--- a/docs/slides/Modulo 4/dia_5.pptx
+++ b/docs/slides/Modulo 4/dia_5.pptx
@@ -5,31 +5,31 @@
     <p:sldMasterId id="2147483648" r:id="rId1"/>
   </p:sldMasterIdLst>
   <p:sldIdLst>
-    <p:sldId id="256" r:id="rId7"/>
-    <p:sldId id="257" r:id="rId8"/>
-    <p:sldId id="258" r:id="rId9"/>
-    <p:sldId id="259" r:id="rId10"/>
-    <p:sldId id="260" r:id="rId11"/>
-    <p:sldId id="261" r:id="rId12"/>
-    <p:sldId id="262" r:id="rId13"/>
-    <p:sldId id="263" r:id="rId14"/>
-    <p:sldId id="264" r:id="rId15"/>
-    <p:sldId id="265" r:id="rId16"/>
-    <p:sldId id="266" r:id="rId17"/>
-    <p:sldId id="267" r:id="rId18"/>
-    <p:sldId id="268" r:id="rId19"/>
-    <p:sldId id="269" r:id="rId20"/>
-    <p:sldId id="270" r:id="rId21"/>
-    <p:sldId id="271" r:id="rId22"/>
-    <p:sldId id="272" r:id="rId23"/>
-    <p:sldId id="273" r:id="rId24"/>
-    <p:sldId id="274" r:id="rId25"/>
-    <p:sldId id="275" r:id="rId26"/>
-    <p:sldId id="276" r:id="rId27"/>
-    <p:sldId id="277" r:id="rId28"/>
-    <p:sldId id="278" r:id="rId29"/>
+    <p:sldId id="256" r:id="rId2"/>
+    <p:sldId id="257" r:id="rId3"/>
+    <p:sldId id="258" r:id="rId4"/>
+    <p:sldId id="259" r:id="rId5"/>
+    <p:sldId id="260" r:id="rId6"/>
+    <p:sldId id="261" r:id="rId7"/>
+    <p:sldId id="262" r:id="rId8"/>
+    <p:sldId id="263" r:id="rId9"/>
+    <p:sldId id="264" r:id="rId10"/>
+    <p:sldId id="265" r:id="rId11"/>
+    <p:sldId id="266" r:id="rId12"/>
+    <p:sldId id="267" r:id="rId13"/>
+    <p:sldId id="268" r:id="rId14"/>
+    <p:sldId id="269" r:id="rId15"/>
+    <p:sldId id="270" r:id="rId16"/>
+    <p:sldId id="271" r:id="rId17"/>
+    <p:sldId id="272" r:id="rId18"/>
+    <p:sldId id="273" r:id="rId19"/>
+    <p:sldId id="274" r:id="rId20"/>
+    <p:sldId id="275" r:id="rId21"/>
+    <p:sldId id="276" r:id="rId22"/>
+    <p:sldId id="277" r:id="rId23"/>
+    <p:sldId id="278" r:id="rId24"/>
   </p:sldIdLst>
-  <p:sldSz cx="12188952" cy="6858000" type="screen4x3"/>
+  <p:sldSz cx="12188825" cy="6858000"/>
   <p:notesSz cx="6858000" cy="9144000"/>
   <p:defaultTextStyle>
     <a:defPPr>
@@ -126,6 +126,22 @@
       </a:defRPr>
     </a:lvl9pPr>
   </p:defaultTextStyle>
+  <p:extLst>
+    <p:ext uri="{EFAFB233-063F-42B5-8137-9DF3F51BA10A}">
+      <p15:sldGuideLst xmlns:p15="http://schemas.microsoft.com/office/powerpoint/2012/main">
+        <p15:guide id="1" orient="horz" pos="2160">
+          <p15:clr>
+            <a:srgbClr val="A4A3A4"/>
+          </p15:clr>
+        </p15:guide>
+        <p15:guide id="2" pos="2880">
+          <p15:clr>
+            <a:srgbClr val="A4A3A4"/>
+          </p15:clr>
+        </p15:guide>
+      </p15:sldGuideLst>
+    </p:ext>
+  </p:extLst>
 </p:presentation>
 </file>
 
@@ -167,10 +183,9 @@
           <a:lstStyle/>
           <a:p>
             <a:r>
-              <a:rPr lang="en-US" smtClean="0"/>
+              <a:rPr lang="en-US"/>
               <a:t>Click to edit Master title style</a:t>
             </a:r>
-            <a:endParaRPr lang="en-US"/>
           </a:p>
         </p:txBody>
       </p:sp>
@@ -286,10 +301,9 @@
           </a:lstStyle>
           <a:p>
             <a:r>
-              <a:rPr lang="en-US" smtClean="0"/>
+              <a:rPr lang="en-US"/>
               <a:t>Click to edit Master subtitle style</a:t>
             </a:r>
-            <a:endParaRPr lang="en-US"/>
           </a:p>
         </p:txBody>
       </p:sp>
@@ -310,7 +324,7 @@
           <a:p>
             <a:fld id="{5BCAD085-E8A6-8845-BD4E-CB4CCA059FC4}" type="datetimeFigureOut">
               <a:rPr lang="en-US" smtClean="0"/>
-              <a:t>1/27/13</a:t>
+              <a:t>4/23/2026</a:t>
             </a:fld>
             <a:endParaRPr lang="en-US"/>
           </a:p>
@@ -352,7 +366,7 @@
           <a:p>
             <a:fld id="{C1FF6DA9-008F-8B48-92A6-B652298478BF}" type="slidenum">
               <a:rPr lang="en-US" smtClean="0"/>
-              <a:t>‹#›</a:t>
+              <a:t>‹Nº›</a:t>
             </a:fld>
             <a:endParaRPr lang="en-US"/>
           </a:p>
@@ -404,10 +418,9 @@
           <a:lstStyle/>
           <a:p>
             <a:r>
-              <a:rPr lang="en-US" smtClean="0"/>
+              <a:rPr lang="en-US"/>
               <a:t>Click to edit Master title style</a:t>
             </a:r>
-            <a:endParaRPr lang="en-US"/>
           </a:p>
         </p:txBody>
       </p:sp>
@@ -428,38 +441,37 @@
           <a:p>
             <a:pPr lvl="0"/>
             <a:r>
-              <a:rPr lang="en-US" smtClean="0"/>
+              <a:rPr lang="en-US"/>
               <a:t>Click to edit Master text styles</a:t>
             </a:r>
           </a:p>
           <a:p>
             <a:pPr lvl="1"/>
             <a:r>
-              <a:rPr lang="en-US" smtClean="0"/>
+              <a:rPr lang="en-US"/>
               <a:t>Second level</a:t>
             </a:r>
           </a:p>
           <a:p>
             <a:pPr lvl="2"/>
             <a:r>
-              <a:rPr lang="en-US" smtClean="0"/>
+              <a:rPr lang="en-US"/>
               <a:t>Third level</a:t>
             </a:r>
           </a:p>
           <a:p>
             <a:pPr lvl="3"/>
             <a:r>
-              <a:rPr lang="en-US" smtClean="0"/>
+              <a:rPr lang="en-US"/>
               <a:t>Fourth level</a:t>
             </a:r>
           </a:p>
           <a:p>
             <a:pPr lvl="4"/>
             <a:r>
-              <a:rPr lang="en-US" smtClean="0"/>
+              <a:rPr lang="en-US"/>
               <a:t>Fifth level</a:t>
             </a:r>
-            <a:endParaRPr lang="en-US"/>
           </a:p>
         </p:txBody>
       </p:sp>
@@ -480,7 +492,7 @@
           <a:p>
             <a:fld id="{5BCAD085-E8A6-8845-BD4E-CB4CCA059FC4}" type="datetimeFigureOut">
               <a:rPr lang="en-US" smtClean="0"/>
-              <a:t>1/27/13</a:t>
+              <a:t>4/23/2026</a:t>
             </a:fld>
             <a:endParaRPr lang="en-US"/>
           </a:p>
@@ -522,7 +534,7 @@
           <a:p>
             <a:fld id="{C1FF6DA9-008F-8B48-92A6-B652298478BF}" type="slidenum">
               <a:rPr lang="en-US" smtClean="0"/>
-              <a:t>‹#›</a:t>
+              <a:t>‹Nº›</a:t>
             </a:fld>
             <a:endParaRPr lang="en-US"/>
           </a:p>
@@ -579,10 +591,9 @@
           <a:lstStyle/>
           <a:p>
             <a:r>
-              <a:rPr lang="en-US" smtClean="0"/>
+              <a:rPr lang="en-US"/>
               <a:t>Click to edit Master title style</a:t>
             </a:r>
-            <a:endParaRPr lang="en-US"/>
           </a:p>
         </p:txBody>
       </p:sp>
@@ -608,38 +619,37 @@
           <a:p>
             <a:pPr lvl="0"/>
             <a:r>
-              <a:rPr lang="en-US" smtClean="0"/>
+              <a:rPr lang="en-US"/>
               <a:t>Click to edit Master text styles</a:t>
             </a:r>
           </a:p>
           <a:p>
             <a:pPr lvl="1"/>
             <a:r>
-              <a:rPr lang="en-US" smtClean="0"/>
+              <a:rPr lang="en-US"/>
               <a:t>Second level</a:t>
             </a:r>
           </a:p>
           <a:p>
             <a:pPr lvl="2"/>
             <a:r>
-              <a:rPr lang="en-US" smtClean="0"/>
+              <a:rPr lang="en-US"/>
               <a:t>Third level</a:t>
             </a:r>
           </a:p>
           <a:p>
             <a:pPr lvl="3"/>
             <a:r>
-              <a:rPr lang="en-US" smtClean="0"/>
+              <a:rPr lang="en-US"/>
               <a:t>Fourth level</a:t>
             </a:r>
           </a:p>
           <a:p>
             <a:pPr lvl="4"/>
             <a:r>
-              <a:rPr lang="en-US" smtClean="0"/>
+              <a:rPr lang="en-US"/>
               <a:t>Fifth level</a:t>
             </a:r>
-            <a:endParaRPr lang="en-US"/>
           </a:p>
         </p:txBody>
       </p:sp>
@@ -660,7 +670,7 @@
           <a:p>
             <a:fld id="{5BCAD085-E8A6-8845-BD4E-CB4CCA059FC4}" type="datetimeFigureOut">
               <a:rPr lang="en-US" smtClean="0"/>
-              <a:t>1/27/13</a:t>
+              <a:t>4/23/2026</a:t>
             </a:fld>
             <a:endParaRPr lang="en-US"/>
           </a:p>
@@ -702,7 +712,7 @@
           <a:p>
             <a:fld id="{C1FF6DA9-008F-8B48-92A6-B652298478BF}" type="slidenum">
               <a:rPr lang="en-US" smtClean="0"/>
-              <a:t>‹#›</a:t>
+              <a:t>‹Nº›</a:t>
             </a:fld>
             <a:endParaRPr lang="en-US"/>
           </a:p>
@@ -754,10 +764,9 @@
           <a:lstStyle/>
           <a:p>
             <a:r>
-              <a:rPr lang="en-US" smtClean="0"/>
+              <a:rPr lang="en-US"/>
               <a:t>Click to edit Master title style</a:t>
             </a:r>
-            <a:endParaRPr lang="en-US"/>
           </a:p>
         </p:txBody>
       </p:sp>
@@ -778,38 +787,37 @@
           <a:p>
             <a:pPr lvl="0"/>
             <a:r>
-              <a:rPr lang="en-US" smtClean="0"/>
+              <a:rPr lang="en-US"/>
               <a:t>Click to edit Master text styles</a:t>
             </a:r>
           </a:p>
           <a:p>
             <a:pPr lvl="1"/>
             <a:r>
-              <a:rPr lang="en-US" smtClean="0"/>
+              <a:rPr lang="en-US"/>
               <a:t>Second level</a:t>
             </a:r>
           </a:p>
           <a:p>
             <a:pPr lvl="2"/>
             <a:r>
-              <a:rPr lang="en-US" smtClean="0"/>
+              <a:rPr lang="en-US"/>
               <a:t>Third level</a:t>
             </a:r>
           </a:p>
           <a:p>
             <a:pPr lvl="3"/>
             <a:r>
-              <a:rPr lang="en-US" smtClean="0"/>
+              <a:rPr lang="en-US"/>
               <a:t>Fourth level</a:t>
             </a:r>
           </a:p>
           <a:p>
             <a:pPr lvl="4"/>
             <a:r>
-              <a:rPr lang="en-US" smtClean="0"/>
+              <a:rPr lang="en-US"/>
               <a:t>Fifth level</a:t>
             </a:r>
-            <a:endParaRPr lang="en-US"/>
           </a:p>
         </p:txBody>
       </p:sp>
@@ -830,7 +838,7 @@
           <a:p>
             <a:fld id="{5BCAD085-E8A6-8845-BD4E-CB4CCA059FC4}" type="datetimeFigureOut">
               <a:rPr lang="en-US" smtClean="0"/>
-              <a:t>1/27/13</a:t>
+              <a:t>4/23/2026</a:t>
             </a:fld>
             <a:endParaRPr lang="en-US"/>
           </a:p>
@@ -872,7 +880,7 @@
           <a:p>
             <a:fld id="{C1FF6DA9-008F-8B48-92A6-B652298478BF}" type="slidenum">
               <a:rPr lang="en-US" smtClean="0"/>
-              <a:t>‹#›</a:t>
+              <a:t>‹Nº›</a:t>
             </a:fld>
             <a:endParaRPr lang="en-US"/>
           </a:p>
@@ -933,10 +941,9 @@
           </a:lstStyle>
           <a:p>
             <a:r>
-              <a:rPr lang="en-US" smtClean="0"/>
+              <a:rPr lang="en-US"/>
               <a:t>Click to edit Master title style</a:t>
             </a:r>
-            <a:endParaRPr lang="en-US"/>
           </a:p>
         </p:txBody>
       </p:sp>
@@ -1053,7 +1060,7 @@
           <a:p>
             <a:pPr lvl="0"/>
             <a:r>
-              <a:rPr lang="en-US" smtClean="0"/>
+              <a:rPr lang="en-US"/>
               <a:t>Click to edit Master text styles</a:t>
             </a:r>
           </a:p>
@@ -1076,7 +1083,7 @@
           <a:p>
             <a:fld id="{5BCAD085-E8A6-8845-BD4E-CB4CCA059FC4}" type="datetimeFigureOut">
               <a:rPr lang="en-US" smtClean="0"/>
-              <a:t>1/27/13</a:t>
+              <a:t>4/23/2026</a:t>
             </a:fld>
             <a:endParaRPr lang="en-US"/>
           </a:p>
@@ -1118,7 +1125,7 @@
           <a:p>
             <a:fld id="{C1FF6DA9-008F-8B48-92A6-B652298478BF}" type="slidenum">
               <a:rPr lang="en-US" smtClean="0"/>
-              <a:t>‹#›</a:t>
+              <a:t>‹Nº›</a:t>
             </a:fld>
             <a:endParaRPr lang="en-US"/>
           </a:p>
@@ -1170,10 +1177,9 @@
           <a:lstStyle/>
           <a:p>
             <a:r>
-              <a:rPr lang="en-US" smtClean="0"/>
+              <a:rPr lang="en-US"/>
               <a:t>Click to edit Master title style</a:t>
             </a:r>
-            <a:endParaRPr lang="en-US"/>
           </a:p>
         </p:txBody>
       </p:sp>
@@ -1227,38 +1233,37 @@
           <a:p>
             <a:pPr lvl="0"/>
             <a:r>
-              <a:rPr lang="en-US" smtClean="0"/>
+              <a:rPr lang="en-US"/>
               <a:t>Click to edit Master text styles</a:t>
             </a:r>
           </a:p>
           <a:p>
             <a:pPr lvl="1"/>
             <a:r>
-              <a:rPr lang="en-US" smtClean="0"/>
+              <a:rPr lang="en-US"/>
               <a:t>Second level</a:t>
             </a:r>
           </a:p>
           <a:p>
             <a:pPr lvl="2"/>
             <a:r>
-              <a:rPr lang="en-US" smtClean="0"/>
+              <a:rPr lang="en-US"/>
               <a:t>Third level</a:t>
             </a:r>
           </a:p>
           <a:p>
             <a:pPr lvl="3"/>
             <a:r>
-              <a:rPr lang="en-US" smtClean="0"/>
+              <a:rPr lang="en-US"/>
               <a:t>Fourth level</a:t>
             </a:r>
           </a:p>
           <a:p>
             <a:pPr lvl="4"/>
             <a:r>
-              <a:rPr lang="en-US" smtClean="0"/>
+              <a:rPr lang="en-US"/>
               <a:t>Fifth level</a:t>
             </a:r>
-            <a:endParaRPr lang="en-US"/>
           </a:p>
         </p:txBody>
       </p:sp>
@@ -1312,38 +1317,37 @@
           <a:p>
             <a:pPr lvl="0"/>
             <a:r>
-              <a:rPr lang="en-US" smtClean="0"/>
+              <a:rPr lang="en-US"/>
               <a:t>Click to edit Master text styles</a:t>
             </a:r>
           </a:p>
           <a:p>
             <a:pPr lvl="1"/>
             <a:r>
-              <a:rPr lang="en-US" smtClean="0"/>
+              <a:rPr lang="en-US"/>
               <a:t>Second level</a:t>
             </a:r>
           </a:p>
           <a:p>
             <a:pPr lvl="2"/>
             <a:r>
-              <a:rPr lang="en-US" smtClean="0"/>
+              <a:rPr lang="en-US"/>
               <a:t>Third level</a:t>
             </a:r>
           </a:p>
           <a:p>
             <a:pPr lvl="3"/>
             <a:r>
-              <a:rPr lang="en-US" smtClean="0"/>
+              <a:rPr lang="en-US"/>
               <a:t>Fourth level</a:t>
             </a:r>
           </a:p>
           <a:p>
             <a:pPr lvl="4"/>
             <a:r>
-              <a:rPr lang="en-US" smtClean="0"/>
+              <a:rPr lang="en-US"/>
               <a:t>Fifth level</a:t>
             </a:r>
-            <a:endParaRPr lang="en-US"/>
           </a:p>
         </p:txBody>
       </p:sp>
@@ -1364,7 +1368,7 @@
           <a:p>
             <a:fld id="{5BCAD085-E8A6-8845-BD4E-CB4CCA059FC4}" type="datetimeFigureOut">
               <a:rPr lang="en-US" smtClean="0"/>
-              <a:t>1/27/13</a:t>
+              <a:t>4/23/2026</a:t>
             </a:fld>
             <a:endParaRPr lang="en-US"/>
           </a:p>
@@ -1406,7 +1410,7 @@
           <a:p>
             <a:fld id="{C1FF6DA9-008F-8B48-92A6-B652298478BF}" type="slidenum">
               <a:rPr lang="en-US" smtClean="0"/>
-              <a:t>‹#›</a:t>
+              <a:t>‹Nº›</a:t>
             </a:fld>
             <a:endParaRPr lang="en-US"/>
           </a:p>
@@ -1462,10 +1466,9 @@
           </a:lstStyle>
           <a:p>
             <a:r>
-              <a:rPr lang="en-US" smtClean="0"/>
+              <a:rPr lang="en-US"/>
               <a:t>Click to edit Master title style</a:t>
             </a:r>
-            <a:endParaRPr lang="en-US"/>
           </a:p>
         </p:txBody>
       </p:sp>
@@ -1528,7 +1531,7 @@
           <a:p>
             <a:pPr lvl="0"/>
             <a:r>
-              <a:rPr lang="en-US" smtClean="0"/>
+              <a:rPr lang="en-US"/>
               <a:t>Click to edit Master text styles</a:t>
             </a:r>
           </a:p>
@@ -1584,38 +1587,37 @@
           <a:p>
             <a:pPr lvl="0"/>
             <a:r>
-              <a:rPr lang="en-US" smtClean="0"/>
+              <a:rPr lang="en-US"/>
               <a:t>Click to edit Master text styles</a:t>
             </a:r>
           </a:p>
           <a:p>
             <a:pPr lvl="1"/>
             <a:r>
-              <a:rPr lang="en-US" smtClean="0"/>
+              <a:rPr lang="en-US"/>
               <a:t>Second level</a:t>
             </a:r>
           </a:p>
           <a:p>
             <a:pPr lvl="2"/>
             <a:r>
-              <a:rPr lang="en-US" smtClean="0"/>
+              <a:rPr lang="en-US"/>
               <a:t>Third level</a:t>
             </a:r>
           </a:p>
           <a:p>
             <a:pPr lvl="3"/>
             <a:r>
-              <a:rPr lang="en-US" smtClean="0"/>
+              <a:rPr lang="en-US"/>
               <a:t>Fourth level</a:t>
             </a:r>
           </a:p>
           <a:p>
             <a:pPr lvl="4"/>
             <a:r>
-              <a:rPr lang="en-US" smtClean="0"/>
+              <a:rPr lang="en-US"/>
               <a:t>Fifth level</a:t>
             </a:r>
-            <a:endParaRPr lang="en-US"/>
           </a:p>
         </p:txBody>
       </p:sp>
@@ -1678,7 +1680,7 @@
           <a:p>
             <a:pPr lvl="0"/>
             <a:r>
-              <a:rPr lang="en-US" smtClean="0"/>
+              <a:rPr lang="en-US"/>
               <a:t>Click to edit Master text styles</a:t>
             </a:r>
           </a:p>
@@ -1734,38 +1736,37 @@
           <a:p>
             <a:pPr lvl="0"/>
             <a:r>
-              <a:rPr lang="en-US" smtClean="0"/>
+              <a:rPr lang="en-US"/>
               <a:t>Click to edit Master text styles</a:t>
             </a:r>
           </a:p>
           <a:p>
             <a:pPr lvl="1"/>
             <a:r>
-              <a:rPr lang="en-US" smtClean="0"/>
+              <a:rPr lang="en-US"/>
               <a:t>Second level</a:t>
             </a:r>
           </a:p>
           <a:p>
             <a:pPr lvl="2"/>
             <a:r>
-              <a:rPr lang="en-US" smtClean="0"/>
+              <a:rPr lang="en-US"/>
               <a:t>Third level</a:t>
             </a:r>
           </a:p>
           <a:p>
             <a:pPr lvl="3"/>
             <a:r>
-              <a:rPr lang="en-US" smtClean="0"/>
+              <a:rPr lang="en-US"/>
               <a:t>Fourth level</a:t>
             </a:r>
           </a:p>
           <a:p>
             <a:pPr lvl="4"/>
             <a:r>
-              <a:rPr lang="en-US" smtClean="0"/>
+              <a:rPr lang="en-US"/>
               <a:t>Fifth level</a:t>
             </a:r>
-            <a:endParaRPr lang="en-US"/>
           </a:p>
         </p:txBody>
       </p:sp>
@@ -1786,7 +1787,7 @@
           <a:p>
             <a:fld id="{5BCAD085-E8A6-8845-BD4E-CB4CCA059FC4}" type="datetimeFigureOut">
               <a:rPr lang="en-US" smtClean="0"/>
-              <a:t>1/27/13</a:t>
+              <a:t>4/23/2026</a:t>
             </a:fld>
             <a:endParaRPr lang="en-US"/>
           </a:p>
@@ -1828,7 +1829,7 @@
           <a:p>
             <a:fld id="{C1FF6DA9-008F-8B48-92A6-B652298478BF}" type="slidenum">
               <a:rPr lang="en-US" smtClean="0"/>
-              <a:t>‹#›</a:t>
+              <a:t>‹Nº›</a:t>
             </a:fld>
             <a:endParaRPr lang="en-US"/>
           </a:p>
@@ -1880,10 +1881,9 @@
           <a:lstStyle/>
           <a:p>
             <a:r>
-              <a:rPr lang="en-US" smtClean="0"/>
+              <a:rPr lang="en-US"/>
               <a:t>Click to edit Master title style</a:t>
             </a:r>
-            <a:endParaRPr lang="en-US"/>
           </a:p>
         </p:txBody>
       </p:sp>
@@ -1904,7 +1904,7 @@
           <a:p>
             <a:fld id="{5BCAD085-E8A6-8845-BD4E-CB4CCA059FC4}" type="datetimeFigureOut">
               <a:rPr lang="en-US" smtClean="0"/>
-              <a:t>1/27/13</a:t>
+              <a:t>4/23/2026</a:t>
             </a:fld>
             <a:endParaRPr lang="en-US"/>
           </a:p>
@@ -1946,7 +1946,7 @@
           <a:p>
             <a:fld id="{C1FF6DA9-008F-8B48-92A6-B652298478BF}" type="slidenum">
               <a:rPr lang="en-US" smtClean="0"/>
-              <a:t>‹#›</a:t>
+              <a:t>‹Nº›</a:t>
             </a:fld>
             <a:endParaRPr lang="en-US"/>
           </a:p>
@@ -1999,7 +1999,7 @@
           <a:p>
             <a:fld id="{5BCAD085-E8A6-8845-BD4E-CB4CCA059FC4}" type="datetimeFigureOut">
               <a:rPr lang="en-US" smtClean="0"/>
-              <a:t>1/27/13</a:t>
+              <a:t>4/23/2026</a:t>
             </a:fld>
             <a:endParaRPr lang="en-US"/>
           </a:p>
@@ -2041,7 +2041,7 @@
           <a:p>
             <a:fld id="{C1FF6DA9-008F-8B48-92A6-B652298478BF}" type="slidenum">
               <a:rPr lang="en-US" smtClean="0"/>
-              <a:t>‹#›</a:t>
+              <a:t>‹Nº›</a:t>
             </a:fld>
             <a:endParaRPr lang="en-US"/>
           </a:p>
@@ -2102,10 +2102,9 @@
           </a:lstStyle>
           <a:p>
             <a:r>
-              <a:rPr lang="en-US" smtClean="0"/>
+              <a:rPr lang="en-US"/>
               <a:t>Click to edit Master title style</a:t>
             </a:r>
-            <a:endParaRPr lang="en-US"/>
           </a:p>
         </p:txBody>
       </p:sp>
@@ -2159,38 +2158,37 @@
           <a:p>
             <a:pPr lvl="0"/>
             <a:r>
-              <a:rPr lang="en-US" smtClean="0"/>
+              <a:rPr lang="en-US"/>
               <a:t>Click to edit Master text styles</a:t>
             </a:r>
           </a:p>
           <a:p>
             <a:pPr lvl="1"/>
             <a:r>
-              <a:rPr lang="en-US" smtClean="0"/>
+              <a:rPr lang="en-US"/>
               <a:t>Second level</a:t>
             </a:r>
           </a:p>
           <a:p>
             <a:pPr lvl="2"/>
             <a:r>
-              <a:rPr lang="en-US" smtClean="0"/>
+              <a:rPr lang="en-US"/>
               <a:t>Third level</a:t>
             </a:r>
           </a:p>
           <a:p>
             <a:pPr lvl="3"/>
             <a:r>
-              <a:rPr lang="en-US" smtClean="0"/>
+              <a:rPr lang="en-US"/>
               <a:t>Fourth level</a:t>
             </a:r>
           </a:p>
           <a:p>
             <a:pPr lvl="4"/>
             <a:r>
-              <a:rPr lang="en-US" smtClean="0"/>
+              <a:rPr lang="en-US"/>
               <a:t>Fifth level</a:t>
             </a:r>
-            <a:endParaRPr lang="en-US"/>
           </a:p>
         </p:txBody>
       </p:sp>
@@ -2253,7 +2251,7 @@
           <a:p>
             <a:pPr lvl="0"/>
             <a:r>
-              <a:rPr lang="en-US" smtClean="0"/>
+              <a:rPr lang="en-US"/>
               <a:t>Click to edit Master text styles</a:t>
             </a:r>
           </a:p>
@@ -2276,7 +2274,7 @@
           <a:p>
             <a:fld id="{5BCAD085-E8A6-8845-BD4E-CB4CCA059FC4}" type="datetimeFigureOut">
               <a:rPr lang="en-US" smtClean="0"/>
-              <a:t>1/27/13</a:t>
+              <a:t>4/23/2026</a:t>
             </a:fld>
             <a:endParaRPr lang="en-US"/>
           </a:p>
@@ -2318,7 +2316,7 @@
           <a:p>
             <a:fld id="{C1FF6DA9-008F-8B48-92A6-B652298478BF}" type="slidenum">
               <a:rPr lang="en-US" smtClean="0"/>
-              <a:t>‹#›</a:t>
+              <a:t>‹Nº›</a:t>
             </a:fld>
             <a:endParaRPr lang="en-US"/>
           </a:p>
@@ -2379,10 +2377,9 @@
           </a:lstStyle>
           <a:p>
             <a:r>
-              <a:rPr lang="en-US" smtClean="0"/>
+              <a:rPr lang="en-US"/>
               <a:t>Click to edit Master title style</a:t>
             </a:r>
-            <a:endParaRPr lang="en-US"/>
           </a:p>
         </p:txBody>
       </p:sp>
@@ -2506,7 +2503,7 @@
           <a:p>
             <a:pPr lvl="0"/>
             <a:r>
-              <a:rPr lang="en-US" smtClean="0"/>
+              <a:rPr lang="en-US"/>
               <a:t>Click to edit Master text styles</a:t>
             </a:r>
           </a:p>
@@ -2529,7 +2526,7 @@
           <a:p>
             <a:fld id="{5BCAD085-E8A6-8845-BD4E-CB4CCA059FC4}" type="datetimeFigureOut">
               <a:rPr lang="en-US" smtClean="0"/>
-              <a:t>1/27/13</a:t>
+              <a:t>4/23/2026</a:t>
             </a:fld>
             <a:endParaRPr lang="en-US"/>
           </a:p>
@@ -2571,7 +2568,7 @@
           <a:p>
             <a:fld id="{C1FF6DA9-008F-8B48-92A6-B652298478BF}" type="slidenum">
               <a:rPr lang="en-US" smtClean="0"/>
-              <a:t>‹#›</a:t>
+              <a:t>‹Nº›</a:t>
             </a:fld>
             <a:endParaRPr lang="en-US"/>
           </a:p>
@@ -2638,10 +2635,9 @@
           <a:lstStyle/>
           <a:p>
             <a:r>
-              <a:rPr lang="en-US" smtClean="0"/>
+              <a:rPr lang="en-US"/>
               <a:t>Click to edit Master title style</a:t>
             </a:r>
-            <a:endParaRPr lang="en-US"/>
           </a:p>
         </p:txBody>
       </p:sp>
@@ -2672,38 +2668,37 @@
           <a:p>
             <a:pPr lvl="0"/>
             <a:r>
-              <a:rPr lang="en-US" smtClean="0"/>
+              <a:rPr lang="en-US"/>
               <a:t>Click to edit Master text styles</a:t>
             </a:r>
           </a:p>
           <a:p>
             <a:pPr lvl="1"/>
             <a:r>
-              <a:rPr lang="en-US" smtClean="0"/>
+              <a:rPr lang="en-US"/>
               <a:t>Second level</a:t>
             </a:r>
           </a:p>
           <a:p>
             <a:pPr lvl="2"/>
             <a:r>
-              <a:rPr lang="en-US" smtClean="0"/>
+              <a:rPr lang="en-US"/>
               <a:t>Third level</a:t>
             </a:r>
           </a:p>
           <a:p>
             <a:pPr lvl="3"/>
             <a:r>
-              <a:rPr lang="en-US" smtClean="0"/>
+              <a:rPr lang="en-US"/>
               <a:t>Fourth level</a:t>
             </a:r>
           </a:p>
           <a:p>
             <a:pPr lvl="4"/>
             <a:r>
-              <a:rPr lang="en-US" smtClean="0"/>
+              <a:rPr lang="en-US"/>
               <a:t>Fifth level</a:t>
             </a:r>
-            <a:endParaRPr lang="en-US"/>
           </a:p>
         </p:txBody>
       </p:sp>
@@ -2742,7 +2737,7 @@
           <a:p>
             <a:fld id="{5BCAD085-E8A6-8845-BD4E-CB4CCA059FC4}" type="datetimeFigureOut">
               <a:rPr lang="en-US" smtClean="0"/>
-              <a:t>1/27/13</a:t>
+              <a:t>4/23/2026</a:t>
             </a:fld>
             <a:endParaRPr lang="en-US"/>
           </a:p>
@@ -2820,7 +2815,7 @@
           <a:p>
             <a:fld id="{C1FF6DA9-008F-8B48-92A6-B652298478BF}" type="slidenum">
               <a:rPr lang="en-US" smtClean="0"/>
-              <a:t>‹#›</a:t>
+              <a:t>‹Nº›</a:t>
             </a:fld>
             <a:endParaRPr lang="en-US"/>
           </a:p>
@@ -3101,7 +3096,7 @@
 </file>
 
 <file path=ppt/slides/slide1.xml><?xml version="1.0" encoding="utf-8"?>
-<p:sld xmlns:a="http://schemas.openxmlformats.org/drawingml/2006/main" xmlns:p="http://schemas.openxmlformats.org/presentationml/2006/main" xmlns:r="http://schemas.openxmlformats.org/officeDocument/2006/relationships">
+<p:sld xmlns:a="http://schemas.openxmlformats.org/drawingml/2006/main" xmlns:r="http://schemas.openxmlformats.org/officeDocument/2006/relationships" xmlns:p="http://schemas.openxmlformats.org/presentationml/2006/main">
   <p:cSld>
     <p:spTree>
       <p:nvGrpSpPr>
@@ -3109,7 +3104,14 @@
         <p:cNvGrpSpPr/>
         <p:nvPr/>
       </p:nvGrpSpPr>
-      <p:grpSpPr/>
+      <p:grpSpPr>
+        <a:xfrm>
+          <a:off x="0" y="0"/>
+          <a:ext cx="0" cy="0"/>
+          <a:chOff x="0" y="0"/>
+          <a:chExt cx="0" cy="0"/>
+        </a:xfrm>
+      </p:grpSpPr>
       <p:sp>
         <p:nvSpPr>
           <p:cNvPr id="2" name="Rectangle 1"/>
@@ -3150,6 +3152,7 @@
           <a:lstStyle/>
           <a:p>
             <a:pPr algn="ctr"/>
+            <a:endParaRPr/>
           </a:p>
         </p:txBody>
       </p:sp>
@@ -3193,6 +3196,7 @@
           <a:lstStyle/>
           <a:p>
             <a:pPr algn="ctr"/>
+            <a:endParaRPr/>
           </a:p>
         </p:txBody>
       </p:sp>
@@ -3311,7 +3315,7 @@
 </file>
 
 <file path=ppt/slides/slide10.xml><?xml version="1.0" encoding="utf-8"?>
-<p:sld xmlns:a="http://schemas.openxmlformats.org/drawingml/2006/main" xmlns:p="http://schemas.openxmlformats.org/presentationml/2006/main" xmlns:r="http://schemas.openxmlformats.org/officeDocument/2006/relationships">
+<p:sld xmlns:a="http://schemas.openxmlformats.org/drawingml/2006/main" xmlns:r="http://schemas.openxmlformats.org/officeDocument/2006/relationships" xmlns:p="http://schemas.openxmlformats.org/presentationml/2006/main">
   <p:cSld>
     <p:spTree>
       <p:nvGrpSpPr>
@@ -3319,7 +3323,14 @@
         <p:cNvGrpSpPr/>
         <p:nvPr/>
       </p:nvGrpSpPr>
-      <p:grpSpPr/>
+      <p:grpSpPr>
+        <a:xfrm>
+          <a:off x="0" y="0"/>
+          <a:ext cx="0" cy="0"/>
+          <a:chOff x="0" y="0"/>
+          <a:chExt cx="0" cy="0"/>
+        </a:xfrm>
+      </p:grpSpPr>
       <p:sp>
         <p:nvSpPr>
           <p:cNvPr id="2" name="Rectangle 1"/>
@@ -3360,6 +3371,7 @@
           <a:lstStyle/>
           <a:p>
             <a:pPr algn="ctr"/>
+            <a:endParaRPr/>
           </a:p>
         </p:txBody>
       </p:sp>
@@ -3440,7 +3452,7 @@
 </file>
 
 <file path=ppt/slides/slide11.xml><?xml version="1.0" encoding="utf-8"?>
-<p:sld xmlns:a="http://schemas.openxmlformats.org/drawingml/2006/main" xmlns:p="http://schemas.openxmlformats.org/presentationml/2006/main" xmlns:r="http://schemas.openxmlformats.org/officeDocument/2006/relationships">
+<p:sld xmlns:a="http://schemas.openxmlformats.org/drawingml/2006/main" xmlns:r="http://schemas.openxmlformats.org/officeDocument/2006/relationships" xmlns:p="http://schemas.openxmlformats.org/presentationml/2006/main">
   <p:cSld>
     <p:spTree>
       <p:nvGrpSpPr>
@@ -3448,7 +3460,14 @@
         <p:cNvGrpSpPr/>
         <p:nvPr/>
       </p:nvGrpSpPr>
-      <p:grpSpPr/>
+      <p:grpSpPr>
+        <a:xfrm>
+          <a:off x="0" y="0"/>
+          <a:ext cx="0" cy="0"/>
+          <a:chOff x="0" y="0"/>
+          <a:chExt cx="0" cy="0"/>
+        </a:xfrm>
+      </p:grpSpPr>
       <p:sp>
         <p:nvSpPr>
           <p:cNvPr id="2" name="Rectangle 1"/>
@@ -3489,6 +3508,7 @@
           <a:lstStyle/>
           <a:p>
             <a:pPr algn="ctr"/>
+            <a:endParaRPr/>
           </a:p>
         </p:txBody>
       </p:sp>
@@ -3566,6 +3586,7 @@
           <a:lstStyle/>
           <a:p>
             <a:pPr algn="ctr"/>
+            <a:endParaRPr/>
           </a:p>
         </p:txBody>
       </p:sp>
@@ -3681,7 +3702,7 @@
 </file>
 
 <file path=ppt/slides/slide12.xml><?xml version="1.0" encoding="utf-8"?>
-<p:sld xmlns:a="http://schemas.openxmlformats.org/drawingml/2006/main" xmlns:p="http://schemas.openxmlformats.org/presentationml/2006/main" xmlns:r="http://schemas.openxmlformats.org/officeDocument/2006/relationships">
+<p:sld xmlns:a="http://schemas.openxmlformats.org/drawingml/2006/main" xmlns:r="http://schemas.openxmlformats.org/officeDocument/2006/relationships" xmlns:p="http://schemas.openxmlformats.org/presentationml/2006/main">
   <p:cSld>
     <p:spTree>
       <p:nvGrpSpPr>
@@ -3689,7 +3710,14 @@
         <p:cNvGrpSpPr/>
         <p:nvPr/>
       </p:nvGrpSpPr>
-      <p:grpSpPr/>
+      <p:grpSpPr>
+        <a:xfrm>
+          <a:off x="0" y="0"/>
+          <a:ext cx="0" cy="0"/>
+          <a:chOff x="0" y="0"/>
+          <a:chExt cx="0" cy="0"/>
+        </a:xfrm>
+      </p:grpSpPr>
       <p:sp>
         <p:nvSpPr>
           <p:cNvPr id="2" name="Rectangle 1"/>
@@ -3730,6 +3758,7 @@
           <a:lstStyle/>
           <a:p>
             <a:pPr algn="ctr"/>
+            <a:endParaRPr/>
           </a:p>
         </p:txBody>
       </p:sp>
@@ -3807,6 +3836,7 @@
           <a:lstStyle/>
           <a:p>
             <a:pPr algn="ctr"/>
+            <a:endParaRPr/>
           </a:p>
         </p:txBody>
       </p:sp>
@@ -4002,7 +4032,7 @@
 </file>
 
 <file path=ppt/slides/slide13.xml><?xml version="1.0" encoding="utf-8"?>
-<p:sld xmlns:a="http://schemas.openxmlformats.org/drawingml/2006/main" xmlns:p="http://schemas.openxmlformats.org/presentationml/2006/main" xmlns:r="http://schemas.openxmlformats.org/officeDocument/2006/relationships">
+<p:sld xmlns:a="http://schemas.openxmlformats.org/drawingml/2006/main" xmlns:r="http://schemas.openxmlformats.org/officeDocument/2006/relationships" xmlns:p="http://schemas.openxmlformats.org/presentationml/2006/main">
   <p:cSld>
     <p:spTree>
       <p:nvGrpSpPr>
@@ -4010,7 +4040,14 @@
         <p:cNvGrpSpPr/>
         <p:nvPr/>
       </p:nvGrpSpPr>
-      <p:grpSpPr/>
+      <p:grpSpPr>
+        <a:xfrm>
+          <a:off x="0" y="0"/>
+          <a:ext cx="0" cy="0"/>
+          <a:chOff x="0" y="0"/>
+          <a:chExt cx="0" cy="0"/>
+        </a:xfrm>
+      </p:grpSpPr>
       <p:sp>
         <p:nvSpPr>
           <p:cNvPr id="2" name="Rectangle 1"/>
@@ -4051,6 +4088,7 @@
           <a:lstStyle/>
           <a:p>
             <a:pPr algn="ctr"/>
+            <a:endParaRPr/>
           </a:p>
         </p:txBody>
       </p:sp>
@@ -4162,6 +4200,7 @@
           <a:lstStyle/>
           <a:p>
             <a:pPr algn="ctr"/>
+            <a:endParaRPr/>
           </a:p>
         </p:txBody>
       </p:sp>
@@ -4239,6 +4278,7 @@
           <a:lstStyle/>
           <a:p>
             <a:pPr algn="ctr"/>
+            <a:endParaRPr/>
           </a:p>
         </p:txBody>
       </p:sp>
@@ -4251,7 +4291,7 @@
         <p:spPr>
           <a:xfrm>
             <a:off x="731520" y="1600200"/>
-            <a:ext cx="10698480" cy="4754880"/>
+            <a:ext cx="4955602" cy="4754880"/>
           </a:xfrm>
           <a:prstGeom prst="rect">
             <a:avLst/>
@@ -4262,113 +4302,1222 @@
           <a:bodyPr wrap="square"/>
           <a:lstStyle/>
           <a:p>
-            <a:br/>
-            <a:pPr algn="l">
-              <a:defRPr sz="1500" b="0">
-                <a:solidFill>
-                  <a:srgbClr val="D4D4D4"/>
-                </a:solidFill>
-                <a:latin typeface="Consolas"/>
-              </a:defRPr>
-            </a:pPr>
-            <a:r>
-              <a:t>// ERROR 1: Timestamp del sistema</a:t>
-            </a:r>
-            <a:br/>
-            <a:r>
-              <a:t>func (s *SmartContract) BadCreate(ctx ...) error {</a:t>
-            </a:r>
-            <a:br/>
-            <a:r>
-              <a:t>    asset.CreatedAt = time.Now().String()  // DIFERENTE EN CADA PEER</a:t>
-            </a:r>
-            <a:br/>
-            <a:r>
-              <a:t>    // Correcto: asset.CreatedAt = ctx.GetStub().GetTxTimestamp()</a:t>
-            </a:r>
-            <a:br/>
-            <a:r>
+            <a:br>
+              <a:rPr sz="1600" dirty="0">
+                <a:solidFill>
+                  <a:schemeClr val="bg1">
+                    <a:lumMod val="95000"/>
+                  </a:schemeClr>
+                </a:solidFill>
+              </a:rPr>
+            </a:br>
+            <a:r>
+              <a:rPr sz="1600" dirty="0">
+                <a:solidFill>
+                  <a:schemeClr val="bg1">
+                    <a:lumMod val="95000"/>
+                  </a:schemeClr>
+                </a:solidFill>
+              </a:rPr>
+              <a:t>// ERROR 1: Timestamp del </a:t>
+            </a:r>
+            <a:r>
+              <a:rPr sz="1600" dirty="0" err="1">
+                <a:solidFill>
+                  <a:schemeClr val="bg1">
+                    <a:lumMod val="95000"/>
+                  </a:schemeClr>
+                </a:solidFill>
+              </a:rPr>
+              <a:t>sistema</a:t>
+            </a:r>
+            <a:br>
+              <a:rPr sz="1600" dirty="0">
+                <a:solidFill>
+                  <a:schemeClr val="bg1">
+                    <a:lumMod val="95000"/>
+                  </a:schemeClr>
+                </a:solidFill>
+              </a:rPr>
+            </a:br>
+            <a:r>
+              <a:rPr sz="1600" dirty="0" err="1">
+                <a:solidFill>
+                  <a:schemeClr val="bg1">
+                    <a:lumMod val="95000"/>
+                  </a:schemeClr>
+                </a:solidFill>
+              </a:rPr>
+              <a:t>func</a:t>
+            </a:r>
+            <a:r>
+              <a:rPr sz="1600" dirty="0">
+                <a:solidFill>
+                  <a:schemeClr val="bg1">
+                    <a:lumMod val="95000"/>
+                  </a:schemeClr>
+                </a:solidFill>
+              </a:rPr>
+              <a:t> (s *</a:t>
+            </a:r>
+            <a:r>
+              <a:rPr sz="1600" dirty="0" err="1">
+                <a:solidFill>
+                  <a:schemeClr val="bg1">
+                    <a:lumMod val="95000"/>
+                  </a:schemeClr>
+                </a:solidFill>
+              </a:rPr>
+              <a:t>SmartContract</a:t>
+            </a:r>
+            <a:r>
+              <a:rPr sz="1600" dirty="0">
+                <a:solidFill>
+                  <a:schemeClr val="bg1">
+                    <a:lumMod val="95000"/>
+                  </a:schemeClr>
+                </a:solidFill>
+              </a:rPr>
+              <a:t>) </a:t>
+            </a:r>
+            <a:r>
+              <a:rPr sz="1600" dirty="0" err="1">
+                <a:solidFill>
+                  <a:schemeClr val="bg1">
+                    <a:lumMod val="95000"/>
+                  </a:schemeClr>
+                </a:solidFill>
+              </a:rPr>
+              <a:t>BadCreate</a:t>
+            </a:r>
+            <a:r>
+              <a:rPr sz="1600" dirty="0">
+                <a:solidFill>
+                  <a:schemeClr val="bg1">
+                    <a:lumMod val="95000"/>
+                  </a:schemeClr>
+                </a:solidFill>
+              </a:rPr>
+              <a:t>(</a:t>
+            </a:r>
+            <a:r>
+              <a:rPr sz="1600" dirty="0" err="1">
+                <a:solidFill>
+                  <a:schemeClr val="bg1">
+                    <a:lumMod val="95000"/>
+                  </a:schemeClr>
+                </a:solidFill>
+              </a:rPr>
+              <a:t>ctx</a:t>
+            </a:r>
+            <a:r>
+              <a:rPr sz="1600" dirty="0">
+                <a:solidFill>
+                  <a:schemeClr val="bg1">
+                    <a:lumMod val="95000"/>
+                  </a:schemeClr>
+                </a:solidFill>
+              </a:rPr>
+              <a:t> ...) error {</a:t>
+            </a:r>
+            <a:br>
+              <a:rPr sz="1600" dirty="0">
+                <a:solidFill>
+                  <a:schemeClr val="bg1">
+                    <a:lumMod val="95000"/>
+                  </a:schemeClr>
+                </a:solidFill>
+              </a:rPr>
+            </a:br>
+            <a:r>
+              <a:rPr sz="1600" dirty="0">
+                <a:solidFill>
+                  <a:schemeClr val="bg1">
+                    <a:lumMod val="95000"/>
+                  </a:schemeClr>
+                </a:solidFill>
+              </a:rPr>
+              <a:t>    </a:t>
+            </a:r>
+            <a:r>
+              <a:rPr sz="1600" dirty="0" err="1">
+                <a:solidFill>
+                  <a:schemeClr val="bg1">
+                    <a:lumMod val="95000"/>
+                  </a:schemeClr>
+                </a:solidFill>
+              </a:rPr>
+              <a:t>asset.CreatedAt</a:t>
+            </a:r>
+            <a:r>
+              <a:rPr sz="1600" dirty="0">
+                <a:solidFill>
+                  <a:schemeClr val="bg1">
+                    <a:lumMod val="95000"/>
+                  </a:schemeClr>
+                </a:solidFill>
+              </a:rPr>
+              <a:t> = </a:t>
+            </a:r>
+            <a:r>
+              <a:rPr sz="1600" dirty="0" err="1">
+                <a:solidFill>
+                  <a:schemeClr val="bg1">
+                    <a:lumMod val="95000"/>
+                  </a:schemeClr>
+                </a:solidFill>
+              </a:rPr>
+              <a:t>time.Now</a:t>
+            </a:r>
+            <a:r>
+              <a:rPr sz="1600" dirty="0">
+                <a:solidFill>
+                  <a:schemeClr val="bg1">
+                    <a:lumMod val="95000"/>
+                  </a:schemeClr>
+                </a:solidFill>
+              </a:rPr>
+              <a:t>().String()  // DIFERENTE EN CADA PEER</a:t>
+            </a:r>
+            <a:br>
+              <a:rPr sz="1600" dirty="0">
+                <a:solidFill>
+                  <a:schemeClr val="bg1">
+                    <a:lumMod val="95000"/>
+                  </a:schemeClr>
+                </a:solidFill>
+              </a:rPr>
+            </a:br>
+            <a:r>
+              <a:rPr sz="1600" dirty="0">
+                <a:solidFill>
+                  <a:schemeClr val="bg1">
+                    <a:lumMod val="95000"/>
+                  </a:schemeClr>
+                </a:solidFill>
+              </a:rPr>
+              <a:t>    // </a:t>
+            </a:r>
+            <a:r>
+              <a:rPr sz="1600" dirty="0" err="1">
+                <a:solidFill>
+                  <a:schemeClr val="bg1">
+                    <a:lumMod val="95000"/>
+                  </a:schemeClr>
+                </a:solidFill>
+              </a:rPr>
+              <a:t>Correcto</a:t>
+            </a:r>
+            <a:r>
+              <a:rPr sz="1600" dirty="0">
+                <a:solidFill>
+                  <a:schemeClr val="bg1">
+                    <a:lumMod val="95000"/>
+                  </a:schemeClr>
+                </a:solidFill>
+              </a:rPr>
+              <a:t>: </a:t>
+            </a:r>
+            <a:r>
+              <a:rPr sz="1600" dirty="0" err="1">
+                <a:solidFill>
+                  <a:schemeClr val="bg1">
+                    <a:lumMod val="95000"/>
+                  </a:schemeClr>
+                </a:solidFill>
+              </a:rPr>
+              <a:t>asset.CreatedAt</a:t>
+            </a:r>
+            <a:r>
+              <a:rPr sz="1600" dirty="0">
+                <a:solidFill>
+                  <a:schemeClr val="bg1">
+                    <a:lumMod val="95000"/>
+                  </a:schemeClr>
+                </a:solidFill>
+              </a:rPr>
+              <a:t> = </a:t>
+            </a:r>
+            <a:r>
+              <a:rPr sz="1600" dirty="0" err="1">
+                <a:solidFill>
+                  <a:schemeClr val="bg1">
+                    <a:lumMod val="95000"/>
+                  </a:schemeClr>
+                </a:solidFill>
+              </a:rPr>
+              <a:t>ctx.GetStub</a:t>
+            </a:r>
+            <a:r>
+              <a:rPr sz="1600" dirty="0">
+                <a:solidFill>
+                  <a:schemeClr val="bg1">
+                    <a:lumMod val="95000"/>
+                  </a:schemeClr>
+                </a:solidFill>
+              </a:rPr>
+              <a:t>().</a:t>
+            </a:r>
+            <a:r>
+              <a:rPr sz="1600" dirty="0" err="1">
+                <a:solidFill>
+                  <a:schemeClr val="bg1">
+                    <a:lumMod val="95000"/>
+                  </a:schemeClr>
+                </a:solidFill>
+              </a:rPr>
+              <a:t>GetTxTimestamp</a:t>
+            </a:r>
+            <a:r>
+              <a:rPr sz="1600" dirty="0">
+                <a:solidFill>
+                  <a:schemeClr val="bg1">
+                    <a:lumMod val="95000"/>
+                  </a:schemeClr>
+                </a:solidFill>
+              </a:rPr>
+              <a:t>()</a:t>
+            </a:r>
+            <a:br>
+              <a:rPr sz="1600" dirty="0">
+                <a:solidFill>
+                  <a:schemeClr val="bg1">
+                    <a:lumMod val="95000"/>
+                  </a:schemeClr>
+                </a:solidFill>
+              </a:rPr>
+            </a:br>
+            <a:r>
+              <a:rPr sz="1600" dirty="0">
+                <a:solidFill>
+                  <a:schemeClr val="bg1">
+                    <a:lumMod val="95000"/>
+                  </a:schemeClr>
+                </a:solidFill>
+              </a:rPr>
               <a:t>}</a:t>
             </a:r>
-            <a:br/>
-            <a:br/>
-            <a:r>
-              <a:t>// ERROR 2: Iterar un mapa en Go (orden aleatorio)</a:t>
-            </a:r>
-            <a:br/>
-            <a:r>
-              <a:t>func (s *SmartContract) BadTotals(ctx ...) error {</a:t>
-            </a:r>
-            <a:br/>
-            <a:r>
+            <a:br>
+              <a:rPr sz="1600" dirty="0">
+                <a:solidFill>
+                  <a:schemeClr val="bg1">
+                    <a:lumMod val="95000"/>
+                  </a:schemeClr>
+                </a:solidFill>
+              </a:rPr>
+            </a:br>
+            <a:br>
+              <a:rPr sz="1600" dirty="0">
+                <a:solidFill>
+                  <a:schemeClr val="bg1">
+                    <a:lumMod val="95000"/>
+                  </a:schemeClr>
+                </a:solidFill>
+              </a:rPr>
+            </a:br>
+            <a:r>
+              <a:rPr sz="1600" dirty="0">
+                <a:solidFill>
+                  <a:schemeClr val="bg1">
+                    <a:lumMod val="95000"/>
+                  </a:schemeClr>
+                </a:solidFill>
+              </a:rPr>
+              <a:t>// ERROR 2: </a:t>
+            </a:r>
+            <a:r>
+              <a:rPr sz="1600" dirty="0" err="1">
+                <a:solidFill>
+                  <a:schemeClr val="bg1">
+                    <a:lumMod val="95000"/>
+                  </a:schemeClr>
+                </a:solidFill>
+              </a:rPr>
+              <a:t>Iterar</a:t>
+            </a:r>
+            <a:r>
+              <a:rPr sz="1600" dirty="0">
+                <a:solidFill>
+                  <a:schemeClr val="bg1">
+                    <a:lumMod val="95000"/>
+                  </a:schemeClr>
+                </a:solidFill>
+              </a:rPr>
+              <a:t> un </a:t>
+            </a:r>
+            <a:r>
+              <a:rPr sz="1600" dirty="0" err="1">
+                <a:solidFill>
+                  <a:schemeClr val="bg1">
+                    <a:lumMod val="95000"/>
+                  </a:schemeClr>
+                </a:solidFill>
+              </a:rPr>
+              <a:t>mapa</a:t>
+            </a:r>
+            <a:r>
+              <a:rPr sz="1600" dirty="0">
+                <a:solidFill>
+                  <a:schemeClr val="bg1">
+                    <a:lumMod val="95000"/>
+                  </a:schemeClr>
+                </a:solidFill>
+              </a:rPr>
+              <a:t> </a:t>
+            </a:r>
+            <a:r>
+              <a:rPr sz="1600" dirty="0" err="1">
+                <a:solidFill>
+                  <a:schemeClr val="bg1">
+                    <a:lumMod val="95000"/>
+                  </a:schemeClr>
+                </a:solidFill>
+              </a:rPr>
+              <a:t>en</a:t>
+            </a:r>
+            <a:r>
+              <a:rPr sz="1600" dirty="0">
+                <a:solidFill>
+                  <a:schemeClr val="bg1">
+                    <a:lumMod val="95000"/>
+                  </a:schemeClr>
+                </a:solidFill>
+              </a:rPr>
+              <a:t> Go (</a:t>
+            </a:r>
+            <a:r>
+              <a:rPr sz="1600" dirty="0" err="1">
+                <a:solidFill>
+                  <a:schemeClr val="bg1">
+                    <a:lumMod val="95000"/>
+                  </a:schemeClr>
+                </a:solidFill>
+              </a:rPr>
+              <a:t>orden</a:t>
+            </a:r>
+            <a:r>
+              <a:rPr sz="1600" dirty="0">
+                <a:solidFill>
+                  <a:schemeClr val="bg1">
+                    <a:lumMod val="95000"/>
+                  </a:schemeClr>
+                </a:solidFill>
+              </a:rPr>
+              <a:t> </a:t>
+            </a:r>
+            <a:r>
+              <a:rPr sz="1600" dirty="0" err="1">
+                <a:solidFill>
+                  <a:schemeClr val="bg1">
+                    <a:lumMod val="95000"/>
+                  </a:schemeClr>
+                </a:solidFill>
+              </a:rPr>
+              <a:t>aleatorio</a:t>
+            </a:r>
+            <a:r>
+              <a:rPr sz="1600" dirty="0">
+                <a:solidFill>
+                  <a:schemeClr val="bg1">
+                    <a:lumMod val="95000"/>
+                  </a:schemeClr>
+                </a:solidFill>
+              </a:rPr>
+              <a:t>)</a:t>
+            </a:r>
+            <a:br>
+              <a:rPr sz="1600" dirty="0">
+                <a:solidFill>
+                  <a:schemeClr val="bg1">
+                    <a:lumMod val="95000"/>
+                  </a:schemeClr>
+                </a:solidFill>
+              </a:rPr>
+            </a:br>
+            <a:r>
+              <a:rPr sz="1600" dirty="0" err="1">
+                <a:solidFill>
+                  <a:schemeClr val="bg1">
+                    <a:lumMod val="95000"/>
+                  </a:schemeClr>
+                </a:solidFill>
+              </a:rPr>
+              <a:t>func</a:t>
+            </a:r>
+            <a:r>
+              <a:rPr sz="1600" dirty="0">
+                <a:solidFill>
+                  <a:schemeClr val="bg1">
+                    <a:lumMod val="95000"/>
+                  </a:schemeClr>
+                </a:solidFill>
+              </a:rPr>
+              <a:t> (s *</a:t>
+            </a:r>
+            <a:r>
+              <a:rPr sz="1600" dirty="0" err="1">
+                <a:solidFill>
+                  <a:schemeClr val="bg1">
+                    <a:lumMod val="95000"/>
+                  </a:schemeClr>
+                </a:solidFill>
+              </a:rPr>
+              <a:t>SmartContract</a:t>
+            </a:r>
+            <a:r>
+              <a:rPr sz="1600" dirty="0">
+                <a:solidFill>
+                  <a:schemeClr val="bg1">
+                    <a:lumMod val="95000"/>
+                  </a:schemeClr>
+                </a:solidFill>
+              </a:rPr>
+              <a:t>) </a:t>
+            </a:r>
+            <a:r>
+              <a:rPr sz="1600" dirty="0" err="1">
+                <a:solidFill>
+                  <a:schemeClr val="bg1">
+                    <a:lumMod val="95000"/>
+                  </a:schemeClr>
+                </a:solidFill>
+              </a:rPr>
+              <a:t>BadTotals</a:t>
+            </a:r>
+            <a:r>
+              <a:rPr sz="1600" dirty="0">
+                <a:solidFill>
+                  <a:schemeClr val="bg1">
+                    <a:lumMod val="95000"/>
+                  </a:schemeClr>
+                </a:solidFill>
+              </a:rPr>
+              <a:t>(</a:t>
+            </a:r>
+            <a:r>
+              <a:rPr sz="1600" dirty="0" err="1">
+                <a:solidFill>
+                  <a:schemeClr val="bg1">
+                    <a:lumMod val="95000"/>
+                  </a:schemeClr>
+                </a:solidFill>
+              </a:rPr>
+              <a:t>ctx</a:t>
+            </a:r>
+            <a:r>
+              <a:rPr sz="1600" dirty="0">
+                <a:solidFill>
+                  <a:schemeClr val="bg1">
+                    <a:lumMod val="95000"/>
+                  </a:schemeClr>
+                </a:solidFill>
+              </a:rPr>
+              <a:t> ...) error {</a:t>
+            </a:r>
+            <a:br>
+              <a:rPr sz="1600" dirty="0">
+                <a:solidFill>
+                  <a:schemeClr val="bg1">
+                    <a:lumMod val="95000"/>
+                  </a:schemeClr>
+                </a:solidFill>
+              </a:rPr>
+            </a:br>
+            <a:r>
+              <a:rPr sz="1600" dirty="0">
+                <a:solidFill>
+                  <a:schemeClr val="bg1">
+                    <a:lumMod val="95000"/>
+                  </a:schemeClr>
+                </a:solidFill>
+              </a:rPr>
               <a:t>    totals := map[string]int{"a": 1, "b": 2, "c": 3}</a:t>
             </a:r>
-            <a:br/>
-            <a:r>
+            <a:br>
+              <a:rPr sz="1600" dirty="0">
+                <a:solidFill>
+                  <a:schemeClr val="bg1">
+                    <a:lumMod val="95000"/>
+                  </a:schemeClr>
+                </a:solidFill>
+              </a:rPr>
+            </a:br>
+            <a:r>
+              <a:rPr sz="1600" dirty="0">
+                <a:solidFill>
+                  <a:schemeClr val="bg1">
+                    <a:lumMod val="95000"/>
+                  </a:schemeClr>
+                </a:solidFill>
+              </a:rPr>
               <a:t>    result := ""</a:t>
             </a:r>
-            <a:br/>
-            <a:r>
+            <a:br>
+              <a:rPr sz="1600" dirty="0">
+                <a:solidFill>
+                  <a:schemeClr val="bg1">
+                    <a:lumMod val="95000"/>
+                  </a:schemeClr>
+                </a:solidFill>
+              </a:rPr>
+            </a:br>
+            <a:r>
+              <a:rPr sz="1600" dirty="0">
+                <a:solidFill>
+                  <a:schemeClr val="bg1">
+                    <a:lumMod val="95000"/>
+                  </a:schemeClr>
+                </a:solidFill>
+              </a:rPr>
               <a:t>    for k, v := range totals {</a:t>
             </a:r>
-            <a:br/>
-            <a:r>
-              <a:t>        result += fmt.Sprintf("%s:%d,", k, v)</a:t>
-            </a:r>
-            <a:br/>
-            <a:r>
+            <a:br>
+              <a:rPr sz="1600" dirty="0">
+                <a:solidFill>
+                  <a:schemeClr val="bg1">
+                    <a:lumMod val="95000"/>
+                  </a:schemeClr>
+                </a:solidFill>
+              </a:rPr>
+            </a:br>
+            <a:r>
+              <a:rPr sz="1600" dirty="0">
+                <a:solidFill>
+                  <a:schemeClr val="bg1">
+                    <a:lumMod val="95000"/>
+                  </a:schemeClr>
+                </a:solidFill>
+              </a:rPr>
+              <a:t>        result += </a:t>
+            </a:r>
+            <a:r>
+              <a:rPr sz="1600" dirty="0" err="1">
+                <a:solidFill>
+                  <a:schemeClr val="bg1">
+                    <a:lumMod val="95000"/>
+                  </a:schemeClr>
+                </a:solidFill>
+              </a:rPr>
+              <a:t>fmt.Sprintf</a:t>
+            </a:r>
+            <a:r>
+              <a:rPr sz="1600" dirty="0">
+                <a:solidFill>
+                  <a:schemeClr val="bg1">
+                    <a:lumMod val="95000"/>
+                  </a:schemeClr>
+                </a:solidFill>
+              </a:rPr>
+              <a:t>("%s:%d,", k, v)</a:t>
+            </a:r>
+            <a:br>
+              <a:rPr sz="1600" dirty="0">
+                <a:solidFill>
+                  <a:schemeClr val="bg1">
+                    <a:lumMod val="95000"/>
+                  </a:schemeClr>
+                </a:solidFill>
+              </a:rPr>
+            </a:br>
+            <a:r>
+              <a:rPr sz="1600" dirty="0">
+                <a:solidFill>
+                  <a:schemeClr val="bg1">
+                    <a:lumMod val="95000"/>
+                  </a:schemeClr>
+                </a:solidFill>
+              </a:rPr>
               <a:t>    }</a:t>
             </a:r>
-            <a:br/>
-            <a:r>
-              <a:t>    // result puede ser "a:1,b:2,c:3" o "c:3,a:1,b:2" -&gt; NO DETERMINISTA</a:t>
-            </a:r>
-            <a:br/>
-            <a:r>
+            <a:br>
+              <a:rPr sz="1600" dirty="0">
+                <a:solidFill>
+                  <a:schemeClr val="bg1">
+                    <a:lumMod val="95000"/>
+                  </a:schemeClr>
+                </a:solidFill>
+              </a:rPr>
+            </a:br>
+            <a:r>
+              <a:rPr sz="1600" dirty="0">
+                <a:solidFill>
+                  <a:schemeClr val="bg1">
+                    <a:lumMod val="95000"/>
+                  </a:schemeClr>
+                </a:solidFill>
+              </a:rPr>
+              <a:t>    // result </a:t>
+            </a:r>
+            <a:r>
+              <a:rPr sz="1600" dirty="0" err="1">
+                <a:solidFill>
+                  <a:schemeClr val="bg1">
+                    <a:lumMod val="95000"/>
+                  </a:schemeClr>
+                </a:solidFill>
+              </a:rPr>
+              <a:t>puede</a:t>
+            </a:r>
+            <a:r>
+              <a:rPr sz="1600" dirty="0">
+                <a:solidFill>
+                  <a:schemeClr val="bg1">
+                    <a:lumMod val="95000"/>
+                  </a:schemeClr>
+                </a:solidFill>
+              </a:rPr>
+              <a:t> ser "a:1,b:2,c:3" o "c:3,a:1,b:2" -&gt; NO DETERMINISTA</a:t>
+            </a:r>
+            <a:br>
+              <a:rPr sz="1600" dirty="0">
+                <a:solidFill>
+                  <a:schemeClr val="bg1">
+                    <a:lumMod val="95000"/>
+                  </a:schemeClr>
+                </a:solidFill>
+              </a:rPr>
+            </a:br>
+            <a:r>
+              <a:rPr sz="1600" dirty="0">
+                <a:solidFill>
+                  <a:schemeClr val="bg1">
+                    <a:lumMod val="95000"/>
+                  </a:schemeClr>
+                </a:solidFill>
+              </a:rPr>
               <a:t>}</a:t>
             </a:r>
-            <a:br/>
-            <a:br/>
-            <a:r>
+            <a:br>
+              <a:rPr sz="1600" dirty="0">
+                <a:solidFill>
+                  <a:schemeClr val="bg1">
+                    <a:lumMod val="95000"/>
+                  </a:schemeClr>
+                </a:solidFill>
+              </a:rPr>
+            </a:br>
+            <a:endParaRPr sz="1600" dirty="0">
+              <a:solidFill>
+                <a:schemeClr val="bg1">
+                  <a:lumMod val="95000"/>
+                </a:schemeClr>
+              </a:solidFill>
+            </a:endParaRPr>
+          </a:p>
+        </p:txBody>
+      </p:sp>
+      <p:sp>
+        <p:nvSpPr>
+          <p:cNvPr id="10" name="CuadroTexto 9">
+            <a:extLst>
+              <a:ext uri="{FF2B5EF4-FFF2-40B4-BE49-F238E27FC236}">
+                <a16:creationId xmlns:a16="http://schemas.microsoft.com/office/drawing/2014/main" id="{DB175AA5-AADD-093C-57DB-8632DE85DBDB}"/>
+              </a:ext>
+            </a:extLst>
+          </p:cNvPr>
+          <p:cNvSpPr txBox="1"/>
+          <p:nvPr/>
+        </p:nvSpPr>
+        <p:spPr>
+          <a:xfrm>
+            <a:off x="6663396" y="1645920"/>
+            <a:ext cx="4955602" cy="3293209"/>
+          </a:xfrm>
+          <a:prstGeom prst="rect">
+            <a:avLst/>
+          </a:prstGeom>
+          <a:noFill/>
+        </p:spPr>
+        <p:txBody>
+          <a:bodyPr wrap="square">
+            <a:spAutoFit/>
+          </a:bodyPr>
+          <a:lstStyle/>
+          <a:p>
+            <a:br>
+              <a:rPr lang="es-ES" sz="1600" dirty="0">
+                <a:solidFill>
+                  <a:schemeClr val="bg1">
+                    <a:lumMod val="95000"/>
+                  </a:schemeClr>
+                </a:solidFill>
+              </a:rPr>
+            </a:br>
+            <a:r>
+              <a:rPr lang="es-ES" sz="1600" dirty="0">
+                <a:solidFill>
+                  <a:schemeClr val="bg1">
+                    <a:lumMod val="95000"/>
+                  </a:schemeClr>
+                </a:solidFill>
+              </a:rPr>
               <a:t>// ERROR 3: Llamada HTTP externa</a:t>
             </a:r>
-            <a:br/>
-            <a:r>
-              <a:t>func (s *SmartContract) BadPrice(ctx ...) error {</a:t>
-            </a:r>
-            <a:br/>
-            <a:r>
-              <a:t>    resp, _ := http.Get("https://api.prices.com/gold")</a:t>
-            </a:r>
-            <a:br/>
-            <a:r>
+            <a:br>
+              <a:rPr lang="es-ES" sz="1600" dirty="0">
+                <a:solidFill>
+                  <a:schemeClr val="bg1">
+                    <a:lumMod val="95000"/>
+                  </a:schemeClr>
+                </a:solidFill>
+              </a:rPr>
+            </a:br>
+            <a:r>
+              <a:rPr lang="es-ES" sz="1600" dirty="0" err="1">
+                <a:solidFill>
+                  <a:schemeClr val="bg1">
+                    <a:lumMod val="95000"/>
+                  </a:schemeClr>
+                </a:solidFill>
+              </a:rPr>
+              <a:t>func</a:t>
+            </a:r>
+            <a:r>
+              <a:rPr lang="es-ES" sz="1600" dirty="0">
+                <a:solidFill>
+                  <a:schemeClr val="bg1">
+                    <a:lumMod val="95000"/>
+                  </a:schemeClr>
+                </a:solidFill>
+              </a:rPr>
+              <a:t> (s *</a:t>
+            </a:r>
+            <a:r>
+              <a:rPr lang="es-ES" sz="1600" dirty="0" err="1">
+                <a:solidFill>
+                  <a:schemeClr val="bg1">
+                    <a:lumMod val="95000"/>
+                  </a:schemeClr>
+                </a:solidFill>
+              </a:rPr>
+              <a:t>SmartContract</a:t>
+            </a:r>
+            <a:r>
+              <a:rPr lang="es-ES" sz="1600" dirty="0">
+                <a:solidFill>
+                  <a:schemeClr val="bg1">
+                    <a:lumMod val="95000"/>
+                  </a:schemeClr>
+                </a:solidFill>
+              </a:rPr>
+              <a:t>) </a:t>
+            </a:r>
+            <a:r>
+              <a:rPr lang="es-ES" sz="1600" dirty="0" err="1">
+                <a:solidFill>
+                  <a:schemeClr val="bg1">
+                    <a:lumMod val="95000"/>
+                  </a:schemeClr>
+                </a:solidFill>
+              </a:rPr>
+              <a:t>BadPrice</a:t>
+            </a:r>
+            <a:r>
+              <a:rPr lang="es-ES" sz="1600" dirty="0">
+                <a:solidFill>
+                  <a:schemeClr val="bg1">
+                    <a:lumMod val="95000"/>
+                  </a:schemeClr>
+                </a:solidFill>
+              </a:rPr>
+              <a:t>(</a:t>
+            </a:r>
+            <a:r>
+              <a:rPr lang="es-ES" sz="1600" dirty="0" err="1">
+                <a:solidFill>
+                  <a:schemeClr val="bg1">
+                    <a:lumMod val="95000"/>
+                  </a:schemeClr>
+                </a:solidFill>
+              </a:rPr>
+              <a:t>ctx</a:t>
+            </a:r>
+            <a:r>
+              <a:rPr lang="es-ES" sz="1600" dirty="0">
+                <a:solidFill>
+                  <a:schemeClr val="bg1">
+                    <a:lumMod val="95000"/>
+                  </a:schemeClr>
+                </a:solidFill>
+              </a:rPr>
+              <a:t> ...) error {</a:t>
+            </a:r>
+            <a:br>
+              <a:rPr lang="es-ES" sz="1600" dirty="0">
+                <a:solidFill>
+                  <a:schemeClr val="bg1">
+                    <a:lumMod val="95000"/>
+                  </a:schemeClr>
+                </a:solidFill>
+              </a:rPr>
+            </a:br>
+            <a:r>
+              <a:rPr lang="es-ES" sz="1600" dirty="0">
+                <a:solidFill>
+                  <a:schemeClr val="bg1">
+                    <a:lumMod val="95000"/>
+                  </a:schemeClr>
+                </a:solidFill>
+              </a:rPr>
+              <a:t>    </a:t>
+            </a:r>
+            <a:r>
+              <a:rPr lang="es-ES" sz="1600" dirty="0" err="1">
+                <a:solidFill>
+                  <a:schemeClr val="bg1">
+                    <a:lumMod val="95000"/>
+                  </a:schemeClr>
+                </a:solidFill>
+              </a:rPr>
+              <a:t>resp</a:t>
+            </a:r>
+            <a:r>
+              <a:rPr lang="es-ES" sz="1600" dirty="0">
+                <a:solidFill>
+                  <a:schemeClr val="bg1">
+                    <a:lumMod val="95000"/>
+                  </a:schemeClr>
+                </a:solidFill>
+              </a:rPr>
+              <a:t>, _ := </a:t>
+            </a:r>
+            <a:r>
+              <a:rPr lang="es-ES" sz="1600" dirty="0" err="1">
+                <a:solidFill>
+                  <a:schemeClr val="bg1">
+                    <a:lumMod val="95000"/>
+                  </a:schemeClr>
+                </a:solidFill>
+              </a:rPr>
+              <a:t>http.Get</a:t>
+            </a:r>
+            <a:r>
+              <a:rPr lang="es-ES" sz="1600" dirty="0">
+                <a:solidFill>
+                  <a:schemeClr val="bg1">
+                    <a:lumMod val="95000"/>
+                  </a:schemeClr>
+                </a:solidFill>
+              </a:rPr>
+              <a:t>("https://api.prices.com/</a:t>
+            </a:r>
+            <a:r>
+              <a:rPr lang="es-ES" sz="1600" dirty="0" err="1">
+                <a:solidFill>
+                  <a:schemeClr val="bg1">
+                    <a:lumMod val="95000"/>
+                  </a:schemeClr>
+                </a:solidFill>
+              </a:rPr>
+              <a:t>gold</a:t>
+            </a:r>
+            <a:r>
+              <a:rPr lang="es-ES" sz="1600" dirty="0">
+                <a:solidFill>
+                  <a:schemeClr val="bg1">
+                    <a:lumMod val="95000"/>
+                  </a:schemeClr>
+                </a:solidFill>
+              </a:rPr>
+              <a:t>")</a:t>
+            </a:r>
+            <a:br>
+              <a:rPr lang="es-ES" sz="1600" dirty="0">
+                <a:solidFill>
+                  <a:schemeClr val="bg1">
+                    <a:lumMod val="95000"/>
+                  </a:schemeClr>
+                </a:solidFill>
+              </a:rPr>
+            </a:br>
+            <a:r>
+              <a:rPr lang="es-ES" sz="1600" dirty="0">
+                <a:solidFill>
+                  <a:schemeClr val="bg1">
+                    <a:lumMod val="95000"/>
+                  </a:schemeClr>
+                </a:solidFill>
+              </a:rPr>
               <a:t>    // Cada peer puede obtener un precio diferente -&gt; INVALIDA</a:t>
             </a:r>
-            <a:br/>
-            <a:r>
+            <a:br>
+              <a:rPr lang="es-ES" sz="1600" dirty="0">
+                <a:solidFill>
+                  <a:schemeClr val="bg1">
+                    <a:lumMod val="95000"/>
+                  </a:schemeClr>
+                </a:solidFill>
+              </a:rPr>
+            </a:br>
+            <a:r>
+              <a:rPr lang="es-ES" sz="1600" dirty="0">
+                <a:solidFill>
+                  <a:schemeClr val="bg1">
+                    <a:lumMod val="95000"/>
+                  </a:schemeClr>
+                </a:solidFill>
+              </a:rPr>
               <a:t>}</a:t>
             </a:r>
-            <a:br/>
-            <a:br/>
-            <a:r>
+            <a:br>
+              <a:rPr lang="es-ES" sz="1600" dirty="0">
+                <a:solidFill>
+                  <a:schemeClr val="bg1">
+                    <a:lumMod val="95000"/>
+                  </a:schemeClr>
+                </a:solidFill>
+              </a:rPr>
+            </a:br>
+            <a:br>
+              <a:rPr lang="es-ES" sz="1600" dirty="0">
+                <a:solidFill>
+                  <a:schemeClr val="bg1">
+                    <a:lumMod val="95000"/>
+                  </a:schemeClr>
+                </a:solidFill>
+              </a:rPr>
+            </a:br>
+            <a:r>
+              <a:rPr lang="es-ES" sz="1600" dirty="0">
+                <a:solidFill>
+                  <a:schemeClr val="bg1">
+                    <a:lumMod val="95000"/>
+                  </a:schemeClr>
+                </a:solidFill>
+              </a:rPr>
               <a:t>// ERROR 4: Numero aleatorio</a:t>
             </a:r>
-            <a:br/>
-            <a:r>
-              <a:t>func (s *SmartContract) BadRandom(ctx ...) error {</a:t>
-            </a:r>
-            <a:br/>
-            <a:r>
-              <a:t>    id := fmt.Sprintf("ASSET-%d", rand.Intn(99999))</a:t>
-            </a:r>
-            <a:br/>
-            <a:r>
+            <a:br>
+              <a:rPr lang="es-ES" sz="1600" dirty="0">
+                <a:solidFill>
+                  <a:schemeClr val="bg1">
+                    <a:lumMod val="95000"/>
+                  </a:schemeClr>
+                </a:solidFill>
+              </a:rPr>
+            </a:br>
+            <a:r>
+              <a:rPr lang="es-ES" sz="1600" dirty="0" err="1">
+                <a:solidFill>
+                  <a:schemeClr val="bg1">
+                    <a:lumMod val="95000"/>
+                  </a:schemeClr>
+                </a:solidFill>
+              </a:rPr>
+              <a:t>func</a:t>
+            </a:r>
+            <a:r>
+              <a:rPr lang="es-ES" sz="1600" dirty="0">
+                <a:solidFill>
+                  <a:schemeClr val="bg1">
+                    <a:lumMod val="95000"/>
+                  </a:schemeClr>
+                </a:solidFill>
+              </a:rPr>
+              <a:t> (s *</a:t>
+            </a:r>
+            <a:r>
+              <a:rPr lang="es-ES" sz="1600" dirty="0" err="1">
+                <a:solidFill>
+                  <a:schemeClr val="bg1">
+                    <a:lumMod val="95000"/>
+                  </a:schemeClr>
+                </a:solidFill>
+              </a:rPr>
+              <a:t>SmartContract</a:t>
+            </a:r>
+            <a:r>
+              <a:rPr lang="es-ES" sz="1600" dirty="0">
+                <a:solidFill>
+                  <a:schemeClr val="bg1">
+                    <a:lumMod val="95000"/>
+                  </a:schemeClr>
+                </a:solidFill>
+              </a:rPr>
+              <a:t>) </a:t>
+            </a:r>
+            <a:r>
+              <a:rPr lang="es-ES" sz="1600" dirty="0" err="1">
+                <a:solidFill>
+                  <a:schemeClr val="bg1">
+                    <a:lumMod val="95000"/>
+                  </a:schemeClr>
+                </a:solidFill>
+              </a:rPr>
+              <a:t>BadRandom</a:t>
+            </a:r>
+            <a:r>
+              <a:rPr lang="es-ES" sz="1600" dirty="0">
+                <a:solidFill>
+                  <a:schemeClr val="bg1">
+                    <a:lumMod val="95000"/>
+                  </a:schemeClr>
+                </a:solidFill>
+              </a:rPr>
+              <a:t>(</a:t>
+            </a:r>
+            <a:r>
+              <a:rPr lang="es-ES" sz="1600" dirty="0" err="1">
+                <a:solidFill>
+                  <a:schemeClr val="bg1">
+                    <a:lumMod val="95000"/>
+                  </a:schemeClr>
+                </a:solidFill>
+              </a:rPr>
+              <a:t>ctx</a:t>
+            </a:r>
+            <a:r>
+              <a:rPr lang="es-ES" sz="1600" dirty="0">
+                <a:solidFill>
+                  <a:schemeClr val="bg1">
+                    <a:lumMod val="95000"/>
+                  </a:schemeClr>
+                </a:solidFill>
+              </a:rPr>
+              <a:t> ...) error {</a:t>
+            </a:r>
+            <a:br>
+              <a:rPr lang="es-ES" sz="1600" dirty="0">
+                <a:solidFill>
+                  <a:schemeClr val="bg1">
+                    <a:lumMod val="95000"/>
+                  </a:schemeClr>
+                </a:solidFill>
+              </a:rPr>
+            </a:br>
+            <a:r>
+              <a:rPr lang="es-ES" sz="1600" dirty="0">
+                <a:solidFill>
+                  <a:schemeClr val="bg1">
+                    <a:lumMod val="95000"/>
+                  </a:schemeClr>
+                </a:solidFill>
+              </a:rPr>
+              <a:t>    id := </a:t>
+            </a:r>
+            <a:r>
+              <a:rPr lang="es-ES" sz="1600" dirty="0" err="1">
+                <a:solidFill>
+                  <a:schemeClr val="bg1">
+                    <a:lumMod val="95000"/>
+                  </a:schemeClr>
+                </a:solidFill>
+              </a:rPr>
+              <a:t>fmt.Sprintf</a:t>
+            </a:r>
+            <a:r>
+              <a:rPr lang="es-ES" sz="1600" dirty="0">
+                <a:solidFill>
+                  <a:schemeClr val="bg1">
+                    <a:lumMod val="95000"/>
+                  </a:schemeClr>
+                </a:solidFill>
+              </a:rPr>
+              <a:t>("ASSET-%d", </a:t>
+            </a:r>
+            <a:r>
+              <a:rPr lang="es-ES" sz="1600" dirty="0" err="1">
+                <a:solidFill>
+                  <a:schemeClr val="bg1">
+                    <a:lumMod val="95000"/>
+                  </a:schemeClr>
+                </a:solidFill>
+              </a:rPr>
+              <a:t>rand.Intn</a:t>
+            </a:r>
+            <a:r>
+              <a:rPr lang="es-ES" sz="1600" dirty="0">
+                <a:solidFill>
+                  <a:schemeClr val="bg1">
+                    <a:lumMod val="95000"/>
+                  </a:schemeClr>
+                </a:solidFill>
+              </a:rPr>
+              <a:t>(99999))</a:t>
+            </a:r>
+            <a:br>
+              <a:rPr lang="es-ES" sz="1600" dirty="0">
+                <a:solidFill>
+                  <a:schemeClr val="bg1">
+                    <a:lumMod val="95000"/>
+                  </a:schemeClr>
+                </a:solidFill>
+              </a:rPr>
+            </a:br>
+            <a:r>
+              <a:rPr lang="es-ES" sz="1600" dirty="0">
+                <a:solidFill>
+                  <a:schemeClr val="bg1">
+                    <a:lumMod val="95000"/>
+                  </a:schemeClr>
+                </a:solidFill>
+              </a:rPr>
               <a:t>    // ID diferente en cada peer -&gt; INVALIDA</a:t>
             </a:r>
-            <a:br/>
-            <a:r>
+            <a:br>
+              <a:rPr lang="es-ES" sz="1600" dirty="0">
+                <a:solidFill>
+                  <a:schemeClr val="bg1">
+                    <a:lumMod val="95000"/>
+                  </a:schemeClr>
+                </a:solidFill>
+              </a:rPr>
+            </a:br>
+            <a:r>
+              <a:rPr lang="es-ES" sz="1600" dirty="0">
+                <a:solidFill>
+                  <a:schemeClr val="bg1">
+                    <a:lumMod val="95000"/>
+                  </a:schemeClr>
+                </a:solidFill>
+              </a:rPr>
               <a:t>}</a:t>
             </a:r>
+            <a:endParaRPr lang="es-ES" sz="1600" dirty="0"/>
+          </a:p>
+        </p:txBody>
+      </p:sp>
+      <p:sp>
+        <p:nvSpPr>
+          <p:cNvPr id="11" name="Rectángulo 10">
+            <a:extLst>
+              <a:ext uri="{FF2B5EF4-FFF2-40B4-BE49-F238E27FC236}">
+                <a16:creationId xmlns:a16="http://schemas.microsoft.com/office/drawing/2014/main" id="{EC860317-7AAA-B1EE-04AB-37A143FF2697}"/>
+              </a:ext>
+            </a:extLst>
+          </p:cNvPr>
+          <p:cNvSpPr/>
+          <p:nvPr/>
+        </p:nvSpPr>
+        <p:spPr>
+          <a:xfrm>
+            <a:off x="6094412" y="1417320"/>
+            <a:ext cx="45719" cy="5120640"/>
+          </a:xfrm>
+          <a:prstGeom prst="rect">
+            <a:avLst/>
+          </a:prstGeom>
+        </p:spPr>
+        <p:style>
+          <a:lnRef idx="1">
+            <a:schemeClr val="accent1"/>
+          </a:lnRef>
+          <a:fillRef idx="3">
+            <a:schemeClr val="accent1"/>
+          </a:fillRef>
+          <a:effectRef idx="2">
+            <a:schemeClr val="accent1"/>
+          </a:effectRef>
+          <a:fontRef idx="minor">
+            <a:schemeClr val="lt1"/>
+          </a:fontRef>
+        </p:style>
+        <p:txBody>
+          <a:bodyPr rtlCol="0" anchor="ctr"/>
+          <a:lstStyle/>
+          <a:p>
+            <a:pPr algn="ctr"/>
+            <a:endParaRPr lang="es-ES"/>
           </a:p>
         </p:txBody>
       </p:sp>
@@ -4381,7 +5530,7 @@
 </file>
 
 <file path=ppt/slides/slide14.xml><?xml version="1.0" encoding="utf-8"?>
-<p:sld xmlns:a="http://schemas.openxmlformats.org/drawingml/2006/main" xmlns:p="http://schemas.openxmlformats.org/presentationml/2006/main" xmlns:r="http://schemas.openxmlformats.org/officeDocument/2006/relationships">
+<p:sld xmlns:a="http://schemas.openxmlformats.org/drawingml/2006/main" xmlns:r="http://schemas.openxmlformats.org/officeDocument/2006/relationships" xmlns:p="http://schemas.openxmlformats.org/presentationml/2006/main">
   <p:cSld>
     <p:spTree>
       <p:nvGrpSpPr>
@@ -4389,7 +5538,14 @@
         <p:cNvGrpSpPr/>
         <p:nvPr/>
       </p:nvGrpSpPr>
-      <p:grpSpPr/>
+      <p:grpSpPr>
+        <a:xfrm>
+          <a:off x="0" y="0"/>
+          <a:ext cx="0" cy="0"/>
+          <a:chOff x="0" y="0"/>
+          <a:chExt cx="0" cy="0"/>
+        </a:xfrm>
+      </p:grpSpPr>
       <p:sp>
         <p:nvSpPr>
           <p:cNvPr id="2" name="Rectangle 1"/>
@@ -4430,6 +5586,7 @@
           <a:lstStyle/>
           <a:p>
             <a:pPr algn="ctr"/>
+            <a:endParaRPr/>
           </a:p>
         </p:txBody>
       </p:sp>
@@ -4507,6 +5664,7 @@
           <a:lstStyle/>
           <a:p>
             <a:pPr algn="ctr"/>
+            <a:endParaRPr/>
           </a:p>
         </p:txBody>
       </p:sp>
@@ -4718,7 +5876,7 @@
 </file>
 
 <file path=ppt/slides/slide15.xml><?xml version="1.0" encoding="utf-8"?>
-<p:sld xmlns:a="http://schemas.openxmlformats.org/drawingml/2006/main" xmlns:p="http://schemas.openxmlformats.org/presentationml/2006/main" xmlns:r="http://schemas.openxmlformats.org/officeDocument/2006/relationships">
+<p:sld xmlns:a="http://schemas.openxmlformats.org/drawingml/2006/main" xmlns:r="http://schemas.openxmlformats.org/officeDocument/2006/relationships" xmlns:p="http://schemas.openxmlformats.org/presentationml/2006/main">
   <p:cSld>
     <p:spTree>
       <p:nvGrpSpPr>
@@ -4726,7 +5884,14 @@
         <p:cNvGrpSpPr/>
         <p:nvPr/>
       </p:nvGrpSpPr>
-      <p:grpSpPr/>
+      <p:grpSpPr>
+        <a:xfrm>
+          <a:off x="0" y="0"/>
+          <a:ext cx="0" cy="0"/>
+          <a:chOff x="0" y="0"/>
+          <a:chExt cx="0" cy="0"/>
+        </a:xfrm>
+      </p:grpSpPr>
       <p:sp>
         <p:nvSpPr>
           <p:cNvPr id="2" name="Rectangle 1"/>
@@ -4767,6 +5932,7 @@
           <a:lstStyle/>
           <a:p>
             <a:pPr algn="ctr"/>
+            <a:endParaRPr/>
           </a:p>
         </p:txBody>
       </p:sp>
@@ -4847,7 +6013,7 @@
 </file>
 
 <file path=ppt/slides/slide16.xml><?xml version="1.0" encoding="utf-8"?>
-<p:sld xmlns:a="http://schemas.openxmlformats.org/drawingml/2006/main" xmlns:p="http://schemas.openxmlformats.org/presentationml/2006/main" xmlns:r="http://schemas.openxmlformats.org/officeDocument/2006/relationships">
+<p:sld xmlns:a="http://schemas.openxmlformats.org/drawingml/2006/main" xmlns:r="http://schemas.openxmlformats.org/officeDocument/2006/relationships" xmlns:p="http://schemas.openxmlformats.org/presentationml/2006/main">
   <p:cSld>
     <p:spTree>
       <p:nvGrpSpPr>
@@ -4855,7 +6021,14 @@
         <p:cNvGrpSpPr/>
         <p:nvPr/>
       </p:nvGrpSpPr>
-      <p:grpSpPr/>
+      <p:grpSpPr>
+        <a:xfrm>
+          <a:off x="0" y="0"/>
+          <a:ext cx="0" cy="0"/>
+          <a:chOff x="0" y="0"/>
+          <a:chExt cx="0" cy="0"/>
+        </a:xfrm>
+      </p:grpSpPr>
       <p:sp>
         <p:nvSpPr>
           <p:cNvPr id="2" name="Rectangle 1"/>
@@ -4896,6 +6069,7 @@
           <a:lstStyle/>
           <a:p>
             <a:pPr algn="ctr"/>
+            <a:endParaRPr/>
           </a:p>
         </p:txBody>
       </p:sp>
@@ -4973,6 +6147,7 @@
           <a:lstStyle/>
           <a:p>
             <a:pPr algn="ctr"/>
+            <a:endParaRPr/>
           </a:p>
         </p:txBody>
       </p:sp>
@@ -5184,7 +6359,7 @@
 </file>
 
 <file path=ppt/slides/slide17.xml><?xml version="1.0" encoding="utf-8"?>
-<p:sld xmlns:a="http://schemas.openxmlformats.org/drawingml/2006/main" xmlns:p="http://schemas.openxmlformats.org/presentationml/2006/main" xmlns:r="http://schemas.openxmlformats.org/officeDocument/2006/relationships">
+<p:sld xmlns:a="http://schemas.openxmlformats.org/drawingml/2006/main" xmlns:r="http://schemas.openxmlformats.org/officeDocument/2006/relationships" xmlns:p="http://schemas.openxmlformats.org/presentationml/2006/main">
   <p:cSld>
     <p:spTree>
       <p:nvGrpSpPr>
@@ -5192,7 +6367,14 @@
         <p:cNvGrpSpPr/>
         <p:nvPr/>
       </p:nvGrpSpPr>
-      <p:grpSpPr/>
+      <p:grpSpPr>
+        <a:xfrm>
+          <a:off x="0" y="0"/>
+          <a:ext cx="0" cy="0"/>
+          <a:chOff x="0" y="0"/>
+          <a:chExt cx="0" cy="0"/>
+        </a:xfrm>
+      </p:grpSpPr>
       <p:sp>
         <p:nvSpPr>
           <p:cNvPr id="2" name="Rectangle 1"/>
@@ -5233,6 +6415,7 @@
           <a:lstStyle/>
           <a:p>
             <a:pPr algn="ctr"/>
+            <a:endParaRPr/>
           </a:p>
         </p:txBody>
       </p:sp>
@@ -5344,6 +6527,7 @@
           <a:lstStyle/>
           <a:p>
             <a:pPr algn="ctr"/>
+            <a:endParaRPr/>
           </a:p>
         </p:txBody>
       </p:sp>
@@ -5421,6 +6605,7 @@
           <a:lstStyle/>
           <a:p>
             <a:pPr algn="ctr"/>
+            <a:endParaRPr/>
           </a:p>
         </p:txBody>
       </p:sp>
@@ -5433,7 +6618,7 @@
         <p:spPr>
           <a:xfrm>
             <a:off x="731520" y="1600200"/>
-            <a:ext cx="10698480" cy="4754880"/>
+            <a:ext cx="4944451" cy="4754880"/>
           </a:xfrm>
           <a:prstGeom prst="rect">
             <a:avLst/>
@@ -5444,129 +6629,1458 @@
           <a:bodyPr wrap="square"/>
           <a:lstStyle/>
           <a:p>
-            <a:br/>
-            <a:pPr algn="l">
-              <a:defRPr sz="1500" b="0">
-                <a:solidFill>
-                  <a:srgbClr val="D4D4D4"/>
-                </a:solidFill>
-                <a:latin typeface="Consolas"/>
-              </a:defRPr>
-            </a:pPr>
-            <a:r>
-              <a:t>// Version 1 del modelo</a:t>
-            </a:r>
-            <a:br/>
-            <a:r>
+            <a:br>
+              <a:rPr sz="1600" dirty="0">
+                <a:solidFill>
+                  <a:schemeClr val="bg1">
+                    <a:lumMod val="95000"/>
+                  </a:schemeClr>
+                </a:solidFill>
+              </a:rPr>
+            </a:br>
+            <a:r>
+              <a:rPr sz="1600" dirty="0">
+                <a:solidFill>
+                  <a:schemeClr val="bg1">
+                    <a:lumMod val="95000"/>
+                  </a:schemeClr>
+                </a:solidFill>
+              </a:rPr>
+              <a:t>// Version 1 del </a:t>
+            </a:r>
+            <a:r>
+              <a:rPr sz="1600" dirty="0" err="1">
+                <a:solidFill>
+                  <a:schemeClr val="bg1">
+                    <a:lumMod val="95000"/>
+                  </a:schemeClr>
+                </a:solidFill>
+              </a:rPr>
+              <a:t>modelo</a:t>
+            </a:r>
+            <a:br>
+              <a:rPr sz="1600" dirty="0">
+                <a:solidFill>
+                  <a:schemeClr val="bg1">
+                    <a:lumMod val="95000"/>
+                  </a:schemeClr>
+                </a:solidFill>
+              </a:rPr>
+            </a:br>
+            <a:r>
+              <a:rPr sz="1600" dirty="0">
+                <a:solidFill>
+                  <a:schemeClr val="bg1">
+                    <a:lumMod val="95000"/>
+                  </a:schemeClr>
+                </a:solidFill>
+              </a:rPr>
               <a:t>type PropertyV1 struct {</a:t>
             </a:r>
-            <a:br/>
-            <a:r>
-              <a:t>    ID      string `json:"id"`</a:t>
-            </a:r>
-            <a:br/>
-            <a:r>
-              <a:t>    Owner   string `json:"owner"`</a:t>
-            </a:r>
-            <a:br/>
-            <a:r>
-              <a:t>    Address string `json:"address"`</a:t>
-            </a:r>
-            <a:br/>
-            <a:r>
+            <a:br>
+              <a:rPr sz="1600" dirty="0">
+                <a:solidFill>
+                  <a:schemeClr val="bg1">
+                    <a:lumMod val="95000"/>
+                  </a:schemeClr>
+                </a:solidFill>
+              </a:rPr>
+            </a:br>
+            <a:r>
+              <a:rPr sz="1600" dirty="0">
+                <a:solidFill>
+                  <a:schemeClr val="bg1">
+                    <a:lumMod val="95000"/>
+                  </a:schemeClr>
+                </a:solidFill>
+              </a:rPr>
+              <a:t>    ID      string `</a:t>
+            </a:r>
+            <a:r>
+              <a:rPr sz="1600" dirty="0" err="1">
+                <a:solidFill>
+                  <a:schemeClr val="bg1">
+                    <a:lumMod val="95000"/>
+                  </a:schemeClr>
+                </a:solidFill>
+              </a:rPr>
+              <a:t>json</a:t>
+            </a:r>
+            <a:r>
+              <a:rPr sz="1600" dirty="0">
+                <a:solidFill>
+                  <a:schemeClr val="bg1">
+                    <a:lumMod val="95000"/>
+                  </a:schemeClr>
+                </a:solidFill>
+              </a:rPr>
+              <a:t>:"id"`</a:t>
+            </a:r>
+            <a:br>
+              <a:rPr sz="1600" dirty="0">
+                <a:solidFill>
+                  <a:schemeClr val="bg1">
+                    <a:lumMod val="95000"/>
+                  </a:schemeClr>
+                </a:solidFill>
+              </a:rPr>
+            </a:br>
+            <a:r>
+              <a:rPr sz="1600" dirty="0">
+                <a:solidFill>
+                  <a:schemeClr val="bg1">
+                    <a:lumMod val="95000"/>
+                  </a:schemeClr>
+                </a:solidFill>
+              </a:rPr>
+              <a:t>    Owner   string `</a:t>
+            </a:r>
+            <a:r>
+              <a:rPr sz="1600" dirty="0" err="1">
+                <a:solidFill>
+                  <a:schemeClr val="bg1">
+                    <a:lumMod val="95000"/>
+                  </a:schemeClr>
+                </a:solidFill>
+              </a:rPr>
+              <a:t>json</a:t>
+            </a:r>
+            <a:r>
+              <a:rPr sz="1600" dirty="0">
+                <a:solidFill>
+                  <a:schemeClr val="bg1">
+                    <a:lumMod val="95000"/>
+                  </a:schemeClr>
+                </a:solidFill>
+              </a:rPr>
+              <a:t>:"owner"`</a:t>
+            </a:r>
+            <a:br>
+              <a:rPr sz="1600" dirty="0">
+                <a:solidFill>
+                  <a:schemeClr val="bg1">
+                    <a:lumMod val="95000"/>
+                  </a:schemeClr>
+                </a:solidFill>
+              </a:rPr>
+            </a:br>
+            <a:r>
+              <a:rPr sz="1600" dirty="0">
+                <a:solidFill>
+                  <a:schemeClr val="bg1">
+                    <a:lumMod val="95000"/>
+                  </a:schemeClr>
+                </a:solidFill>
+              </a:rPr>
+              <a:t>    Address string `</a:t>
+            </a:r>
+            <a:r>
+              <a:rPr sz="1600" dirty="0" err="1">
+                <a:solidFill>
+                  <a:schemeClr val="bg1">
+                    <a:lumMod val="95000"/>
+                  </a:schemeClr>
+                </a:solidFill>
+              </a:rPr>
+              <a:t>json</a:t>
+            </a:r>
+            <a:r>
+              <a:rPr sz="1600" dirty="0">
+                <a:solidFill>
+                  <a:schemeClr val="bg1">
+                    <a:lumMod val="95000"/>
+                  </a:schemeClr>
+                </a:solidFill>
+              </a:rPr>
+              <a:t>:"address"`</a:t>
+            </a:r>
+            <a:br>
+              <a:rPr sz="1600" dirty="0">
+                <a:solidFill>
+                  <a:schemeClr val="bg1">
+                    <a:lumMod val="95000"/>
+                  </a:schemeClr>
+                </a:solidFill>
+              </a:rPr>
+            </a:br>
+            <a:r>
+              <a:rPr sz="1600" dirty="0">
+                <a:solidFill>
+                  <a:schemeClr val="bg1">
+                    <a:lumMod val="95000"/>
+                  </a:schemeClr>
+                </a:solidFill>
+              </a:rPr>
               <a:t>}</a:t>
             </a:r>
-            <a:br/>
-            <a:br/>
-            <a:r>
-              <a:t>// Version 2: nuevos campos</a:t>
-            </a:r>
-            <a:br/>
-            <a:r>
+            <a:br>
+              <a:rPr sz="1600" dirty="0">
+                <a:solidFill>
+                  <a:schemeClr val="bg1">
+                    <a:lumMod val="95000"/>
+                  </a:schemeClr>
+                </a:solidFill>
+              </a:rPr>
+            </a:br>
+            <a:br>
+              <a:rPr sz="1600" dirty="0">
+                <a:solidFill>
+                  <a:schemeClr val="bg1">
+                    <a:lumMod val="95000"/>
+                  </a:schemeClr>
+                </a:solidFill>
+              </a:rPr>
+            </a:br>
+            <a:r>
+              <a:rPr sz="1600" dirty="0">
+                <a:solidFill>
+                  <a:schemeClr val="bg1">
+                    <a:lumMod val="95000"/>
+                  </a:schemeClr>
+                </a:solidFill>
+              </a:rPr>
+              <a:t>// Version 2: </a:t>
+            </a:r>
+            <a:r>
+              <a:rPr sz="1600" dirty="0" err="1">
+                <a:solidFill>
+                  <a:schemeClr val="bg1">
+                    <a:lumMod val="95000"/>
+                  </a:schemeClr>
+                </a:solidFill>
+              </a:rPr>
+              <a:t>nuevos</a:t>
+            </a:r>
+            <a:r>
+              <a:rPr sz="1600" dirty="0">
+                <a:solidFill>
+                  <a:schemeClr val="bg1">
+                    <a:lumMod val="95000"/>
+                  </a:schemeClr>
+                </a:solidFill>
+              </a:rPr>
+              <a:t> campos</a:t>
+            </a:r>
+            <a:br>
+              <a:rPr sz="1600" dirty="0">
+                <a:solidFill>
+                  <a:schemeClr val="bg1">
+                    <a:lumMod val="95000"/>
+                  </a:schemeClr>
+                </a:solidFill>
+              </a:rPr>
+            </a:br>
+            <a:r>
+              <a:rPr sz="1600" dirty="0">
+                <a:solidFill>
+                  <a:schemeClr val="bg1">
+                    <a:lumMod val="95000"/>
+                  </a:schemeClr>
+                </a:solidFill>
+              </a:rPr>
               <a:t>type PropertyV2 struct {</a:t>
             </a:r>
-            <a:br/>
-            <a:r>
-              <a:t>    ID             string `json:"id"`</a:t>
-            </a:r>
-            <a:br/>
-            <a:r>
-              <a:t>    Owner          string `json:"owner"`</a:t>
-            </a:r>
-            <a:br/>
-            <a:r>
-              <a:t>    Address        string `json:"address"`</a:t>
-            </a:r>
-            <a:br/>
-            <a:r>
-              <a:t>    PropertyType   string `json:"propertyType"`   // NUEVO</a:t>
-            </a:r>
-            <a:br/>
-            <a:r>
-              <a:t>    AppraisalValue int    `json:"appraisalValue"` // NUEVO</a:t>
-            </a:r>
-            <a:br/>
-            <a:r>
-              <a:t>    Version        int    `json:"version"`        // NUEVO: control de version</a:t>
-            </a:r>
-            <a:br/>
-            <a:r>
+            <a:br>
+              <a:rPr sz="1600" dirty="0">
+                <a:solidFill>
+                  <a:schemeClr val="bg1">
+                    <a:lumMod val="95000"/>
+                  </a:schemeClr>
+                </a:solidFill>
+              </a:rPr>
+            </a:br>
+            <a:r>
+              <a:rPr sz="1600" dirty="0">
+                <a:solidFill>
+                  <a:schemeClr val="bg1">
+                    <a:lumMod val="95000"/>
+                  </a:schemeClr>
+                </a:solidFill>
+              </a:rPr>
+              <a:t>    ID             string `</a:t>
+            </a:r>
+            <a:r>
+              <a:rPr sz="1600" dirty="0" err="1">
+                <a:solidFill>
+                  <a:schemeClr val="bg1">
+                    <a:lumMod val="95000"/>
+                  </a:schemeClr>
+                </a:solidFill>
+              </a:rPr>
+              <a:t>json</a:t>
+            </a:r>
+            <a:r>
+              <a:rPr sz="1600" dirty="0">
+                <a:solidFill>
+                  <a:schemeClr val="bg1">
+                    <a:lumMod val="95000"/>
+                  </a:schemeClr>
+                </a:solidFill>
+              </a:rPr>
+              <a:t>:"id"`</a:t>
+            </a:r>
+            <a:br>
+              <a:rPr sz="1600" dirty="0">
+                <a:solidFill>
+                  <a:schemeClr val="bg1">
+                    <a:lumMod val="95000"/>
+                  </a:schemeClr>
+                </a:solidFill>
+              </a:rPr>
+            </a:br>
+            <a:r>
+              <a:rPr sz="1600" dirty="0">
+                <a:solidFill>
+                  <a:schemeClr val="bg1">
+                    <a:lumMod val="95000"/>
+                  </a:schemeClr>
+                </a:solidFill>
+              </a:rPr>
+              <a:t>    Owner          string `</a:t>
+            </a:r>
+            <a:r>
+              <a:rPr sz="1600" dirty="0" err="1">
+                <a:solidFill>
+                  <a:schemeClr val="bg1">
+                    <a:lumMod val="95000"/>
+                  </a:schemeClr>
+                </a:solidFill>
+              </a:rPr>
+              <a:t>json</a:t>
+            </a:r>
+            <a:r>
+              <a:rPr sz="1600" dirty="0">
+                <a:solidFill>
+                  <a:schemeClr val="bg1">
+                    <a:lumMod val="95000"/>
+                  </a:schemeClr>
+                </a:solidFill>
+              </a:rPr>
+              <a:t>:"owner"`</a:t>
+            </a:r>
+            <a:br>
+              <a:rPr sz="1600" dirty="0">
+                <a:solidFill>
+                  <a:schemeClr val="bg1">
+                    <a:lumMod val="95000"/>
+                  </a:schemeClr>
+                </a:solidFill>
+              </a:rPr>
+            </a:br>
+            <a:r>
+              <a:rPr sz="1600" dirty="0">
+                <a:solidFill>
+                  <a:schemeClr val="bg1">
+                    <a:lumMod val="95000"/>
+                  </a:schemeClr>
+                </a:solidFill>
+              </a:rPr>
+              <a:t>    Address        string `</a:t>
+            </a:r>
+            <a:r>
+              <a:rPr sz="1600" dirty="0" err="1">
+                <a:solidFill>
+                  <a:schemeClr val="bg1">
+                    <a:lumMod val="95000"/>
+                  </a:schemeClr>
+                </a:solidFill>
+              </a:rPr>
+              <a:t>json</a:t>
+            </a:r>
+            <a:r>
+              <a:rPr sz="1600" dirty="0">
+                <a:solidFill>
+                  <a:schemeClr val="bg1">
+                    <a:lumMod val="95000"/>
+                  </a:schemeClr>
+                </a:solidFill>
+              </a:rPr>
+              <a:t>:"address"`</a:t>
+            </a:r>
+            <a:br>
+              <a:rPr sz="1600" dirty="0">
+                <a:solidFill>
+                  <a:schemeClr val="bg1">
+                    <a:lumMod val="95000"/>
+                  </a:schemeClr>
+                </a:solidFill>
+              </a:rPr>
+            </a:br>
+            <a:r>
+              <a:rPr sz="1600" dirty="0">
+                <a:solidFill>
+                  <a:schemeClr val="bg1">
+                    <a:lumMod val="95000"/>
+                  </a:schemeClr>
+                </a:solidFill>
+              </a:rPr>
+              <a:t>    </a:t>
+            </a:r>
+            <a:r>
+              <a:rPr sz="1600" dirty="0" err="1">
+                <a:solidFill>
+                  <a:schemeClr val="bg1">
+                    <a:lumMod val="95000"/>
+                  </a:schemeClr>
+                </a:solidFill>
+              </a:rPr>
+              <a:t>PropertyType</a:t>
+            </a:r>
+            <a:r>
+              <a:rPr sz="1600" dirty="0">
+                <a:solidFill>
+                  <a:schemeClr val="bg1">
+                    <a:lumMod val="95000"/>
+                  </a:schemeClr>
+                </a:solidFill>
+              </a:rPr>
+              <a:t>   string `</a:t>
+            </a:r>
+            <a:r>
+              <a:rPr sz="1600" dirty="0" err="1">
+                <a:solidFill>
+                  <a:schemeClr val="bg1">
+                    <a:lumMod val="95000"/>
+                  </a:schemeClr>
+                </a:solidFill>
+              </a:rPr>
+              <a:t>json</a:t>
+            </a:r>
+            <a:r>
+              <a:rPr sz="1600" dirty="0">
+                <a:solidFill>
+                  <a:schemeClr val="bg1">
+                    <a:lumMod val="95000"/>
+                  </a:schemeClr>
+                </a:solidFill>
+              </a:rPr>
+              <a:t>:"</a:t>
+            </a:r>
+            <a:r>
+              <a:rPr sz="1600" dirty="0" err="1">
+                <a:solidFill>
+                  <a:schemeClr val="bg1">
+                    <a:lumMod val="95000"/>
+                  </a:schemeClr>
+                </a:solidFill>
+              </a:rPr>
+              <a:t>propertyType</a:t>
+            </a:r>
+            <a:r>
+              <a:rPr sz="1600" dirty="0">
+                <a:solidFill>
+                  <a:schemeClr val="bg1">
+                    <a:lumMod val="95000"/>
+                  </a:schemeClr>
+                </a:solidFill>
+              </a:rPr>
+              <a:t>"`   // NUEVO</a:t>
+            </a:r>
+            <a:br>
+              <a:rPr sz="1600" dirty="0">
+                <a:solidFill>
+                  <a:schemeClr val="bg1">
+                    <a:lumMod val="95000"/>
+                  </a:schemeClr>
+                </a:solidFill>
+              </a:rPr>
+            </a:br>
+            <a:r>
+              <a:rPr sz="1600" dirty="0">
+                <a:solidFill>
+                  <a:schemeClr val="bg1">
+                    <a:lumMod val="95000"/>
+                  </a:schemeClr>
+                </a:solidFill>
+              </a:rPr>
+              <a:t>    </a:t>
+            </a:r>
+            <a:r>
+              <a:rPr sz="1600" dirty="0" err="1">
+                <a:solidFill>
+                  <a:schemeClr val="bg1">
+                    <a:lumMod val="95000"/>
+                  </a:schemeClr>
+                </a:solidFill>
+              </a:rPr>
+              <a:t>AppraisalValue</a:t>
+            </a:r>
+            <a:r>
+              <a:rPr sz="1600" dirty="0">
+                <a:solidFill>
+                  <a:schemeClr val="bg1">
+                    <a:lumMod val="95000"/>
+                  </a:schemeClr>
+                </a:solidFill>
+              </a:rPr>
+              <a:t> int    `</a:t>
+            </a:r>
+            <a:r>
+              <a:rPr sz="1600" dirty="0" err="1">
+                <a:solidFill>
+                  <a:schemeClr val="bg1">
+                    <a:lumMod val="95000"/>
+                  </a:schemeClr>
+                </a:solidFill>
+              </a:rPr>
+              <a:t>json</a:t>
+            </a:r>
+            <a:r>
+              <a:rPr sz="1600" dirty="0">
+                <a:solidFill>
+                  <a:schemeClr val="bg1">
+                    <a:lumMod val="95000"/>
+                  </a:schemeClr>
+                </a:solidFill>
+              </a:rPr>
+              <a:t>:"</a:t>
+            </a:r>
+            <a:r>
+              <a:rPr sz="1600" dirty="0" err="1">
+                <a:solidFill>
+                  <a:schemeClr val="bg1">
+                    <a:lumMod val="95000"/>
+                  </a:schemeClr>
+                </a:solidFill>
+              </a:rPr>
+              <a:t>appraisalValue</a:t>
+            </a:r>
+            <a:r>
+              <a:rPr sz="1600" dirty="0">
+                <a:solidFill>
+                  <a:schemeClr val="bg1">
+                    <a:lumMod val="95000"/>
+                  </a:schemeClr>
+                </a:solidFill>
+              </a:rPr>
+              <a:t>"` // NUEVO</a:t>
+            </a:r>
+            <a:br>
+              <a:rPr sz="1600" dirty="0">
+                <a:solidFill>
+                  <a:schemeClr val="bg1">
+                    <a:lumMod val="95000"/>
+                  </a:schemeClr>
+                </a:solidFill>
+              </a:rPr>
+            </a:br>
+            <a:r>
+              <a:rPr sz="1600" dirty="0">
+                <a:solidFill>
+                  <a:schemeClr val="bg1">
+                    <a:lumMod val="95000"/>
+                  </a:schemeClr>
+                </a:solidFill>
+              </a:rPr>
+              <a:t>    Version        int    `</a:t>
+            </a:r>
+            <a:r>
+              <a:rPr sz="1600" dirty="0" err="1">
+                <a:solidFill>
+                  <a:schemeClr val="bg1">
+                    <a:lumMod val="95000"/>
+                  </a:schemeClr>
+                </a:solidFill>
+              </a:rPr>
+              <a:t>json</a:t>
+            </a:r>
+            <a:r>
+              <a:rPr sz="1600" dirty="0">
+                <a:solidFill>
+                  <a:schemeClr val="bg1">
+                    <a:lumMod val="95000"/>
+                  </a:schemeClr>
+                </a:solidFill>
+              </a:rPr>
+              <a:t>:"version"`        // NUEVO: control de version</a:t>
+            </a:r>
+            <a:br>
+              <a:rPr sz="1600" dirty="0">
+                <a:solidFill>
+                  <a:schemeClr val="bg1">
+                    <a:lumMod val="95000"/>
+                  </a:schemeClr>
+                </a:solidFill>
+              </a:rPr>
+            </a:br>
+            <a:r>
+              <a:rPr sz="1600" dirty="0">
+                <a:solidFill>
+                  <a:schemeClr val="bg1">
+                    <a:lumMod val="95000"/>
+                  </a:schemeClr>
+                </a:solidFill>
+              </a:rPr>
               <a:t>}</a:t>
             </a:r>
-            <a:br/>
-            <a:br/>
-            <a:r>
+            <a:br>
+              <a:rPr sz="1600" dirty="0">
+                <a:solidFill>
+                  <a:schemeClr val="bg1">
+                    <a:lumMod val="95000"/>
+                  </a:schemeClr>
+                </a:solidFill>
+              </a:rPr>
+            </a:br>
+            <a:endParaRPr sz="1600" dirty="0">
+              <a:solidFill>
+                <a:schemeClr val="bg1">
+                  <a:lumMod val="95000"/>
+                </a:schemeClr>
+              </a:solidFill>
+            </a:endParaRPr>
+          </a:p>
+        </p:txBody>
+      </p:sp>
+      <p:sp>
+        <p:nvSpPr>
+          <p:cNvPr id="10" name="CuadroTexto 9">
+            <a:extLst>
+              <a:ext uri="{FF2B5EF4-FFF2-40B4-BE49-F238E27FC236}">
+                <a16:creationId xmlns:a16="http://schemas.microsoft.com/office/drawing/2014/main" id="{B39633C8-376A-3DE1-82A7-E7DE4C276564}"/>
+              </a:ext>
+            </a:extLst>
+          </p:cNvPr>
+          <p:cNvSpPr txBox="1"/>
+          <p:nvPr/>
+        </p:nvSpPr>
+        <p:spPr>
+          <a:xfrm>
+            <a:off x="6365659" y="1396133"/>
+            <a:ext cx="5091646" cy="4770537"/>
+          </a:xfrm>
+          <a:prstGeom prst="rect">
+            <a:avLst/>
+          </a:prstGeom>
+          <a:noFill/>
+        </p:spPr>
+        <p:txBody>
+          <a:bodyPr wrap="square">
+            <a:spAutoFit/>
+          </a:bodyPr>
+          <a:lstStyle/>
+          <a:p>
+            <a:br>
+              <a:rPr lang="es-ES" sz="1600" dirty="0">
+                <a:solidFill>
+                  <a:schemeClr val="bg1">
+                    <a:lumMod val="95000"/>
+                  </a:schemeClr>
+                </a:solidFill>
+              </a:rPr>
+            </a:br>
+            <a:r>
+              <a:rPr lang="es-ES" sz="1600" dirty="0">
+                <a:solidFill>
+                  <a:schemeClr val="bg1">
+                    <a:lumMod val="95000"/>
+                  </a:schemeClr>
+                </a:solidFill>
+              </a:rPr>
               <a:t>// Leer con compatibilidad: si faltan campos, aplicar defaults</a:t>
             </a:r>
-            <a:br/>
-            <a:r>
-              <a:t>func (s *SmartContract) ReadProperty(ctx ..., id string) (*PropertyV2, error) {</a:t>
-            </a:r>
-            <a:br/>
-            <a:r>
-              <a:t>    data, _ := ctx.GetStub().GetState(id)</a:t>
-            </a:r>
-            <a:br/>
-            <a:r>
-              <a:t>    var prop PropertyV2</a:t>
-            </a:r>
-            <a:br/>
-            <a:r>
-              <a:t>    json.Unmarshal(data, &amp;prop)</a:t>
-            </a:r>
-            <a:br/>
-            <a:br/>
-            <a:r>
-              <a:t>    // Migracion lazy: si es version antigua, aplicar defaults</a:t>
-            </a:r>
-            <a:br/>
-            <a:r>
-              <a:t>    if prop.Version &lt; 2 {</a:t>
-            </a:r>
-            <a:br/>
-            <a:r>
-              <a:t>        if prop.PropertyType == "" { prop.PropertyType = "unknown" }</a:t>
-            </a:r>
-            <a:br/>
-            <a:r>
-              <a:t>        prop.Version = 2</a:t>
-            </a:r>
-            <a:br/>
-            <a:r>
-              <a:t>        // Guardar migrado (opcional: hacerlo on-read o con funcion de migracion)</a:t>
-            </a:r>
-            <a:br/>
-            <a:r>
+            <a:br>
+              <a:rPr lang="es-ES" sz="1600" dirty="0">
+                <a:solidFill>
+                  <a:schemeClr val="bg1">
+                    <a:lumMod val="95000"/>
+                  </a:schemeClr>
+                </a:solidFill>
+              </a:rPr>
+            </a:br>
+            <a:r>
+              <a:rPr lang="es-ES" sz="1600" dirty="0" err="1">
+                <a:solidFill>
+                  <a:schemeClr val="bg1">
+                    <a:lumMod val="95000"/>
+                  </a:schemeClr>
+                </a:solidFill>
+              </a:rPr>
+              <a:t>func</a:t>
+            </a:r>
+            <a:r>
+              <a:rPr lang="es-ES" sz="1600" dirty="0">
+                <a:solidFill>
+                  <a:schemeClr val="bg1">
+                    <a:lumMod val="95000"/>
+                  </a:schemeClr>
+                </a:solidFill>
+              </a:rPr>
+              <a:t> (s *</a:t>
+            </a:r>
+            <a:r>
+              <a:rPr lang="es-ES" sz="1600" dirty="0" err="1">
+                <a:solidFill>
+                  <a:schemeClr val="bg1">
+                    <a:lumMod val="95000"/>
+                  </a:schemeClr>
+                </a:solidFill>
+              </a:rPr>
+              <a:t>SmartContract</a:t>
+            </a:r>
+            <a:r>
+              <a:rPr lang="es-ES" sz="1600" dirty="0">
+                <a:solidFill>
+                  <a:schemeClr val="bg1">
+                    <a:lumMod val="95000"/>
+                  </a:schemeClr>
+                </a:solidFill>
+              </a:rPr>
+              <a:t>) </a:t>
+            </a:r>
+            <a:r>
+              <a:rPr lang="es-ES" sz="1600" dirty="0" err="1">
+                <a:solidFill>
+                  <a:schemeClr val="bg1">
+                    <a:lumMod val="95000"/>
+                  </a:schemeClr>
+                </a:solidFill>
+              </a:rPr>
+              <a:t>ReadProperty</a:t>
+            </a:r>
+            <a:r>
+              <a:rPr lang="es-ES" sz="1600" dirty="0">
+                <a:solidFill>
+                  <a:schemeClr val="bg1">
+                    <a:lumMod val="95000"/>
+                  </a:schemeClr>
+                </a:solidFill>
+              </a:rPr>
+              <a:t>(</a:t>
+            </a:r>
+            <a:r>
+              <a:rPr lang="es-ES" sz="1600" dirty="0" err="1">
+                <a:solidFill>
+                  <a:schemeClr val="bg1">
+                    <a:lumMod val="95000"/>
+                  </a:schemeClr>
+                </a:solidFill>
+              </a:rPr>
+              <a:t>ctx</a:t>
+            </a:r>
+            <a:r>
+              <a:rPr lang="es-ES" sz="1600" dirty="0">
+                <a:solidFill>
+                  <a:schemeClr val="bg1">
+                    <a:lumMod val="95000"/>
+                  </a:schemeClr>
+                </a:solidFill>
+              </a:rPr>
+              <a:t> ..., id </a:t>
+            </a:r>
+            <a:r>
+              <a:rPr lang="es-ES" sz="1600" dirty="0" err="1">
+                <a:solidFill>
+                  <a:schemeClr val="bg1">
+                    <a:lumMod val="95000"/>
+                  </a:schemeClr>
+                </a:solidFill>
+              </a:rPr>
+              <a:t>string</a:t>
+            </a:r>
+            <a:r>
+              <a:rPr lang="es-ES" sz="1600" dirty="0">
+                <a:solidFill>
+                  <a:schemeClr val="bg1">
+                    <a:lumMod val="95000"/>
+                  </a:schemeClr>
+                </a:solidFill>
+              </a:rPr>
+              <a:t>) (*PropertyV2, error) {</a:t>
+            </a:r>
+            <a:br>
+              <a:rPr lang="es-ES" sz="1600" dirty="0">
+                <a:solidFill>
+                  <a:schemeClr val="bg1">
+                    <a:lumMod val="95000"/>
+                  </a:schemeClr>
+                </a:solidFill>
+              </a:rPr>
+            </a:br>
+            <a:r>
+              <a:rPr lang="es-ES" sz="1600" dirty="0">
+                <a:solidFill>
+                  <a:schemeClr val="bg1">
+                    <a:lumMod val="95000"/>
+                  </a:schemeClr>
+                </a:solidFill>
+              </a:rPr>
+              <a:t>    data, _ := </a:t>
+            </a:r>
+            <a:r>
+              <a:rPr lang="es-ES" sz="1600" dirty="0" err="1">
+                <a:solidFill>
+                  <a:schemeClr val="bg1">
+                    <a:lumMod val="95000"/>
+                  </a:schemeClr>
+                </a:solidFill>
+              </a:rPr>
+              <a:t>ctx.GetStub</a:t>
+            </a:r>
+            <a:r>
+              <a:rPr lang="es-ES" sz="1600" dirty="0">
+                <a:solidFill>
+                  <a:schemeClr val="bg1">
+                    <a:lumMod val="95000"/>
+                  </a:schemeClr>
+                </a:solidFill>
+              </a:rPr>
+              <a:t>().</a:t>
+            </a:r>
+            <a:r>
+              <a:rPr lang="es-ES" sz="1600" dirty="0" err="1">
+                <a:solidFill>
+                  <a:schemeClr val="bg1">
+                    <a:lumMod val="95000"/>
+                  </a:schemeClr>
+                </a:solidFill>
+              </a:rPr>
+              <a:t>GetState</a:t>
+            </a:r>
+            <a:r>
+              <a:rPr lang="es-ES" sz="1600" dirty="0">
+                <a:solidFill>
+                  <a:schemeClr val="bg1">
+                    <a:lumMod val="95000"/>
+                  </a:schemeClr>
+                </a:solidFill>
+              </a:rPr>
+              <a:t>(id)</a:t>
+            </a:r>
+            <a:br>
+              <a:rPr lang="es-ES" sz="1600" dirty="0">
+                <a:solidFill>
+                  <a:schemeClr val="bg1">
+                    <a:lumMod val="95000"/>
+                  </a:schemeClr>
+                </a:solidFill>
+              </a:rPr>
+            </a:br>
+            <a:r>
+              <a:rPr lang="es-ES" sz="1600" dirty="0">
+                <a:solidFill>
+                  <a:schemeClr val="bg1">
+                    <a:lumMod val="95000"/>
+                  </a:schemeClr>
+                </a:solidFill>
+              </a:rPr>
+              <a:t>    </a:t>
+            </a:r>
+            <a:r>
+              <a:rPr lang="es-ES" sz="1600" dirty="0" err="1">
+                <a:solidFill>
+                  <a:schemeClr val="bg1">
+                    <a:lumMod val="95000"/>
+                  </a:schemeClr>
+                </a:solidFill>
+              </a:rPr>
+              <a:t>var</a:t>
+            </a:r>
+            <a:r>
+              <a:rPr lang="es-ES" sz="1600" dirty="0">
+                <a:solidFill>
+                  <a:schemeClr val="bg1">
+                    <a:lumMod val="95000"/>
+                  </a:schemeClr>
+                </a:solidFill>
+              </a:rPr>
+              <a:t> </a:t>
+            </a:r>
+            <a:r>
+              <a:rPr lang="es-ES" sz="1600" dirty="0" err="1">
+                <a:solidFill>
+                  <a:schemeClr val="bg1">
+                    <a:lumMod val="95000"/>
+                  </a:schemeClr>
+                </a:solidFill>
+              </a:rPr>
+              <a:t>prop</a:t>
+            </a:r>
+            <a:r>
+              <a:rPr lang="es-ES" sz="1600" dirty="0">
+                <a:solidFill>
+                  <a:schemeClr val="bg1">
+                    <a:lumMod val="95000"/>
+                  </a:schemeClr>
+                </a:solidFill>
+              </a:rPr>
+              <a:t> PropertyV2</a:t>
+            </a:r>
+            <a:br>
+              <a:rPr lang="es-ES" sz="1600" dirty="0">
+                <a:solidFill>
+                  <a:schemeClr val="bg1">
+                    <a:lumMod val="95000"/>
+                  </a:schemeClr>
+                </a:solidFill>
+              </a:rPr>
+            </a:br>
+            <a:r>
+              <a:rPr lang="es-ES" sz="1600" dirty="0">
+                <a:solidFill>
+                  <a:schemeClr val="bg1">
+                    <a:lumMod val="95000"/>
+                  </a:schemeClr>
+                </a:solidFill>
+              </a:rPr>
+              <a:t>    </a:t>
+            </a:r>
+            <a:r>
+              <a:rPr lang="es-ES" sz="1600" dirty="0" err="1">
+                <a:solidFill>
+                  <a:schemeClr val="bg1">
+                    <a:lumMod val="95000"/>
+                  </a:schemeClr>
+                </a:solidFill>
+              </a:rPr>
+              <a:t>json.Unmarshal</a:t>
+            </a:r>
+            <a:r>
+              <a:rPr lang="es-ES" sz="1600" dirty="0">
+                <a:solidFill>
+                  <a:schemeClr val="bg1">
+                    <a:lumMod val="95000"/>
+                  </a:schemeClr>
+                </a:solidFill>
+              </a:rPr>
+              <a:t>(data, &amp;</a:t>
+            </a:r>
+            <a:r>
+              <a:rPr lang="es-ES" sz="1600" dirty="0" err="1">
+                <a:solidFill>
+                  <a:schemeClr val="bg1">
+                    <a:lumMod val="95000"/>
+                  </a:schemeClr>
+                </a:solidFill>
+              </a:rPr>
+              <a:t>prop</a:t>
+            </a:r>
+            <a:r>
+              <a:rPr lang="es-ES" sz="1600" dirty="0">
+                <a:solidFill>
+                  <a:schemeClr val="bg1">
+                    <a:lumMod val="95000"/>
+                  </a:schemeClr>
+                </a:solidFill>
+              </a:rPr>
+              <a:t>)</a:t>
+            </a:r>
+            <a:br>
+              <a:rPr lang="es-ES" sz="1600" dirty="0">
+                <a:solidFill>
+                  <a:schemeClr val="bg1">
+                    <a:lumMod val="95000"/>
+                  </a:schemeClr>
+                </a:solidFill>
+              </a:rPr>
+            </a:br>
+            <a:br>
+              <a:rPr lang="es-ES" sz="1600" dirty="0">
+                <a:solidFill>
+                  <a:schemeClr val="bg1">
+                    <a:lumMod val="95000"/>
+                  </a:schemeClr>
+                </a:solidFill>
+              </a:rPr>
+            </a:br>
+            <a:r>
+              <a:rPr lang="es-ES" sz="1600" dirty="0">
+                <a:solidFill>
+                  <a:schemeClr val="bg1">
+                    <a:lumMod val="95000"/>
+                  </a:schemeClr>
+                </a:solidFill>
+              </a:rPr>
+              <a:t>    // </a:t>
+            </a:r>
+            <a:r>
+              <a:rPr lang="es-ES" sz="1600" dirty="0" err="1">
+                <a:solidFill>
+                  <a:schemeClr val="bg1">
+                    <a:lumMod val="95000"/>
+                  </a:schemeClr>
+                </a:solidFill>
+              </a:rPr>
+              <a:t>Migracion</a:t>
+            </a:r>
+            <a:r>
+              <a:rPr lang="es-ES" sz="1600" dirty="0">
+                <a:solidFill>
+                  <a:schemeClr val="bg1">
+                    <a:lumMod val="95000"/>
+                  </a:schemeClr>
+                </a:solidFill>
+              </a:rPr>
+              <a:t> </a:t>
+            </a:r>
+            <a:r>
+              <a:rPr lang="es-ES" sz="1600" dirty="0" err="1">
+                <a:solidFill>
+                  <a:schemeClr val="bg1">
+                    <a:lumMod val="95000"/>
+                  </a:schemeClr>
+                </a:solidFill>
+              </a:rPr>
+              <a:t>lazy</a:t>
+            </a:r>
+            <a:r>
+              <a:rPr lang="es-ES" sz="1600" dirty="0">
+                <a:solidFill>
+                  <a:schemeClr val="bg1">
+                    <a:lumMod val="95000"/>
+                  </a:schemeClr>
+                </a:solidFill>
+              </a:rPr>
+              <a:t>: si es </a:t>
+            </a:r>
+            <a:r>
+              <a:rPr lang="es-ES" sz="1600" dirty="0" err="1">
+                <a:solidFill>
+                  <a:schemeClr val="bg1">
+                    <a:lumMod val="95000"/>
+                  </a:schemeClr>
+                </a:solidFill>
+              </a:rPr>
+              <a:t>version</a:t>
+            </a:r>
+            <a:r>
+              <a:rPr lang="es-ES" sz="1600" dirty="0">
+                <a:solidFill>
+                  <a:schemeClr val="bg1">
+                    <a:lumMod val="95000"/>
+                  </a:schemeClr>
+                </a:solidFill>
+              </a:rPr>
+              <a:t> antigua, aplicar defaults</a:t>
+            </a:r>
+            <a:br>
+              <a:rPr lang="es-ES" sz="1600" dirty="0">
+                <a:solidFill>
+                  <a:schemeClr val="bg1">
+                    <a:lumMod val="95000"/>
+                  </a:schemeClr>
+                </a:solidFill>
+              </a:rPr>
+            </a:br>
+            <a:r>
+              <a:rPr lang="es-ES" sz="1600" dirty="0">
+                <a:solidFill>
+                  <a:schemeClr val="bg1">
+                    <a:lumMod val="95000"/>
+                  </a:schemeClr>
+                </a:solidFill>
+              </a:rPr>
+              <a:t>    </a:t>
+            </a:r>
+            <a:r>
+              <a:rPr lang="es-ES" sz="1600" dirty="0" err="1">
+                <a:solidFill>
+                  <a:schemeClr val="bg1">
+                    <a:lumMod val="95000"/>
+                  </a:schemeClr>
+                </a:solidFill>
+              </a:rPr>
+              <a:t>if</a:t>
+            </a:r>
+            <a:r>
+              <a:rPr lang="es-ES" sz="1600" dirty="0">
+                <a:solidFill>
+                  <a:schemeClr val="bg1">
+                    <a:lumMod val="95000"/>
+                  </a:schemeClr>
+                </a:solidFill>
+              </a:rPr>
+              <a:t> </a:t>
+            </a:r>
+            <a:r>
+              <a:rPr lang="es-ES" sz="1600" dirty="0" err="1">
+                <a:solidFill>
+                  <a:schemeClr val="bg1">
+                    <a:lumMod val="95000"/>
+                  </a:schemeClr>
+                </a:solidFill>
+              </a:rPr>
+              <a:t>prop.Version</a:t>
+            </a:r>
+            <a:r>
+              <a:rPr lang="es-ES" sz="1600" dirty="0">
+                <a:solidFill>
+                  <a:schemeClr val="bg1">
+                    <a:lumMod val="95000"/>
+                  </a:schemeClr>
+                </a:solidFill>
+              </a:rPr>
+              <a:t> &lt; 2 {</a:t>
+            </a:r>
+            <a:br>
+              <a:rPr lang="es-ES" sz="1600" dirty="0">
+                <a:solidFill>
+                  <a:schemeClr val="bg1">
+                    <a:lumMod val="95000"/>
+                  </a:schemeClr>
+                </a:solidFill>
+              </a:rPr>
+            </a:br>
+            <a:r>
+              <a:rPr lang="es-ES" sz="1600" dirty="0">
+                <a:solidFill>
+                  <a:schemeClr val="bg1">
+                    <a:lumMod val="95000"/>
+                  </a:schemeClr>
+                </a:solidFill>
+              </a:rPr>
+              <a:t>        </a:t>
+            </a:r>
+            <a:r>
+              <a:rPr lang="es-ES" sz="1600" dirty="0" err="1">
+                <a:solidFill>
+                  <a:schemeClr val="bg1">
+                    <a:lumMod val="95000"/>
+                  </a:schemeClr>
+                </a:solidFill>
+              </a:rPr>
+              <a:t>if</a:t>
+            </a:r>
+            <a:r>
+              <a:rPr lang="es-ES" sz="1600" dirty="0">
+                <a:solidFill>
+                  <a:schemeClr val="bg1">
+                    <a:lumMod val="95000"/>
+                  </a:schemeClr>
+                </a:solidFill>
+              </a:rPr>
+              <a:t> </a:t>
+            </a:r>
+            <a:r>
+              <a:rPr lang="es-ES" sz="1600" dirty="0" err="1">
+                <a:solidFill>
+                  <a:schemeClr val="bg1">
+                    <a:lumMod val="95000"/>
+                  </a:schemeClr>
+                </a:solidFill>
+              </a:rPr>
+              <a:t>prop.PropertyType</a:t>
+            </a:r>
+            <a:r>
+              <a:rPr lang="es-ES" sz="1600" dirty="0">
+                <a:solidFill>
+                  <a:schemeClr val="bg1">
+                    <a:lumMod val="95000"/>
+                  </a:schemeClr>
+                </a:solidFill>
+              </a:rPr>
+              <a:t> == "" { </a:t>
+            </a:r>
+            <a:r>
+              <a:rPr lang="es-ES" sz="1600" dirty="0" err="1">
+                <a:solidFill>
+                  <a:schemeClr val="bg1">
+                    <a:lumMod val="95000"/>
+                  </a:schemeClr>
+                </a:solidFill>
+              </a:rPr>
+              <a:t>prop.PropertyType</a:t>
+            </a:r>
+            <a:r>
+              <a:rPr lang="es-ES" sz="1600" dirty="0">
+                <a:solidFill>
+                  <a:schemeClr val="bg1">
+                    <a:lumMod val="95000"/>
+                  </a:schemeClr>
+                </a:solidFill>
+              </a:rPr>
+              <a:t> = "</a:t>
+            </a:r>
+            <a:r>
+              <a:rPr lang="es-ES" sz="1600" dirty="0" err="1">
+                <a:solidFill>
+                  <a:schemeClr val="bg1">
+                    <a:lumMod val="95000"/>
+                  </a:schemeClr>
+                </a:solidFill>
+              </a:rPr>
+              <a:t>unknown</a:t>
+            </a:r>
+            <a:r>
+              <a:rPr lang="es-ES" sz="1600" dirty="0">
+                <a:solidFill>
+                  <a:schemeClr val="bg1">
+                    <a:lumMod val="95000"/>
+                  </a:schemeClr>
+                </a:solidFill>
+              </a:rPr>
+              <a:t>" }</a:t>
+            </a:r>
+            <a:br>
+              <a:rPr lang="es-ES" sz="1600" dirty="0">
+                <a:solidFill>
+                  <a:schemeClr val="bg1">
+                    <a:lumMod val="95000"/>
+                  </a:schemeClr>
+                </a:solidFill>
+              </a:rPr>
+            </a:br>
+            <a:r>
+              <a:rPr lang="es-ES" sz="1600" dirty="0">
+                <a:solidFill>
+                  <a:schemeClr val="bg1">
+                    <a:lumMod val="95000"/>
+                  </a:schemeClr>
+                </a:solidFill>
+              </a:rPr>
+              <a:t>        </a:t>
+            </a:r>
+            <a:r>
+              <a:rPr lang="es-ES" sz="1600" dirty="0" err="1">
+                <a:solidFill>
+                  <a:schemeClr val="bg1">
+                    <a:lumMod val="95000"/>
+                  </a:schemeClr>
+                </a:solidFill>
+              </a:rPr>
+              <a:t>prop.Version</a:t>
+            </a:r>
+            <a:r>
+              <a:rPr lang="es-ES" sz="1600" dirty="0">
+                <a:solidFill>
+                  <a:schemeClr val="bg1">
+                    <a:lumMod val="95000"/>
+                  </a:schemeClr>
+                </a:solidFill>
+              </a:rPr>
+              <a:t> = 2</a:t>
+            </a:r>
+            <a:br>
+              <a:rPr lang="es-ES" sz="1600" dirty="0">
+                <a:solidFill>
+                  <a:schemeClr val="bg1">
+                    <a:lumMod val="95000"/>
+                  </a:schemeClr>
+                </a:solidFill>
+              </a:rPr>
+            </a:br>
+            <a:r>
+              <a:rPr lang="es-ES" sz="1600" dirty="0">
+                <a:solidFill>
+                  <a:schemeClr val="bg1">
+                    <a:lumMod val="95000"/>
+                  </a:schemeClr>
+                </a:solidFill>
+              </a:rPr>
+              <a:t>        // Guardar migrado (opcional: hacerlo </a:t>
+            </a:r>
+            <a:r>
+              <a:rPr lang="es-ES" sz="1600" dirty="0" err="1">
+                <a:solidFill>
+                  <a:schemeClr val="bg1">
+                    <a:lumMod val="95000"/>
+                  </a:schemeClr>
+                </a:solidFill>
+              </a:rPr>
+              <a:t>on-read</a:t>
+            </a:r>
+            <a:r>
+              <a:rPr lang="es-ES" sz="1600" dirty="0">
+                <a:solidFill>
+                  <a:schemeClr val="bg1">
+                    <a:lumMod val="95000"/>
+                  </a:schemeClr>
+                </a:solidFill>
+              </a:rPr>
+              <a:t> o con </a:t>
+            </a:r>
+            <a:r>
+              <a:rPr lang="es-ES" sz="1600" dirty="0" err="1">
+                <a:solidFill>
+                  <a:schemeClr val="bg1">
+                    <a:lumMod val="95000"/>
+                  </a:schemeClr>
+                </a:solidFill>
+              </a:rPr>
+              <a:t>funcion</a:t>
+            </a:r>
+            <a:r>
+              <a:rPr lang="es-ES" sz="1600" dirty="0">
+                <a:solidFill>
+                  <a:schemeClr val="bg1">
+                    <a:lumMod val="95000"/>
+                  </a:schemeClr>
+                </a:solidFill>
+              </a:rPr>
+              <a:t> de </a:t>
+            </a:r>
+            <a:r>
+              <a:rPr lang="es-ES" sz="1600" dirty="0" err="1">
+                <a:solidFill>
+                  <a:schemeClr val="bg1">
+                    <a:lumMod val="95000"/>
+                  </a:schemeClr>
+                </a:solidFill>
+              </a:rPr>
+              <a:t>migracion</a:t>
+            </a:r>
+            <a:r>
+              <a:rPr lang="es-ES" sz="1600" dirty="0">
+                <a:solidFill>
+                  <a:schemeClr val="bg1">
+                    <a:lumMod val="95000"/>
+                  </a:schemeClr>
+                </a:solidFill>
+              </a:rPr>
+              <a:t>)</a:t>
+            </a:r>
+            <a:br>
+              <a:rPr lang="es-ES" sz="1600" dirty="0">
+                <a:solidFill>
+                  <a:schemeClr val="bg1">
+                    <a:lumMod val="95000"/>
+                  </a:schemeClr>
+                </a:solidFill>
+              </a:rPr>
+            </a:br>
+            <a:r>
+              <a:rPr lang="es-ES" sz="1600" dirty="0">
+                <a:solidFill>
+                  <a:schemeClr val="bg1">
+                    <a:lumMod val="95000"/>
+                  </a:schemeClr>
+                </a:solidFill>
+              </a:rPr>
               <a:t>    }</a:t>
             </a:r>
-            <a:br/>
-            <a:r>
-              <a:t>    return &amp;prop, nil</a:t>
-            </a:r>
-            <a:br/>
-            <a:r>
+            <a:br>
+              <a:rPr lang="es-ES" sz="1600" dirty="0">
+                <a:solidFill>
+                  <a:schemeClr val="bg1">
+                    <a:lumMod val="95000"/>
+                  </a:schemeClr>
+                </a:solidFill>
+              </a:rPr>
+            </a:br>
+            <a:r>
+              <a:rPr lang="es-ES" sz="1600" dirty="0">
+                <a:solidFill>
+                  <a:schemeClr val="bg1">
+                    <a:lumMod val="95000"/>
+                  </a:schemeClr>
+                </a:solidFill>
+              </a:rPr>
+              <a:t>    </a:t>
+            </a:r>
+            <a:r>
+              <a:rPr lang="es-ES" sz="1600" dirty="0" err="1">
+                <a:solidFill>
+                  <a:schemeClr val="bg1">
+                    <a:lumMod val="95000"/>
+                  </a:schemeClr>
+                </a:solidFill>
+              </a:rPr>
+              <a:t>return</a:t>
+            </a:r>
+            <a:r>
+              <a:rPr lang="es-ES" sz="1600" dirty="0">
+                <a:solidFill>
+                  <a:schemeClr val="bg1">
+                    <a:lumMod val="95000"/>
+                  </a:schemeClr>
+                </a:solidFill>
+              </a:rPr>
+              <a:t> &amp;</a:t>
+            </a:r>
+            <a:r>
+              <a:rPr lang="es-ES" sz="1600" dirty="0" err="1">
+                <a:solidFill>
+                  <a:schemeClr val="bg1">
+                    <a:lumMod val="95000"/>
+                  </a:schemeClr>
+                </a:solidFill>
+              </a:rPr>
+              <a:t>prop</a:t>
+            </a:r>
+            <a:r>
+              <a:rPr lang="es-ES" sz="1600" dirty="0">
+                <a:solidFill>
+                  <a:schemeClr val="bg1">
+                    <a:lumMod val="95000"/>
+                  </a:schemeClr>
+                </a:solidFill>
+              </a:rPr>
+              <a:t>, </a:t>
+            </a:r>
+            <a:r>
+              <a:rPr lang="es-ES" sz="1600" dirty="0" err="1">
+                <a:solidFill>
+                  <a:schemeClr val="bg1">
+                    <a:lumMod val="95000"/>
+                  </a:schemeClr>
+                </a:solidFill>
+              </a:rPr>
+              <a:t>nil</a:t>
+            </a:r>
+            <a:br>
+              <a:rPr lang="es-ES" sz="1600" dirty="0">
+                <a:solidFill>
+                  <a:schemeClr val="bg1">
+                    <a:lumMod val="95000"/>
+                  </a:schemeClr>
+                </a:solidFill>
+              </a:rPr>
+            </a:br>
+            <a:r>
+              <a:rPr lang="es-ES" sz="1600" dirty="0">
+                <a:solidFill>
+                  <a:schemeClr val="bg1">
+                    <a:lumMod val="95000"/>
+                  </a:schemeClr>
+                </a:solidFill>
+              </a:rPr>
               <a:t>}</a:t>
             </a:r>
+            <a:endParaRPr lang="es-ES" sz="1600" dirty="0"/>
+          </a:p>
+        </p:txBody>
+      </p:sp>
+      <p:sp>
+        <p:nvSpPr>
+          <p:cNvPr id="11" name="Rectángulo 10">
+            <a:extLst>
+              <a:ext uri="{FF2B5EF4-FFF2-40B4-BE49-F238E27FC236}">
+                <a16:creationId xmlns:a16="http://schemas.microsoft.com/office/drawing/2014/main" id="{5EF529DB-AD16-4D45-E2A2-21D5DD93D4F0}"/>
+              </a:ext>
+            </a:extLst>
+          </p:cNvPr>
+          <p:cNvSpPr/>
+          <p:nvPr/>
+        </p:nvSpPr>
+        <p:spPr>
+          <a:xfrm>
+            <a:off x="5943600" y="1417320"/>
+            <a:ext cx="45719" cy="5120640"/>
+          </a:xfrm>
+          <a:prstGeom prst="rect">
+            <a:avLst/>
+          </a:prstGeom>
+        </p:spPr>
+        <p:style>
+          <a:lnRef idx="1">
+            <a:schemeClr val="accent1"/>
+          </a:lnRef>
+          <a:fillRef idx="3">
+            <a:schemeClr val="accent1"/>
+          </a:fillRef>
+          <a:effectRef idx="2">
+            <a:schemeClr val="accent1"/>
+          </a:effectRef>
+          <a:fontRef idx="minor">
+            <a:schemeClr val="lt1"/>
+          </a:fontRef>
+        </p:style>
+        <p:txBody>
+          <a:bodyPr rtlCol="0" anchor="ctr"/>
+          <a:lstStyle/>
+          <a:p>
+            <a:pPr algn="ctr"/>
+            <a:endParaRPr lang="es-ES"/>
           </a:p>
         </p:txBody>
       </p:sp>
@@ -5579,7 +8093,7 @@
 </file>
 
 <file path=ppt/slides/slide18.xml><?xml version="1.0" encoding="utf-8"?>
-<p:sld xmlns:a="http://schemas.openxmlformats.org/drawingml/2006/main" xmlns:p="http://schemas.openxmlformats.org/presentationml/2006/main" xmlns:r="http://schemas.openxmlformats.org/officeDocument/2006/relationships">
+<p:sld xmlns:a="http://schemas.openxmlformats.org/drawingml/2006/main" xmlns:r="http://schemas.openxmlformats.org/officeDocument/2006/relationships" xmlns:p="http://schemas.openxmlformats.org/presentationml/2006/main">
   <p:cSld>
     <p:spTree>
       <p:nvGrpSpPr>
@@ -5587,7 +8101,14 @@
         <p:cNvGrpSpPr/>
         <p:nvPr/>
       </p:nvGrpSpPr>
-      <p:grpSpPr/>
+      <p:grpSpPr>
+        <a:xfrm>
+          <a:off x="0" y="0"/>
+          <a:ext cx="0" cy="0"/>
+          <a:chOff x="0" y="0"/>
+          <a:chExt cx="0" cy="0"/>
+        </a:xfrm>
+      </p:grpSpPr>
       <p:sp>
         <p:nvSpPr>
           <p:cNvPr id="2" name="Rectangle 1"/>
@@ -5628,6 +8149,7 @@
           <a:lstStyle/>
           <a:p>
             <a:pPr algn="ctr"/>
+            <a:endParaRPr/>
           </a:p>
         </p:txBody>
       </p:sp>
@@ -5705,6 +8227,7 @@
           <a:lstStyle/>
           <a:p>
             <a:pPr algn="ctr"/>
+            <a:endParaRPr/>
           </a:p>
         </p:txBody>
       </p:sp>
@@ -5900,7 +8423,7 @@
 </file>
 
 <file path=ppt/slides/slide19.xml><?xml version="1.0" encoding="utf-8"?>
-<p:sld xmlns:a="http://schemas.openxmlformats.org/drawingml/2006/main" xmlns:p="http://schemas.openxmlformats.org/presentationml/2006/main" xmlns:r="http://schemas.openxmlformats.org/officeDocument/2006/relationships">
+<p:sld xmlns:a="http://schemas.openxmlformats.org/drawingml/2006/main" xmlns:r="http://schemas.openxmlformats.org/officeDocument/2006/relationships" xmlns:p="http://schemas.openxmlformats.org/presentationml/2006/main">
   <p:cSld>
     <p:spTree>
       <p:nvGrpSpPr>
@@ -5908,7 +8431,14 @@
         <p:cNvGrpSpPr/>
         <p:nvPr/>
       </p:nvGrpSpPr>
-      <p:grpSpPr/>
+      <p:grpSpPr>
+        <a:xfrm>
+          <a:off x="0" y="0"/>
+          <a:ext cx="0" cy="0"/>
+          <a:chOff x="0" y="0"/>
+          <a:chExt cx="0" cy="0"/>
+        </a:xfrm>
+      </p:grpSpPr>
       <p:sp>
         <p:nvSpPr>
           <p:cNvPr id="2" name="Rectangle 1"/>
@@ -5949,6 +8479,7 @@
           <a:lstStyle/>
           <a:p>
             <a:pPr algn="ctr"/>
+            <a:endParaRPr/>
           </a:p>
         </p:txBody>
       </p:sp>
@@ -5992,6 +8523,7 @@
           <a:lstStyle/>
           <a:p>
             <a:pPr algn="ctr"/>
+            <a:endParaRPr/>
           </a:p>
         </p:txBody>
       </p:sp>
@@ -6103,6 +8635,7 @@
           <a:lstStyle/>
           <a:p>
             <a:pPr algn="ctr"/>
+            <a:endParaRPr/>
           </a:p>
         </p:txBody>
       </p:sp>
@@ -6155,6 +8688,7 @@
                 <a:latin typeface="Calibri"/>
               </a:defRPr>
             </a:pPr>
+            <a:endParaRPr/>
           </a:p>
           <a:p>
             <a:pPr>
@@ -6312,6 +8846,7 @@
                 <a:latin typeface="Calibri"/>
               </a:defRPr>
             </a:pPr>
+            <a:endParaRPr/>
           </a:p>
           <a:p>
             <a:pPr>
@@ -6372,7 +8907,7 @@
 </file>
 
 <file path=ppt/slides/slide2.xml><?xml version="1.0" encoding="utf-8"?>
-<p:sld xmlns:a="http://schemas.openxmlformats.org/drawingml/2006/main" xmlns:p="http://schemas.openxmlformats.org/presentationml/2006/main" xmlns:r="http://schemas.openxmlformats.org/officeDocument/2006/relationships">
+<p:sld xmlns:a="http://schemas.openxmlformats.org/drawingml/2006/main" xmlns:r="http://schemas.openxmlformats.org/officeDocument/2006/relationships" xmlns:p="http://schemas.openxmlformats.org/presentationml/2006/main">
   <p:cSld>
     <p:spTree>
       <p:nvGrpSpPr>
@@ -6380,7 +8915,14 @@
         <p:cNvGrpSpPr/>
         <p:nvPr/>
       </p:nvGrpSpPr>
-      <p:grpSpPr/>
+      <p:grpSpPr>
+        <a:xfrm>
+          <a:off x="0" y="0"/>
+          <a:ext cx="0" cy="0"/>
+          <a:chOff x="0" y="0"/>
+          <a:chExt cx="0" cy="0"/>
+        </a:xfrm>
+      </p:grpSpPr>
       <p:sp>
         <p:nvSpPr>
           <p:cNvPr id="2" name="Rectangle 1"/>
@@ -6421,6 +8963,7 @@
           <a:lstStyle/>
           <a:p>
             <a:pPr algn="ctr"/>
+            <a:endParaRPr/>
           </a:p>
         </p:txBody>
       </p:sp>
@@ -6498,6 +9041,7 @@
           <a:lstStyle/>
           <a:p>
             <a:pPr algn="ctr"/>
+            <a:endParaRPr/>
           </a:p>
         </p:txBody>
       </p:sp>
@@ -6597,7 +9141,7 @@
 </file>
 
 <file path=ppt/slides/slide20.xml><?xml version="1.0" encoding="utf-8"?>
-<p:sld xmlns:a="http://schemas.openxmlformats.org/drawingml/2006/main" xmlns:p="http://schemas.openxmlformats.org/presentationml/2006/main" xmlns:r="http://schemas.openxmlformats.org/officeDocument/2006/relationships">
+<p:sld xmlns:a="http://schemas.openxmlformats.org/drawingml/2006/main" xmlns:r="http://schemas.openxmlformats.org/officeDocument/2006/relationships" xmlns:p="http://schemas.openxmlformats.org/presentationml/2006/main">
   <p:cSld>
     <p:spTree>
       <p:nvGrpSpPr>
@@ -6605,7 +9149,14 @@
         <p:cNvGrpSpPr/>
         <p:nvPr/>
       </p:nvGrpSpPr>
-      <p:grpSpPr/>
+      <p:grpSpPr>
+        <a:xfrm>
+          <a:off x="0" y="0"/>
+          <a:ext cx="0" cy="0"/>
+          <a:chOff x="0" y="0"/>
+          <a:chExt cx="0" cy="0"/>
+        </a:xfrm>
+      </p:grpSpPr>
       <p:sp>
         <p:nvSpPr>
           <p:cNvPr id="2" name="Rectangle 1"/>
@@ -6646,6 +9197,7 @@
           <a:lstStyle/>
           <a:p>
             <a:pPr algn="ctr"/>
+            <a:endParaRPr/>
           </a:p>
         </p:txBody>
       </p:sp>
@@ -6723,6 +9275,7 @@
           <a:lstStyle/>
           <a:p>
             <a:pPr algn="ctr"/>
+            <a:endParaRPr/>
           </a:p>
         </p:txBody>
       </p:sp>
@@ -6766,6 +9319,7 @@
           <a:lstStyle/>
           <a:p>
             <a:pPr algn="ctr"/>
+            <a:endParaRPr/>
           </a:p>
         </p:txBody>
       </p:sp>
@@ -6843,6 +9397,7 @@
           <a:lstStyle/>
           <a:p>
             <a:pPr algn="ctr"/>
+            <a:endParaRPr/>
           </a:p>
         </p:txBody>
       </p:sp>
@@ -6960,7 +9515,7 @@
 </file>
 
 <file path=ppt/slides/slide21.xml><?xml version="1.0" encoding="utf-8"?>
-<p:sld xmlns:a="http://schemas.openxmlformats.org/drawingml/2006/main" xmlns:p="http://schemas.openxmlformats.org/presentationml/2006/main" xmlns:r="http://schemas.openxmlformats.org/officeDocument/2006/relationships">
+<p:sld xmlns:a="http://schemas.openxmlformats.org/drawingml/2006/main" xmlns:r="http://schemas.openxmlformats.org/officeDocument/2006/relationships" xmlns:p="http://schemas.openxmlformats.org/presentationml/2006/main">
   <p:cSld>
     <p:spTree>
       <p:nvGrpSpPr>
@@ -6968,7 +9523,14 @@
         <p:cNvGrpSpPr/>
         <p:nvPr/>
       </p:nvGrpSpPr>
-      <p:grpSpPr/>
+      <p:grpSpPr>
+        <a:xfrm>
+          <a:off x="0" y="0"/>
+          <a:ext cx="0" cy="0"/>
+          <a:chOff x="0" y="0"/>
+          <a:chExt cx="0" cy="0"/>
+        </a:xfrm>
+      </p:grpSpPr>
       <p:sp>
         <p:nvSpPr>
           <p:cNvPr id="2" name="Rectangle 1"/>
@@ -7009,6 +9571,7 @@
           <a:lstStyle/>
           <a:p>
             <a:pPr algn="ctr"/>
+            <a:endParaRPr/>
           </a:p>
         </p:txBody>
       </p:sp>
@@ -7086,6 +9649,7 @@
           <a:lstStyle/>
           <a:p>
             <a:pPr algn="ctr"/>
+            <a:endParaRPr/>
           </a:p>
         </p:txBody>
       </p:sp>
@@ -7129,6 +9693,7 @@
           <a:lstStyle/>
           <a:p>
             <a:pPr algn="ctr"/>
+            <a:endParaRPr/>
           </a:p>
         </p:txBody>
       </p:sp>
@@ -7206,6 +9771,7 @@
           <a:lstStyle/>
           <a:p>
             <a:pPr algn="ctr"/>
+            <a:endParaRPr/>
           </a:p>
         </p:txBody>
       </p:sp>
@@ -7340,7 +9906,7 @@
 </file>
 
 <file path=ppt/slides/slide22.xml><?xml version="1.0" encoding="utf-8"?>
-<p:sld xmlns:a="http://schemas.openxmlformats.org/drawingml/2006/main" xmlns:p="http://schemas.openxmlformats.org/presentationml/2006/main" xmlns:r="http://schemas.openxmlformats.org/officeDocument/2006/relationships">
+<p:sld xmlns:a="http://schemas.openxmlformats.org/drawingml/2006/main" xmlns:r="http://schemas.openxmlformats.org/officeDocument/2006/relationships" xmlns:p="http://schemas.openxmlformats.org/presentationml/2006/main">
   <p:cSld>
     <p:spTree>
       <p:nvGrpSpPr>
@@ -7348,7 +9914,14 @@
         <p:cNvGrpSpPr/>
         <p:nvPr/>
       </p:nvGrpSpPr>
-      <p:grpSpPr/>
+      <p:grpSpPr>
+        <a:xfrm>
+          <a:off x="0" y="0"/>
+          <a:ext cx="0" cy="0"/>
+          <a:chOff x="0" y="0"/>
+          <a:chExt cx="0" cy="0"/>
+        </a:xfrm>
+      </p:grpSpPr>
       <p:sp>
         <p:nvSpPr>
           <p:cNvPr id="2" name="Rectangle 1"/>
@@ -7389,6 +9962,7 @@
           <a:lstStyle/>
           <a:p>
             <a:pPr algn="ctr"/>
+            <a:endParaRPr/>
           </a:p>
         </p:txBody>
       </p:sp>
@@ -7432,6 +10006,7 @@
           <a:lstStyle/>
           <a:p>
             <a:pPr algn="ctr"/>
+            <a:endParaRPr/>
           </a:p>
         </p:txBody>
       </p:sp>
@@ -7543,6 +10118,7 @@
           <a:lstStyle/>
           <a:p>
             <a:pPr algn="ctr"/>
+            <a:endParaRPr/>
           </a:p>
         </p:txBody>
       </p:sp>
@@ -7658,7 +10234,7 @@
 </file>
 
 <file path=ppt/slides/slide23.xml><?xml version="1.0" encoding="utf-8"?>
-<p:sld xmlns:a="http://schemas.openxmlformats.org/drawingml/2006/main" xmlns:p="http://schemas.openxmlformats.org/presentationml/2006/main" xmlns:r="http://schemas.openxmlformats.org/officeDocument/2006/relationships">
+<p:sld xmlns:a="http://schemas.openxmlformats.org/drawingml/2006/main" xmlns:r="http://schemas.openxmlformats.org/officeDocument/2006/relationships" xmlns:p="http://schemas.openxmlformats.org/presentationml/2006/main">
   <p:cSld>
     <p:spTree>
       <p:nvGrpSpPr>
@@ -7666,7 +10242,14 @@
         <p:cNvGrpSpPr/>
         <p:nvPr/>
       </p:nvGrpSpPr>
-      <p:grpSpPr/>
+      <p:grpSpPr>
+        <a:xfrm>
+          <a:off x="0" y="0"/>
+          <a:ext cx="0" cy="0"/>
+          <a:chOff x="0" y="0"/>
+          <a:chExt cx="0" cy="0"/>
+        </a:xfrm>
+      </p:grpSpPr>
       <p:sp>
         <p:nvSpPr>
           <p:cNvPr id="2" name="Rectangle 1"/>
@@ -7707,6 +10290,7 @@
           <a:lstStyle/>
           <a:p>
             <a:pPr algn="ctr"/>
+            <a:endParaRPr/>
           </a:p>
         </p:txBody>
       </p:sp>
@@ -7784,6 +10368,7 @@
           <a:lstStyle/>
           <a:p>
             <a:pPr algn="ctr"/>
+            <a:endParaRPr/>
           </a:p>
         </p:txBody>
       </p:sp>
@@ -7947,7 +10532,7 @@
 </file>
 
 <file path=ppt/slides/slide3.xml><?xml version="1.0" encoding="utf-8"?>
-<p:sld xmlns:a="http://schemas.openxmlformats.org/drawingml/2006/main" xmlns:p="http://schemas.openxmlformats.org/presentationml/2006/main" xmlns:r="http://schemas.openxmlformats.org/officeDocument/2006/relationships">
+<p:sld xmlns:a="http://schemas.openxmlformats.org/drawingml/2006/main" xmlns:r="http://schemas.openxmlformats.org/officeDocument/2006/relationships" xmlns:p="http://schemas.openxmlformats.org/presentationml/2006/main">
   <p:cSld>
     <p:spTree>
       <p:nvGrpSpPr>
@@ -7955,7 +10540,14 @@
         <p:cNvGrpSpPr/>
         <p:nvPr/>
       </p:nvGrpSpPr>
-      <p:grpSpPr/>
+      <p:grpSpPr>
+        <a:xfrm>
+          <a:off x="0" y="0"/>
+          <a:ext cx="0" cy="0"/>
+          <a:chOff x="0" y="0"/>
+          <a:chExt cx="0" cy="0"/>
+        </a:xfrm>
+      </p:grpSpPr>
       <p:sp>
         <p:nvSpPr>
           <p:cNvPr id="2" name="Rectangle 1"/>
@@ -7996,6 +10588,7 @@
           <a:lstStyle/>
           <a:p>
             <a:pPr algn="ctr"/>
+            <a:endParaRPr/>
           </a:p>
         </p:txBody>
       </p:sp>
@@ -8039,6 +10632,7 @@
           <a:lstStyle/>
           <a:p>
             <a:pPr algn="ctr"/>
+            <a:endParaRPr/>
           </a:p>
         </p:txBody>
       </p:sp>
@@ -8150,6 +10744,7 @@
           <a:lstStyle/>
           <a:p>
             <a:pPr algn="ctr"/>
+            <a:endParaRPr/>
           </a:p>
         </p:txBody>
       </p:sp>
@@ -8234,6 +10829,7 @@
                 <a:latin typeface="Calibri"/>
               </a:defRPr>
             </a:pPr>
+            <a:endParaRPr/>
           </a:p>
           <a:p>
             <a:pPr>
@@ -8342,7 +10938,7 @@
 </file>
 
 <file path=ppt/slides/slide4.xml><?xml version="1.0" encoding="utf-8"?>
-<p:sld xmlns:a="http://schemas.openxmlformats.org/drawingml/2006/main" xmlns:p="http://schemas.openxmlformats.org/presentationml/2006/main" xmlns:r="http://schemas.openxmlformats.org/officeDocument/2006/relationships">
+<p:sld xmlns:a="http://schemas.openxmlformats.org/drawingml/2006/main" xmlns:r="http://schemas.openxmlformats.org/officeDocument/2006/relationships" xmlns:p="http://schemas.openxmlformats.org/presentationml/2006/main">
   <p:cSld>
     <p:spTree>
       <p:nvGrpSpPr>
@@ -8350,7 +10946,14 @@
         <p:cNvGrpSpPr/>
         <p:nvPr/>
       </p:nvGrpSpPr>
-      <p:grpSpPr/>
+      <p:grpSpPr>
+        <a:xfrm>
+          <a:off x="0" y="0"/>
+          <a:ext cx="0" cy="0"/>
+          <a:chOff x="0" y="0"/>
+          <a:chExt cx="0" cy="0"/>
+        </a:xfrm>
+      </p:grpSpPr>
       <p:sp>
         <p:nvSpPr>
           <p:cNvPr id="2" name="Rectangle 1"/>
@@ -8391,6 +10994,7 @@
           <a:lstStyle/>
           <a:p>
             <a:pPr algn="ctr"/>
+            <a:endParaRPr/>
           </a:p>
         </p:txBody>
       </p:sp>
@@ -8475,7 +11079,7 @@
 </file>
 
 <file path=ppt/slides/slide5.xml><?xml version="1.0" encoding="utf-8"?>
-<p:sld xmlns:a="http://schemas.openxmlformats.org/drawingml/2006/main" xmlns:p="http://schemas.openxmlformats.org/presentationml/2006/main" xmlns:r="http://schemas.openxmlformats.org/officeDocument/2006/relationships">
+<p:sld xmlns:a="http://schemas.openxmlformats.org/drawingml/2006/main" xmlns:r="http://schemas.openxmlformats.org/officeDocument/2006/relationships" xmlns:p="http://schemas.openxmlformats.org/presentationml/2006/main">
   <p:cSld>
     <p:spTree>
       <p:nvGrpSpPr>
@@ -8483,7 +11087,14 @@
         <p:cNvGrpSpPr/>
         <p:nvPr/>
       </p:nvGrpSpPr>
-      <p:grpSpPr/>
+      <p:grpSpPr>
+        <a:xfrm>
+          <a:off x="0" y="0"/>
+          <a:ext cx="0" cy="0"/>
+          <a:chOff x="0" y="0"/>
+          <a:chExt cx="0" cy="0"/>
+        </a:xfrm>
+      </p:grpSpPr>
       <p:sp>
         <p:nvSpPr>
           <p:cNvPr id="2" name="Rectangle 1"/>
@@ -8524,6 +11135,7 @@
           <a:lstStyle/>
           <a:p>
             <a:pPr algn="ctr"/>
+            <a:endParaRPr/>
           </a:p>
         </p:txBody>
       </p:sp>
@@ -8601,6 +11213,7 @@
           <a:lstStyle/>
           <a:p>
             <a:pPr algn="ctr"/>
+            <a:endParaRPr/>
           </a:p>
         </p:txBody>
       </p:sp>
@@ -8780,7 +11393,7 @@
 </file>
 
 <file path=ppt/slides/slide6.xml><?xml version="1.0" encoding="utf-8"?>
-<p:sld xmlns:a="http://schemas.openxmlformats.org/drawingml/2006/main" xmlns:p="http://schemas.openxmlformats.org/presentationml/2006/main" xmlns:r="http://schemas.openxmlformats.org/officeDocument/2006/relationships">
+<p:sld xmlns:a="http://schemas.openxmlformats.org/drawingml/2006/main" xmlns:r="http://schemas.openxmlformats.org/officeDocument/2006/relationships" xmlns:p="http://schemas.openxmlformats.org/presentationml/2006/main">
   <p:cSld>
     <p:spTree>
       <p:nvGrpSpPr>
@@ -8788,7 +11401,14 @@
         <p:cNvGrpSpPr/>
         <p:nvPr/>
       </p:nvGrpSpPr>
-      <p:grpSpPr/>
+      <p:grpSpPr>
+        <a:xfrm>
+          <a:off x="0" y="0"/>
+          <a:ext cx="0" cy="0"/>
+          <a:chOff x="0" y="0"/>
+          <a:chExt cx="0" cy="0"/>
+        </a:xfrm>
+      </p:grpSpPr>
       <p:sp>
         <p:nvSpPr>
           <p:cNvPr id="2" name="Rectangle 1"/>
@@ -8829,6 +11449,7 @@
           <a:lstStyle/>
           <a:p>
             <a:pPr algn="ctr"/>
+            <a:endParaRPr/>
           </a:p>
         </p:txBody>
       </p:sp>
@@ -8906,6 +11527,7 @@
           <a:lstStyle/>
           <a:p>
             <a:pPr algn="ctr"/>
+            <a:endParaRPr/>
           </a:p>
         </p:txBody>
       </p:sp>
@@ -9053,7 +11675,7 @@
 </file>
 
 <file path=ppt/slides/slide7.xml><?xml version="1.0" encoding="utf-8"?>
-<p:sld xmlns:a="http://schemas.openxmlformats.org/drawingml/2006/main" xmlns:p="http://schemas.openxmlformats.org/presentationml/2006/main" xmlns:r="http://schemas.openxmlformats.org/officeDocument/2006/relationships">
+<p:sld xmlns:a="http://schemas.openxmlformats.org/drawingml/2006/main" xmlns:r="http://schemas.openxmlformats.org/officeDocument/2006/relationships" xmlns:p="http://schemas.openxmlformats.org/presentationml/2006/main">
   <p:cSld>
     <p:spTree>
       <p:nvGrpSpPr>
@@ -9061,7 +11683,14 @@
         <p:cNvGrpSpPr/>
         <p:nvPr/>
       </p:nvGrpSpPr>
-      <p:grpSpPr/>
+      <p:grpSpPr>
+        <a:xfrm>
+          <a:off x="0" y="0"/>
+          <a:ext cx="0" cy="0"/>
+          <a:chOff x="0" y="0"/>
+          <a:chExt cx="0" cy="0"/>
+        </a:xfrm>
+      </p:grpSpPr>
       <p:sp>
         <p:nvSpPr>
           <p:cNvPr id="2" name="Rectangle 1"/>
@@ -9102,6 +11731,7 @@
           <a:lstStyle/>
           <a:p>
             <a:pPr algn="ctr"/>
+            <a:endParaRPr/>
           </a:p>
         </p:txBody>
       </p:sp>
@@ -9213,6 +11843,7 @@
           <a:lstStyle/>
           <a:p>
             <a:pPr algn="ctr"/>
+            <a:endParaRPr/>
           </a:p>
         </p:txBody>
       </p:sp>
@@ -9290,6 +11921,7 @@
           <a:lstStyle/>
           <a:p>
             <a:pPr algn="ctr"/>
+            <a:endParaRPr/>
           </a:p>
         </p:txBody>
       </p:sp>
@@ -9302,7 +11934,7 @@
         <p:spPr>
           <a:xfrm>
             <a:off x="731520" y="1600200"/>
-            <a:ext cx="10698480" cy="4754880"/>
+            <a:ext cx="5568919" cy="4754880"/>
           </a:xfrm>
           <a:prstGeom prst="rect">
             <a:avLst/>
@@ -9313,110 +11945,1105 @@
           <a:bodyPr wrap="square"/>
           <a:lstStyle/>
           <a:p>
-            <a:br/>
-            <a:pPr algn="l">
-              <a:defRPr sz="1500" b="0">
-                <a:solidFill>
-                  <a:srgbClr val="D4D4D4"/>
-                </a:solidFill>
-                <a:latin typeface="Consolas"/>
-              </a:defRPr>
-            </a:pPr>
-            <a:r>
+            <a:br>
+              <a:rPr sz="1600" dirty="0">
+                <a:solidFill>
+                  <a:schemeClr val="bg1">
+                    <a:lumMod val="95000"/>
+                  </a:schemeClr>
+                </a:solidFill>
+              </a:rPr>
+            </a:br>
+            <a:r>
+              <a:rPr sz="1600" dirty="0">
+                <a:solidFill>
+                  <a:schemeClr val="bg1">
+                    <a:lumMod val="95000"/>
+                  </a:schemeClr>
+                </a:solidFill>
+              </a:rPr>
               <a:t>import (</a:t>
             </a:r>
-            <a:br/>
-            <a:r>
-              <a:t>    "github.com/hyperledger/fabric-chaincode-go/pkg/statebased"</a:t>
-            </a:r>
-            <a:br/>
-            <a:r>
+            <a:br>
+              <a:rPr sz="1600" dirty="0">
+                <a:solidFill>
+                  <a:schemeClr val="bg1">
+                    <a:lumMod val="95000"/>
+                  </a:schemeClr>
+                </a:solidFill>
+              </a:rPr>
+            </a:br>
+            <a:r>
+              <a:rPr sz="1600" dirty="0">
+                <a:solidFill>
+                  <a:schemeClr val="bg1">
+                    <a:lumMod val="95000"/>
+                  </a:schemeClr>
+                </a:solidFill>
+              </a:rPr>
+              <a:t>    "github.com/</a:t>
+            </a:r>
+            <a:r>
+              <a:rPr sz="1600" dirty="0" err="1">
+                <a:solidFill>
+                  <a:schemeClr val="bg1">
+                    <a:lumMod val="95000"/>
+                  </a:schemeClr>
+                </a:solidFill>
+              </a:rPr>
+              <a:t>hyperledger</a:t>
+            </a:r>
+            <a:r>
+              <a:rPr sz="1600" dirty="0">
+                <a:solidFill>
+                  <a:schemeClr val="bg1">
+                    <a:lumMod val="95000"/>
+                  </a:schemeClr>
+                </a:solidFill>
+              </a:rPr>
+              <a:t>/fabric-</a:t>
+            </a:r>
+            <a:r>
+              <a:rPr sz="1600" dirty="0" err="1">
+                <a:solidFill>
+                  <a:schemeClr val="bg1">
+                    <a:lumMod val="95000"/>
+                  </a:schemeClr>
+                </a:solidFill>
+              </a:rPr>
+              <a:t>chaincode</a:t>
+            </a:r>
+            <a:r>
+              <a:rPr sz="1600" dirty="0">
+                <a:solidFill>
+                  <a:schemeClr val="bg1">
+                    <a:lumMod val="95000"/>
+                  </a:schemeClr>
+                </a:solidFill>
+              </a:rPr>
+              <a:t>-go/pkg/</a:t>
+            </a:r>
+            <a:r>
+              <a:rPr sz="1600" dirty="0" err="1">
+                <a:solidFill>
+                  <a:schemeClr val="bg1">
+                    <a:lumMod val="95000"/>
+                  </a:schemeClr>
+                </a:solidFill>
+              </a:rPr>
+              <a:t>statebased</a:t>
+            </a:r>
+            <a:r>
+              <a:rPr sz="1600" dirty="0">
+                <a:solidFill>
+                  <a:schemeClr val="bg1">
+                    <a:lumMod val="95000"/>
+                  </a:schemeClr>
+                </a:solidFill>
+              </a:rPr>
+              <a:t>"</a:t>
+            </a:r>
+            <a:br>
+              <a:rPr sz="1600" dirty="0">
+                <a:solidFill>
+                  <a:schemeClr val="bg1">
+                    <a:lumMod val="95000"/>
+                  </a:schemeClr>
+                </a:solidFill>
+              </a:rPr>
+            </a:br>
+            <a:r>
+              <a:rPr sz="1600" dirty="0">
+                <a:solidFill>
+                  <a:schemeClr val="bg1">
+                    <a:lumMod val="95000"/>
+                  </a:schemeClr>
+                </a:solidFill>
+              </a:rPr>
               <a:t>)</a:t>
             </a:r>
-            <a:br/>
-            <a:br/>
-            <a:r>
-              <a:t>func (s *SmartContract) SetHighValueEndorsement(</a:t>
-            </a:r>
-            <a:br/>
-            <a:r>
-              <a:t>    ctx contractapi.TransactionContextInterface,</a:t>
-            </a:r>
-            <a:br/>
-            <a:r>
-              <a:t>    propertyID string) error {</a:t>
-            </a:r>
-            <a:br/>
-            <a:br/>
-            <a:r>
-              <a:t>    // Leer propiedad</a:t>
-            </a:r>
-            <a:br/>
-            <a:r>
-              <a:t>    property, _ := s.ReadProperty(ctx, propertyID)</a:t>
-            </a:r>
-            <a:br/>
-            <a:br/>
-            <a:r>
-              <a:t>    // Si el valor supera 1M, requerir endorsement de 3 orgs</a:t>
-            </a:r>
-            <a:br/>
-            <a:r>
-              <a:t>    if property.AppraisalValue &gt; 1000000 {</a:t>
-            </a:r>
-            <a:br/>
-            <a:r>
-              <a:t>        policy, err := statebased.NewStateEP(nil)</a:t>
-            </a:r>
-            <a:br/>
-            <a:r>
+            <a:br>
+              <a:rPr sz="1600" dirty="0">
+                <a:solidFill>
+                  <a:schemeClr val="bg1">
+                    <a:lumMod val="95000"/>
+                  </a:schemeClr>
+                </a:solidFill>
+              </a:rPr>
+            </a:br>
+            <a:br>
+              <a:rPr sz="1600" dirty="0">
+                <a:solidFill>
+                  <a:schemeClr val="bg1">
+                    <a:lumMod val="95000"/>
+                  </a:schemeClr>
+                </a:solidFill>
+              </a:rPr>
+            </a:br>
+            <a:r>
+              <a:rPr sz="1600" dirty="0" err="1">
+                <a:solidFill>
+                  <a:schemeClr val="bg1">
+                    <a:lumMod val="95000"/>
+                  </a:schemeClr>
+                </a:solidFill>
+              </a:rPr>
+              <a:t>func</a:t>
+            </a:r>
+            <a:r>
+              <a:rPr sz="1600" dirty="0">
+                <a:solidFill>
+                  <a:schemeClr val="bg1">
+                    <a:lumMod val="95000"/>
+                  </a:schemeClr>
+                </a:solidFill>
+              </a:rPr>
+              <a:t> (s *</a:t>
+            </a:r>
+            <a:r>
+              <a:rPr sz="1600" dirty="0" err="1">
+                <a:solidFill>
+                  <a:schemeClr val="bg1">
+                    <a:lumMod val="95000"/>
+                  </a:schemeClr>
+                </a:solidFill>
+              </a:rPr>
+              <a:t>SmartContract</a:t>
+            </a:r>
+            <a:r>
+              <a:rPr sz="1600" dirty="0">
+                <a:solidFill>
+                  <a:schemeClr val="bg1">
+                    <a:lumMod val="95000"/>
+                  </a:schemeClr>
+                </a:solidFill>
+              </a:rPr>
+              <a:t>) </a:t>
+            </a:r>
+            <a:r>
+              <a:rPr sz="1600" dirty="0" err="1">
+                <a:solidFill>
+                  <a:schemeClr val="bg1">
+                    <a:lumMod val="95000"/>
+                  </a:schemeClr>
+                </a:solidFill>
+              </a:rPr>
+              <a:t>SetHighValueEndorsement</a:t>
+            </a:r>
+            <a:r>
+              <a:rPr sz="1600" dirty="0">
+                <a:solidFill>
+                  <a:schemeClr val="bg1">
+                    <a:lumMod val="95000"/>
+                  </a:schemeClr>
+                </a:solidFill>
+              </a:rPr>
+              <a:t>(</a:t>
+            </a:r>
+            <a:br>
+              <a:rPr sz="1600" dirty="0">
+                <a:solidFill>
+                  <a:schemeClr val="bg1">
+                    <a:lumMod val="95000"/>
+                  </a:schemeClr>
+                </a:solidFill>
+              </a:rPr>
+            </a:br>
+            <a:r>
+              <a:rPr sz="1600" dirty="0">
+                <a:solidFill>
+                  <a:schemeClr val="bg1">
+                    <a:lumMod val="95000"/>
+                  </a:schemeClr>
+                </a:solidFill>
+              </a:rPr>
+              <a:t>    </a:t>
+            </a:r>
+            <a:r>
+              <a:rPr sz="1600" dirty="0" err="1">
+                <a:solidFill>
+                  <a:schemeClr val="bg1">
+                    <a:lumMod val="95000"/>
+                  </a:schemeClr>
+                </a:solidFill>
+              </a:rPr>
+              <a:t>ctx</a:t>
+            </a:r>
+            <a:r>
+              <a:rPr sz="1600" dirty="0">
+                <a:solidFill>
+                  <a:schemeClr val="bg1">
+                    <a:lumMod val="95000"/>
+                  </a:schemeClr>
+                </a:solidFill>
+              </a:rPr>
+              <a:t> </a:t>
+            </a:r>
+            <a:r>
+              <a:rPr sz="1600" dirty="0" err="1">
+                <a:solidFill>
+                  <a:schemeClr val="bg1">
+                    <a:lumMod val="95000"/>
+                  </a:schemeClr>
+                </a:solidFill>
+              </a:rPr>
+              <a:t>contractapi.TransactionContextInterface</a:t>
+            </a:r>
+            <a:r>
+              <a:rPr sz="1600" dirty="0">
+                <a:solidFill>
+                  <a:schemeClr val="bg1">
+                    <a:lumMod val="95000"/>
+                  </a:schemeClr>
+                </a:solidFill>
+              </a:rPr>
+              <a:t>,</a:t>
+            </a:r>
+            <a:br>
+              <a:rPr sz="1600" dirty="0">
+                <a:solidFill>
+                  <a:schemeClr val="bg1">
+                    <a:lumMod val="95000"/>
+                  </a:schemeClr>
+                </a:solidFill>
+              </a:rPr>
+            </a:br>
+            <a:r>
+              <a:rPr sz="1600" dirty="0">
+                <a:solidFill>
+                  <a:schemeClr val="bg1">
+                    <a:lumMod val="95000"/>
+                  </a:schemeClr>
+                </a:solidFill>
+              </a:rPr>
+              <a:t>    </a:t>
+            </a:r>
+            <a:r>
+              <a:rPr sz="1600" dirty="0" err="1">
+                <a:solidFill>
+                  <a:schemeClr val="bg1">
+                    <a:lumMod val="95000"/>
+                  </a:schemeClr>
+                </a:solidFill>
+              </a:rPr>
+              <a:t>propertyID</a:t>
+            </a:r>
+            <a:r>
+              <a:rPr sz="1600" dirty="0">
+                <a:solidFill>
+                  <a:schemeClr val="bg1">
+                    <a:lumMod val="95000"/>
+                  </a:schemeClr>
+                </a:solidFill>
+              </a:rPr>
+              <a:t> string) error {</a:t>
+            </a:r>
+            <a:br>
+              <a:rPr sz="1600" dirty="0">
+                <a:solidFill>
+                  <a:schemeClr val="bg1">
+                    <a:lumMod val="95000"/>
+                  </a:schemeClr>
+                </a:solidFill>
+              </a:rPr>
+            </a:br>
+            <a:br>
+              <a:rPr sz="1600" dirty="0">
+                <a:solidFill>
+                  <a:schemeClr val="bg1">
+                    <a:lumMod val="95000"/>
+                  </a:schemeClr>
+                </a:solidFill>
+              </a:rPr>
+            </a:br>
+            <a:r>
+              <a:rPr sz="1600" dirty="0">
+                <a:solidFill>
+                  <a:schemeClr val="bg1">
+                    <a:lumMod val="95000"/>
+                  </a:schemeClr>
+                </a:solidFill>
+              </a:rPr>
+              <a:t>    // Leer </a:t>
+            </a:r>
+            <a:r>
+              <a:rPr sz="1600" dirty="0" err="1">
+                <a:solidFill>
+                  <a:schemeClr val="bg1">
+                    <a:lumMod val="95000"/>
+                  </a:schemeClr>
+                </a:solidFill>
+              </a:rPr>
+              <a:t>propiedad</a:t>
+            </a:r>
+            <a:br>
+              <a:rPr sz="1600" dirty="0">
+                <a:solidFill>
+                  <a:schemeClr val="bg1">
+                    <a:lumMod val="95000"/>
+                  </a:schemeClr>
+                </a:solidFill>
+              </a:rPr>
+            </a:br>
+            <a:r>
+              <a:rPr sz="1600" dirty="0">
+                <a:solidFill>
+                  <a:schemeClr val="bg1">
+                    <a:lumMod val="95000"/>
+                  </a:schemeClr>
+                </a:solidFill>
+              </a:rPr>
+              <a:t>    property, _ := </a:t>
+            </a:r>
+            <a:r>
+              <a:rPr sz="1600" dirty="0" err="1">
+                <a:solidFill>
+                  <a:schemeClr val="bg1">
+                    <a:lumMod val="95000"/>
+                  </a:schemeClr>
+                </a:solidFill>
+              </a:rPr>
+              <a:t>s.ReadProperty</a:t>
+            </a:r>
+            <a:r>
+              <a:rPr sz="1600" dirty="0">
+                <a:solidFill>
+                  <a:schemeClr val="bg1">
+                    <a:lumMod val="95000"/>
+                  </a:schemeClr>
+                </a:solidFill>
+              </a:rPr>
+              <a:t>(</a:t>
+            </a:r>
+            <a:r>
+              <a:rPr sz="1600" dirty="0" err="1">
+                <a:solidFill>
+                  <a:schemeClr val="bg1">
+                    <a:lumMod val="95000"/>
+                  </a:schemeClr>
+                </a:solidFill>
+              </a:rPr>
+              <a:t>ctx</a:t>
+            </a:r>
+            <a:r>
+              <a:rPr sz="1600" dirty="0">
+                <a:solidFill>
+                  <a:schemeClr val="bg1">
+                    <a:lumMod val="95000"/>
+                  </a:schemeClr>
+                </a:solidFill>
+              </a:rPr>
+              <a:t>, </a:t>
+            </a:r>
+            <a:r>
+              <a:rPr sz="1600" dirty="0" err="1">
+                <a:solidFill>
+                  <a:schemeClr val="bg1">
+                    <a:lumMod val="95000"/>
+                  </a:schemeClr>
+                </a:solidFill>
+              </a:rPr>
+              <a:t>propertyID</a:t>
+            </a:r>
+            <a:r>
+              <a:rPr sz="1600" dirty="0">
+                <a:solidFill>
+                  <a:schemeClr val="bg1">
+                    <a:lumMod val="95000"/>
+                  </a:schemeClr>
+                </a:solidFill>
+              </a:rPr>
+              <a:t>)</a:t>
+            </a:r>
+            <a:br>
+              <a:rPr sz="1600" dirty="0">
+                <a:solidFill>
+                  <a:schemeClr val="bg1">
+                    <a:lumMod val="95000"/>
+                  </a:schemeClr>
+                </a:solidFill>
+              </a:rPr>
+            </a:br>
+            <a:br>
+              <a:rPr sz="1600" dirty="0">
+                <a:solidFill>
+                  <a:schemeClr val="bg1">
+                    <a:lumMod val="95000"/>
+                  </a:schemeClr>
+                </a:solidFill>
+              </a:rPr>
+            </a:br>
+            <a:r>
+              <a:rPr sz="1600" dirty="0">
+                <a:solidFill>
+                  <a:schemeClr val="bg1">
+                    <a:lumMod val="95000"/>
+                  </a:schemeClr>
+                </a:solidFill>
+              </a:rPr>
+              <a:t>    // Si </a:t>
+            </a:r>
+            <a:r>
+              <a:rPr sz="1600" dirty="0" err="1">
+                <a:solidFill>
+                  <a:schemeClr val="bg1">
+                    <a:lumMod val="95000"/>
+                  </a:schemeClr>
+                </a:solidFill>
+              </a:rPr>
+              <a:t>el</a:t>
+            </a:r>
+            <a:r>
+              <a:rPr sz="1600" dirty="0">
+                <a:solidFill>
+                  <a:schemeClr val="bg1">
+                    <a:lumMod val="95000"/>
+                  </a:schemeClr>
+                </a:solidFill>
+              </a:rPr>
+              <a:t> valor </a:t>
+            </a:r>
+            <a:r>
+              <a:rPr sz="1600" dirty="0" err="1">
+                <a:solidFill>
+                  <a:schemeClr val="bg1">
+                    <a:lumMod val="95000"/>
+                  </a:schemeClr>
+                </a:solidFill>
+              </a:rPr>
+              <a:t>supera</a:t>
+            </a:r>
+            <a:r>
+              <a:rPr sz="1600" dirty="0">
+                <a:solidFill>
+                  <a:schemeClr val="bg1">
+                    <a:lumMod val="95000"/>
+                  </a:schemeClr>
+                </a:solidFill>
+              </a:rPr>
+              <a:t> 1M, </a:t>
+            </a:r>
+            <a:r>
+              <a:rPr sz="1600" dirty="0" err="1">
+                <a:solidFill>
+                  <a:schemeClr val="bg1">
+                    <a:lumMod val="95000"/>
+                  </a:schemeClr>
+                </a:solidFill>
+              </a:rPr>
+              <a:t>requerir</a:t>
+            </a:r>
+            <a:r>
+              <a:rPr sz="1600" dirty="0">
+                <a:solidFill>
+                  <a:schemeClr val="bg1">
+                    <a:lumMod val="95000"/>
+                  </a:schemeClr>
+                </a:solidFill>
+              </a:rPr>
+              <a:t> endorsement de 3 orgs</a:t>
+            </a:r>
+            <a:br>
+              <a:rPr sz="1600" dirty="0">
+                <a:solidFill>
+                  <a:schemeClr val="bg1">
+                    <a:lumMod val="95000"/>
+                  </a:schemeClr>
+                </a:solidFill>
+              </a:rPr>
+            </a:br>
+            <a:r>
+              <a:rPr sz="1600" dirty="0">
+                <a:solidFill>
+                  <a:schemeClr val="bg1">
+                    <a:lumMod val="95000"/>
+                  </a:schemeClr>
+                </a:solidFill>
+              </a:rPr>
+              <a:t>    if </a:t>
+            </a:r>
+            <a:r>
+              <a:rPr sz="1600" dirty="0" err="1">
+                <a:solidFill>
+                  <a:schemeClr val="bg1">
+                    <a:lumMod val="95000"/>
+                  </a:schemeClr>
+                </a:solidFill>
+              </a:rPr>
+              <a:t>property.AppraisalValue</a:t>
+            </a:r>
+            <a:r>
+              <a:rPr sz="1600" dirty="0">
+                <a:solidFill>
+                  <a:schemeClr val="bg1">
+                    <a:lumMod val="95000"/>
+                  </a:schemeClr>
+                </a:solidFill>
+              </a:rPr>
+              <a:t> &gt; 1000000 {</a:t>
+            </a:r>
+            <a:br>
+              <a:rPr sz="1600" dirty="0">
+                <a:solidFill>
+                  <a:schemeClr val="bg1">
+                    <a:lumMod val="95000"/>
+                  </a:schemeClr>
+                </a:solidFill>
+              </a:rPr>
+            </a:br>
+            <a:r>
+              <a:rPr sz="1600" dirty="0">
+                <a:solidFill>
+                  <a:schemeClr val="bg1">
+                    <a:lumMod val="95000"/>
+                  </a:schemeClr>
+                </a:solidFill>
+              </a:rPr>
+              <a:t>        policy, err := </a:t>
+            </a:r>
+            <a:r>
+              <a:rPr sz="1600" dirty="0" err="1">
+                <a:solidFill>
+                  <a:schemeClr val="bg1">
+                    <a:lumMod val="95000"/>
+                  </a:schemeClr>
+                </a:solidFill>
+              </a:rPr>
+              <a:t>statebased.NewStateEP</a:t>
+            </a:r>
+            <a:r>
+              <a:rPr sz="1600" dirty="0">
+                <a:solidFill>
+                  <a:schemeClr val="bg1">
+                    <a:lumMod val="95000"/>
+                  </a:schemeClr>
+                </a:solidFill>
+              </a:rPr>
+              <a:t>(nil)</a:t>
+            </a:r>
+            <a:br>
+              <a:rPr sz="1600" dirty="0">
+                <a:solidFill>
+                  <a:schemeClr val="bg1">
+                    <a:lumMod val="95000"/>
+                  </a:schemeClr>
+                </a:solidFill>
+              </a:rPr>
+            </a:br>
+            <a:r>
+              <a:rPr sz="1600" dirty="0">
+                <a:solidFill>
+                  <a:schemeClr val="bg1">
+                    <a:lumMod val="95000"/>
+                  </a:schemeClr>
+                </a:solidFill>
+              </a:rPr>
               <a:t>        if err != nil {</a:t>
             </a:r>
-            <a:br/>
-            <a:r>
+            <a:br>
+              <a:rPr sz="1600" dirty="0">
+                <a:solidFill>
+                  <a:schemeClr val="bg1">
+                    <a:lumMod val="95000"/>
+                  </a:schemeClr>
+                </a:solidFill>
+              </a:rPr>
+            </a:br>
+            <a:r>
+              <a:rPr sz="1600" dirty="0">
+                <a:solidFill>
+                  <a:schemeClr val="bg1">
+                    <a:lumMod val="95000"/>
+                  </a:schemeClr>
+                </a:solidFill>
+              </a:rPr>
               <a:t>            return err</a:t>
             </a:r>
-            <a:br/>
-            <a:r>
+            <a:br>
+              <a:rPr sz="1600" dirty="0">
+                <a:solidFill>
+                  <a:schemeClr val="bg1">
+                    <a:lumMod val="95000"/>
+                  </a:schemeClr>
+                </a:solidFill>
+              </a:rPr>
+            </a:br>
+            <a:r>
+              <a:rPr sz="1600" dirty="0">
+                <a:solidFill>
+                  <a:schemeClr val="bg1">
+                    <a:lumMod val="95000"/>
+                  </a:schemeClr>
+                </a:solidFill>
+              </a:rPr>
               <a:t>        }</a:t>
             </a:r>
-            <a:br/>
-            <a:r>
+          </a:p>
+        </p:txBody>
+      </p:sp>
+      <p:sp>
+        <p:nvSpPr>
+          <p:cNvPr id="10" name="CuadroTexto 9">
+            <a:extLst>
+              <a:ext uri="{FF2B5EF4-FFF2-40B4-BE49-F238E27FC236}">
+                <a16:creationId xmlns:a16="http://schemas.microsoft.com/office/drawing/2014/main" id="{45756808-E31F-AF67-0797-B40894E524B3}"/>
+              </a:ext>
+            </a:extLst>
+          </p:cNvPr>
+          <p:cNvSpPr txBox="1"/>
+          <p:nvPr/>
+        </p:nvSpPr>
+        <p:spPr>
+          <a:xfrm>
+            <a:off x="6531827" y="1645920"/>
+            <a:ext cx="6138746" cy="2800767"/>
+          </a:xfrm>
+          <a:prstGeom prst="rect">
+            <a:avLst/>
+          </a:prstGeom>
+          <a:noFill/>
+        </p:spPr>
+        <p:txBody>
+          <a:bodyPr wrap="square">
+            <a:spAutoFit/>
+          </a:bodyPr>
+          <a:lstStyle/>
+          <a:p>
+            <a:br>
+              <a:rPr lang="es-ES" sz="1600" dirty="0">
+                <a:solidFill>
+                  <a:schemeClr val="bg1">
+                    <a:lumMod val="95000"/>
+                  </a:schemeClr>
+                </a:solidFill>
+              </a:rPr>
+            </a:br>
+            <a:r>
+              <a:rPr lang="es-ES" sz="1600" dirty="0">
+                <a:solidFill>
+                  <a:schemeClr val="bg1">
+                    <a:lumMod val="95000"/>
+                  </a:schemeClr>
+                </a:solidFill>
+              </a:rPr>
               <a:t>        // Requiere las tres organizaciones</a:t>
             </a:r>
-            <a:br/>
-            <a:r>
-              <a:t>        policy.AddOrgs(statebased.RoleTypePeer,</a:t>
-            </a:r>
-            <a:br/>
-            <a:r>
+            <a:br>
+              <a:rPr lang="es-ES" sz="1600" dirty="0">
+                <a:solidFill>
+                  <a:schemeClr val="bg1">
+                    <a:lumMod val="95000"/>
+                  </a:schemeClr>
+                </a:solidFill>
+              </a:rPr>
+            </a:br>
+            <a:r>
+              <a:rPr lang="es-ES" sz="1600" dirty="0">
+                <a:solidFill>
+                  <a:schemeClr val="bg1">
+                    <a:lumMod val="95000"/>
+                  </a:schemeClr>
+                </a:solidFill>
+              </a:rPr>
+              <a:t>        </a:t>
+            </a:r>
+            <a:r>
+              <a:rPr lang="es-ES" sz="1600" dirty="0" err="1">
+                <a:solidFill>
+                  <a:schemeClr val="bg1">
+                    <a:lumMod val="95000"/>
+                  </a:schemeClr>
+                </a:solidFill>
+              </a:rPr>
+              <a:t>policy.AddOrgs</a:t>
+            </a:r>
+            <a:r>
+              <a:rPr lang="es-ES" sz="1600" dirty="0">
+                <a:solidFill>
+                  <a:schemeClr val="bg1">
+                    <a:lumMod val="95000"/>
+                  </a:schemeClr>
+                </a:solidFill>
+              </a:rPr>
+              <a:t>(</a:t>
+            </a:r>
+            <a:r>
+              <a:rPr lang="es-ES" sz="1600" dirty="0" err="1">
+                <a:solidFill>
+                  <a:schemeClr val="bg1">
+                    <a:lumMod val="95000"/>
+                  </a:schemeClr>
+                </a:solidFill>
+              </a:rPr>
+              <a:t>statebased.RoleTypePeer</a:t>
+            </a:r>
+            <a:r>
+              <a:rPr lang="es-ES" sz="1600" dirty="0">
+                <a:solidFill>
+                  <a:schemeClr val="bg1">
+                    <a:lumMod val="95000"/>
+                  </a:schemeClr>
+                </a:solidFill>
+              </a:rPr>
+              <a:t>,</a:t>
+            </a:r>
+            <a:br>
+              <a:rPr lang="es-ES" sz="1600" dirty="0">
+                <a:solidFill>
+                  <a:schemeClr val="bg1">
+                    <a:lumMod val="95000"/>
+                  </a:schemeClr>
+                </a:solidFill>
+              </a:rPr>
+            </a:br>
+            <a:r>
+              <a:rPr lang="es-ES" sz="1600" dirty="0">
+                <a:solidFill>
+                  <a:schemeClr val="bg1">
+                    <a:lumMod val="95000"/>
+                  </a:schemeClr>
+                </a:solidFill>
+              </a:rPr>
               <a:t>            "Org1MSP", "Org2MSP", "Org3MSP")</a:t>
             </a:r>
-            <a:br/>
-            <a:r>
-              <a:t>        policyBytes, _ := policy.Policy()</a:t>
-            </a:r>
-            <a:br/>
-            <a:br/>
-            <a:r>
-              <a:t>        return ctx.GetStub().SetStateValidationParameter(</a:t>
-            </a:r>
-            <a:br/>
-            <a:r>
-              <a:t>            propertyID, policyBytes)</a:t>
-            </a:r>
-            <a:br/>
-            <a:r>
+            <a:br>
+              <a:rPr lang="es-ES" sz="1600" dirty="0">
+                <a:solidFill>
+                  <a:schemeClr val="bg1">
+                    <a:lumMod val="95000"/>
+                  </a:schemeClr>
+                </a:solidFill>
+              </a:rPr>
+            </a:br>
+            <a:r>
+              <a:rPr lang="es-ES" sz="1600" dirty="0">
+                <a:solidFill>
+                  <a:schemeClr val="bg1">
+                    <a:lumMod val="95000"/>
+                  </a:schemeClr>
+                </a:solidFill>
+              </a:rPr>
+              <a:t>        </a:t>
+            </a:r>
+            <a:r>
+              <a:rPr lang="es-ES" sz="1600" dirty="0" err="1">
+                <a:solidFill>
+                  <a:schemeClr val="bg1">
+                    <a:lumMod val="95000"/>
+                  </a:schemeClr>
+                </a:solidFill>
+              </a:rPr>
+              <a:t>policyBytes</a:t>
+            </a:r>
+            <a:r>
+              <a:rPr lang="es-ES" sz="1600" dirty="0">
+                <a:solidFill>
+                  <a:schemeClr val="bg1">
+                    <a:lumMod val="95000"/>
+                  </a:schemeClr>
+                </a:solidFill>
+              </a:rPr>
+              <a:t>, _ := </a:t>
+            </a:r>
+            <a:r>
+              <a:rPr lang="es-ES" sz="1600" dirty="0" err="1">
+                <a:solidFill>
+                  <a:schemeClr val="bg1">
+                    <a:lumMod val="95000"/>
+                  </a:schemeClr>
+                </a:solidFill>
+              </a:rPr>
+              <a:t>policy.Policy</a:t>
+            </a:r>
+            <a:r>
+              <a:rPr lang="es-ES" sz="1600" dirty="0">
+                <a:solidFill>
+                  <a:schemeClr val="bg1">
+                    <a:lumMod val="95000"/>
+                  </a:schemeClr>
+                </a:solidFill>
+              </a:rPr>
+              <a:t>()</a:t>
+            </a:r>
+            <a:br>
+              <a:rPr lang="es-ES" sz="1600" dirty="0">
+                <a:solidFill>
+                  <a:schemeClr val="bg1">
+                    <a:lumMod val="95000"/>
+                  </a:schemeClr>
+                </a:solidFill>
+              </a:rPr>
+            </a:br>
+            <a:br>
+              <a:rPr lang="es-ES" sz="1600" dirty="0">
+                <a:solidFill>
+                  <a:schemeClr val="bg1">
+                    <a:lumMod val="95000"/>
+                  </a:schemeClr>
+                </a:solidFill>
+              </a:rPr>
+            </a:br>
+            <a:r>
+              <a:rPr lang="es-ES" sz="1600" dirty="0">
+                <a:solidFill>
+                  <a:schemeClr val="bg1">
+                    <a:lumMod val="95000"/>
+                  </a:schemeClr>
+                </a:solidFill>
+              </a:rPr>
+              <a:t>        </a:t>
+            </a:r>
+            <a:r>
+              <a:rPr lang="es-ES" sz="1600" dirty="0" err="1">
+                <a:solidFill>
+                  <a:schemeClr val="bg1">
+                    <a:lumMod val="95000"/>
+                  </a:schemeClr>
+                </a:solidFill>
+              </a:rPr>
+              <a:t>return</a:t>
+            </a:r>
+            <a:r>
+              <a:rPr lang="es-ES" sz="1600" dirty="0">
+                <a:solidFill>
+                  <a:schemeClr val="bg1">
+                    <a:lumMod val="95000"/>
+                  </a:schemeClr>
+                </a:solidFill>
+              </a:rPr>
+              <a:t> </a:t>
+            </a:r>
+            <a:r>
+              <a:rPr lang="es-ES" sz="1600" dirty="0" err="1">
+                <a:solidFill>
+                  <a:schemeClr val="bg1">
+                    <a:lumMod val="95000"/>
+                  </a:schemeClr>
+                </a:solidFill>
+              </a:rPr>
+              <a:t>ctx.GetStub</a:t>
+            </a:r>
+            <a:r>
+              <a:rPr lang="es-ES" sz="1600" dirty="0">
+                <a:solidFill>
+                  <a:schemeClr val="bg1">
+                    <a:lumMod val="95000"/>
+                  </a:schemeClr>
+                </a:solidFill>
+              </a:rPr>
+              <a:t>().</a:t>
+            </a:r>
+            <a:r>
+              <a:rPr lang="es-ES" sz="1600" dirty="0" err="1">
+                <a:solidFill>
+                  <a:schemeClr val="bg1">
+                    <a:lumMod val="95000"/>
+                  </a:schemeClr>
+                </a:solidFill>
+              </a:rPr>
+              <a:t>SetStateValidationParameter</a:t>
+            </a:r>
+            <a:r>
+              <a:rPr lang="es-ES" sz="1600" dirty="0">
+                <a:solidFill>
+                  <a:schemeClr val="bg1">
+                    <a:lumMod val="95000"/>
+                  </a:schemeClr>
+                </a:solidFill>
+              </a:rPr>
+              <a:t>(</a:t>
+            </a:r>
+            <a:br>
+              <a:rPr lang="es-ES" sz="1600" dirty="0">
+                <a:solidFill>
+                  <a:schemeClr val="bg1">
+                    <a:lumMod val="95000"/>
+                  </a:schemeClr>
+                </a:solidFill>
+              </a:rPr>
+            </a:br>
+            <a:r>
+              <a:rPr lang="es-ES" sz="1600" dirty="0">
+                <a:solidFill>
+                  <a:schemeClr val="bg1">
+                    <a:lumMod val="95000"/>
+                  </a:schemeClr>
+                </a:solidFill>
+              </a:rPr>
+              <a:t>            </a:t>
+            </a:r>
+            <a:r>
+              <a:rPr lang="es-ES" sz="1600" dirty="0" err="1">
+                <a:solidFill>
+                  <a:schemeClr val="bg1">
+                    <a:lumMod val="95000"/>
+                  </a:schemeClr>
+                </a:solidFill>
+              </a:rPr>
+              <a:t>propertyID</a:t>
+            </a:r>
+            <a:r>
+              <a:rPr lang="es-ES" sz="1600" dirty="0">
+                <a:solidFill>
+                  <a:schemeClr val="bg1">
+                    <a:lumMod val="95000"/>
+                  </a:schemeClr>
+                </a:solidFill>
+              </a:rPr>
+              <a:t>, </a:t>
+            </a:r>
+            <a:r>
+              <a:rPr lang="es-ES" sz="1600" dirty="0" err="1">
+                <a:solidFill>
+                  <a:schemeClr val="bg1">
+                    <a:lumMod val="95000"/>
+                  </a:schemeClr>
+                </a:solidFill>
+              </a:rPr>
+              <a:t>policyBytes</a:t>
+            </a:r>
+            <a:r>
+              <a:rPr lang="es-ES" sz="1600" dirty="0">
+                <a:solidFill>
+                  <a:schemeClr val="bg1">
+                    <a:lumMod val="95000"/>
+                  </a:schemeClr>
+                </a:solidFill>
+              </a:rPr>
+              <a:t>)</a:t>
+            </a:r>
+            <a:br>
+              <a:rPr lang="es-ES" sz="1600" dirty="0">
+                <a:solidFill>
+                  <a:schemeClr val="bg1">
+                    <a:lumMod val="95000"/>
+                  </a:schemeClr>
+                </a:solidFill>
+              </a:rPr>
+            </a:br>
+            <a:r>
+              <a:rPr lang="es-ES" sz="1600" dirty="0">
+                <a:solidFill>
+                  <a:schemeClr val="bg1">
+                    <a:lumMod val="95000"/>
+                  </a:schemeClr>
+                </a:solidFill>
+              </a:rPr>
               <a:t>    }</a:t>
             </a:r>
-            <a:br/>
-            <a:r>
-              <a:t>    return nil</a:t>
-            </a:r>
-            <a:br/>
-            <a:r>
+            <a:br>
+              <a:rPr lang="es-ES" sz="1600" dirty="0">
+                <a:solidFill>
+                  <a:schemeClr val="bg1">
+                    <a:lumMod val="95000"/>
+                  </a:schemeClr>
+                </a:solidFill>
+              </a:rPr>
+            </a:br>
+            <a:r>
+              <a:rPr lang="es-ES" sz="1600" dirty="0">
+                <a:solidFill>
+                  <a:schemeClr val="bg1">
+                    <a:lumMod val="95000"/>
+                  </a:schemeClr>
+                </a:solidFill>
+              </a:rPr>
+              <a:t>    </a:t>
+            </a:r>
+            <a:r>
+              <a:rPr lang="es-ES" sz="1600" dirty="0" err="1">
+                <a:solidFill>
+                  <a:schemeClr val="bg1">
+                    <a:lumMod val="95000"/>
+                  </a:schemeClr>
+                </a:solidFill>
+              </a:rPr>
+              <a:t>return</a:t>
+            </a:r>
+            <a:r>
+              <a:rPr lang="es-ES" sz="1600" dirty="0">
+                <a:solidFill>
+                  <a:schemeClr val="bg1">
+                    <a:lumMod val="95000"/>
+                  </a:schemeClr>
+                </a:solidFill>
+              </a:rPr>
+              <a:t> </a:t>
+            </a:r>
+            <a:r>
+              <a:rPr lang="es-ES" sz="1600" dirty="0" err="1">
+                <a:solidFill>
+                  <a:schemeClr val="bg1">
+                    <a:lumMod val="95000"/>
+                  </a:schemeClr>
+                </a:solidFill>
+              </a:rPr>
+              <a:t>nil</a:t>
+            </a:r>
+            <a:br>
+              <a:rPr lang="es-ES" sz="1600" dirty="0">
+                <a:solidFill>
+                  <a:schemeClr val="bg1">
+                    <a:lumMod val="95000"/>
+                  </a:schemeClr>
+                </a:solidFill>
+              </a:rPr>
+            </a:br>
+            <a:r>
+              <a:rPr lang="es-ES" sz="1600" dirty="0">
+                <a:solidFill>
+                  <a:schemeClr val="bg1">
+                    <a:lumMod val="95000"/>
+                  </a:schemeClr>
+                </a:solidFill>
+              </a:rPr>
               <a:t>}</a:t>
             </a:r>
+            <a:endParaRPr lang="es-ES" sz="1600" dirty="0"/>
+          </a:p>
+        </p:txBody>
+      </p:sp>
+      <p:sp>
+        <p:nvSpPr>
+          <p:cNvPr id="11" name="Rectángulo 10">
+            <a:extLst>
+              <a:ext uri="{FF2B5EF4-FFF2-40B4-BE49-F238E27FC236}">
+                <a16:creationId xmlns:a16="http://schemas.microsoft.com/office/drawing/2014/main" id="{2323D0E1-B9F3-634F-6985-4684ECE9D515}"/>
+              </a:ext>
+            </a:extLst>
+          </p:cNvPr>
+          <p:cNvSpPr/>
+          <p:nvPr/>
+        </p:nvSpPr>
+        <p:spPr>
+          <a:xfrm>
+            <a:off x="6094412" y="1417320"/>
+            <a:ext cx="45719" cy="5120640"/>
+          </a:xfrm>
+          <a:prstGeom prst="rect">
+            <a:avLst/>
+          </a:prstGeom>
+        </p:spPr>
+        <p:style>
+          <a:lnRef idx="1">
+            <a:schemeClr val="accent1"/>
+          </a:lnRef>
+          <a:fillRef idx="3">
+            <a:schemeClr val="accent1"/>
+          </a:fillRef>
+          <a:effectRef idx="2">
+            <a:schemeClr val="accent1"/>
+          </a:effectRef>
+          <a:fontRef idx="minor">
+            <a:schemeClr val="lt1"/>
+          </a:fontRef>
+        </p:style>
+        <p:txBody>
+          <a:bodyPr rtlCol="0" anchor="ctr"/>
+          <a:lstStyle/>
+          <a:p>
+            <a:pPr algn="ctr"/>
+            <a:endParaRPr lang="es-ES"/>
           </a:p>
         </p:txBody>
       </p:sp>
@@ -9429,7 +13056,7 @@
 </file>
 
 <file path=ppt/slides/slide8.xml><?xml version="1.0" encoding="utf-8"?>
-<p:sld xmlns:a="http://schemas.openxmlformats.org/drawingml/2006/main" xmlns:p="http://schemas.openxmlformats.org/presentationml/2006/main" xmlns:r="http://schemas.openxmlformats.org/officeDocument/2006/relationships">
+<p:sld xmlns:a="http://schemas.openxmlformats.org/drawingml/2006/main" xmlns:r="http://schemas.openxmlformats.org/officeDocument/2006/relationships" xmlns:p="http://schemas.openxmlformats.org/presentationml/2006/main">
   <p:cSld>
     <p:spTree>
       <p:nvGrpSpPr>
@@ -9437,7 +13064,14 @@
         <p:cNvGrpSpPr/>
         <p:nvPr/>
       </p:nvGrpSpPr>
-      <p:grpSpPr/>
+      <p:grpSpPr>
+        <a:xfrm>
+          <a:off x="0" y="0"/>
+          <a:ext cx="0" cy="0"/>
+          <a:chOff x="0" y="0"/>
+          <a:chExt cx="0" cy="0"/>
+        </a:xfrm>
+      </p:grpSpPr>
       <p:sp>
         <p:nvSpPr>
           <p:cNvPr id="2" name="Rectangle 1"/>
@@ -9478,6 +13112,7 @@
           <a:lstStyle/>
           <a:p>
             <a:pPr algn="ctr"/>
+            <a:endParaRPr/>
           </a:p>
         </p:txBody>
       </p:sp>
@@ -9555,6 +13190,7 @@
           <a:lstStyle/>
           <a:p>
             <a:pPr algn="ctr"/>
+            <a:endParaRPr/>
           </a:p>
         </p:txBody>
       </p:sp>
@@ -9782,7 +13418,7 @@
 </file>
 
 <file path=ppt/slides/slide9.xml><?xml version="1.0" encoding="utf-8"?>
-<p:sld xmlns:a="http://schemas.openxmlformats.org/drawingml/2006/main" xmlns:p="http://schemas.openxmlformats.org/presentationml/2006/main" xmlns:r="http://schemas.openxmlformats.org/officeDocument/2006/relationships">
+<p:sld xmlns:a="http://schemas.openxmlformats.org/drawingml/2006/main" xmlns:r="http://schemas.openxmlformats.org/officeDocument/2006/relationships" xmlns:p="http://schemas.openxmlformats.org/presentationml/2006/main">
   <p:cSld>
     <p:spTree>
       <p:nvGrpSpPr>
@@ -9790,7 +13426,14 @@
         <p:cNvGrpSpPr/>
         <p:nvPr/>
       </p:nvGrpSpPr>
-      <p:grpSpPr/>
+      <p:grpSpPr>
+        <a:xfrm>
+          <a:off x="0" y="0"/>
+          <a:ext cx="0" cy="0"/>
+          <a:chOff x="0" y="0"/>
+          <a:chExt cx="0" cy="0"/>
+        </a:xfrm>
+      </p:grpSpPr>
       <p:sp>
         <p:nvSpPr>
           <p:cNvPr id="2" name="Rectangle 1"/>
@@ -9831,6 +13474,7 @@
           <a:lstStyle/>
           <a:p>
             <a:pPr algn="ctr"/>
+            <a:endParaRPr/>
           </a:p>
         </p:txBody>
       </p:sp>
@@ -9942,6 +13586,7 @@
           <a:lstStyle/>
           <a:p>
             <a:pPr algn="ctr"/>
+            <a:endParaRPr/>
           </a:p>
         </p:txBody>
       </p:sp>
@@ -10019,6 +13664,7 @@
           <a:lstStyle/>
           <a:p>
             <a:pPr algn="ctr"/>
+            <a:endParaRPr/>
           </a:p>
         </p:txBody>
       </p:sp>
@@ -10031,7 +13677,7 @@
         <p:spPr>
           <a:xfrm>
             <a:off x="731520" y="1600200"/>
-            <a:ext cx="10698480" cy="4754880"/>
+            <a:ext cx="5546617" cy="4754880"/>
           </a:xfrm>
           <a:prstGeom prst="rect">
             <a:avLst/>
@@ -10042,129 +13688,1601 @@
           <a:bodyPr wrap="square"/>
           <a:lstStyle/>
           <a:p>
-            <a:br/>
-            <a:pPr algn="l">
-              <a:defRPr sz="1500" b="0">
-                <a:solidFill>
-                  <a:srgbClr val="D4D4D4"/>
-                </a:solidFill>
-                <a:latin typeface="Consolas"/>
-              </a:defRPr>
-            </a:pPr>
-            <a:r>
-              <a:t>func (s *SmartContract) checkRole(ctx contractapi.TransactionContextInterface,</a:t>
-            </a:r>
-            <a:br/>
-            <a:r>
-              <a:t>    requiredRole string) error {</a:t>
-            </a:r>
-            <a:br/>
-            <a:br/>
-            <a:r>
-              <a:t>    role, found, err := ctx.GetClientIdentity().GetAttributeValue("role")</a:t>
-            </a:r>
-            <a:br/>
-            <a:r>
+            <a:br>
+              <a:rPr sz="1600" dirty="0">
+                <a:solidFill>
+                  <a:schemeClr val="bg1">
+                    <a:lumMod val="95000"/>
+                  </a:schemeClr>
+                </a:solidFill>
+              </a:rPr>
+            </a:br>
+            <a:r>
+              <a:rPr sz="1600" dirty="0" err="1">
+                <a:solidFill>
+                  <a:schemeClr val="bg1">
+                    <a:lumMod val="95000"/>
+                  </a:schemeClr>
+                </a:solidFill>
+              </a:rPr>
+              <a:t>func</a:t>
+            </a:r>
+            <a:r>
+              <a:rPr sz="1600" dirty="0">
+                <a:solidFill>
+                  <a:schemeClr val="bg1">
+                    <a:lumMod val="95000"/>
+                  </a:schemeClr>
+                </a:solidFill>
+              </a:rPr>
+              <a:t> (s *</a:t>
+            </a:r>
+            <a:r>
+              <a:rPr sz="1600" dirty="0" err="1">
+                <a:solidFill>
+                  <a:schemeClr val="bg1">
+                    <a:lumMod val="95000"/>
+                  </a:schemeClr>
+                </a:solidFill>
+              </a:rPr>
+              <a:t>SmartContract</a:t>
+            </a:r>
+            <a:r>
+              <a:rPr sz="1600" dirty="0">
+                <a:solidFill>
+                  <a:schemeClr val="bg1">
+                    <a:lumMod val="95000"/>
+                  </a:schemeClr>
+                </a:solidFill>
+              </a:rPr>
+              <a:t>) </a:t>
+            </a:r>
+            <a:r>
+              <a:rPr sz="1600" dirty="0" err="1">
+                <a:solidFill>
+                  <a:schemeClr val="bg1">
+                    <a:lumMod val="95000"/>
+                  </a:schemeClr>
+                </a:solidFill>
+              </a:rPr>
+              <a:t>checkRole</a:t>
+            </a:r>
+            <a:r>
+              <a:rPr sz="1600" dirty="0">
+                <a:solidFill>
+                  <a:schemeClr val="bg1">
+                    <a:lumMod val="95000"/>
+                  </a:schemeClr>
+                </a:solidFill>
+              </a:rPr>
+              <a:t>(</a:t>
+            </a:r>
+            <a:r>
+              <a:rPr sz="1600" dirty="0" err="1">
+                <a:solidFill>
+                  <a:schemeClr val="bg1">
+                    <a:lumMod val="95000"/>
+                  </a:schemeClr>
+                </a:solidFill>
+              </a:rPr>
+              <a:t>ctx</a:t>
+            </a:r>
+            <a:r>
+              <a:rPr sz="1600" dirty="0">
+                <a:solidFill>
+                  <a:schemeClr val="bg1">
+                    <a:lumMod val="95000"/>
+                  </a:schemeClr>
+                </a:solidFill>
+              </a:rPr>
+              <a:t> </a:t>
+            </a:r>
+            <a:r>
+              <a:rPr sz="1600" dirty="0" err="1">
+                <a:solidFill>
+                  <a:schemeClr val="bg1">
+                    <a:lumMod val="95000"/>
+                  </a:schemeClr>
+                </a:solidFill>
+              </a:rPr>
+              <a:t>contractapi.TransactionContextInterface</a:t>
+            </a:r>
+            <a:r>
+              <a:rPr sz="1600" dirty="0">
+                <a:solidFill>
+                  <a:schemeClr val="bg1">
+                    <a:lumMod val="95000"/>
+                  </a:schemeClr>
+                </a:solidFill>
+              </a:rPr>
+              <a:t>,</a:t>
+            </a:r>
+            <a:br>
+              <a:rPr sz="1600" dirty="0">
+                <a:solidFill>
+                  <a:schemeClr val="bg1">
+                    <a:lumMod val="95000"/>
+                  </a:schemeClr>
+                </a:solidFill>
+              </a:rPr>
+            </a:br>
+            <a:r>
+              <a:rPr sz="1600" dirty="0">
+                <a:solidFill>
+                  <a:schemeClr val="bg1">
+                    <a:lumMod val="95000"/>
+                  </a:schemeClr>
+                </a:solidFill>
+              </a:rPr>
+              <a:t>    </a:t>
+            </a:r>
+            <a:r>
+              <a:rPr sz="1600" dirty="0" err="1">
+                <a:solidFill>
+                  <a:schemeClr val="bg1">
+                    <a:lumMod val="95000"/>
+                  </a:schemeClr>
+                </a:solidFill>
+              </a:rPr>
+              <a:t>requiredRole</a:t>
+            </a:r>
+            <a:r>
+              <a:rPr sz="1600" dirty="0">
+                <a:solidFill>
+                  <a:schemeClr val="bg1">
+                    <a:lumMod val="95000"/>
+                  </a:schemeClr>
+                </a:solidFill>
+              </a:rPr>
+              <a:t> string) error {</a:t>
+            </a:r>
+            <a:br>
+              <a:rPr sz="1600" dirty="0">
+                <a:solidFill>
+                  <a:schemeClr val="bg1">
+                    <a:lumMod val="95000"/>
+                  </a:schemeClr>
+                </a:solidFill>
+              </a:rPr>
+            </a:br>
+            <a:br>
+              <a:rPr sz="1600" dirty="0">
+                <a:solidFill>
+                  <a:schemeClr val="bg1">
+                    <a:lumMod val="95000"/>
+                  </a:schemeClr>
+                </a:solidFill>
+              </a:rPr>
+            </a:br>
+            <a:r>
+              <a:rPr sz="1600" dirty="0">
+                <a:solidFill>
+                  <a:schemeClr val="bg1">
+                    <a:lumMod val="95000"/>
+                  </a:schemeClr>
+                </a:solidFill>
+              </a:rPr>
+              <a:t>    role, found, err := </a:t>
+            </a:r>
+            <a:r>
+              <a:rPr sz="1600" dirty="0" err="1">
+                <a:solidFill>
+                  <a:schemeClr val="bg1">
+                    <a:lumMod val="95000"/>
+                  </a:schemeClr>
+                </a:solidFill>
+              </a:rPr>
+              <a:t>ctx.GetClientIdentity</a:t>
+            </a:r>
+            <a:r>
+              <a:rPr sz="1600" dirty="0">
+                <a:solidFill>
+                  <a:schemeClr val="bg1">
+                    <a:lumMod val="95000"/>
+                  </a:schemeClr>
+                </a:solidFill>
+              </a:rPr>
+              <a:t>().</a:t>
+            </a:r>
+            <a:r>
+              <a:rPr sz="1600" dirty="0" err="1">
+                <a:solidFill>
+                  <a:schemeClr val="bg1">
+                    <a:lumMod val="95000"/>
+                  </a:schemeClr>
+                </a:solidFill>
+              </a:rPr>
+              <a:t>GetAttributeValue</a:t>
+            </a:r>
+            <a:r>
+              <a:rPr sz="1600" dirty="0">
+                <a:solidFill>
+                  <a:schemeClr val="bg1">
+                    <a:lumMod val="95000"/>
+                  </a:schemeClr>
+                </a:solidFill>
+              </a:rPr>
+              <a:t>("role")</a:t>
+            </a:r>
+            <a:br>
+              <a:rPr sz="1600" dirty="0">
+                <a:solidFill>
+                  <a:schemeClr val="bg1">
+                    <a:lumMod val="95000"/>
+                  </a:schemeClr>
+                </a:solidFill>
+              </a:rPr>
+            </a:br>
+            <a:r>
+              <a:rPr sz="1600" dirty="0">
+                <a:solidFill>
+                  <a:schemeClr val="bg1">
+                    <a:lumMod val="95000"/>
+                  </a:schemeClr>
+                </a:solidFill>
+              </a:rPr>
               <a:t>    if err != nil {</a:t>
             </a:r>
-            <a:br/>
-            <a:r>
-              <a:t>        return fmt.Errorf("error leyendo atributo role: %v", err)</a:t>
-            </a:r>
-            <a:br/>
-            <a:r>
+            <a:br>
+              <a:rPr sz="1600" dirty="0">
+                <a:solidFill>
+                  <a:schemeClr val="bg1">
+                    <a:lumMod val="95000"/>
+                  </a:schemeClr>
+                </a:solidFill>
+              </a:rPr>
+            </a:br>
+            <a:r>
+              <a:rPr sz="1600" dirty="0">
+                <a:solidFill>
+                  <a:schemeClr val="bg1">
+                    <a:lumMod val="95000"/>
+                  </a:schemeClr>
+                </a:solidFill>
+              </a:rPr>
+              <a:t>        return </a:t>
+            </a:r>
+            <a:r>
+              <a:rPr sz="1600" dirty="0" err="1">
+                <a:solidFill>
+                  <a:schemeClr val="bg1">
+                    <a:lumMod val="95000"/>
+                  </a:schemeClr>
+                </a:solidFill>
+              </a:rPr>
+              <a:t>fmt.Errorf</a:t>
+            </a:r>
+            <a:r>
+              <a:rPr sz="1600" dirty="0">
+                <a:solidFill>
+                  <a:schemeClr val="bg1">
+                    <a:lumMod val="95000"/>
+                  </a:schemeClr>
+                </a:solidFill>
+              </a:rPr>
+              <a:t>("error </a:t>
+            </a:r>
+            <a:r>
+              <a:rPr sz="1600" dirty="0" err="1">
+                <a:solidFill>
+                  <a:schemeClr val="bg1">
+                    <a:lumMod val="95000"/>
+                  </a:schemeClr>
+                </a:solidFill>
+              </a:rPr>
+              <a:t>leyendo</a:t>
+            </a:r>
+            <a:r>
+              <a:rPr sz="1600" dirty="0">
+                <a:solidFill>
+                  <a:schemeClr val="bg1">
+                    <a:lumMod val="95000"/>
+                  </a:schemeClr>
+                </a:solidFill>
+              </a:rPr>
+              <a:t> </a:t>
+            </a:r>
+            <a:r>
+              <a:rPr sz="1600" dirty="0" err="1">
+                <a:solidFill>
+                  <a:schemeClr val="bg1">
+                    <a:lumMod val="95000"/>
+                  </a:schemeClr>
+                </a:solidFill>
+              </a:rPr>
+              <a:t>atributo</a:t>
+            </a:r>
+            <a:r>
+              <a:rPr sz="1600" dirty="0">
+                <a:solidFill>
+                  <a:schemeClr val="bg1">
+                    <a:lumMod val="95000"/>
+                  </a:schemeClr>
+                </a:solidFill>
+              </a:rPr>
+              <a:t> role: %v", err)</a:t>
+            </a:r>
+            <a:br>
+              <a:rPr sz="1600" dirty="0">
+                <a:solidFill>
+                  <a:schemeClr val="bg1">
+                    <a:lumMod val="95000"/>
+                  </a:schemeClr>
+                </a:solidFill>
+              </a:rPr>
+            </a:br>
+            <a:r>
+              <a:rPr sz="1600" dirty="0">
+                <a:solidFill>
+                  <a:schemeClr val="bg1">
+                    <a:lumMod val="95000"/>
+                  </a:schemeClr>
+                </a:solidFill>
+              </a:rPr>
               <a:t>    }</a:t>
             </a:r>
-            <a:br/>
-            <a:r>
+            <a:br>
+              <a:rPr sz="1600" dirty="0">
+                <a:solidFill>
+                  <a:schemeClr val="bg1">
+                    <a:lumMod val="95000"/>
+                  </a:schemeClr>
+                </a:solidFill>
+              </a:rPr>
+            </a:br>
+            <a:r>
+              <a:rPr sz="1600" dirty="0">
+                <a:solidFill>
+                  <a:schemeClr val="bg1">
+                    <a:lumMod val="95000"/>
+                  </a:schemeClr>
+                </a:solidFill>
+              </a:rPr>
               <a:t>    if !found {</a:t>
             </a:r>
-            <a:br/>
-            <a:r>
-              <a:t>        return fmt.Errorf("el certificado no tiene atributo 'role'")</a:t>
-            </a:r>
-            <a:br/>
-            <a:r>
+            <a:br>
+              <a:rPr sz="1600" dirty="0">
+                <a:solidFill>
+                  <a:schemeClr val="bg1">
+                    <a:lumMod val="95000"/>
+                  </a:schemeClr>
+                </a:solidFill>
+              </a:rPr>
+            </a:br>
+            <a:r>
+              <a:rPr sz="1600" dirty="0">
+                <a:solidFill>
+                  <a:schemeClr val="bg1">
+                    <a:lumMod val="95000"/>
+                  </a:schemeClr>
+                </a:solidFill>
+              </a:rPr>
+              <a:t>        return </a:t>
+            </a:r>
+            <a:r>
+              <a:rPr sz="1600" dirty="0" err="1">
+                <a:solidFill>
+                  <a:schemeClr val="bg1">
+                    <a:lumMod val="95000"/>
+                  </a:schemeClr>
+                </a:solidFill>
+              </a:rPr>
+              <a:t>fmt.Errorf</a:t>
+            </a:r>
+            <a:r>
+              <a:rPr sz="1600" dirty="0">
+                <a:solidFill>
+                  <a:schemeClr val="bg1">
+                    <a:lumMod val="95000"/>
+                  </a:schemeClr>
+                </a:solidFill>
+              </a:rPr>
+              <a:t>("</a:t>
+            </a:r>
+            <a:r>
+              <a:rPr sz="1600" dirty="0" err="1">
+                <a:solidFill>
+                  <a:schemeClr val="bg1">
+                    <a:lumMod val="95000"/>
+                  </a:schemeClr>
+                </a:solidFill>
+              </a:rPr>
+              <a:t>el</a:t>
+            </a:r>
+            <a:r>
+              <a:rPr sz="1600" dirty="0">
+                <a:solidFill>
+                  <a:schemeClr val="bg1">
+                    <a:lumMod val="95000"/>
+                  </a:schemeClr>
+                </a:solidFill>
+              </a:rPr>
+              <a:t> </a:t>
+            </a:r>
+            <a:r>
+              <a:rPr sz="1600" dirty="0" err="1">
+                <a:solidFill>
+                  <a:schemeClr val="bg1">
+                    <a:lumMod val="95000"/>
+                  </a:schemeClr>
+                </a:solidFill>
+              </a:rPr>
+              <a:t>certificado</a:t>
+            </a:r>
+            <a:r>
+              <a:rPr sz="1600" dirty="0">
+                <a:solidFill>
+                  <a:schemeClr val="bg1">
+                    <a:lumMod val="95000"/>
+                  </a:schemeClr>
+                </a:solidFill>
+              </a:rPr>
+              <a:t> no </a:t>
+            </a:r>
+            <a:r>
+              <a:rPr sz="1600" dirty="0" err="1">
+                <a:solidFill>
+                  <a:schemeClr val="bg1">
+                    <a:lumMod val="95000"/>
+                  </a:schemeClr>
+                </a:solidFill>
+              </a:rPr>
+              <a:t>tiene</a:t>
+            </a:r>
+            <a:r>
+              <a:rPr sz="1600" dirty="0">
+                <a:solidFill>
+                  <a:schemeClr val="bg1">
+                    <a:lumMod val="95000"/>
+                  </a:schemeClr>
+                </a:solidFill>
+              </a:rPr>
+              <a:t> </a:t>
+            </a:r>
+            <a:r>
+              <a:rPr sz="1600" dirty="0" err="1">
+                <a:solidFill>
+                  <a:schemeClr val="bg1">
+                    <a:lumMod val="95000"/>
+                  </a:schemeClr>
+                </a:solidFill>
+              </a:rPr>
+              <a:t>atributo</a:t>
+            </a:r>
+            <a:r>
+              <a:rPr sz="1600" dirty="0">
+                <a:solidFill>
+                  <a:schemeClr val="bg1">
+                    <a:lumMod val="95000"/>
+                  </a:schemeClr>
+                </a:solidFill>
+              </a:rPr>
+              <a:t> 'role'")</a:t>
+            </a:r>
+            <a:br>
+              <a:rPr sz="1600" dirty="0">
+                <a:solidFill>
+                  <a:schemeClr val="bg1">
+                    <a:lumMod val="95000"/>
+                  </a:schemeClr>
+                </a:solidFill>
+              </a:rPr>
+            </a:br>
+            <a:r>
+              <a:rPr sz="1600" dirty="0">
+                <a:solidFill>
+                  <a:schemeClr val="bg1">
+                    <a:lumMod val="95000"/>
+                  </a:schemeClr>
+                </a:solidFill>
+              </a:rPr>
               <a:t>    }</a:t>
             </a:r>
-            <a:br/>
-            <a:r>
-              <a:t>    if role != requiredRole {</a:t>
-            </a:r>
-            <a:br/>
-            <a:r>
-              <a:t>        return fmt.Errorf("rol requerido: %s, rol actual: %s",</a:t>
-            </a:r>
-            <a:br/>
-            <a:r>
-              <a:t>            requiredRole, role)</a:t>
-            </a:r>
-            <a:br/>
-            <a:r>
+            <a:br>
+              <a:rPr sz="1600" dirty="0">
+                <a:solidFill>
+                  <a:schemeClr val="bg1">
+                    <a:lumMod val="95000"/>
+                  </a:schemeClr>
+                </a:solidFill>
+              </a:rPr>
+            </a:br>
+            <a:r>
+              <a:rPr sz="1600" dirty="0">
+                <a:solidFill>
+                  <a:schemeClr val="bg1">
+                    <a:lumMod val="95000"/>
+                  </a:schemeClr>
+                </a:solidFill>
+              </a:rPr>
+              <a:t>    if role != </a:t>
+            </a:r>
+            <a:r>
+              <a:rPr sz="1600" dirty="0" err="1">
+                <a:solidFill>
+                  <a:schemeClr val="bg1">
+                    <a:lumMod val="95000"/>
+                  </a:schemeClr>
+                </a:solidFill>
+              </a:rPr>
+              <a:t>requiredRole</a:t>
+            </a:r>
+            <a:r>
+              <a:rPr sz="1600" dirty="0">
+                <a:solidFill>
+                  <a:schemeClr val="bg1">
+                    <a:lumMod val="95000"/>
+                  </a:schemeClr>
+                </a:solidFill>
+              </a:rPr>
+              <a:t> {</a:t>
+            </a:r>
+            <a:br>
+              <a:rPr sz="1600" dirty="0">
+                <a:solidFill>
+                  <a:schemeClr val="bg1">
+                    <a:lumMod val="95000"/>
+                  </a:schemeClr>
+                </a:solidFill>
+              </a:rPr>
+            </a:br>
+            <a:r>
+              <a:rPr sz="1600" dirty="0">
+                <a:solidFill>
+                  <a:schemeClr val="bg1">
+                    <a:lumMod val="95000"/>
+                  </a:schemeClr>
+                </a:solidFill>
+              </a:rPr>
+              <a:t>        return </a:t>
+            </a:r>
+            <a:r>
+              <a:rPr sz="1600" dirty="0" err="1">
+                <a:solidFill>
+                  <a:schemeClr val="bg1">
+                    <a:lumMod val="95000"/>
+                  </a:schemeClr>
+                </a:solidFill>
+              </a:rPr>
+              <a:t>fmt.Errorf</a:t>
+            </a:r>
+            <a:r>
+              <a:rPr sz="1600" dirty="0">
+                <a:solidFill>
+                  <a:schemeClr val="bg1">
+                    <a:lumMod val="95000"/>
+                  </a:schemeClr>
+                </a:solidFill>
+              </a:rPr>
+              <a:t>("</a:t>
+            </a:r>
+            <a:r>
+              <a:rPr sz="1600" dirty="0" err="1">
+                <a:solidFill>
+                  <a:schemeClr val="bg1">
+                    <a:lumMod val="95000"/>
+                  </a:schemeClr>
+                </a:solidFill>
+              </a:rPr>
+              <a:t>rol</a:t>
+            </a:r>
+            <a:r>
+              <a:rPr sz="1600" dirty="0">
+                <a:solidFill>
+                  <a:schemeClr val="bg1">
+                    <a:lumMod val="95000"/>
+                  </a:schemeClr>
+                </a:solidFill>
+              </a:rPr>
+              <a:t> </a:t>
+            </a:r>
+            <a:r>
+              <a:rPr sz="1600" dirty="0" err="1">
+                <a:solidFill>
+                  <a:schemeClr val="bg1">
+                    <a:lumMod val="95000"/>
+                  </a:schemeClr>
+                </a:solidFill>
+              </a:rPr>
+              <a:t>requerido</a:t>
+            </a:r>
+            <a:r>
+              <a:rPr sz="1600" dirty="0">
+                <a:solidFill>
+                  <a:schemeClr val="bg1">
+                    <a:lumMod val="95000"/>
+                  </a:schemeClr>
+                </a:solidFill>
+              </a:rPr>
+              <a:t>: %s, </a:t>
+            </a:r>
+            <a:r>
+              <a:rPr sz="1600" dirty="0" err="1">
+                <a:solidFill>
+                  <a:schemeClr val="bg1">
+                    <a:lumMod val="95000"/>
+                  </a:schemeClr>
+                </a:solidFill>
+              </a:rPr>
+              <a:t>rol</a:t>
+            </a:r>
+            <a:r>
+              <a:rPr sz="1600" dirty="0">
+                <a:solidFill>
+                  <a:schemeClr val="bg1">
+                    <a:lumMod val="95000"/>
+                  </a:schemeClr>
+                </a:solidFill>
+              </a:rPr>
+              <a:t> actual: %s",</a:t>
+            </a:r>
+            <a:br>
+              <a:rPr sz="1600" dirty="0">
+                <a:solidFill>
+                  <a:schemeClr val="bg1">
+                    <a:lumMod val="95000"/>
+                  </a:schemeClr>
+                </a:solidFill>
+              </a:rPr>
+            </a:br>
+            <a:r>
+              <a:rPr sz="1600" dirty="0">
+                <a:solidFill>
+                  <a:schemeClr val="bg1">
+                    <a:lumMod val="95000"/>
+                  </a:schemeClr>
+                </a:solidFill>
+              </a:rPr>
+              <a:t>            </a:t>
+            </a:r>
+            <a:r>
+              <a:rPr sz="1600" dirty="0" err="1">
+                <a:solidFill>
+                  <a:schemeClr val="bg1">
+                    <a:lumMod val="95000"/>
+                  </a:schemeClr>
+                </a:solidFill>
+              </a:rPr>
+              <a:t>requiredRole</a:t>
+            </a:r>
+            <a:r>
+              <a:rPr sz="1600" dirty="0">
+                <a:solidFill>
+                  <a:schemeClr val="bg1">
+                    <a:lumMod val="95000"/>
+                  </a:schemeClr>
+                </a:solidFill>
+              </a:rPr>
+              <a:t>, role)</a:t>
+            </a:r>
+            <a:br>
+              <a:rPr sz="1600" dirty="0">
+                <a:solidFill>
+                  <a:schemeClr val="bg1">
+                    <a:lumMod val="95000"/>
+                  </a:schemeClr>
+                </a:solidFill>
+              </a:rPr>
+            </a:br>
+            <a:r>
+              <a:rPr sz="1600" dirty="0">
+                <a:solidFill>
+                  <a:schemeClr val="bg1">
+                    <a:lumMod val="95000"/>
+                  </a:schemeClr>
+                </a:solidFill>
+              </a:rPr>
               <a:t>    }</a:t>
             </a:r>
-            <a:br/>
-            <a:r>
+            <a:br>
+              <a:rPr sz="1600" dirty="0">
+                <a:solidFill>
+                  <a:schemeClr val="bg1">
+                    <a:lumMod val="95000"/>
+                  </a:schemeClr>
+                </a:solidFill>
+              </a:rPr>
+            </a:br>
+            <a:r>
+              <a:rPr sz="1600" dirty="0">
+                <a:solidFill>
+                  <a:schemeClr val="bg1">
+                    <a:lumMod val="95000"/>
+                  </a:schemeClr>
+                </a:solidFill>
+              </a:rPr>
               <a:t>    return nil</a:t>
             </a:r>
-            <a:br/>
-            <a:r>
+            <a:br>
+              <a:rPr sz="1600" dirty="0">
+                <a:solidFill>
+                  <a:schemeClr val="bg1">
+                    <a:lumMod val="95000"/>
+                  </a:schemeClr>
+                </a:solidFill>
+              </a:rPr>
+            </a:br>
+            <a:r>
+              <a:rPr sz="1600" dirty="0">
+                <a:solidFill>
+                  <a:schemeClr val="bg1">
+                    <a:lumMod val="95000"/>
+                  </a:schemeClr>
+                </a:solidFill>
+              </a:rPr>
               <a:t>}</a:t>
             </a:r>
-            <a:br/>
-            <a:br/>
-            <a:r>
-              <a:t>// Uso en funciones del chaincode:</a:t>
-            </a:r>
-            <a:br/>
-            <a:r>
-              <a:t>func (s *SmartContract) ApproveTransfer(ctx ...) error {</a:t>
-            </a:r>
-            <a:br/>
-            <a:r>
-              <a:t>    if err := s.checkRole(ctx, "registrador"); err != nil {</a:t>
-            </a:r>
-            <a:br/>
-            <a:r>
-              <a:t>        return err</a:t>
-            </a:r>
-            <a:br/>
-            <a:r>
+          </a:p>
+        </p:txBody>
+      </p:sp>
+      <p:sp>
+        <p:nvSpPr>
+          <p:cNvPr id="10" name="CuadroTexto 9">
+            <a:extLst>
+              <a:ext uri="{FF2B5EF4-FFF2-40B4-BE49-F238E27FC236}">
+                <a16:creationId xmlns:a16="http://schemas.microsoft.com/office/drawing/2014/main" id="{5597AE08-AF36-10CA-6D70-63C0F22F7FDE}"/>
+              </a:ext>
+            </a:extLst>
+          </p:cNvPr>
+          <p:cNvSpPr txBox="1"/>
+          <p:nvPr/>
+        </p:nvSpPr>
+        <p:spPr>
+          <a:xfrm>
+            <a:off x="6902574" y="1472121"/>
+            <a:ext cx="4554731" cy="4770537"/>
+          </a:xfrm>
+          <a:prstGeom prst="rect">
+            <a:avLst/>
+          </a:prstGeom>
+          <a:noFill/>
+        </p:spPr>
+        <p:txBody>
+          <a:bodyPr wrap="square">
+            <a:spAutoFit/>
+          </a:bodyPr>
+          <a:lstStyle/>
+          <a:p>
+            <a:br>
+              <a:rPr lang="es-ES" sz="1600" dirty="0">
+                <a:solidFill>
+                  <a:schemeClr val="bg1">
+                    <a:lumMod val="95000"/>
+                  </a:schemeClr>
+                </a:solidFill>
+              </a:rPr>
+            </a:br>
+            <a:br>
+              <a:rPr lang="es-ES" sz="1600" dirty="0">
+                <a:solidFill>
+                  <a:schemeClr val="bg1">
+                    <a:lumMod val="95000"/>
+                  </a:schemeClr>
+                </a:solidFill>
+              </a:rPr>
+            </a:br>
+            <a:r>
+              <a:rPr lang="es-ES" sz="1600" dirty="0">
+                <a:solidFill>
+                  <a:schemeClr val="bg1">
+                    <a:lumMod val="95000"/>
+                  </a:schemeClr>
+                </a:solidFill>
+              </a:rPr>
+              <a:t>// Uso en funciones del </a:t>
+            </a:r>
+            <a:r>
+              <a:rPr lang="es-ES" sz="1600" dirty="0" err="1">
+                <a:solidFill>
+                  <a:schemeClr val="bg1">
+                    <a:lumMod val="95000"/>
+                  </a:schemeClr>
+                </a:solidFill>
+              </a:rPr>
+              <a:t>chaincode</a:t>
+            </a:r>
+            <a:r>
+              <a:rPr lang="es-ES" sz="1600" dirty="0">
+                <a:solidFill>
+                  <a:schemeClr val="bg1">
+                    <a:lumMod val="95000"/>
+                  </a:schemeClr>
+                </a:solidFill>
+              </a:rPr>
+              <a:t>:</a:t>
+            </a:r>
+            <a:br>
+              <a:rPr lang="es-ES" sz="1600" dirty="0">
+                <a:solidFill>
+                  <a:schemeClr val="bg1">
+                    <a:lumMod val="95000"/>
+                  </a:schemeClr>
+                </a:solidFill>
+              </a:rPr>
+            </a:br>
+            <a:r>
+              <a:rPr lang="es-ES" sz="1600" dirty="0" err="1">
+                <a:solidFill>
+                  <a:schemeClr val="bg1">
+                    <a:lumMod val="95000"/>
+                  </a:schemeClr>
+                </a:solidFill>
+              </a:rPr>
+              <a:t>func</a:t>
+            </a:r>
+            <a:r>
+              <a:rPr lang="es-ES" sz="1600" dirty="0">
+                <a:solidFill>
+                  <a:schemeClr val="bg1">
+                    <a:lumMod val="95000"/>
+                  </a:schemeClr>
+                </a:solidFill>
+              </a:rPr>
+              <a:t> (s *</a:t>
+            </a:r>
+            <a:r>
+              <a:rPr lang="es-ES" sz="1600" dirty="0" err="1">
+                <a:solidFill>
+                  <a:schemeClr val="bg1">
+                    <a:lumMod val="95000"/>
+                  </a:schemeClr>
+                </a:solidFill>
+              </a:rPr>
+              <a:t>SmartContract</a:t>
+            </a:r>
+            <a:r>
+              <a:rPr lang="es-ES" sz="1600" dirty="0">
+                <a:solidFill>
+                  <a:schemeClr val="bg1">
+                    <a:lumMod val="95000"/>
+                  </a:schemeClr>
+                </a:solidFill>
+              </a:rPr>
+              <a:t>) </a:t>
+            </a:r>
+            <a:r>
+              <a:rPr lang="es-ES" sz="1600" dirty="0" err="1">
+                <a:solidFill>
+                  <a:schemeClr val="bg1">
+                    <a:lumMod val="95000"/>
+                  </a:schemeClr>
+                </a:solidFill>
+              </a:rPr>
+              <a:t>ApproveTransfer</a:t>
+            </a:r>
+            <a:r>
+              <a:rPr lang="es-ES" sz="1600" dirty="0">
+                <a:solidFill>
+                  <a:schemeClr val="bg1">
+                    <a:lumMod val="95000"/>
+                  </a:schemeClr>
+                </a:solidFill>
+              </a:rPr>
+              <a:t>(</a:t>
+            </a:r>
+            <a:r>
+              <a:rPr lang="es-ES" sz="1600" dirty="0" err="1">
+                <a:solidFill>
+                  <a:schemeClr val="bg1">
+                    <a:lumMod val="95000"/>
+                  </a:schemeClr>
+                </a:solidFill>
+              </a:rPr>
+              <a:t>ctx</a:t>
+            </a:r>
+            <a:r>
+              <a:rPr lang="es-ES" sz="1600" dirty="0">
+                <a:solidFill>
+                  <a:schemeClr val="bg1">
+                    <a:lumMod val="95000"/>
+                  </a:schemeClr>
+                </a:solidFill>
+              </a:rPr>
+              <a:t> ...) error {</a:t>
+            </a:r>
+            <a:br>
+              <a:rPr lang="es-ES" sz="1600" dirty="0">
+                <a:solidFill>
+                  <a:schemeClr val="bg1">
+                    <a:lumMod val="95000"/>
+                  </a:schemeClr>
+                </a:solidFill>
+              </a:rPr>
+            </a:br>
+            <a:r>
+              <a:rPr lang="es-ES" sz="1600" dirty="0">
+                <a:solidFill>
+                  <a:schemeClr val="bg1">
+                    <a:lumMod val="95000"/>
+                  </a:schemeClr>
+                </a:solidFill>
+              </a:rPr>
+              <a:t>    </a:t>
+            </a:r>
+            <a:r>
+              <a:rPr lang="es-ES" sz="1600" dirty="0" err="1">
+                <a:solidFill>
+                  <a:schemeClr val="bg1">
+                    <a:lumMod val="95000"/>
+                  </a:schemeClr>
+                </a:solidFill>
+              </a:rPr>
+              <a:t>if</a:t>
+            </a:r>
+            <a:r>
+              <a:rPr lang="es-ES" sz="1600" dirty="0">
+                <a:solidFill>
+                  <a:schemeClr val="bg1">
+                    <a:lumMod val="95000"/>
+                  </a:schemeClr>
+                </a:solidFill>
+              </a:rPr>
+              <a:t> </a:t>
+            </a:r>
+            <a:r>
+              <a:rPr lang="es-ES" sz="1600" dirty="0" err="1">
+                <a:solidFill>
+                  <a:schemeClr val="bg1">
+                    <a:lumMod val="95000"/>
+                  </a:schemeClr>
+                </a:solidFill>
+              </a:rPr>
+              <a:t>err</a:t>
+            </a:r>
+            <a:r>
+              <a:rPr lang="es-ES" sz="1600" dirty="0">
+                <a:solidFill>
+                  <a:schemeClr val="bg1">
+                    <a:lumMod val="95000"/>
+                  </a:schemeClr>
+                </a:solidFill>
+              </a:rPr>
+              <a:t> := </a:t>
+            </a:r>
+            <a:r>
+              <a:rPr lang="es-ES" sz="1600" dirty="0" err="1">
+                <a:solidFill>
+                  <a:schemeClr val="bg1">
+                    <a:lumMod val="95000"/>
+                  </a:schemeClr>
+                </a:solidFill>
+              </a:rPr>
+              <a:t>s.checkRole</a:t>
+            </a:r>
+            <a:r>
+              <a:rPr lang="es-ES" sz="1600" dirty="0">
+                <a:solidFill>
+                  <a:schemeClr val="bg1">
+                    <a:lumMod val="95000"/>
+                  </a:schemeClr>
+                </a:solidFill>
+              </a:rPr>
+              <a:t>(</a:t>
+            </a:r>
+            <a:r>
+              <a:rPr lang="es-ES" sz="1600" dirty="0" err="1">
+                <a:solidFill>
+                  <a:schemeClr val="bg1">
+                    <a:lumMod val="95000"/>
+                  </a:schemeClr>
+                </a:solidFill>
+              </a:rPr>
+              <a:t>ctx</a:t>
+            </a:r>
+            <a:r>
+              <a:rPr lang="es-ES" sz="1600" dirty="0">
+                <a:solidFill>
+                  <a:schemeClr val="bg1">
+                    <a:lumMod val="95000"/>
+                  </a:schemeClr>
+                </a:solidFill>
+              </a:rPr>
+              <a:t>, "registrador"); </a:t>
+            </a:r>
+            <a:r>
+              <a:rPr lang="es-ES" sz="1600" dirty="0" err="1">
+                <a:solidFill>
+                  <a:schemeClr val="bg1">
+                    <a:lumMod val="95000"/>
+                  </a:schemeClr>
+                </a:solidFill>
+              </a:rPr>
+              <a:t>err</a:t>
+            </a:r>
+            <a:r>
+              <a:rPr lang="es-ES" sz="1600" dirty="0">
+                <a:solidFill>
+                  <a:schemeClr val="bg1">
+                    <a:lumMod val="95000"/>
+                  </a:schemeClr>
+                </a:solidFill>
+              </a:rPr>
+              <a:t> != </a:t>
+            </a:r>
+            <a:r>
+              <a:rPr lang="es-ES" sz="1600" dirty="0" err="1">
+                <a:solidFill>
+                  <a:schemeClr val="bg1">
+                    <a:lumMod val="95000"/>
+                  </a:schemeClr>
+                </a:solidFill>
+              </a:rPr>
+              <a:t>nil</a:t>
+            </a:r>
+            <a:r>
+              <a:rPr lang="es-ES" sz="1600" dirty="0">
+                <a:solidFill>
+                  <a:schemeClr val="bg1">
+                    <a:lumMod val="95000"/>
+                  </a:schemeClr>
+                </a:solidFill>
+              </a:rPr>
+              <a:t> {</a:t>
+            </a:r>
+            <a:br>
+              <a:rPr lang="es-ES" sz="1600" dirty="0">
+                <a:solidFill>
+                  <a:schemeClr val="bg1">
+                    <a:lumMod val="95000"/>
+                  </a:schemeClr>
+                </a:solidFill>
+              </a:rPr>
+            </a:br>
+            <a:r>
+              <a:rPr lang="es-ES" sz="1600" dirty="0">
+                <a:solidFill>
+                  <a:schemeClr val="bg1">
+                    <a:lumMod val="95000"/>
+                  </a:schemeClr>
+                </a:solidFill>
+              </a:rPr>
+              <a:t>        </a:t>
+            </a:r>
+            <a:r>
+              <a:rPr lang="es-ES" sz="1600" dirty="0" err="1">
+                <a:solidFill>
+                  <a:schemeClr val="bg1">
+                    <a:lumMod val="95000"/>
+                  </a:schemeClr>
+                </a:solidFill>
+              </a:rPr>
+              <a:t>return</a:t>
+            </a:r>
+            <a:r>
+              <a:rPr lang="es-ES" sz="1600" dirty="0">
+                <a:solidFill>
+                  <a:schemeClr val="bg1">
+                    <a:lumMod val="95000"/>
+                  </a:schemeClr>
+                </a:solidFill>
+              </a:rPr>
+              <a:t> </a:t>
+            </a:r>
+            <a:r>
+              <a:rPr lang="es-ES" sz="1600" dirty="0" err="1">
+                <a:solidFill>
+                  <a:schemeClr val="bg1">
+                    <a:lumMod val="95000"/>
+                  </a:schemeClr>
+                </a:solidFill>
+              </a:rPr>
+              <a:t>err</a:t>
+            </a:r>
+            <a:br>
+              <a:rPr lang="es-ES" sz="1600" dirty="0">
+                <a:solidFill>
+                  <a:schemeClr val="bg1">
+                    <a:lumMod val="95000"/>
+                  </a:schemeClr>
+                </a:solidFill>
+              </a:rPr>
+            </a:br>
+            <a:r>
+              <a:rPr lang="es-ES" sz="1600" dirty="0">
+                <a:solidFill>
+                  <a:schemeClr val="bg1">
+                    <a:lumMod val="95000"/>
+                  </a:schemeClr>
+                </a:solidFill>
+              </a:rPr>
               <a:t>    }</a:t>
             </a:r>
-            <a:br/>
-            <a:r>
-              <a:t>    // ... logica de aprobacion</a:t>
-            </a:r>
-            <a:br/>
-            <a:r>
+            <a:br>
+              <a:rPr lang="es-ES" sz="1600" dirty="0">
+                <a:solidFill>
+                  <a:schemeClr val="bg1">
+                    <a:lumMod val="95000"/>
+                  </a:schemeClr>
+                </a:solidFill>
+              </a:rPr>
+            </a:br>
+            <a:r>
+              <a:rPr lang="es-ES" sz="1600" dirty="0">
+                <a:solidFill>
+                  <a:schemeClr val="bg1">
+                    <a:lumMod val="95000"/>
+                  </a:schemeClr>
+                </a:solidFill>
+              </a:rPr>
+              <a:t>    // ... </a:t>
+            </a:r>
+            <a:r>
+              <a:rPr lang="es-ES" sz="1600" dirty="0" err="1">
+                <a:solidFill>
+                  <a:schemeClr val="bg1">
+                    <a:lumMod val="95000"/>
+                  </a:schemeClr>
+                </a:solidFill>
+              </a:rPr>
+              <a:t>logica</a:t>
+            </a:r>
+            <a:r>
+              <a:rPr lang="es-ES" sz="1600" dirty="0">
+                <a:solidFill>
+                  <a:schemeClr val="bg1">
+                    <a:lumMod val="95000"/>
+                  </a:schemeClr>
+                </a:solidFill>
+              </a:rPr>
+              <a:t> de </a:t>
+            </a:r>
+            <a:r>
+              <a:rPr lang="es-ES" sz="1600" dirty="0" err="1">
+                <a:solidFill>
+                  <a:schemeClr val="bg1">
+                    <a:lumMod val="95000"/>
+                  </a:schemeClr>
+                </a:solidFill>
+              </a:rPr>
+              <a:t>aprobacion</a:t>
+            </a:r>
+            <a:br>
+              <a:rPr lang="es-ES" sz="1600" dirty="0">
+                <a:solidFill>
+                  <a:schemeClr val="bg1">
+                    <a:lumMod val="95000"/>
+                  </a:schemeClr>
+                </a:solidFill>
+              </a:rPr>
+            </a:br>
+            <a:r>
+              <a:rPr lang="es-ES" sz="1600" dirty="0">
+                <a:solidFill>
+                  <a:schemeClr val="bg1">
+                    <a:lumMod val="95000"/>
+                  </a:schemeClr>
+                </a:solidFill>
+              </a:rPr>
               <a:t>}</a:t>
             </a:r>
-            <a:br/>
-            <a:br/>
-            <a:r>
-              <a:t>func (s *SmartContract) FreezeProperty(ctx ...) error {</a:t>
-            </a:r>
-            <a:br/>
-            <a:r>
-              <a:t>    if err := s.checkRole(ctx, "autoridad_judicial"); err != nil {</a:t>
-            </a:r>
-            <a:br/>
-            <a:r>
-              <a:t>        return err</a:t>
-            </a:r>
-            <a:br/>
-            <a:r>
+            <a:br>
+              <a:rPr lang="es-ES" sz="1600" dirty="0">
+                <a:solidFill>
+                  <a:schemeClr val="bg1">
+                    <a:lumMod val="95000"/>
+                  </a:schemeClr>
+                </a:solidFill>
+              </a:rPr>
+            </a:br>
+            <a:br>
+              <a:rPr lang="es-ES" sz="1600" dirty="0">
+                <a:solidFill>
+                  <a:schemeClr val="bg1">
+                    <a:lumMod val="95000"/>
+                  </a:schemeClr>
+                </a:solidFill>
+              </a:rPr>
+            </a:br>
+            <a:r>
+              <a:rPr lang="es-ES" sz="1600" dirty="0" err="1">
+                <a:solidFill>
+                  <a:schemeClr val="bg1">
+                    <a:lumMod val="95000"/>
+                  </a:schemeClr>
+                </a:solidFill>
+              </a:rPr>
+              <a:t>func</a:t>
+            </a:r>
+            <a:r>
+              <a:rPr lang="es-ES" sz="1600" dirty="0">
+                <a:solidFill>
+                  <a:schemeClr val="bg1">
+                    <a:lumMod val="95000"/>
+                  </a:schemeClr>
+                </a:solidFill>
+              </a:rPr>
+              <a:t> (s *</a:t>
+            </a:r>
+            <a:r>
+              <a:rPr lang="es-ES" sz="1600" dirty="0" err="1">
+                <a:solidFill>
+                  <a:schemeClr val="bg1">
+                    <a:lumMod val="95000"/>
+                  </a:schemeClr>
+                </a:solidFill>
+              </a:rPr>
+              <a:t>SmartContract</a:t>
+            </a:r>
+            <a:r>
+              <a:rPr lang="es-ES" sz="1600" dirty="0">
+                <a:solidFill>
+                  <a:schemeClr val="bg1">
+                    <a:lumMod val="95000"/>
+                  </a:schemeClr>
+                </a:solidFill>
+              </a:rPr>
+              <a:t>) </a:t>
+            </a:r>
+            <a:r>
+              <a:rPr lang="es-ES" sz="1600" dirty="0" err="1">
+                <a:solidFill>
+                  <a:schemeClr val="bg1">
+                    <a:lumMod val="95000"/>
+                  </a:schemeClr>
+                </a:solidFill>
+              </a:rPr>
+              <a:t>FreezeProperty</a:t>
+            </a:r>
+            <a:r>
+              <a:rPr lang="es-ES" sz="1600" dirty="0">
+                <a:solidFill>
+                  <a:schemeClr val="bg1">
+                    <a:lumMod val="95000"/>
+                  </a:schemeClr>
+                </a:solidFill>
+              </a:rPr>
+              <a:t>(</a:t>
+            </a:r>
+            <a:r>
+              <a:rPr lang="es-ES" sz="1600" dirty="0" err="1">
+                <a:solidFill>
+                  <a:schemeClr val="bg1">
+                    <a:lumMod val="95000"/>
+                  </a:schemeClr>
+                </a:solidFill>
+              </a:rPr>
+              <a:t>ctx</a:t>
+            </a:r>
+            <a:r>
+              <a:rPr lang="es-ES" sz="1600" dirty="0">
+                <a:solidFill>
+                  <a:schemeClr val="bg1">
+                    <a:lumMod val="95000"/>
+                  </a:schemeClr>
+                </a:solidFill>
+              </a:rPr>
+              <a:t> ...) error {</a:t>
+            </a:r>
+            <a:br>
+              <a:rPr lang="es-ES" sz="1600" dirty="0">
+                <a:solidFill>
+                  <a:schemeClr val="bg1">
+                    <a:lumMod val="95000"/>
+                  </a:schemeClr>
+                </a:solidFill>
+              </a:rPr>
+            </a:br>
+            <a:r>
+              <a:rPr lang="es-ES" sz="1600" dirty="0">
+                <a:solidFill>
+                  <a:schemeClr val="bg1">
+                    <a:lumMod val="95000"/>
+                  </a:schemeClr>
+                </a:solidFill>
+              </a:rPr>
+              <a:t>    </a:t>
+            </a:r>
+            <a:r>
+              <a:rPr lang="es-ES" sz="1600" dirty="0" err="1">
+                <a:solidFill>
+                  <a:schemeClr val="bg1">
+                    <a:lumMod val="95000"/>
+                  </a:schemeClr>
+                </a:solidFill>
+              </a:rPr>
+              <a:t>if</a:t>
+            </a:r>
+            <a:r>
+              <a:rPr lang="es-ES" sz="1600" dirty="0">
+                <a:solidFill>
+                  <a:schemeClr val="bg1">
+                    <a:lumMod val="95000"/>
+                  </a:schemeClr>
+                </a:solidFill>
+              </a:rPr>
+              <a:t> </a:t>
+            </a:r>
+            <a:r>
+              <a:rPr lang="es-ES" sz="1600" dirty="0" err="1">
+                <a:solidFill>
+                  <a:schemeClr val="bg1">
+                    <a:lumMod val="95000"/>
+                  </a:schemeClr>
+                </a:solidFill>
+              </a:rPr>
+              <a:t>err</a:t>
+            </a:r>
+            <a:r>
+              <a:rPr lang="es-ES" sz="1600" dirty="0">
+                <a:solidFill>
+                  <a:schemeClr val="bg1">
+                    <a:lumMod val="95000"/>
+                  </a:schemeClr>
+                </a:solidFill>
+              </a:rPr>
+              <a:t> := </a:t>
+            </a:r>
+            <a:r>
+              <a:rPr lang="es-ES" sz="1600" dirty="0" err="1">
+                <a:solidFill>
+                  <a:schemeClr val="bg1">
+                    <a:lumMod val="95000"/>
+                  </a:schemeClr>
+                </a:solidFill>
+              </a:rPr>
+              <a:t>s.checkRole</a:t>
+            </a:r>
+            <a:r>
+              <a:rPr lang="es-ES" sz="1600" dirty="0">
+                <a:solidFill>
+                  <a:schemeClr val="bg1">
+                    <a:lumMod val="95000"/>
+                  </a:schemeClr>
+                </a:solidFill>
+              </a:rPr>
+              <a:t>(</a:t>
+            </a:r>
+            <a:r>
+              <a:rPr lang="es-ES" sz="1600" dirty="0" err="1">
+                <a:solidFill>
+                  <a:schemeClr val="bg1">
+                    <a:lumMod val="95000"/>
+                  </a:schemeClr>
+                </a:solidFill>
+              </a:rPr>
+              <a:t>ctx</a:t>
+            </a:r>
+            <a:r>
+              <a:rPr lang="es-ES" sz="1600" dirty="0">
+                <a:solidFill>
+                  <a:schemeClr val="bg1">
+                    <a:lumMod val="95000"/>
+                  </a:schemeClr>
+                </a:solidFill>
+              </a:rPr>
+              <a:t>, "</a:t>
+            </a:r>
+            <a:r>
+              <a:rPr lang="es-ES" sz="1600" dirty="0" err="1">
+                <a:solidFill>
+                  <a:schemeClr val="bg1">
+                    <a:lumMod val="95000"/>
+                  </a:schemeClr>
+                </a:solidFill>
+              </a:rPr>
+              <a:t>autoridad_judicial</a:t>
+            </a:r>
+            <a:r>
+              <a:rPr lang="es-ES" sz="1600" dirty="0">
+                <a:solidFill>
+                  <a:schemeClr val="bg1">
+                    <a:lumMod val="95000"/>
+                  </a:schemeClr>
+                </a:solidFill>
+              </a:rPr>
+              <a:t>"); </a:t>
+            </a:r>
+            <a:r>
+              <a:rPr lang="es-ES" sz="1600" dirty="0" err="1">
+                <a:solidFill>
+                  <a:schemeClr val="bg1">
+                    <a:lumMod val="95000"/>
+                  </a:schemeClr>
+                </a:solidFill>
+              </a:rPr>
+              <a:t>err</a:t>
+            </a:r>
+            <a:r>
+              <a:rPr lang="es-ES" sz="1600" dirty="0">
+                <a:solidFill>
+                  <a:schemeClr val="bg1">
+                    <a:lumMod val="95000"/>
+                  </a:schemeClr>
+                </a:solidFill>
+              </a:rPr>
+              <a:t> != </a:t>
+            </a:r>
+            <a:r>
+              <a:rPr lang="es-ES" sz="1600" dirty="0" err="1">
+                <a:solidFill>
+                  <a:schemeClr val="bg1">
+                    <a:lumMod val="95000"/>
+                  </a:schemeClr>
+                </a:solidFill>
+              </a:rPr>
+              <a:t>nil</a:t>
+            </a:r>
+            <a:r>
+              <a:rPr lang="es-ES" sz="1600" dirty="0">
+                <a:solidFill>
+                  <a:schemeClr val="bg1">
+                    <a:lumMod val="95000"/>
+                  </a:schemeClr>
+                </a:solidFill>
+              </a:rPr>
+              <a:t> {</a:t>
+            </a:r>
+            <a:br>
+              <a:rPr lang="es-ES" sz="1600" dirty="0">
+                <a:solidFill>
+                  <a:schemeClr val="bg1">
+                    <a:lumMod val="95000"/>
+                  </a:schemeClr>
+                </a:solidFill>
+              </a:rPr>
+            </a:br>
+            <a:r>
+              <a:rPr lang="es-ES" sz="1600" dirty="0">
+                <a:solidFill>
+                  <a:schemeClr val="bg1">
+                    <a:lumMod val="95000"/>
+                  </a:schemeClr>
+                </a:solidFill>
+              </a:rPr>
+              <a:t>        </a:t>
+            </a:r>
+            <a:r>
+              <a:rPr lang="es-ES" sz="1600" dirty="0" err="1">
+                <a:solidFill>
+                  <a:schemeClr val="bg1">
+                    <a:lumMod val="95000"/>
+                  </a:schemeClr>
+                </a:solidFill>
+              </a:rPr>
+              <a:t>return</a:t>
+            </a:r>
+            <a:r>
+              <a:rPr lang="es-ES" sz="1600" dirty="0">
+                <a:solidFill>
+                  <a:schemeClr val="bg1">
+                    <a:lumMod val="95000"/>
+                  </a:schemeClr>
+                </a:solidFill>
+              </a:rPr>
+              <a:t> </a:t>
+            </a:r>
+            <a:r>
+              <a:rPr lang="es-ES" sz="1600" dirty="0" err="1">
+                <a:solidFill>
+                  <a:schemeClr val="bg1">
+                    <a:lumMod val="95000"/>
+                  </a:schemeClr>
+                </a:solidFill>
+              </a:rPr>
+              <a:t>err</a:t>
+            </a:r>
+            <a:br>
+              <a:rPr lang="es-ES" sz="1600" dirty="0">
+                <a:solidFill>
+                  <a:schemeClr val="bg1">
+                    <a:lumMod val="95000"/>
+                  </a:schemeClr>
+                </a:solidFill>
+              </a:rPr>
+            </a:br>
+            <a:r>
+              <a:rPr lang="es-ES" sz="1600" dirty="0">
+                <a:solidFill>
+                  <a:schemeClr val="bg1">
+                    <a:lumMod val="95000"/>
+                  </a:schemeClr>
+                </a:solidFill>
+              </a:rPr>
               <a:t>    }</a:t>
             </a:r>
-            <a:br/>
-            <a:r>
-              <a:t>    // ... logica de bloqueo</a:t>
-            </a:r>
-            <a:br/>
-            <a:r>
+            <a:br>
+              <a:rPr lang="es-ES" sz="1600" dirty="0">
+                <a:solidFill>
+                  <a:schemeClr val="bg1">
+                    <a:lumMod val="95000"/>
+                  </a:schemeClr>
+                </a:solidFill>
+              </a:rPr>
+            </a:br>
+            <a:r>
+              <a:rPr lang="es-ES" sz="1600" dirty="0">
+                <a:solidFill>
+                  <a:schemeClr val="bg1">
+                    <a:lumMod val="95000"/>
+                  </a:schemeClr>
+                </a:solidFill>
+              </a:rPr>
+              <a:t>    // ... </a:t>
+            </a:r>
+            <a:r>
+              <a:rPr lang="es-ES" sz="1600" dirty="0" err="1">
+                <a:solidFill>
+                  <a:schemeClr val="bg1">
+                    <a:lumMod val="95000"/>
+                  </a:schemeClr>
+                </a:solidFill>
+              </a:rPr>
+              <a:t>logica</a:t>
+            </a:r>
+            <a:r>
+              <a:rPr lang="es-ES" sz="1600" dirty="0">
+                <a:solidFill>
+                  <a:schemeClr val="bg1">
+                    <a:lumMod val="95000"/>
+                  </a:schemeClr>
+                </a:solidFill>
+              </a:rPr>
+              <a:t> de bloqueo</a:t>
+            </a:r>
+            <a:br>
+              <a:rPr lang="es-ES" sz="1600" dirty="0">
+                <a:solidFill>
+                  <a:schemeClr val="bg1">
+                    <a:lumMod val="95000"/>
+                  </a:schemeClr>
+                </a:solidFill>
+              </a:rPr>
+            </a:br>
+            <a:r>
+              <a:rPr lang="es-ES" sz="1600" dirty="0">
+                <a:solidFill>
+                  <a:schemeClr val="bg1">
+                    <a:lumMod val="95000"/>
+                  </a:schemeClr>
+                </a:solidFill>
+              </a:rPr>
               <a:t>}</a:t>
             </a:r>
+            <a:endParaRPr lang="es-ES" sz="1600" dirty="0"/>
+          </a:p>
+        </p:txBody>
+      </p:sp>
+      <p:sp>
+        <p:nvSpPr>
+          <p:cNvPr id="11" name="Rectángulo 10">
+            <a:extLst>
+              <a:ext uri="{FF2B5EF4-FFF2-40B4-BE49-F238E27FC236}">
+                <a16:creationId xmlns:a16="http://schemas.microsoft.com/office/drawing/2014/main" id="{656925EF-EACF-A227-736E-F9CACAEDFF90}"/>
+              </a:ext>
+            </a:extLst>
+          </p:cNvPr>
+          <p:cNvSpPr/>
+          <p:nvPr/>
+        </p:nvSpPr>
+        <p:spPr>
+          <a:xfrm>
+            <a:off x="6278137" y="1417320"/>
+            <a:ext cx="45719" cy="5120640"/>
+          </a:xfrm>
+          <a:prstGeom prst="rect">
+            <a:avLst/>
+          </a:prstGeom>
+        </p:spPr>
+        <p:style>
+          <a:lnRef idx="1">
+            <a:schemeClr val="accent1"/>
+          </a:lnRef>
+          <a:fillRef idx="3">
+            <a:schemeClr val="accent1"/>
+          </a:fillRef>
+          <a:effectRef idx="2">
+            <a:schemeClr val="accent1"/>
+          </a:effectRef>
+          <a:fontRef idx="minor">
+            <a:schemeClr val="lt1"/>
+          </a:fontRef>
+        </p:style>
+        <p:txBody>
+          <a:bodyPr rtlCol="0" anchor="ctr"/>
+          <a:lstStyle/>
+          <a:p>
+            <a:pPr algn="ctr"/>
+            <a:endParaRPr lang="es-ES"/>
           </a:p>
         </p:txBody>
       </p:sp>

--- a/docs/slides/Modulo 4/dia_5.pptx
+++ b/docs/slides/Modulo 4/dia_5.pptx
@@ -27,7 +27,11 @@
     <p:sldId id="275" r:id="rId21"/>
     <p:sldId id="276" r:id="rId22"/>
     <p:sldId id="277" r:id="rId23"/>
-    <p:sldId id="278" r:id="rId24"/>
+    <p:sldId id="279" r:id="rId24"/>
+    <p:sldId id="280" r:id="rId25"/>
+    <p:sldId id="278" r:id="rId26"/>
+    <p:sldId id="281" r:id="rId27"/>
+    <p:sldId id="282" r:id="rId28"/>
   </p:sldIdLst>
   <p:sldSz cx="12188825" cy="6858000"/>
   <p:notesSz cx="6858000" cy="9144000"/>
@@ -4233,7 +4237,7 @@
               </a:defRPr>
             </a:pPr>
             <a:r>
-              <a:t>GO</a:t>
+              <a:t>NODE.JS</a:t>
             </a:r>
           </a:p>
         </p:txBody>
@@ -4302,7 +4306,7 @@
           <a:bodyPr wrap="square"/>
           <a:lstStyle/>
           <a:p>
-            <a:br>
+            <a:r>
               <a:rPr sz="1600" dirty="0">
                 <a:solidFill>
                   <a:schemeClr val="bg1">
@@ -4310,7 +4314,10 @@
                   </a:schemeClr>
                 </a:solidFill>
               </a:rPr>
-            </a:br>
+              <a:t>// ERROR 1: Timestamp del sistema</a:t>
+            </a:r>
+          </a:p>
+          <a:p>
             <a:r>
               <a:rPr sz="1600" dirty="0">
                 <a:solidFill>
@@ -4319,19 +4326,23 @@
                   </a:schemeClr>
                 </a:solidFill>
               </a:rPr>
-              <a:t>// ERROR 1: Timestamp del </a:t>
-            </a:r>
-            <a:r>
-              <a:rPr sz="1600" dirty="0" err="1">
+              <a:t>async BadCreate(ctx) {</a:t>
+            </a:r>
+          </a:p>
+          <a:p>
+            <a:r>
+              <a:rPr sz="1600" dirty="0">
                 <a:solidFill>
                   <a:schemeClr val="bg1">
                     <a:lumMod val="95000"/>
                   </a:schemeClr>
                 </a:solidFill>
               </a:rPr>
-              <a:t>sistema</a:t>
-            </a:r>
-            <a:br>
+              <a:t>    asset.createdAt = new Date().toISOString();</a:t>
+            </a:r>
+          </a:p>
+          <a:p>
+            <a:r>
               <a:rPr sz="1600" dirty="0">
                 <a:solidFill>
                   <a:schemeClr val="bg1">
@@ -4339,17 +4350,22 @@
                   </a:schemeClr>
                 </a:solidFill>
               </a:rPr>
-            </a:br>
-            <a:r>
-              <a:rPr sz="1600" dirty="0" err="1">
+              <a:t>    // DIFERENTE EN CADA PEER</a:t>
+            </a:r>
+          </a:p>
+          <a:p>
+            <a:r>
+              <a:rPr sz="1600" dirty="0">
                 <a:solidFill>
                   <a:schemeClr val="bg1">
                     <a:lumMod val="95000"/>
                   </a:schemeClr>
                 </a:solidFill>
               </a:rPr>
-              <a:t>func</a:t>
-            </a:r>
+              <a:t>    // Correcto: usar ctx.stub.getTxTimestamp()</a:t>
+            </a:r>
+          </a:p>
+          <a:p>
             <a:r>
               <a:rPr sz="1600" dirty="0">
                 <a:solidFill>
@@ -4358,644 +4374,10 @@
                   </a:schemeClr>
                 </a:solidFill>
               </a:rPr>
-              <a:t> (s *</a:t>
-            </a:r>
-            <a:r>
-              <a:rPr sz="1600" dirty="0" err="1">
-                <a:solidFill>
-                  <a:schemeClr val="bg1">
-                    <a:lumMod val="95000"/>
-                  </a:schemeClr>
-                </a:solidFill>
-              </a:rPr>
-              <a:t>SmartContract</a:t>
-            </a:r>
-            <a:r>
-              <a:rPr sz="1600" dirty="0">
-                <a:solidFill>
-                  <a:schemeClr val="bg1">
-                    <a:lumMod val="95000"/>
-                  </a:schemeClr>
-                </a:solidFill>
-              </a:rPr>
-              <a:t>) </a:t>
-            </a:r>
-            <a:r>
-              <a:rPr sz="1600" dirty="0" err="1">
-                <a:solidFill>
-                  <a:schemeClr val="bg1">
-                    <a:lumMod val="95000"/>
-                  </a:schemeClr>
-                </a:solidFill>
-              </a:rPr>
-              <a:t>BadCreate</a:t>
-            </a:r>
-            <a:r>
-              <a:rPr sz="1600" dirty="0">
-                <a:solidFill>
-                  <a:schemeClr val="bg1">
-                    <a:lumMod val="95000"/>
-                  </a:schemeClr>
-                </a:solidFill>
-              </a:rPr>
-              <a:t>(</a:t>
-            </a:r>
-            <a:r>
-              <a:rPr sz="1600" dirty="0" err="1">
-                <a:solidFill>
-                  <a:schemeClr val="bg1">
-                    <a:lumMod val="95000"/>
-                  </a:schemeClr>
-                </a:solidFill>
-              </a:rPr>
-              <a:t>ctx</a:t>
-            </a:r>
-            <a:r>
-              <a:rPr sz="1600" dirty="0">
-                <a:solidFill>
-                  <a:schemeClr val="bg1">
-                    <a:lumMod val="95000"/>
-                  </a:schemeClr>
-                </a:solidFill>
-              </a:rPr>
-              <a:t> ...) error {</a:t>
-            </a:r>
-            <a:br>
-              <a:rPr sz="1600" dirty="0">
-                <a:solidFill>
-                  <a:schemeClr val="bg1">
-                    <a:lumMod val="95000"/>
-                  </a:schemeClr>
-                </a:solidFill>
-              </a:rPr>
-            </a:br>
-            <a:r>
-              <a:rPr sz="1600" dirty="0">
-                <a:solidFill>
-                  <a:schemeClr val="bg1">
-                    <a:lumMod val="95000"/>
-                  </a:schemeClr>
-                </a:solidFill>
-              </a:rPr>
-              <a:t>    </a:t>
-            </a:r>
-            <a:r>
-              <a:rPr sz="1600" dirty="0" err="1">
-                <a:solidFill>
-                  <a:schemeClr val="bg1">
-                    <a:lumMod val="95000"/>
-                  </a:schemeClr>
-                </a:solidFill>
-              </a:rPr>
-              <a:t>asset.CreatedAt</a:t>
-            </a:r>
-            <a:r>
-              <a:rPr sz="1600" dirty="0">
-                <a:solidFill>
-                  <a:schemeClr val="bg1">
-                    <a:lumMod val="95000"/>
-                  </a:schemeClr>
-                </a:solidFill>
-              </a:rPr>
-              <a:t> = </a:t>
-            </a:r>
-            <a:r>
-              <a:rPr sz="1600" dirty="0" err="1">
-                <a:solidFill>
-                  <a:schemeClr val="bg1">
-                    <a:lumMod val="95000"/>
-                  </a:schemeClr>
-                </a:solidFill>
-              </a:rPr>
-              <a:t>time.Now</a:t>
-            </a:r>
-            <a:r>
-              <a:rPr sz="1600" dirty="0">
-                <a:solidFill>
-                  <a:schemeClr val="bg1">
-                    <a:lumMod val="95000"/>
-                  </a:schemeClr>
-                </a:solidFill>
-              </a:rPr>
-              <a:t>().String()  // DIFERENTE EN CADA PEER</a:t>
-            </a:r>
-            <a:br>
-              <a:rPr sz="1600" dirty="0">
-                <a:solidFill>
-                  <a:schemeClr val="bg1">
-                    <a:lumMod val="95000"/>
-                  </a:schemeClr>
-                </a:solidFill>
-              </a:rPr>
-            </a:br>
-            <a:r>
-              <a:rPr sz="1600" dirty="0">
-                <a:solidFill>
-                  <a:schemeClr val="bg1">
-                    <a:lumMod val="95000"/>
-                  </a:schemeClr>
-                </a:solidFill>
-              </a:rPr>
-              <a:t>    // </a:t>
-            </a:r>
-            <a:r>
-              <a:rPr sz="1600" dirty="0" err="1">
-                <a:solidFill>
-                  <a:schemeClr val="bg1">
-                    <a:lumMod val="95000"/>
-                  </a:schemeClr>
-                </a:solidFill>
-              </a:rPr>
-              <a:t>Correcto</a:t>
-            </a:r>
-            <a:r>
-              <a:rPr sz="1600" dirty="0">
-                <a:solidFill>
-                  <a:schemeClr val="bg1">
-                    <a:lumMod val="95000"/>
-                  </a:schemeClr>
-                </a:solidFill>
-              </a:rPr>
-              <a:t>: </a:t>
-            </a:r>
-            <a:r>
-              <a:rPr sz="1600" dirty="0" err="1">
-                <a:solidFill>
-                  <a:schemeClr val="bg1">
-                    <a:lumMod val="95000"/>
-                  </a:schemeClr>
-                </a:solidFill>
-              </a:rPr>
-              <a:t>asset.CreatedAt</a:t>
-            </a:r>
-            <a:r>
-              <a:rPr sz="1600" dirty="0">
-                <a:solidFill>
-                  <a:schemeClr val="bg1">
-                    <a:lumMod val="95000"/>
-                  </a:schemeClr>
-                </a:solidFill>
-              </a:rPr>
-              <a:t> = </a:t>
-            </a:r>
-            <a:r>
-              <a:rPr sz="1600" dirty="0" err="1">
-                <a:solidFill>
-                  <a:schemeClr val="bg1">
-                    <a:lumMod val="95000"/>
-                  </a:schemeClr>
-                </a:solidFill>
-              </a:rPr>
-              <a:t>ctx.GetStub</a:t>
-            </a:r>
-            <a:r>
-              <a:rPr sz="1600" dirty="0">
-                <a:solidFill>
-                  <a:schemeClr val="bg1">
-                    <a:lumMod val="95000"/>
-                  </a:schemeClr>
-                </a:solidFill>
-              </a:rPr>
-              <a:t>().</a:t>
-            </a:r>
-            <a:r>
-              <a:rPr sz="1600" dirty="0" err="1">
-                <a:solidFill>
-                  <a:schemeClr val="bg1">
-                    <a:lumMod val="95000"/>
-                  </a:schemeClr>
-                </a:solidFill>
-              </a:rPr>
-              <a:t>GetTxTimestamp</a:t>
-            </a:r>
-            <a:r>
-              <a:rPr sz="1600" dirty="0">
-                <a:solidFill>
-                  <a:schemeClr val="bg1">
-                    <a:lumMod val="95000"/>
-                  </a:schemeClr>
-                </a:solidFill>
-              </a:rPr>
-              <a:t>()</a:t>
-            </a:r>
-            <a:br>
-              <a:rPr sz="1600" dirty="0">
-                <a:solidFill>
-                  <a:schemeClr val="bg1">
-                    <a:lumMod val="95000"/>
-                  </a:schemeClr>
-                </a:solidFill>
-              </a:rPr>
-            </a:br>
-            <a:r>
-              <a:rPr sz="1600" dirty="0">
-                <a:solidFill>
-                  <a:schemeClr val="bg1">
-                    <a:lumMod val="95000"/>
-                  </a:schemeClr>
-                </a:solidFill>
-              </a:rPr>
               <a:t>}</a:t>
             </a:r>
-            <a:br>
-              <a:rPr sz="1600" dirty="0">
-                <a:solidFill>
-                  <a:schemeClr val="bg1">
-                    <a:lumMod val="95000"/>
-                  </a:schemeClr>
-                </a:solidFill>
-              </a:rPr>
-            </a:br>
-            <a:br>
-              <a:rPr sz="1600" dirty="0">
-                <a:solidFill>
-                  <a:schemeClr val="bg1">
-                    <a:lumMod val="95000"/>
-                  </a:schemeClr>
-                </a:solidFill>
-              </a:rPr>
-            </a:br>
-            <a:r>
-              <a:rPr sz="1600" dirty="0">
-                <a:solidFill>
-                  <a:schemeClr val="bg1">
-                    <a:lumMod val="95000"/>
-                  </a:schemeClr>
-                </a:solidFill>
-              </a:rPr>
-              <a:t>// ERROR 2: </a:t>
-            </a:r>
-            <a:r>
-              <a:rPr sz="1600" dirty="0" err="1">
-                <a:solidFill>
-                  <a:schemeClr val="bg1">
-                    <a:lumMod val="95000"/>
-                  </a:schemeClr>
-                </a:solidFill>
-              </a:rPr>
-              <a:t>Iterar</a:t>
-            </a:r>
-            <a:r>
-              <a:rPr sz="1600" dirty="0">
-                <a:solidFill>
-                  <a:schemeClr val="bg1">
-                    <a:lumMod val="95000"/>
-                  </a:schemeClr>
-                </a:solidFill>
-              </a:rPr>
-              <a:t> un </a:t>
-            </a:r>
-            <a:r>
-              <a:rPr sz="1600" dirty="0" err="1">
-                <a:solidFill>
-                  <a:schemeClr val="bg1">
-                    <a:lumMod val="95000"/>
-                  </a:schemeClr>
-                </a:solidFill>
-              </a:rPr>
-              <a:t>mapa</a:t>
-            </a:r>
-            <a:r>
-              <a:rPr sz="1600" dirty="0">
-                <a:solidFill>
-                  <a:schemeClr val="bg1">
-                    <a:lumMod val="95000"/>
-                  </a:schemeClr>
-                </a:solidFill>
-              </a:rPr>
-              <a:t> </a:t>
-            </a:r>
-            <a:r>
-              <a:rPr sz="1600" dirty="0" err="1">
-                <a:solidFill>
-                  <a:schemeClr val="bg1">
-                    <a:lumMod val="95000"/>
-                  </a:schemeClr>
-                </a:solidFill>
-              </a:rPr>
-              <a:t>en</a:t>
-            </a:r>
-            <a:r>
-              <a:rPr sz="1600" dirty="0">
-                <a:solidFill>
-                  <a:schemeClr val="bg1">
-                    <a:lumMod val="95000"/>
-                  </a:schemeClr>
-                </a:solidFill>
-              </a:rPr>
-              <a:t> Go (</a:t>
-            </a:r>
-            <a:r>
-              <a:rPr sz="1600" dirty="0" err="1">
-                <a:solidFill>
-                  <a:schemeClr val="bg1">
-                    <a:lumMod val="95000"/>
-                  </a:schemeClr>
-                </a:solidFill>
-              </a:rPr>
-              <a:t>orden</a:t>
-            </a:r>
-            <a:r>
-              <a:rPr sz="1600" dirty="0">
-                <a:solidFill>
-                  <a:schemeClr val="bg1">
-                    <a:lumMod val="95000"/>
-                  </a:schemeClr>
-                </a:solidFill>
-              </a:rPr>
-              <a:t> </a:t>
-            </a:r>
-            <a:r>
-              <a:rPr sz="1600" dirty="0" err="1">
-                <a:solidFill>
-                  <a:schemeClr val="bg1">
-                    <a:lumMod val="95000"/>
-                  </a:schemeClr>
-                </a:solidFill>
-              </a:rPr>
-              <a:t>aleatorio</a:t>
-            </a:r>
-            <a:r>
-              <a:rPr sz="1600" dirty="0">
-                <a:solidFill>
-                  <a:schemeClr val="bg1">
-                    <a:lumMod val="95000"/>
-                  </a:schemeClr>
-                </a:solidFill>
-              </a:rPr>
-              <a:t>)</a:t>
-            </a:r>
-            <a:br>
-              <a:rPr sz="1600" dirty="0">
-                <a:solidFill>
-                  <a:schemeClr val="bg1">
-                    <a:lumMod val="95000"/>
-                  </a:schemeClr>
-                </a:solidFill>
-              </a:rPr>
-            </a:br>
-            <a:r>
-              <a:rPr sz="1600" dirty="0" err="1">
-                <a:solidFill>
-                  <a:schemeClr val="bg1">
-                    <a:lumMod val="95000"/>
-                  </a:schemeClr>
-                </a:solidFill>
-              </a:rPr>
-              <a:t>func</a:t>
-            </a:r>
-            <a:r>
-              <a:rPr sz="1600" dirty="0">
-                <a:solidFill>
-                  <a:schemeClr val="bg1">
-                    <a:lumMod val="95000"/>
-                  </a:schemeClr>
-                </a:solidFill>
-              </a:rPr>
-              <a:t> (s *</a:t>
-            </a:r>
-            <a:r>
-              <a:rPr sz="1600" dirty="0" err="1">
-                <a:solidFill>
-                  <a:schemeClr val="bg1">
-                    <a:lumMod val="95000"/>
-                  </a:schemeClr>
-                </a:solidFill>
-              </a:rPr>
-              <a:t>SmartContract</a:t>
-            </a:r>
-            <a:r>
-              <a:rPr sz="1600" dirty="0">
-                <a:solidFill>
-                  <a:schemeClr val="bg1">
-                    <a:lumMod val="95000"/>
-                  </a:schemeClr>
-                </a:solidFill>
-              </a:rPr>
-              <a:t>) </a:t>
-            </a:r>
-            <a:r>
-              <a:rPr sz="1600" dirty="0" err="1">
-                <a:solidFill>
-                  <a:schemeClr val="bg1">
-                    <a:lumMod val="95000"/>
-                  </a:schemeClr>
-                </a:solidFill>
-              </a:rPr>
-              <a:t>BadTotals</a:t>
-            </a:r>
-            <a:r>
-              <a:rPr sz="1600" dirty="0">
-                <a:solidFill>
-                  <a:schemeClr val="bg1">
-                    <a:lumMod val="95000"/>
-                  </a:schemeClr>
-                </a:solidFill>
-              </a:rPr>
-              <a:t>(</a:t>
-            </a:r>
-            <a:r>
-              <a:rPr sz="1600" dirty="0" err="1">
-                <a:solidFill>
-                  <a:schemeClr val="bg1">
-                    <a:lumMod val="95000"/>
-                  </a:schemeClr>
-                </a:solidFill>
-              </a:rPr>
-              <a:t>ctx</a:t>
-            </a:r>
-            <a:r>
-              <a:rPr sz="1600" dirty="0">
-                <a:solidFill>
-                  <a:schemeClr val="bg1">
-                    <a:lumMod val="95000"/>
-                  </a:schemeClr>
-                </a:solidFill>
-              </a:rPr>
-              <a:t> ...) error {</a:t>
-            </a:r>
-            <a:br>
-              <a:rPr sz="1600" dirty="0">
-                <a:solidFill>
-                  <a:schemeClr val="bg1">
-                    <a:lumMod val="95000"/>
-                  </a:schemeClr>
-                </a:solidFill>
-              </a:rPr>
-            </a:br>
-            <a:r>
-              <a:rPr sz="1600" dirty="0">
-                <a:solidFill>
-                  <a:schemeClr val="bg1">
-                    <a:lumMod val="95000"/>
-                  </a:schemeClr>
-                </a:solidFill>
-              </a:rPr>
-              <a:t>    totals := map[string]int{"a": 1, "b": 2, "c": 3}</a:t>
-            </a:r>
-            <a:br>
-              <a:rPr sz="1600" dirty="0">
-                <a:solidFill>
-                  <a:schemeClr val="bg1">
-                    <a:lumMod val="95000"/>
-                  </a:schemeClr>
-                </a:solidFill>
-              </a:rPr>
-            </a:br>
-            <a:r>
-              <a:rPr sz="1600" dirty="0">
-                <a:solidFill>
-                  <a:schemeClr val="bg1">
-                    <a:lumMod val="95000"/>
-                  </a:schemeClr>
-                </a:solidFill>
-              </a:rPr>
-              <a:t>    result := ""</a:t>
-            </a:r>
-            <a:br>
-              <a:rPr sz="1600" dirty="0">
-                <a:solidFill>
-                  <a:schemeClr val="bg1">
-                    <a:lumMod val="95000"/>
-                  </a:schemeClr>
-                </a:solidFill>
-              </a:rPr>
-            </a:br>
-            <a:r>
-              <a:rPr sz="1600" dirty="0">
-                <a:solidFill>
-                  <a:schemeClr val="bg1">
-                    <a:lumMod val="95000"/>
-                  </a:schemeClr>
-                </a:solidFill>
-              </a:rPr>
-              <a:t>    for k, v := range totals {</a:t>
-            </a:r>
-            <a:br>
-              <a:rPr sz="1600" dirty="0">
-                <a:solidFill>
-                  <a:schemeClr val="bg1">
-                    <a:lumMod val="95000"/>
-                  </a:schemeClr>
-                </a:solidFill>
-              </a:rPr>
-            </a:br>
-            <a:r>
-              <a:rPr sz="1600" dirty="0">
-                <a:solidFill>
-                  <a:schemeClr val="bg1">
-                    <a:lumMod val="95000"/>
-                  </a:schemeClr>
-                </a:solidFill>
-              </a:rPr>
-              <a:t>        result += </a:t>
-            </a:r>
-            <a:r>
-              <a:rPr sz="1600" dirty="0" err="1">
-                <a:solidFill>
-                  <a:schemeClr val="bg1">
-                    <a:lumMod val="95000"/>
-                  </a:schemeClr>
-                </a:solidFill>
-              </a:rPr>
-              <a:t>fmt.Sprintf</a:t>
-            </a:r>
-            <a:r>
-              <a:rPr sz="1600" dirty="0">
-                <a:solidFill>
-                  <a:schemeClr val="bg1">
-                    <a:lumMod val="95000"/>
-                  </a:schemeClr>
-                </a:solidFill>
-              </a:rPr>
-              <a:t>("%s:%d,", k, v)</a:t>
-            </a:r>
-            <a:br>
-              <a:rPr sz="1600" dirty="0">
-                <a:solidFill>
-                  <a:schemeClr val="bg1">
-                    <a:lumMod val="95000"/>
-                  </a:schemeClr>
-                </a:solidFill>
-              </a:rPr>
-            </a:br>
-            <a:r>
-              <a:rPr sz="1600" dirty="0">
-                <a:solidFill>
-                  <a:schemeClr val="bg1">
-                    <a:lumMod val="95000"/>
-                  </a:schemeClr>
-                </a:solidFill>
-              </a:rPr>
-              <a:t>    }</a:t>
-            </a:r>
-            <a:br>
-              <a:rPr sz="1600" dirty="0">
-                <a:solidFill>
-                  <a:schemeClr val="bg1">
-                    <a:lumMod val="95000"/>
-                  </a:schemeClr>
-                </a:solidFill>
-              </a:rPr>
-            </a:br>
-            <a:r>
-              <a:rPr sz="1600" dirty="0">
-                <a:solidFill>
-                  <a:schemeClr val="bg1">
-                    <a:lumMod val="95000"/>
-                  </a:schemeClr>
-                </a:solidFill>
-              </a:rPr>
-              <a:t>    // result </a:t>
-            </a:r>
-            <a:r>
-              <a:rPr sz="1600" dirty="0" err="1">
-                <a:solidFill>
-                  <a:schemeClr val="bg1">
-                    <a:lumMod val="95000"/>
-                  </a:schemeClr>
-                </a:solidFill>
-              </a:rPr>
-              <a:t>puede</a:t>
-            </a:r>
-            <a:r>
-              <a:rPr sz="1600" dirty="0">
-                <a:solidFill>
-                  <a:schemeClr val="bg1">
-                    <a:lumMod val="95000"/>
-                  </a:schemeClr>
-                </a:solidFill>
-              </a:rPr>
-              <a:t> ser "a:1,b:2,c:3" o "c:3,a:1,b:2" -&gt; NO DETERMINISTA</a:t>
-            </a:r>
-            <a:br>
-              <a:rPr sz="1600" dirty="0">
-                <a:solidFill>
-                  <a:schemeClr val="bg1">
-                    <a:lumMod val="95000"/>
-                  </a:schemeClr>
-                </a:solidFill>
-              </a:rPr>
-            </a:br>
-            <a:r>
-              <a:rPr sz="1600" dirty="0">
-                <a:solidFill>
-                  <a:schemeClr val="bg1">
-                    <a:lumMod val="95000"/>
-                  </a:schemeClr>
-                </a:solidFill>
-              </a:rPr>
-              <a:t>}</a:t>
-            </a:r>
-            <a:br>
-              <a:rPr sz="1600" dirty="0">
-                <a:solidFill>
-                  <a:schemeClr val="bg1">
-                    <a:lumMod val="95000"/>
-                  </a:schemeClr>
-                </a:solidFill>
-              </a:rPr>
-            </a:br>
+          </a:p>
+          <a:p>
             <a:endParaRPr sz="1600" dirty="0">
               <a:solidFill>
                 <a:schemeClr val="bg1">
@@ -5003,6 +4385,126 @@
                 </a:schemeClr>
               </a:solidFill>
             </a:endParaRPr>
+          </a:p>
+          <a:p>
+            <a:r>
+              <a:rPr sz="1600" dirty="0">
+                <a:solidFill>
+                  <a:schemeClr val="bg1">
+                    <a:lumMod val="95000"/>
+                  </a:schemeClr>
+                </a:solidFill>
+              </a:rPr>
+              <a:t>// ERROR 2: Iterar un objeto (orden no garantizado)</a:t>
+            </a:r>
+          </a:p>
+          <a:p>
+            <a:r>
+              <a:rPr sz="1600" dirty="0">
+                <a:solidFill>
+                  <a:schemeClr val="bg1">
+                    <a:lumMod val="95000"/>
+                  </a:schemeClr>
+                </a:solidFill>
+              </a:rPr>
+              <a:t>async BadTotals(ctx) {</a:t>
+            </a:r>
+          </a:p>
+          <a:p>
+            <a:r>
+              <a:rPr sz="1600" dirty="0">
+                <a:solidFill>
+                  <a:schemeClr val="bg1">
+                    <a:lumMod val="95000"/>
+                  </a:schemeClr>
+                </a:solidFill>
+              </a:rPr>
+              <a:t>    const totals = { a: 1, b: 2, c: 3 };</a:t>
+            </a:r>
+          </a:p>
+          <a:p>
+            <a:r>
+              <a:rPr sz="1600" dirty="0">
+                <a:solidFill>
+                  <a:schemeClr val="bg1">
+                    <a:lumMod val="95000"/>
+                  </a:schemeClr>
+                </a:solidFill>
+              </a:rPr>
+              <a:t>    let result = '';</a:t>
+            </a:r>
+          </a:p>
+          <a:p>
+            <a:r>
+              <a:rPr sz="1600" dirty="0">
+                <a:solidFill>
+                  <a:schemeClr val="bg1">
+                    <a:lumMod val="95000"/>
+                  </a:schemeClr>
+                </a:solidFill>
+              </a:rPr>
+              <a:t>    for (const k in totals) {</a:t>
+            </a:r>
+          </a:p>
+          <a:p>
+            <a:r>
+              <a:rPr sz="1600" dirty="0">
+                <a:solidFill>
+                  <a:schemeClr val="bg1">
+                    <a:lumMod val="95000"/>
+                  </a:schemeClr>
+                </a:solidFill>
+              </a:rPr>
+              <a:t>        result += `${k}:${totals[k]},`;</a:t>
+            </a:r>
+          </a:p>
+          <a:p>
+            <a:r>
+              <a:rPr sz="1600" dirty="0">
+                <a:solidFill>
+                  <a:schemeClr val="bg1">
+                    <a:lumMod val="95000"/>
+                  </a:schemeClr>
+                </a:solidFill>
+              </a:rPr>
+              <a:t>    }</a:t>
+            </a:r>
+          </a:p>
+          <a:p>
+            <a:r>
+              <a:rPr sz="1600" dirty="0">
+                <a:solidFill>
+                  <a:schemeClr val="bg1">
+                    <a:lumMod val="95000"/>
+                  </a:schemeClr>
+                </a:solidFill>
+              </a:rPr>
+              <a:t>    // result puede ser "a:1,b:2,c:3" o cualquier otro orden</a:t>
+            </a:r>
+          </a:p>
+          <a:p>
+            <a:r>
+              <a:rPr sz="1600" dirty="0">
+                <a:solidFill>
+                  <a:schemeClr val="bg1">
+                    <a:lumMod val="95000"/>
+                  </a:schemeClr>
+                </a:solidFill>
+              </a:rPr>
+              <a:t>    // -&gt; NO DETERMINISTA (depende del motor JS)</a:t>
+            </a:r>
+          </a:p>
+          <a:p>
+            <a:r>
+              <a:rPr sz="1600" dirty="0">
+                <a:solidFill>
+                  <a:schemeClr val="bg1">
+                    <a:lumMod val="95000"/>
+                  </a:schemeClr>
+                </a:solidFill>
+              </a:rPr>
+              <a:t>}</a:t>
+            </a:r>
           </a:p>
         </p:txBody>
       </p:sp>
@@ -5034,7 +4536,7 @@
           </a:bodyPr>
           <a:lstStyle/>
           <a:p>
-            <a:br>
+            <a:r>
               <a:rPr lang="es-ES" sz="1600" dirty="0">
                 <a:solidFill>
                   <a:schemeClr val="bg1">
@@ -5042,7 +4544,10 @@
                   </a:schemeClr>
                 </a:solidFill>
               </a:rPr>
-            </a:br>
+              <a:t>// ERROR 3: Llamada HTTP externa</a:t>
+            </a:r>
+          </a:p>
+          <a:p>
             <a:r>
               <a:rPr lang="es-ES" sz="1600" dirty="0">
                 <a:solidFill>
@@ -5051,9 +4556,11 @@
                   </a:schemeClr>
                 </a:solidFill>
               </a:rPr>
-              <a:t>// ERROR 3: Llamada HTTP externa</a:t>
-            </a:r>
-            <a:br>
+              <a:t>async BadPrice(ctx) {</a:t>
+            </a:r>
+          </a:p>
+          <a:p>
+            <a:r>
               <a:rPr lang="es-ES" sz="1600" dirty="0">
                 <a:solidFill>
                   <a:schemeClr val="bg1">
@@ -5061,17 +4568,22 @@
                   </a:schemeClr>
                 </a:solidFill>
               </a:rPr>
-            </a:br>
-            <a:r>
-              <a:rPr lang="es-ES" sz="1600" dirty="0" err="1">
+              <a:t>    const resp = await fetch(</a:t>
+            </a:r>
+          </a:p>
+          <a:p>
+            <a:r>
+              <a:rPr lang="es-ES" sz="1600" dirty="0">
                 <a:solidFill>
                   <a:schemeClr val="bg1">
                     <a:lumMod val="95000"/>
                   </a:schemeClr>
                 </a:solidFill>
               </a:rPr>
-              <a:t>func</a:t>
-            </a:r>
+              <a:t>        'https://api.prices.com/gold');</a:t>
+            </a:r>
+          </a:p>
+          <a:p>
             <a:r>
               <a:rPr lang="es-ES" sz="1600" dirty="0">
                 <a:solidFill>
@@ -5080,18 +4592,22 @@
                   </a:schemeClr>
                 </a:solidFill>
               </a:rPr>
-              <a:t> (s *</a:t>
-            </a:r>
-            <a:r>
-              <a:rPr lang="es-ES" sz="1600" dirty="0" err="1">
+              <a:t>    // Cada peer puede obtener un precio diferente</a:t>
+            </a:r>
+          </a:p>
+          <a:p>
+            <a:r>
+              <a:rPr lang="es-ES" sz="1600" dirty="0">
                 <a:solidFill>
                   <a:schemeClr val="bg1">
                     <a:lumMod val="95000"/>
                   </a:schemeClr>
                 </a:solidFill>
               </a:rPr>
-              <a:t>SmartContract</a:t>
-            </a:r>
+              <a:t>    // -&gt; INVALIDA</a:t>
+            </a:r>
+          </a:p>
+          <a:p>
             <a:r>
               <a:rPr lang="es-ES" sz="1600" dirty="0">
                 <a:solidFill>
@@ -5100,18 +4616,31 @@
                   </a:schemeClr>
                 </a:solidFill>
               </a:rPr>
-              <a:t>) </a:t>
-            </a:r>
-            <a:r>
-              <a:rPr lang="es-ES" sz="1600" dirty="0" err="1">
+              <a:t>}</a:t>
+            </a:r>
+          </a:p>
+          <a:p>
+            <a:endParaRPr lang="es-ES" sz="1600" dirty="0">
+              <a:solidFill>
+                <a:schemeClr val="bg1">
+                  <a:lumMod val="95000"/>
+                </a:schemeClr>
+              </a:solidFill>
+            </a:endParaRPr>
+          </a:p>
+          <a:p>
+            <a:r>
+              <a:rPr lang="es-ES" sz="1600" dirty="0">
                 <a:solidFill>
                   <a:schemeClr val="bg1">
                     <a:lumMod val="95000"/>
                   </a:schemeClr>
                 </a:solidFill>
               </a:rPr>
-              <a:t>BadPrice</a:t>
-            </a:r>
+              <a:t>// ERROR 4: Numero aleatorio</a:t>
+            </a:r>
+          </a:p>
+          <a:p>
             <a:r>
               <a:rPr lang="es-ES" sz="1600" dirty="0">
                 <a:solidFill>
@@ -5120,18 +4649,22 @@
                   </a:schemeClr>
                 </a:solidFill>
               </a:rPr>
-              <a:t>(</a:t>
-            </a:r>
-            <a:r>
-              <a:rPr lang="es-ES" sz="1600" dirty="0" err="1">
+              <a:t>async BadRandom(ctx) {</a:t>
+            </a:r>
+          </a:p>
+          <a:p>
+            <a:r>
+              <a:rPr lang="es-ES" sz="1600" dirty="0">
                 <a:solidFill>
                   <a:schemeClr val="bg1">
                     <a:lumMod val="95000"/>
                   </a:schemeClr>
                 </a:solidFill>
               </a:rPr>
-              <a:t>ctx</a:t>
-            </a:r>
+              <a:t>    const id = `ASSET-${Math.floor(Math.random()*99999)}`;</a:t>
+            </a:r>
+          </a:p>
+          <a:p>
             <a:r>
               <a:rPr lang="es-ES" sz="1600" dirty="0">
                 <a:solidFill>
@@ -5140,9 +4673,11 @@
                   </a:schemeClr>
                 </a:solidFill>
               </a:rPr>
-              <a:t> ...) error {</a:t>
-            </a:r>
-            <a:br>
+              <a:t>    // ID diferente en cada peer -&gt; INVALIDA</a:t>
+            </a:r>
+          </a:p>
+          <a:p>
+            <a:r>
               <a:rPr lang="es-ES" sz="1600" dirty="0">
                 <a:solidFill>
                   <a:schemeClr val="bg1">
@@ -5150,330 +4685,8 @@
                   </a:schemeClr>
                 </a:solidFill>
               </a:rPr>
-            </a:br>
-            <a:r>
-              <a:rPr lang="es-ES" sz="1600" dirty="0">
-                <a:solidFill>
-                  <a:schemeClr val="bg1">
-                    <a:lumMod val="95000"/>
-                  </a:schemeClr>
-                </a:solidFill>
-              </a:rPr>
-              <a:t>    </a:t>
-            </a:r>
-            <a:r>
-              <a:rPr lang="es-ES" sz="1600" dirty="0" err="1">
-                <a:solidFill>
-                  <a:schemeClr val="bg1">
-                    <a:lumMod val="95000"/>
-                  </a:schemeClr>
-                </a:solidFill>
-              </a:rPr>
-              <a:t>resp</a:t>
-            </a:r>
-            <a:r>
-              <a:rPr lang="es-ES" sz="1600" dirty="0">
-                <a:solidFill>
-                  <a:schemeClr val="bg1">
-                    <a:lumMod val="95000"/>
-                  </a:schemeClr>
-                </a:solidFill>
-              </a:rPr>
-              <a:t>, _ := </a:t>
-            </a:r>
-            <a:r>
-              <a:rPr lang="es-ES" sz="1600" dirty="0" err="1">
-                <a:solidFill>
-                  <a:schemeClr val="bg1">
-                    <a:lumMod val="95000"/>
-                  </a:schemeClr>
-                </a:solidFill>
-              </a:rPr>
-              <a:t>http.Get</a:t>
-            </a:r>
-            <a:r>
-              <a:rPr lang="es-ES" sz="1600" dirty="0">
-                <a:solidFill>
-                  <a:schemeClr val="bg1">
-                    <a:lumMod val="95000"/>
-                  </a:schemeClr>
-                </a:solidFill>
-              </a:rPr>
-              <a:t>("https://api.prices.com/</a:t>
-            </a:r>
-            <a:r>
-              <a:rPr lang="es-ES" sz="1600" dirty="0" err="1">
-                <a:solidFill>
-                  <a:schemeClr val="bg1">
-                    <a:lumMod val="95000"/>
-                  </a:schemeClr>
-                </a:solidFill>
-              </a:rPr>
-              <a:t>gold</a:t>
-            </a:r>
-            <a:r>
-              <a:rPr lang="es-ES" sz="1600" dirty="0">
-                <a:solidFill>
-                  <a:schemeClr val="bg1">
-                    <a:lumMod val="95000"/>
-                  </a:schemeClr>
-                </a:solidFill>
-              </a:rPr>
-              <a:t>")</a:t>
-            </a:r>
-            <a:br>
-              <a:rPr lang="es-ES" sz="1600" dirty="0">
-                <a:solidFill>
-                  <a:schemeClr val="bg1">
-                    <a:lumMod val="95000"/>
-                  </a:schemeClr>
-                </a:solidFill>
-              </a:rPr>
-            </a:br>
-            <a:r>
-              <a:rPr lang="es-ES" sz="1600" dirty="0">
-                <a:solidFill>
-                  <a:schemeClr val="bg1">
-                    <a:lumMod val="95000"/>
-                  </a:schemeClr>
-                </a:solidFill>
-              </a:rPr>
-              <a:t>    // Cada peer puede obtener un precio diferente -&gt; INVALIDA</a:t>
-            </a:r>
-            <a:br>
-              <a:rPr lang="es-ES" sz="1600" dirty="0">
-                <a:solidFill>
-                  <a:schemeClr val="bg1">
-                    <a:lumMod val="95000"/>
-                  </a:schemeClr>
-                </a:solidFill>
-              </a:rPr>
-            </a:br>
-            <a:r>
-              <a:rPr lang="es-ES" sz="1600" dirty="0">
-                <a:solidFill>
-                  <a:schemeClr val="bg1">
-                    <a:lumMod val="95000"/>
-                  </a:schemeClr>
-                </a:solidFill>
-              </a:rPr>
               <a:t>}</a:t>
             </a:r>
-            <a:br>
-              <a:rPr lang="es-ES" sz="1600" dirty="0">
-                <a:solidFill>
-                  <a:schemeClr val="bg1">
-                    <a:lumMod val="95000"/>
-                  </a:schemeClr>
-                </a:solidFill>
-              </a:rPr>
-            </a:br>
-            <a:br>
-              <a:rPr lang="es-ES" sz="1600" dirty="0">
-                <a:solidFill>
-                  <a:schemeClr val="bg1">
-                    <a:lumMod val="95000"/>
-                  </a:schemeClr>
-                </a:solidFill>
-              </a:rPr>
-            </a:br>
-            <a:r>
-              <a:rPr lang="es-ES" sz="1600" dirty="0">
-                <a:solidFill>
-                  <a:schemeClr val="bg1">
-                    <a:lumMod val="95000"/>
-                  </a:schemeClr>
-                </a:solidFill>
-              </a:rPr>
-              <a:t>// ERROR 4: Numero aleatorio</a:t>
-            </a:r>
-            <a:br>
-              <a:rPr lang="es-ES" sz="1600" dirty="0">
-                <a:solidFill>
-                  <a:schemeClr val="bg1">
-                    <a:lumMod val="95000"/>
-                  </a:schemeClr>
-                </a:solidFill>
-              </a:rPr>
-            </a:br>
-            <a:r>
-              <a:rPr lang="es-ES" sz="1600" dirty="0" err="1">
-                <a:solidFill>
-                  <a:schemeClr val="bg1">
-                    <a:lumMod val="95000"/>
-                  </a:schemeClr>
-                </a:solidFill>
-              </a:rPr>
-              <a:t>func</a:t>
-            </a:r>
-            <a:r>
-              <a:rPr lang="es-ES" sz="1600" dirty="0">
-                <a:solidFill>
-                  <a:schemeClr val="bg1">
-                    <a:lumMod val="95000"/>
-                  </a:schemeClr>
-                </a:solidFill>
-              </a:rPr>
-              <a:t> (s *</a:t>
-            </a:r>
-            <a:r>
-              <a:rPr lang="es-ES" sz="1600" dirty="0" err="1">
-                <a:solidFill>
-                  <a:schemeClr val="bg1">
-                    <a:lumMod val="95000"/>
-                  </a:schemeClr>
-                </a:solidFill>
-              </a:rPr>
-              <a:t>SmartContract</a:t>
-            </a:r>
-            <a:r>
-              <a:rPr lang="es-ES" sz="1600" dirty="0">
-                <a:solidFill>
-                  <a:schemeClr val="bg1">
-                    <a:lumMod val="95000"/>
-                  </a:schemeClr>
-                </a:solidFill>
-              </a:rPr>
-              <a:t>) </a:t>
-            </a:r>
-            <a:r>
-              <a:rPr lang="es-ES" sz="1600" dirty="0" err="1">
-                <a:solidFill>
-                  <a:schemeClr val="bg1">
-                    <a:lumMod val="95000"/>
-                  </a:schemeClr>
-                </a:solidFill>
-              </a:rPr>
-              <a:t>BadRandom</a:t>
-            </a:r>
-            <a:r>
-              <a:rPr lang="es-ES" sz="1600" dirty="0">
-                <a:solidFill>
-                  <a:schemeClr val="bg1">
-                    <a:lumMod val="95000"/>
-                  </a:schemeClr>
-                </a:solidFill>
-              </a:rPr>
-              <a:t>(</a:t>
-            </a:r>
-            <a:r>
-              <a:rPr lang="es-ES" sz="1600" dirty="0" err="1">
-                <a:solidFill>
-                  <a:schemeClr val="bg1">
-                    <a:lumMod val="95000"/>
-                  </a:schemeClr>
-                </a:solidFill>
-              </a:rPr>
-              <a:t>ctx</a:t>
-            </a:r>
-            <a:r>
-              <a:rPr lang="es-ES" sz="1600" dirty="0">
-                <a:solidFill>
-                  <a:schemeClr val="bg1">
-                    <a:lumMod val="95000"/>
-                  </a:schemeClr>
-                </a:solidFill>
-              </a:rPr>
-              <a:t> ...) error {</a:t>
-            </a:r>
-            <a:br>
-              <a:rPr lang="es-ES" sz="1600" dirty="0">
-                <a:solidFill>
-                  <a:schemeClr val="bg1">
-                    <a:lumMod val="95000"/>
-                  </a:schemeClr>
-                </a:solidFill>
-              </a:rPr>
-            </a:br>
-            <a:r>
-              <a:rPr lang="es-ES" sz="1600" dirty="0">
-                <a:solidFill>
-                  <a:schemeClr val="bg1">
-                    <a:lumMod val="95000"/>
-                  </a:schemeClr>
-                </a:solidFill>
-              </a:rPr>
-              <a:t>    id := </a:t>
-            </a:r>
-            <a:r>
-              <a:rPr lang="es-ES" sz="1600" dirty="0" err="1">
-                <a:solidFill>
-                  <a:schemeClr val="bg1">
-                    <a:lumMod val="95000"/>
-                  </a:schemeClr>
-                </a:solidFill>
-              </a:rPr>
-              <a:t>fmt.Sprintf</a:t>
-            </a:r>
-            <a:r>
-              <a:rPr lang="es-ES" sz="1600" dirty="0">
-                <a:solidFill>
-                  <a:schemeClr val="bg1">
-                    <a:lumMod val="95000"/>
-                  </a:schemeClr>
-                </a:solidFill>
-              </a:rPr>
-              <a:t>("ASSET-%d", </a:t>
-            </a:r>
-            <a:r>
-              <a:rPr lang="es-ES" sz="1600" dirty="0" err="1">
-                <a:solidFill>
-                  <a:schemeClr val="bg1">
-                    <a:lumMod val="95000"/>
-                  </a:schemeClr>
-                </a:solidFill>
-              </a:rPr>
-              <a:t>rand.Intn</a:t>
-            </a:r>
-            <a:r>
-              <a:rPr lang="es-ES" sz="1600" dirty="0">
-                <a:solidFill>
-                  <a:schemeClr val="bg1">
-                    <a:lumMod val="95000"/>
-                  </a:schemeClr>
-                </a:solidFill>
-              </a:rPr>
-              <a:t>(99999))</a:t>
-            </a:r>
-            <a:br>
-              <a:rPr lang="es-ES" sz="1600" dirty="0">
-                <a:solidFill>
-                  <a:schemeClr val="bg1">
-                    <a:lumMod val="95000"/>
-                  </a:schemeClr>
-                </a:solidFill>
-              </a:rPr>
-            </a:br>
-            <a:r>
-              <a:rPr lang="es-ES" sz="1600" dirty="0">
-                <a:solidFill>
-                  <a:schemeClr val="bg1">
-                    <a:lumMod val="95000"/>
-                  </a:schemeClr>
-                </a:solidFill>
-              </a:rPr>
-              <a:t>    // ID diferente en cada peer -&gt; INVALIDA</a:t>
-            </a:r>
-            <a:br>
-              <a:rPr lang="es-ES" sz="1600" dirty="0">
-                <a:solidFill>
-                  <a:schemeClr val="bg1">
-                    <a:lumMod val="95000"/>
-                  </a:schemeClr>
-                </a:solidFill>
-              </a:rPr>
-            </a:br>
-            <a:r>
-              <a:rPr lang="es-ES" sz="1600" dirty="0">
-                <a:solidFill>
-                  <a:schemeClr val="bg1">
-                    <a:lumMod val="95000"/>
-                  </a:schemeClr>
-                </a:solidFill>
-              </a:rPr>
-              <a:t>}</a:t>
-            </a:r>
-            <a:endParaRPr lang="es-ES" sz="1600" dirty="0"/>
           </a:p>
         </p:txBody>
       </p:sp>
@@ -6560,7 +5773,7 @@
               </a:defRPr>
             </a:pPr>
             <a:r>
-              <a:t>GO</a:t>
+              <a:t>NODE.JS</a:t>
             </a:r>
           </a:p>
         </p:txBody>
@@ -6629,7 +5842,7 @@
           <a:bodyPr wrap="square"/>
           <a:lstStyle/>
           <a:p>
-            <a:br>
+            <a:r>
               <a:rPr sz="1600" dirty="0">
                 <a:solidFill>
                   <a:schemeClr val="bg1">
@@ -6637,7 +5850,10 @@
                   </a:schemeClr>
                 </a:solidFill>
               </a:rPr>
-            </a:br>
+              <a:t>// Version 1 del modelo (documentacion JSDoc)</a:t>
+            </a:r>
+          </a:p>
+          <a:p>
             <a:r>
               <a:rPr sz="1600" dirty="0">
                 <a:solidFill>
@@ -6646,19 +5862,23 @@
                   </a:schemeClr>
                 </a:solidFill>
               </a:rPr>
-              <a:t>// Version 1 del </a:t>
-            </a:r>
-            <a:r>
-              <a:rPr sz="1600" dirty="0" err="1">
+              <a:t>/**</a:t>
+            </a:r>
+          </a:p>
+          <a:p>
+            <a:r>
+              <a:rPr sz="1600" dirty="0">
                 <a:solidFill>
                   <a:schemeClr val="bg1">
                     <a:lumMod val="95000"/>
                   </a:schemeClr>
                 </a:solidFill>
               </a:rPr>
-              <a:t>modelo</a:t>
-            </a:r>
-            <a:br>
+              <a:t> * @typedef {Object} PropertyV1</a:t>
+            </a:r>
+          </a:p>
+          <a:p>
+            <a:r>
               <a:rPr sz="1600" dirty="0">
                 <a:solidFill>
                   <a:schemeClr val="bg1">
@@ -6666,7 +5886,10 @@
                   </a:schemeClr>
                 </a:solidFill>
               </a:rPr>
-            </a:br>
+              <a:t> * @property {string} id</a:t>
+            </a:r>
+          </a:p>
+          <a:p>
             <a:r>
               <a:rPr sz="1600" dirty="0">
                 <a:solidFill>
@@ -6675,9 +5898,11 @@
                   </a:schemeClr>
                 </a:solidFill>
               </a:rPr>
-              <a:t>type PropertyV1 struct {</a:t>
-            </a:r>
-            <a:br>
+              <a:t> * @property {string} owner</a:t>
+            </a:r>
+          </a:p>
+          <a:p>
+            <a:r>
               <a:rPr sz="1600" dirty="0">
                 <a:solidFill>
                   <a:schemeClr val="bg1">
@@ -6685,7 +5910,10 @@
                   </a:schemeClr>
                 </a:solidFill>
               </a:rPr>
-            </a:br>
+              <a:t> * @property {string} address</a:t>
+            </a:r>
+          </a:p>
+          <a:p>
             <a:r>
               <a:rPr sz="1600" dirty="0">
                 <a:solidFill>
@@ -6694,534 +5922,10 @@
                   </a:schemeClr>
                 </a:solidFill>
               </a:rPr>
-              <a:t>    ID      string `</a:t>
-            </a:r>
-            <a:r>
-              <a:rPr sz="1600" dirty="0" err="1">
-                <a:solidFill>
-                  <a:schemeClr val="bg1">
-                    <a:lumMod val="95000"/>
-                  </a:schemeClr>
-                </a:solidFill>
-              </a:rPr>
-              <a:t>json</a:t>
-            </a:r>
-            <a:r>
-              <a:rPr sz="1600" dirty="0">
-                <a:solidFill>
-                  <a:schemeClr val="bg1">
-                    <a:lumMod val="95000"/>
-                  </a:schemeClr>
-                </a:solidFill>
-              </a:rPr>
-              <a:t>:"id"`</a:t>
-            </a:r>
-            <a:br>
-              <a:rPr sz="1600" dirty="0">
-                <a:solidFill>
-                  <a:schemeClr val="bg1">
-                    <a:lumMod val="95000"/>
-                  </a:schemeClr>
-                </a:solidFill>
-              </a:rPr>
-            </a:br>
-            <a:r>
-              <a:rPr sz="1600" dirty="0">
-                <a:solidFill>
-                  <a:schemeClr val="bg1">
-                    <a:lumMod val="95000"/>
-                  </a:schemeClr>
-                </a:solidFill>
-              </a:rPr>
-              <a:t>    Owner   string `</a:t>
-            </a:r>
-            <a:r>
-              <a:rPr sz="1600" dirty="0" err="1">
-                <a:solidFill>
-                  <a:schemeClr val="bg1">
-                    <a:lumMod val="95000"/>
-                  </a:schemeClr>
-                </a:solidFill>
-              </a:rPr>
-              <a:t>json</a:t>
-            </a:r>
-            <a:r>
-              <a:rPr sz="1600" dirty="0">
-                <a:solidFill>
-                  <a:schemeClr val="bg1">
-                    <a:lumMod val="95000"/>
-                  </a:schemeClr>
-                </a:solidFill>
-              </a:rPr>
-              <a:t>:"owner"`</a:t>
-            </a:r>
-            <a:br>
-              <a:rPr sz="1600" dirty="0">
-                <a:solidFill>
-                  <a:schemeClr val="bg1">
-                    <a:lumMod val="95000"/>
-                  </a:schemeClr>
-                </a:solidFill>
-              </a:rPr>
-            </a:br>
-            <a:r>
-              <a:rPr sz="1600" dirty="0">
-                <a:solidFill>
-                  <a:schemeClr val="bg1">
-                    <a:lumMod val="95000"/>
-                  </a:schemeClr>
-                </a:solidFill>
-              </a:rPr>
-              <a:t>    Address string `</a:t>
-            </a:r>
-            <a:r>
-              <a:rPr sz="1600" dirty="0" err="1">
-                <a:solidFill>
-                  <a:schemeClr val="bg1">
-                    <a:lumMod val="95000"/>
-                  </a:schemeClr>
-                </a:solidFill>
-              </a:rPr>
-              <a:t>json</a:t>
-            </a:r>
-            <a:r>
-              <a:rPr sz="1600" dirty="0">
-                <a:solidFill>
-                  <a:schemeClr val="bg1">
-                    <a:lumMod val="95000"/>
-                  </a:schemeClr>
-                </a:solidFill>
-              </a:rPr>
-              <a:t>:"address"`</a:t>
-            </a:r>
-            <a:br>
-              <a:rPr sz="1600" dirty="0">
-                <a:solidFill>
-                  <a:schemeClr val="bg1">
-                    <a:lumMod val="95000"/>
-                  </a:schemeClr>
-                </a:solidFill>
-              </a:rPr>
-            </a:br>
-            <a:r>
-              <a:rPr sz="1600" dirty="0">
-                <a:solidFill>
-                  <a:schemeClr val="bg1">
-                    <a:lumMod val="95000"/>
-                  </a:schemeClr>
-                </a:solidFill>
-              </a:rPr>
-              <a:t>}</a:t>
-            </a:r>
-            <a:br>
-              <a:rPr sz="1600" dirty="0">
-                <a:solidFill>
-                  <a:schemeClr val="bg1">
-                    <a:lumMod val="95000"/>
-                  </a:schemeClr>
-                </a:solidFill>
-              </a:rPr>
-            </a:br>
-            <a:br>
-              <a:rPr sz="1600" dirty="0">
-                <a:solidFill>
-                  <a:schemeClr val="bg1">
-                    <a:lumMod val="95000"/>
-                  </a:schemeClr>
-                </a:solidFill>
-              </a:rPr>
-            </a:br>
-            <a:r>
-              <a:rPr sz="1600" dirty="0">
-                <a:solidFill>
-                  <a:schemeClr val="bg1">
-                    <a:lumMod val="95000"/>
-                  </a:schemeClr>
-                </a:solidFill>
-              </a:rPr>
-              <a:t>// Version 2: </a:t>
-            </a:r>
-            <a:r>
-              <a:rPr sz="1600" dirty="0" err="1">
-                <a:solidFill>
-                  <a:schemeClr val="bg1">
-                    <a:lumMod val="95000"/>
-                  </a:schemeClr>
-                </a:solidFill>
-              </a:rPr>
-              <a:t>nuevos</a:t>
-            </a:r>
-            <a:r>
-              <a:rPr sz="1600" dirty="0">
-                <a:solidFill>
-                  <a:schemeClr val="bg1">
-                    <a:lumMod val="95000"/>
-                  </a:schemeClr>
-                </a:solidFill>
-              </a:rPr>
-              <a:t> campos</a:t>
-            </a:r>
-            <a:br>
-              <a:rPr sz="1600" dirty="0">
-                <a:solidFill>
-                  <a:schemeClr val="bg1">
-                    <a:lumMod val="95000"/>
-                  </a:schemeClr>
-                </a:solidFill>
-              </a:rPr>
-            </a:br>
-            <a:r>
-              <a:rPr sz="1600" dirty="0">
-                <a:solidFill>
-                  <a:schemeClr val="bg1">
-                    <a:lumMod val="95000"/>
-                  </a:schemeClr>
-                </a:solidFill>
-              </a:rPr>
-              <a:t>type PropertyV2 struct {</a:t>
-            </a:r>
-            <a:br>
-              <a:rPr sz="1600" dirty="0">
-                <a:solidFill>
-                  <a:schemeClr val="bg1">
-                    <a:lumMod val="95000"/>
-                  </a:schemeClr>
-                </a:solidFill>
-              </a:rPr>
-            </a:br>
-            <a:r>
-              <a:rPr sz="1600" dirty="0">
-                <a:solidFill>
-                  <a:schemeClr val="bg1">
-                    <a:lumMod val="95000"/>
-                  </a:schemeClr>
-                </a:solidFill>
-              </a:rPr>
-              <a:t>    ID             string `</a:t>
-            </a:r>
-            <a:r>
-              <a:rPr sz="1600" dirty="0" err="1">
-                <a:solidFill>
-                  <a:schemeClr val="bg1">
-                    <a:lumMod val="95000"/>
-                  </a:schemeClr>
-                </a:solidFill>
-              </a:rPr>
-              <a:t>json</a:t>
-            </a:r>
-            <a:r>
-              <a:rPr sz="1600" dirty="0">
-                <a:solidFill>
-                  <a:schemeClr val="bg1">
-                    <a:lumMod val="95000"/>
-                  </a:schemeClr>
-                </a:solidFill>
-              </a:rPr>
-              <a:t>:"id"`</a:t>
-            </a:r>
-            <a:br>
-              <a:rPr sz="1600" dirty="0">
-                <a:solidFill>
-                  <a:schemeClr val="bg1">
-                    <a:lumMod val="95000"/>
-                  </a:schemeClr>
-                </a:solidFill>
-              </a:rPr>
-            </a:br>
-            <a:r>
-              <a:rPr sz="1600" dirty="0">
-                <a:solidFill>
-                  <a:schemeClr val="bg1">
-                    <a:lumMod val="95000"/>
-                  </a:schemeClr>
-                </a:solidFill>
-              </a:rPr>
-              <a:t>    Owner          string `</a:t>
-            </a:r>
-            <a:r>
-              <a:rPr sz="1600" dirty="0" err="1">
-                <a:solidFill>
-                  <a:schemeClr val="bg1">
-                    <a:lumMod val="95000"/>
-                  </a:schemeClr>
-                </a:solidFill>
-              </a:rPr>
-              <a:t>json</a:t>
-            </a:r>
-            <a:r>
-              <a:rPr sz="1600" dirty="0">
-                <a:solidFill>
-                  <a:schemeClr val="bg1">
-                    <a:lumMod val="95000"/>
-                  </a:schemeClr>
-                </a:solidFill>
-              </a:rPr>
-              <a:t>:"owner"`</a:t>
-            </a:r>
-            <a:br>
-              <a:rPr sz="1600" dirty="0">
-                <a:solidFill>
-                  <a:schemeClr val="bg1">
-                    <a:lumMod val="95000"/>
-                  </a:schemeClr>
-                </a:solidFill>
-              </a:rPr>
-            </a:br>
-            <a:r>
-              <a:rPr sz="1600" dirty="0">
-                <a:solidFill>
-                  <a:schemeClr val="bg1">
-                    <a:lumMod val="95000"/>
-                  </a:schemeClr>
-                </a:solidFill>
-              </a:rPr>
-              <a:t>    Address        string `</a:t>
-            </a:r>
-            <a:r>
-              <a:rPr sz="1600" dirty="0" err="1">
-                <a:solidFill>
-                  <a:schemeClr val="bg1">
-                    <a:lumMod val="95000"/>
-                  </a:schemeClr>
-                </a:solidFill>
-              </a:rPr>
-              <a:t>json</a:t>
-            </a:r>
-            <a:r>
-              <a:rPr sz="1600" dirty="0">
-                <a:solidFill>
-                  <a:schemeClr val="bg1">
-                    <a:lumMod val="95000"/>
-                  </a:schemeClr>
-                </a:solidFill>
-              </a:rPr>
-              <a:t>:"address"`</a:t>
-            </a:r>
-            <a:br>
-              <a:rPr sz="1600" dirty="0">
-                <a:solidFill>
-                  <a:schemeClr val="bg1">
-                    <a:lumMod val="95000"/>
-                  </a:schemeClr>
-                </a:solidFill>
-              </a:rPr>
-            </a:br>
-            <a:r>
-              <a:rPr sz="1600" dirty="0">
-                <a:solidFill>
-                  <a:schemeClr val="bg1">
-                    <a:lumMod val="95000"/>
-                  </a:schemeClr>
-                </a:solidFill>
-              </a:rPr>
-              <a:t>    </a:t>
-            </a:r>
-            <a:r>
-              <a:rPr sz="1600" dirty="0" err="1">
-                <a:solidFill>
-                  <a:schemeClr val="bg1">
-                    <a:lumMod val="95000"/>
-                  </a:schemeClr>
-                </a:solidFill>
-              </a:rPr>
-              <a:t>PropertyType</a:t>
-            </a:r>
-            <a:r>
-              <a:rPr sz="1600" dirty="0">
-                <a:solidFill>
-                  <a:schemeClr val="bg1">
-                    <a:lumMod val="95000"/>
-                  </a:schemeClr>
-                </a:solidFill>
-              </a:rPr>
-              <a:t>   string `</a:t>
-            </a:r>
-            <a:r>
-              <a:rPr sz="1600" dirty="0" err="1">
-                <a:solidFill>
-                  <a:schemeClr val="bg1">
-                    <a:lumMod val="95000"/>
-                  </a:schemeClr>
-                </a:solidFill>
-              </a:rPr>
-              <a:t>json</a:t>
-            </a:r>
-            <a:r>
-              <a:rPr sz="1600" dirty="0">
-                <a:solidFill>
-                  <a:schemeClr val="bg1">
-                    <a:lumMod val="95000"/>
-                  </a:schemeClr>
-                </a:solidFill>
-              </a:rPr>
-              <a:t>:"</a:t>
-            </a:r>
-            <a:r>
-              <a:rPr sz="1600" dirty="0" err="1">
-                <a:solidFill>
-                  <a:schemeClr val="bg1">
-                    <a:lumMod val="95000"/>
-                  </a:schemeClr>
-                </a:solidFill>
-              </a:rPr>
-              <a:t>propertyType</a:t>
-            </a:r>
-            <a:r>
-              <a:rPr sz="1600" dirty="0">
-                <a:solidFill>
-                  <a:schemeClr val="bg1">
-                    <a:lumMod val="95000"/>
-                  </a:schemeClr>
-                </a:solidFill>
-              </a:rPr>
-              <a:t>"`   // NUEVO</a:t>
-            </a:r>
-            <a:br>
-              <a:rPr sz="1600" dirty="0">
-                <a:solidFill>
-                  <a:schemeClr val="bg1">
-                    <a:lumMod val="95000"/>
-                  </a:schemeClr>
-                </a:solidFill>
-              </a:rPr>
-            </a:br>
-            <a:r>
-              <a:rPr sz="1600" dirty="0">
-                <a:solidFill>
-                  <a:schemeClr val="bg1">
-                    <a:lumMod val="95000"/>
-                  </a:schemeClr>
-                </a:solidFill>
-              </a:rPr>
-              <a:t>    </a:t>
-            </a:r>
-            <a:r>
-              <a:rPr sz="1600" dirty="0" err="1">
-                <a:solidFill>
-                  <a:schemeClr val="bg1">
-                    <a:lumMod val="95000"/>
-                  </a:schemeClr>
-                </a:solidFill>
-              </a:rPr>
-              <a:t>AppraisalValue</a:t>
-            </a:r>
-            <a:r>
-              <a:rPr sz="1600" dirty="0">
-                <a:solidFill>
-                  <a:schemeClr val="bg1">
-                    <a:lumMod val="95000"/>
-                  </a:schemeClr>
-                </a:solidFill>
-              </a:rPr>
-              <a:t> int    `</a:t>
-            </a:r>
-            <a:r>
-              <a:rPr sz="1600" dirty="0" err="1">
-                <a:solidFill>
-                  <a:schemeClr val="bg1">
-                    <a:lumMod val="95000"/>
-                  </a:schemeClr>
-                </a:solidFill>
-              </a:rPr>
-              <a:t>json</a:t>
-            </a:r>
-            <a:r>
-              <a:rPr sz="1600" dirty="0">
-                <a:solidFill>
-                  <a:schemeClr val="bg1">
-                    <a:lumMod val="95000"/>
-                  </a:schemeClr>
-                </a:solidFill>
-              </a:rPr>
-              <a:t>:"</a:t>
-            </a:r>
-            <a:r>
-              <a:rPr sz="1600" dirty="0" err="1">
-                <a:solidFill>
-                  <a:schemeClr val="bg1">
-                    <a:lumMod val="95000"/>
-                  </a:schemeClr>
-                </a:solidFill>
-              </a:rPr>
-              <a:t>appraisalValue</a:t>
-            </a:r>
-            <a:r>
-              <a:rPr sz="1600" dirty="0">
-                <a:solidFill>
-                  <a:schemeClr val="bg1">
-                    <a:lumMod val="95000"/>
-                  </a:schemeClr>
-                </a:solidFill>
-              </a:rPr>
-              <a:t>"` // NUEVO</a:t>
-            </a:r>
-            <a:br>
-              <a:rPr sz="1600" dirty="0">
-                <a:solidFill>
-                  <a:schemeClr val="bg1">
-                    <a:lumMod val="95000"/>
-                  </a:schemeClr>
-                </a:solidFill>
-              </a:rPr>
-            </a:br>
-            <a:r>
-              <a:rPr sz="1600" dirty="0">
-                <a:solidFill>
-                  <a:schemeClr val="bg1">
-                    <a:lumMod val="95000"/>
-                  </a:schemeClr>
-                </a:solidFill>
-              </a:rPr>
-              <a:t>    Version        int    `</a:t>
-            </a:r>
-            <a:r>
-              <a:rPr sz="1600" dirty="0" err="1">
-                <a:solidFill>
-                  <a:schemeClr val="bg1">
-                    <a:lumMod val="95000"/>
-                  </a:schemeClr>
-                </a:solidFill>
-              </a:rPr>
-              <a:t>json</a:t>
-            </a:r>
-            <a:r>
-              <a:rPr sz="1600" dirty="0">
-                <a:solidFill>
-                  <a:schemeClr val="bg1">
-                    <a:lumMod val="95000"/>
-                  </a:schemeClr>
-                </a:solidFill>
-              </a:rPr>
-              <a:t>:"version"`        // NUEVO: control de version</a:t>
-            </a:r>
-            <a:br>
-              <a:rPr sz="1600" dirty="0">
-                <a:solidFill>
-                  <a:schemeClr val="bg1">
-                    <a:lumMod val="95000"/>
-                  </a:schemeClr>
-                </a:solidFill>
-              </a:rPr>
-            </a:br>
-            <a:r>
-              <a:rPr sz="1600" dirty="0">
-                <a:solidFill>
-                  <a:schemeClr val="bg1">
-                    <a:lumMod val="95000"/>
-                  </a:schemeClr>
-                </a:solidFill>
-              </a:rPr>
-              <a:t>}</a:t>
-            </a:r>
-            <a:br>
-              <a:rPr sz="1600" dirty="0">
-                <a:solidFill>
-                  <a:schemeClr val="bg1">
-                    <a:lumMod val="95000"/>
-                  </a:schemeClr>
-                </a:solidFill>
-              </a:rPr>
-            </a:br>
+              <a:t> */</a:t>
+            </a:r>
+          </a:p>
+          <a:p>
             <a:endParaRPr sz="1600" dirty="0">
               <a:solidFill>
                 <a:schemeClr val="bg1">
@@ -7229,6 +5933,126 @@
                 </a:schemeClr>
               </a:solidFill>
             </a:endParaRPr>
+          </a:p>
+          <a:p>
+            <a:r>
+              <a:rPr sz="1600" dirty="0">
+                <a:solidFill>
+                  <a:schemeClr val="bg1">
+                    <a:lumMod val="95000"/>
+                  </a:schemeClr>
+                </a:solidFill>
+              </a:rPr>
+              <a:t>// Version 2: nuevos campos</a:t>
+            </a:r>
+          </a:p>
+          <a:p>
+            <a:r>
+              <a:rPr sz="1600" dirty="0">
+                <a:solidFill>
+                  <a:schemeClr val="bg1">
+                    <a:lumMod val="95000"/>
+                  </a:schemeClr>
+                </a:solidFill>
+              </a:rPr>
+              <a:t>/**</a:t>
+            </a:r>
+          </a:p>
+          <a:p>
+            <a:r>
+              <a:rPr sz="1600" dirty="0">
+                <a:solidFill>
+                  <a:schemeClr val="bg1">
+                    <a:lumMod val="95000"/>
+                  </a:schemeClr>
+                </a:solidFill>
+              </a:rPr>
+              <a:t> * @typedef {Object} PropertyV2</a:t>
+            </a:r>
+          </a:p>
+          <a:p>
+            <a:r>
+              <a:rPr sz="1600" dirty="0">
+                <a:solidFill>
+                  <a:schemeClr val="bg1">
+                    <a:lumMod val="95000"/>
+                  </a:schemeClr>
+                </a:solidFill>
+              </a:rPr>
+              <a:t> * @property {string} id</a:t>
+            </a:r>
+          </a:p>
+          <a:p>
+            <a:r>
+              <a:rPr sz="1600" dirty="0">
+                <a:solidFill>
+                  <a:schemeClr val="bg1">
+                    <a:lumMod val="95000"/>
+                  </a:schemeClr>
+                </a:solidFill>
+              </a:rPr>
+              <a:t> * @property {string} owner</a:t>
+            </a:r>
+          </a:p>
+          <a:p>
+            <a:r>
+              <a:rPr sz="1600" dirty="0">
+                <a:solidFill>
+                  <a:schemeClr val="bg1">
+                    <a:lumMod val="95000"/>
+                  </a:schemeClr>
+                </a:solidFill>
+              </a:rPr>
+              <a:t> * @property {string} address</a:t>
+            </a:r>
+          </a:p>
+          <a:p>
+            <a:r>
+              <a:rPr sz="1600" dirty="0">
+                <a:solidFill>
+                  <a:schemeClr val="bg1">
+                    <a:lumMod val="95000"/>
+                  </a:schemeClr>
+                </a:solidFill>
+              </a:rPr>
+              <a:t> * @property {string} propertyType    - NUEVO</a:t>
+            </a:r>
+          </a:p>
+          <a:p>
+            <a:r>
+              <a:rPr sz="1600" dirty="0">
+                <a:solidFill>
+                  <a:schemeClr val="bg1">
+                    <a:lumMod val="95000"/>
+                  </a:schemeClr>
+                </a:solidFill>
+              </a:rPr>
+              <a:t> * @property {number} appraisalValue  - NUEVO</a:t>
+            </a:r>
+          </a:p>
+          <a:p>
+            <a:r>
+              <a:rPr sz="1600" dirty="0">
+                <a:solidFill>
+                  <a:schemeClr val="bg1">
+                    <a:lumMod val="95000"/>
+                  </a:schemeClr>
+                </a:solidFill>
+              </a:rPr>
+              <a:t> * @property {number} version         - NUEVO: control version</a:t>
+            </a:r>
+          </a:p>
+          <a:p>
+            <a:r>
+              <a:rPr sz="1600" dirty="0">
+                <a:solidFill>
+                  <a:schemeClr val="bg1">
+                    <a:lumMod val="95000"/>
+                  </a:schemeClr>
+                </a:solidFill>
+              </a:rPr>
+              <a:t> */</a:t>
+            </a:r>
           </a:p>
         </p:txBody>
       </p:sp>
@@ -7260,7 +6084,7 @@
           </a:bodyPr>
           <a:lstStyle/>
           <a:p>
-            <a:br>
+            <a:r>
               <a:rPr lang="es-ES" sz="1600" dirty="0">
                 <a:solidFill>
                   <a:schemeClr val="bg1">
@@ -7268,7 +6092,10 @@
                   </a:schemeClr>
                 </a:solidFill>
               </a:rPr>
-            </a:br>
+              <a:t>// Leer con compatibilidad: si faltan campos, defaults</a:t>
+            </a:r>
+          </a:p>
+          <a:p>
             <a:r>
               <a:rPr lang="es-ES" sz="1600" dirty="0">
                 <a:solidFill>
@@ -7277,9 +6104,11 @@
                   </a:schemeClr>
                 </a:solidFill>
               </a:rPr>
-              <a:t>// Leer con compatibilidad: si faltan campos, aplicar defaults</a:t>
-            </a:r>
-            <a:br>
+              <a:t>async ReadProperty(ctx, id) {</a:t>
+            </a:r>
+          </a:p>
+          <a:p>
+            <a:r>
               <a:rPr lang="es-ES" sz="1600" dirty="0">
                 <a:solidFill>
                   <a:schemeClr val="bg1">
@@ -7287,17 +6116,31 @@
                   </a:schemeClr>
                 </a:solidFill>
               </a:rPr>
-            </a:br>
-            <a:r>
-              <a:rPr lang="es-ES" sz="1600" dirty="0" err="1">
+              <a:t>    const data = await ctx.stub.getState(id);</a:t>
+            </a:r>
+          </a:p>
+          <a:p>
+            <a:r>
+              <a:rPr lang="es-ES" sz="1600" dirty="0">
                 <a:solidFill>
                   <a:schemeClr val="bg1">
                     <a:lumMod val="95000"/>
                   </a:schemeClr>
                 </a:solidFill>
               </a:rPr>
-              <a:t>func</a:t>
-            </a:r>
+              <a:t>    const prop = JSON.parse(data.toString());</a:t>
+            </a:r>
+          </a:p>
+          <a:p>
+            <a:endParaRPr lang="es-ES" sz="1600" dirty="0">
+              <a:solidFill>
+                <a:schemeClr val="bg1">
+                  <a:lumMod val="95000"/>
+                </a:schemeClr>
+              </a:solidFill>
+            </a:endParaRPr>
+          </a:p>
+          <a:p>
             <a:r>
               <a:rPr lang="es-ES" sz="1600" dirty="0">
                 <a:solidFill>
@@ -7306,18 +6149,22 @@
                   </a:schemeClr>
                 </a:solidFill>
               </a:rPr>
-              <a:t> (s *</a:t>
-            </a:r>
-            <a:r>
-              <a:rPr lang="es-ES" sz="1600" dirty="0" err="1">
+              <a:t>    // Migracion lazy: si es version antigua, aplicar defaults</a:t>
+            </a:r>
+          </a:p>
+          <a:p>
+            <a:r>
+              <a:rPr lang="es-ES" sz="1600" dirty="0">
                 <a:solidFill>
                   <a:schemeClr val="bg1">
                     <a:lumMod val="95000"/>
                   </a:schemeClr>
                 </a:solidFill>
               </a:rPr>
-              <a:t>SmartContract</a:t>
-            </a:r>
+              <a:t>    if ((prop.version || 0) &lt; 2) {</a:t>
+            </a:r>
+          </a:p>
+          <a:p>
             <a:r>
               <a:rPr lang="es-ES" sz="1600" dirty="0">
                 <a:solidFill>
@@ -7326,18 +6173,22 @@
                   </a:schemeClr>
                 </a:solidFill>
               </a:rPr>
-              <a:t>) </a:t>
-            </a:r>
-            <a:r>
-              <a:rPr lang="es-ES" sz="1600" dirty="0" err="1">
+              <a:t>        if (!prop.propertyType) {</a:t>
+            </a:r>
+          </a:p>
+          <a:p>
+            <a:r>
+              <a:rPr lang="es-ES" sz="1600" dirty="0">
                 <a:solidFill>
                   <a:schemeClr val="bg1">
                     <a:lumMod val="95000"/>
                   </a:schemeClr>
                 </a:solidFill>
               </a:rPr>
-              <a:t>ReadProperty</a:t>
-            </a:r>
+              <a:t>            prop.propertyType = 'unknown';</a:t>
+            </a:r>
+          </a:p>
+          <a:p>
             <a:r>
               <a:rPr lang="es-ES" sz="1600" dirty="0">
                 <a:solidFill>
@@ -7346,18 +6197,22 @@
                   </a:schemeClr>
                 </a:solidFill>
               </a:rPr>
-              <a:t>(</a:t>
-            </a:r>
-            <a:r>
-              <a:rPr lang="es-ES" sz="1600" dirty="0" err="1">
+              <a:t>        }</a:t>
+            </a:r>
+          </a:p>
+          <a:p>
+            <a:r>
+              <a:rPr lang="es-ES" sz="1600" dirty="0">
                 <a:solidFill>
                   <a:schemeClr val="bg1">
                     <a:lumMod val="95000"/>
                   </a:schemeClr>
                 </a:solidFill>
               </a:rPr>
-              <a:t>ctx</a:t>
-            </a:r>
+              <a:t>        prop.version = 2;</a:t>
+            </a:r>
+          </a:p>
+          <a:p>
             <a:r>
               <a:rPr lang="es-ES" sz="1600" dirty="0">
                 <a:solidFill>
@@ -7366,18 +6221,22 @@
                   </a:schemeClr>
                 </a:solidFill>
               </a:rPr>
-              <a:t> ..., id </a:t>
-            </a:r>
-            <a:r>
-              <a:rPr lang="es-ES" sz="1600" dirty="0" err="1">
+              <a:t>        // Guardar migrado (opcional: on-read o funcion aparte)</a:t>
+            </a:r>
+          </a:p>
+          <a:p>
+            <a:r>
+              <a:rPr lang="es-ES" sz="1600" dirty="0">
                 <a:solidFill>
                   <a:schemeClr val="bg1">
                     <a:lumMod val="95000"/>
                   </a:schemeClr>
                 </a:solidFill>
               </a:rPr>
-              <a:t>string</a:t>
-            </a:r>
+              <a:t>    }</a:t>
+            </a:r>
+          </a:p>
+          <a:p>
             <a:r>
               <a:rPr lang="es-ES" sz="1600" dirty="0">
                 <a:solidFill>
@@ -7386,9 +6245,11 @@
                   </a:schemeClr>
                 </a:solidFill>
               </a:rPr>
-              <a:t>) (*PropertyV2, error) {</a:t>
-            </a:r>
-            <a:br>
+              <a:t>    return prop;</a:t>
+            </a:r>
+          </a:p>
+          <a:p>
+            <a:r>
               <a:rPr lang="es-ES" sz="1600" dirty="0">
                 <a:solidFill>
                   <a:schemeClr val="bg1">
@@ -7396,647 +6257,8 @@
                   </a:schemeClr>
                 </a:solidFill>
               </a:rPr>
-            </a:br>
-            <a:r>
-              <a:rPr lang="es-ES" sz="1600" dirty="0">
-                <a:solidFill>
-                  <a:schemeClr val="bg1">
-                    <a:lumMod val="95000"/>
-                  </a:schemeClr>
-                </a:solidFill>
-              </a:rPr>
-              <a:t>    data, _ := </a:t>
-            </a:r>
-            <a:r>
-              <a:rPr lang="es-ES" sz="1600" dirty="0" err="1">
-                <a:solidFill>
-                  <a:schemeClr val="bg1">
-                    <a:lumMod val="95000"/>
-                  </a:schemeClr>
-                </a:solidFill>
-              </a:rPr>
-              <a:t>ctx.GetStub</a:t>
-            </a:r>
-            <a:r>
-              <a:rPr lang="es-ES" sz="1600" dirty="0">
-                <a:solidFill>
-                  <a:schemeClr val="bg1">
-                    <a:lumMod val="95000"/>
-                  </a:schemeClr>
-                </a:solidFill>
-              </a:rPr>
-              <a:t>().</a:t>
-            </a:r>
-            <a:r>
-              <a:rPr lang="es-ES" sz="1600" dirty="0" err="1">
-                <a:solidFill>
-                  <a:schemeClr val="bg1">
-                    <a:lumMod val="95000"/>
-                  </a:schemeClr>
-                </a:solidFill>
-              </a:rPr>
-              <a:t>GetState</a:t>
-            </a:r>
-            <a:r>
-              <a:rPr lang="es-ES" sz="1600" dirty="0">
-                <a:solidFill>
-                  <a:schemeClr val="bg1">
-                    <a:lumMod val="95000"/>
-                  </a:schemeClr>
-                </a:solidFill>
-              </a:rPr>
-              <a:t>(id)</a:t>
-            </a:r>
-            <a:br>
-              <a:rPr lang="es-ES" sz="1600" dirty="0">
-                <a:solidFill>
-                  <a:schemeClr val="bg1">
-                    <a:lumMod val="95000"/>
-                  </a:schemeClr>
-                </a:solidFill>
-              </a:rPr>
-            </a:br>
-            <a:r>
-              <a:rPr lang="es-ES" sz="1600" dirty="0">
-                <a:solidFill>
-                  <a:schemeClr val="bg1">
-                    <a:lumMod val="95000"/>
-                  </a:schemeClr>
-                </a:solidFill>
-              </a:rPr>
-              <a:t>    </a:t>
-            </a:r>
-            <a:r>
-              <a:rPr lang="es-ES" sz="1600" dirty="0" err="1">
-                <a:solidFill>
-                  <a:schemeClr val="bg1">
-                    <a:lumMod val="95000"/>
-                  </a:schemeClr>
-                </a:solidFill>
-              </a:rPr>
-              <a:t>var</a:t>
-            </a:r>
-            <a:r>
-              <a:rPr lang="es-ES" sz="1600" dirty="0">
-                <a:solidFill>
-                  <a:schemeClr val="bg1">
-                    <a:lumMod val="95000"/>
-                  </a:schemeClr>
-                </a:solidFill>
-              </a:rPr>
-              <a:t> </a:t>
-            </a:r>
-            <a:r>
-              <a:rPr lang="es-ES" sz="1600" dirty="0" err="1">
-                <a:solidFill>
-                  <a:schemeClr val="bg1">
-                    <a:lumMod val="95000"/>
-                  </a:schemeClr>
-                </a:solidFill>
-              </a:rPr>
-              <a:t>prop</a:t>
-            </a:r>
-            <a:r>
-              <a:rPr lang="es-ES" sz="1600" dirty="0">
-                <a:solidFill>
-                  <a:schemeClr val="bg1">
-                    <a:lumMod val="95000"/>
-                  </a:schemeClr>
-                </a:solidFill>
-              </a:rPr>
-              <a:t> PropertyV2</a:t>
-            </a:r>
-            <a:br>
-              <a:rPr lang="es-ES" sz="1600" dirty="0">
-                <a:solidFill>
-                  <a:schemeClr val="bg1">
-                    <a:lumMod val="95000"/>
-                  </a:schemeClr>
-                </a:solidFill>
-              </a:rPr>
-            </a:br>
-            <a:r>
-              <a:rPr lang="es-ES" sz="1600" dirty="0">
-                <a:solidFill>
-                  <a:schemeClr val="bg1">
-                    <a:lumMod val="95000"/>
-                  </a:schemeClr>
-                </a:solidFill>
-              </a:rPr>
-              <a:t>    </a:t>
-            </a:r>
-            <a:r>
-              <a:rPr lang="es-ES" sz="1600" dirty="0" err="1">
-                <a:solidFill>
-                  <a:schemeClr val="bg1">
-                    <a:lumMod val="95000"/>
-                  </a:schemeClr>
-                </a:solidFill>
-              </a:rPr>
-              <a:t>json.Unmarshal</a:t>
-            </a:r>
-            <a:r>
-              <a:rPr lang="es-ES" sz="1600" dirty="0">
-                <a:solidFill>
-                  <a:schemeClr val="bg1">
-                    <a:lumMod val="95000"/>
-                  </a:schemeClr>
-                </a:solidFill>
-              </a:rPr>
-              <a:t>(data, &amp;</a:t>
-            </a:r>
-            <a:r>
-              <a:rPr lang="es-ES" sz="1600" dirty="0" err="1">
-                <a:solidFill>
-                  <a:schemeClr val="bg1">
-                    <a:lumMod val="95000"/>
-                  </a:schemeClr>
-                </a:solidFill>
-              </a:rPr>
-              <a:t>prop</a:t>
-            </a:r>
-            <a:r>
-              <a:rPr lang="es-ES" sz="1600" dirty="0">
-                <a:solidFill>
-                  <a:schemeClr val="bg1">
-                    <a:lumMod val="95000"/>
-                  </a:schemeClr>
-                </a:solidFill>
-              </a:rPr>
-              <a:t>)</a:t>
-            </a:r>
-            <a:br>
-              <a:rPr lang="es-ES" sz="1600" dirty="0">
-                <a:solidFill>
-                  <a:schemeClr val="bg1">
-                    <a:lumMod val="95000"/>
-                  </a:schemeClr>
-                </a:solidFill>
-              </a:rPr>
-            </a:br>
-            <a:br>
-              <a:rPr lang="es-ES" sz="1600" dirty="0">
-                <a:solidFill>
-                  <a:schemeClr val="bg1">
-                    <a:lumMod val="95000"/>
-                  </a:schemeClr>
-                </a:solidFill>
-              </a:rPr>
-            </a:br>
-            <a:r>
-              <a:rPr lang="es-ES" sz="1600" dirty="0">
-                <a:solidFill>
-                  <a:schemeClr val="bg1">
-                    <a:lumMod val="95000"/>
-                  </a:schemeClr>
-                </a:solidFill>
-              </a:rPr>
-              <a:t>    // </a:t>
-            </a:r>
-            <a:r>
-              <a:rPr lang="es-ES" sz="1600" dirty="0" err="1">
-                <a:solidFill>
-                  <a:schemeClr val="bg1">
-                    <a:lumMod val="95000"/>
-                  </a:schemeClr>
-                </a:solidFill>
-              </a:rPr>
-              <a:t>Migracion</a:t>
-            </a:r>
-            <a:r>
-              <a:rPr lang="es-ES" sz="1600" dirty="0">
-                <a:solidFill>
-                  <a:schemeClr val="bg1">
-                    <a:lumMod val="95000"/>
-                  </a:schemeClr>
-                </a:solidFill>
-              </a:rPr>
-              <a:t> </a:t>
-            </a:r>
-            <a:r>
-              <a:rPr lang="es-ES" sz="1600" dirty="0" err="1">
-                <a:solidFill>
-                  <a:schemeClr val="bg1">
-                    <a:lumMod val="95000"/>
-                  </a:schemeClr>
-                </a:solidFill>
-              </a:rPr>
-              <a:t>lazy</a:t>
-            </a:r>
-            <a:r>
-              <a:rPr lang="es-ES" sz="1600" dirty="0">
-                <a:solidFill>
-                  <a:schemeClr val="bg1">
-                    <a:lumMod val="95000"/>
-                  </a:schemeClr>
-                </a:solidFill>
-              </a:rPr>
-              <a:t>: si es </a:t>
-            </a:r>
-            <a:r>
-              <a:rPr lang="es-ES" sz="1600" dirty="0" err="1">
-                <a:solidFill>
-                  <a:schemeClr val="bg1">
-                    <a:lumMod val="95000"/>
-                  </a:schemeClr>
-                </a:solidFill>
-              </a:rPr>
-              <a:t>version</a:t>
-            </a:r>
-            <a:r>
-              <a:rPr lang="es-ES" sz="1600" dirty="0">
-                <a:solidFill>
-                  <a:schemeClr val="bg1">
-                    <a:lumMod val="95000"/>
-                  </a:schemeClr>
-                </a:solidFill>
-              </a:rPr>
-              <a:t> antigua, aplicar defaults</a:t>
-            </a:r>
-            <a:br>
-              <a:rPr lang="es-ES" sz="1600" dirty="0">
-                <a:solidFill>
-                  <a:schemeClr val="bg1">
-                    <a:lumMod val="95000"/>
-                  </a:schemeClr>
-                </a:solidFill>
-              </a:rPr>
-            </a:br>
-            <a:r>
-              <a:rPr lang="es-ES" sz="1600" dirty="0">
-                <a:solidFill>
-                  <a:schemeClr val="bg1">
-                    <a:lumMod val="95000"/>
-                  </a:schemeClr>
-                </a:solidFill>
-              </a:rPr>
-              <a:t>    </a:t>
-            </a:r>
-            <a:r>
-              <a:rPr lang="es-ES" sz="1600" dirty="0" err="1">
-                <a:solidFill>
-                  <a:schemeClr val="bg1">
-                    <a:lumMod val="95000"/>
-                  </a:schemeClr>
-                </a:solidFill>
-              </a:rPr>
-              <a:t>if</a:t>
-            </a:r>
-            <a:r>
-              <a:rPr lang="es-ES" sz="1600" dirty="0">
-                <a:solidFill>
-                  <a:schemeClr val="bg1">
-                    <a:lumMod val="95000"/>
-                  </a:schemeClr>
-                </a:solidFill>
-              </a:rPr>
-              <a:t> </a:t>
-            </a:r>
-            <a:r>
-              <a:rPr lang="es-ES" sz="1600" dirty="0" err="1">
-                <a:solidFill>
-                  <a:schemeClr val="bg1">
-                    <a:lumMod val="95000"/>
-                  </a:schemeClr>
-                </a:solidFill>
-              </a:rPr>
-              <a:t>prop.Version</a:t>
-            </a:r>
-            <a:r>
-              <a:rPr lang="es-ES" sz="1600" dirty="0">
-                <a:solidFill>
-                  <a:schemeClr val="bg1">
-                    <a:lumMod val="95000"/>
-                  </a:schemeClr>
-                </a:solidFill>
-              </a:rPr>
-              <a:t> &lt; 2 {</a:t>
-            </a:r>
-            <a:br>
-              <a:rPr lang="es-ES" sz="1600" dirty="0">
-                <a:solidFill>
-                  <a:schemeClr val="bg1">
-                    <a:lumMod val="95000"/>
-                  </a:schemeClr>
-                </a:solidFill>
-              </a:rPr>
-            </a:br>
-            <a:r>
-              <a:rPr lang="es-ES" sz="1600" dirty="0">
-                <a:solidFill>
-                  <a:schemeClr val="bg1">
-                    <a:lumMod val="95000"/>
-                  </a:schemeClr>
-                </a:solidFill>
-              </a:rPr>
-              <a:t>        </a:t>
-            </a:r>
-            <a:r>
-              <a:rPr lang="es-ES" sz="1600" dirty="0" err="1">
-                <a:solidFill>
-                  <a:schemeClr val="bg1">
-                    <a:lumMod val="95000"/>
-                  </a:schemeClr>
-                </a:solidFill>
-              </a:rPr>
-              <a:t>if</a:t>
-            </a:r>
-            <a:r>
-              <a:rPr lang="es-ES" sz="1600" dirty="0">
-                <a:solidFill>
-                  <a:schemeClr val="bg1">
-                    <a:lumMod val="95000"/>
-                  </a:schemeClr>
-                </a:solidFill>
-              </a:rPr>
-              <a:t> </a:t>
-            </a:r>
-            <a:r>
-              <a:rPr lang="es-ES" sz="1600" dirty="0" err="1">
-                <a:solidFill>
-                  <a:schemeClr val="bg1">
-                    <a:lumMod val="95000"/>
-                  </a:schemeClr>
-                </a:solidFill>
-              </a:rPr>
-              <a:t>prop.PropertyType</a:t>
-            </a:r>
-            <a:r>
-              <a:rPr lang="es-ES" sz="1600" dirty="0">
-                <a:solidFill>
-                  <a:schemeClr val="bg1">
-                    <a:lumMod val="95000"/>
-                  </a:schemeClr>
-                </a:solidFill>
-              </a:rPr>
-              <a:t> == "" { </a:t>
-            </a:r>
-            <a:r>
-              <a:rPr lang="es-ES" sz="1600" dirty="0" err="1">
-                <a:solidFill>
-                  <a:schemeClr val="bg1">
-                    <a:lumMod val="95000"/>
-                  </a:schemeClr>
-                </a:solidFill>
-              </a:rPr>
-              <a:t>prop.PropertyType</a:t>
-            </a:r>
-            <a:r>
-              <a:rPr lang="es-ES" sz="1600" dirty="0">
-                <a:solidFill>
-                  <a:schemeClr val="bg1">
-                    <a:lumMod val="95000"/>
-                  </a:schemeClr>
-                </a:solidFill>
-              </a:rPr>
-              <a:t> = "</a:t>
-            </a:r>
-            <a:r>
-              <a:rPr lang="es-ES" sz="1600" dirty="0" err="1">
-                <a:solidFill>
-                  <a:schemeClr val="bg1">
-                    <a:lumMod val="95000"/>
-                  </a:schemeClr>
-                </a:solidFill>
-              </a:rPr>
-              <a:t>unknown</a:t>
-            </a:r>
-            <a:r>
-              <a:rPr lang="es-ES" sz="1600" dirty="0">
-                <a:solidFill>
-                  <a:schemeClr val="bg1">
-                    <a:lumMod val="95000"/>
-                  </a:schemeClr>
-                </a:solidFill>
-              </a:rPr>
-              <a:t>" }</a:t>
-            </a:r>
-            <a:br>
-              <a:rPr lang="es-ES" sz="1600" dirty="0">
-                <a:solidFill>
-                  <a:schemeClr val="bg1">
-                    <a:lumMod val="95000"/>
-                  </a:schemeClr>
-                </a:solidFill>
-              </a:rPr>
-            </a:br>
-            <a:r>
-              <a:rPr lang="es-ES" sz="1600" dirty="0">
-                <a:solidFill>
-                  <a:schemeClr val="bg1">
-                    <a:lumMod val="95000"/>
-                  </a:schemeClr>
-                </a:solidFill>
-              </a:rPr>
-              <a:t>        </a:t>
-            </a:r>
-            <a:r>
-              <a:rPr lang="es-ES" sz="1600" dirty="0" err="1">
-                <a:solidFill>
-                  <a:schemeClr val="bg1">
-                    <a:lumMod val="95000"/>
-                  </a:schemeClr>
-                </a:solidFill>
-              </a:rPr>
-              <a:t>prop.Version</a:t>
-            </a:r>
-            <a:r>
-              <a:rPr lang="es-ES" sz="1600" dirty="0">
-                <a:solidFill>
-                  <a:schemeClr val="bg1">
-                    <a:lumMod val="95000"/>
-                  </a:schemeClr>
-                </a:solidFill>
-              </a:rPr>
-              <a:t> = 2</a:t>
-            </a:r>
-            <a:br>
-              <a:rPr lang="es-ES" sz="1600" dirty="0">
-                <a:solidFill>
-                  <a:schemeClr val="bg1">
-                    <a:lumMod val="95000"/>
-                  </a:schemeClr>
-                </a:solidFill>
-              </a:rPr>
-            </a:br>
-            <a:r>
-              <a:rPr lang="es-ES" sz="1600" dirty="0">
-                <a:solidFill>
-                  <a:schemeClr val="bg1">
-                    <a:lumMod val="95000"/>
-                  </a:schemeClr>
-                </a:solidFill>
-              </a:rPr>
-              <a:t>        // Guardar migrado (opcional: hacerlo </a:t>
-            </a:r>
-            <a:r>
-              <a:rPr lang="es-ES" sz="1600" dirty="0" err="1">
-                <a:solidFill>
-                  <a:schemeClr val="bg1">
-                    <a:lumMod val="95000"/>
-                  </a:schemeClr>
-                </a:solidFill>
-              </a:rPr>
-              <a:t>on-read</a:t>
-            </a:r>
-            <a:r>
-              <a:rPr lang="es-ES" sz="1600" dirty="0">
-                <a:solidFill>
-                  <a:schemeClr val="bg1">
-                    <a:lumMod val="95000"/>
-                  </a:schemeClr>
-                </a:solidFill>
-              </a:rPr>
-              <a:t> o con </a:t>
-            </a:r>
-            <a:r>
-              <a:rPr lang="es-ES" sz="1600" dirty="0" err="1">
-                <a:solidFill>
-                  <a:schemeClr val="bg1">
-                    <a:lumMod val="95000"/>
-                  </a:schemeClr>
-                </a:solidFill>
-              </a:rPr>
-              <a:t>funcion</a:t>
-            </a:r>
-            <a:r>
-              <a:rPr lang="es-ES" sz="1600" dirty="0">
-                <a:solidFill>
-                  <a:schemeClr val="bg1">
-                    <a:lumMod val="95000"/>
-                  </a:schemeClr>
-                </a:solidFill>
-              </a:rPr>
-              <a:t> de </a:t>
-            </a:r>
-            <a:r>
-              <a:rPr lang="es-ES" sz="1600" dirty="0" err="1">
-                <a:solidFill>
-                  <a:schemeClr val="bg1">
-                    <a:lumMod val="95000"/>
-                  </a:schemeClr>
-                </a:solidFill>
-              </a:rPr>
-              <a:t>migracion</a:t>
-            </a:r>
-            <a:r>
-              <a:rPr lang="es-ES" sz="1600" dirty="0">
-                <a:solidFill>
-                  <a:schemeClr val="bg1">
-                    <a:lumMod val="95000"/>
-                  </a:schemeClr>
-                </a:solidFill>
-              </a:rPr>
-              <a:t>)</a:t>
-            </a:r>
-            <a:br>
-              <a:rPr lang="es-ES" sz="1600" dirty="0">
-                <a:solidFill>
-                  <a:schemeClr val="bg1">
-                    <a:lumMod val="95000"/>
-                  </a:schemeClr>
-                </a:solidFill>
-              </a:rPr>
-            </a:br>
-            <a:r>
-              <a:rPr lang="es-ES" sz="1600" dirty="0">
-                <a:solidFill>
-                  <a:schemeClr val="bg1">
-                    <a:lumMod val="95000"/>
-                  </a:schemeClr>
-                </a:solidFill>
-              </a:rPr>
-              <a:t>    }</a:t>
-            </a:r>
-            <a:br>
-              <a:rPr lang="es-ES" sz="1600" dirty="0">
-                <a:solidFill>
-                  <a:schemeClr val="bg1">
-                    <a:lumMod val="95000"/>
-                  </a:schemeClr>
-                </a:solidFill>
-              </a:rPr>
-            </a:br>
-            <a:r>
-              <a:rPr lang="es-ES" sz="1600" dirty="0">
-                <a:solidFill>
-                  <a:schemeClr val="bg1">
-                    <a:lumMod val="95000"/>
-                  </a:schemeClr>
-                </a:solidFill>
-              </a:rPr>
-              <a:t>    </a:t>
-            </a:r>
-            <a:r>
-              <a:rPr lang="es-ES" sz="1600" dirty="0" err="1">
-                <a:solidFill>
-                  <a:schemeClr val="bg1">
-                    <a:lumMod val="95000"/>
-                  </a:schemeClr>
-                </a:solidFill>
-              </a:rPr>
-              <a:t>return</a:t>
-            </a:r>
-            <a:r>
-              <a:rPr lang="es-ES" sz="1600" dirty="0">
-                <a:solidFill>
-                  <a:schemeClr val="bg1">
-                    <a:lumMod val="95000"/>
-                  </a:schemeClr>
-                </a:solidFill>
-              </a:rPr>
-              <a:t> &amp;</a:t>
-            </a:r>
-            <a:r>
-              <a:rPr lang="es-ES" sz="1600" dirty="0" err="1">
-                <a:solidFill>
-                  <a:schemeClr val="bg1">
-                    <a:lumMod val="95000"/>
-                  </a:schemeClr>
-                </a:solidFill>
-              </a:rPr>
-              <a:t>prop</a:t>
-            </a:r>
-            <a:r>
-              <a:rPr lang="es-ES" sz="1600" dirty="0">
-                <a:solidFill>
-                  <a:schemeClr val="bg1">
-                    <a:lumMod val="95000"/>
-                  </a:schemeClr>
-                </a:solidFill>
-              </a:rPr>
-              <a:t>, </a:t>
-            </a:r>
-            <a:r>
-              <a:rPr lang="es-ES" sz="1600" dirty="0" err="1">
-                <a:solidFill>
-                  <a:schemeClr val="bg1">
-                    <a:lumMod val="95000"/>
-                  </a:schemeClr>
-                </a:solidFill>
-              </a:rPr>
-              <a:t>nil</a:t>
-            </a:r>
-            <a:br>
-              <a:rPr lang="es-ES" sz="1600" dirty="0">
-                <a:solidFill>
-                  <a:schemeClr val="bg1">
-                    <a:lumMod val="95000"/>
-                  </a:schemeClr>
-                </a:solidFill>
-              </a:rPr>
-            </a:br>
-            <a:r>
-              <a:rPr lang="es-ES" sz="1600" dirty="0">
-                <a:solidFill>
-                  <a:schemeClr val="bg1">
-                    <a:lumMod val="95000"/>
-                  </a:schemeClr>
-                </a:solidFill>
-              </a:rPr>
               <a:t>}</a:t>
             </a:r>
-            <a:endParaRPr lang="es-ES" sz="1600" dirty="0"/>
           </a:p>
         </p:txBody>
       </p:sp>
@@ -10259,7 +8481,7 @@
         <p:spPr>
           <a:xfrm>
             <a:off x="0" y="0"/>
-            <a:ext cx="12188952" cy="6858000"/>
+            <a:ext cx="12188952" cy="73152"/>
           </a:xfrm>
           <a:prstGeom prst="rect">
             <a:avLst/>
@@ -10315,6 +8537,794 @@
           <a:lstStyle/>
           <a:p>
             <a:pPr algn="l">
+              <a:defRPr sz="3200" b="1">
+                <a:solidFill>
+                  <a:srgbClr val="22627E"/>
+                </a:solidFill>
+                <a:latin typeface="Calibri"/>
+              </a:defRPr>
+            </a:pPr>
+            <a:r>
+              <a:t>Respuestas al debate (1/2)</a:t>
+            </a:r>
+          </a:p>
+        </p:txBody>
+      </p:sp>
+      <p:sp>
+        <p:nvSpPr>
+          <p:cNvPr id="4" name="Rectangle 3"/>
+          <p:cNvSpPr/>
+          <p:nvPr/>
+        </p:nvSpPr>
+        <p:spPr>
+          <a:xfrm>
+            <a:off x="457200" y="1051560"/>
+            <a:ext cx="10972800" cy="27432"/>
+          </a:xfrm>
+          <a:prstGeom prst="rect">
+            <a:avLst/>
+          </a:prstGeom>
+          <a:solidFill>
+            <a:srgbClr val="22627E"/>
+          </a:solidFill>
+          <a:ln>
+            <a:noFill/>
+          </a:ln>
+        </p:spPr>
+        <p:style>
+          <a:lnRef idx="1">
+            <a:schemeClr val="accent1"/>
+          </a:lnRef>
+          <a:fillRef idx="3">
+            <a:schemeClr val="accent1"/>
+          </a:fillRef>
+          <a:effectRef idx="2">
+            <a:schemeClr val="accent1"/>
+          </a:effectRef>
+          <a:fontRef idx="minor">
+            <a:schemeClr val="lt1"/>
+          </a:fontRef>
+        </p:style>
+        <p:txBody>
+          <a:bodyPr rtlCol="0" anchor="ctr"/>
+          <a:lstStyle/>
+          <a:p>
+            <a:pPr algn="ctr"/>
+            <a:endParaRPr/>
+          </a:p>
+        </p:txBody>
+      </p:sp>
+      <p:sp>
+        <p:nvSpPr>
+          <p:cNvPr id="5" name="TextBox 4"/>
+          <p:cNvSpPr txBox="1"/>
+          <p:nvPr/>
+        </p:nvSpPr>
+        <p:spPr>
+          <a:xfrm>
+            <a:off x="640080" y="1280160"/>
+            <a:ext cx="10515600" cy="5029200"/>
+          </a:xfrm>
+          <a:prstGeom prst="rect">
+            <a:avLst/>
+          </a:prstGeom>
+          <a:noFill/>
+        </p:spPr>
+        <p:txBody>
+          <a:bodyPr wrap="square">
+            <a:spAutoFit/>
+          </a:bodyPr>
+          <a:lstStyle/>
+          <a:p>
+            <a:pPr>
+              <a:spcAft>
+                <a:spcPts val="800"/>
+              </a:spcAft>
+              <a:defRPr sz="2000">
+                <a:solidFill>
+                  <a:srgbClr val="333333"/>
+                </a:solidFill>
+                <a:latin typeface="Calibri"/>
+              </a:defRPr>
+            </a:pPr>
+            <a:r>
+              <a:t>1. ¿Quien audita los chaincodes en un consorcio?</a:t>
+            </a:r>
+          </a:p>
+          <a:p>
+            <a:pPr lvl="1">
+              <a:spcAft>
+                <a:spcPts val="400"/>
+              </a:spcAft>
+              <a:defRPr sz="1700">
+                <a:solidFill>
+                  <a:srgbClr val="666666"/>
+                </a:solidFill>
+                <a:latin typeface="Calibri"/>
+              </a:defRPr>
+            </a:pPr>
+            <a:r>
+              <a:t>    Opcion A: cada org audita por su cuenta (conflicto de intereses).</a:t>
+            </a:r>
+          </a:p>
+          <a:p>
+            <a:pPr lvl="1">
+              <a:spcAft>
+                <a:spcPts val="400"/>
+              </a:spcAft>
+              <a:defRPr sz="1700">
+                <a:solidFill>
+                  <a:srgbClr val="666666"/>
+                </a:solidFill>
+                <a:latin typeface="Calibri"/>
+              </a:defRPr>
+            </a:pPr>
+            <a:r>
+              <a:t>    Opcion B: auditor externo independiente (mas objetivo, mas caro).</a:t>
+            </a:r>
+          </a:p>
+          <a:p>
+            <a:pPr lvl="1">
+              <a:spcAft>
+                <a:spcPts val="400"/>
+              </a:spcAft>
+              <a:defRPr sz="1700">
+                <a:solidFill>
+                  <a:srgbClr val="666666"/>
+                </a:solidFill>
+                <a:latin typeface="Calibri"/>
+              </a:defRPr>
+            </a:pPr>
+            <a:r>
+              <a:t>    Opcion C: mixto — codigo open source + auditoria por org + auditor externo.</a:t>
+            </a:r>
+          </a:p>
+          <a:p>
+            <a:pPr lvl="1">
+              <a:spcAft>
+                <a:spcPts val="400"/>
+              </a:spcAft>
+              <a:defRPr sz="1700">
+                <a:solidFill>
+                  <a:srgbClr val="666666"/>
+                </a:solidFill>
+                <a:latin typeface="Calibri"/>
+              </a:defRPr>
+            </a:pPr>
+            <a:r>
+              <a:t>    En la practica: los consorcios serios pagan una auditoria externa antes de cada release.</a:t>
+            </a:r>
+          </a:p>
+          <a:p>
+            <a:pPr>
+              <a:spcAft>
+                <a:spcPts val="800"/>
+              </a:spcAft>
+              <a:defRPr sz="2000">
+                <a:solidFill>
+                  <a:srgbClr val="333333"/>
+                </a:solidFill>
+                <a:latin typeface="Calibri"/>
+              </a:defRPr>
+            </a:pPr>
+            <a:r>
+              <a:t>2. Bug de determinismo que no falla visiblemente:</a:t>
+            </a:r>
+          </a:p>
+          <a:p>
+            <a:pPr lvl="1">
+              <a:spcAft>
+                <a:spcPts val="400"/>
+              </a:spcAft>
+              <a:defRPr sz="1700">
+                <a:solidFill>
+                  <a:srgbClr val="666666"/>
+                </a:solidFill>
+                <a:latin typeface="Calibri"/>
+              </a:defRPr>
+            </a:pPr>
+            <a:r>
+              <a:t>    Monitorizar tasa de transacciones invalidas (MVCC_READ_CONFLICT, etc.) en metricas.</a:t>
+            </a:r>
+          </a:p>
+          <a:p>
+            <a:pPr lvl="1">
+              <a:spcAft>
+                <a:spcPts val="400"/>
+              </a:spcAft>
+              <a:defRPr sz="1700">
+                <a:solidFill>
+                  <a:srgbClr val="666666"/>
+                </a:solidFill>
+                <a:latin typeface="Calibri"/>
+              </a:defRPr>
+            </a:pPr>
+            <a:r>
+              <a:t>    Alertas cuando esa tasa sube sin causa clara.</a:t>
+            </a:r>
+          </a:p>
+          <a:p>
+            <a:pPr lvl="1">
+              <a:spcAft>
+                <a:spcPts val="400"/>
+              </a:spcAft>
+              <a:defRPr sz="1700">
+                <a:solidFill>
+                  <a:srgbClr val="666666"/>
+                </a:solidFill>
+                <a:latin typeface="Calibri"/>
+              </a:defRPr>
+            </a:pPr>
+            <a:r>
+              <a:t>    Tests de integracion que ejecuten el chaincode en PARALELO en varios peers.</a:t>
+            </a:r>
+          </a:p>
+          <a:p>
+            <a:pPr lvl="1">
+              <a:spcAft>
+                <a:spcPts val="400"/>
+              </a:spcAft>
+              <a:defRPr sz="1700">
+                <a:solidFill>
+                  <a:srgbClr val="666666"/>
+                </a:solidFill>
+                <a:latin typeface="Calibri"/>
+              </a:defRPr>
+            </a:pPr>
+            <a:r>
+              <a:t>    Revisar logs de los peers: buscan 'invalid transactions' en el commit.</a:t>
+            </a:r>
+          </a:p>
+          <a:p>
+            <a:pPr lvl="1">
+              <a:spcAft>
+                <a:spcPts val="400"/>
+              </a:spcAft>
+              <a:defRPr sz="1700">
+                <a:solidFill>
+                  <a:srgbClr val="666666"/>
+                </a:solidFill>
+                <a:latin typeface="Calibri"/>
+              </a:defRPr>
+            </a:pPr>
+            <a:r>
+              <a:t>    Mejor: prevenir en CI con linters que detecten time.Now, rand, map iteration, etc.</a:t>
+            </a:r>
+          </a:p>
+          <a:p>
+            <a:pPr>
+              <a:spcAft>
+                <a:spcPts val="800"/>
+              </a:spcAft>
+              <a:defRPr sz="2000">
+                <a:solidFill>
+                  <a:srgbClr val="333333"/>
+                </a:solidFill>
+                <a:latin typeface="Calibri"/>
+              </a:defRPr>
+            </a:pPr>
+            <a:r>
+              <a:t>3. ¿ABAC suficiente o hace falta RBAC con World State?</a:t>
+            </a:r>
+          </a:p>
+          <a:p>
+            <a:pPr lvl="1">
+              <a:spcAft>
+                <a:spcPts val="400"/>
+              </a:spcAft>
+              <a:defRPr sz="1700">
+                <a:solidFill>
+                  <a:srgbClr val="666666"/>
+                </a:solidFill>
+                <a:latin typeface="Calibri"/>
+              </a:defRPr>
+            </a:pPr>
+            <a:r>
+              <a:t>    ABAC (atributos en cert X.509) es simple pero rigido: el atributo queda fijado al emitir.</a:t>
+            </a:r>
+          </a:p>
+          <a:p>
+            <a:pPr lvl="1">
+              <a:spcAft>
+                <a:spcPts val="400"/>
+              </a:spcAft>
+              <a:defRPr sz="1700">
+                <a:solidFill>
+                  <a:srgbClr val="666666"/>
+                </a:solidFill>
+                <a:latin typeface="Calibri"/>
+              </a:defRPr>
+            </a:pPr>
+            <a:r>
+              <a:t>    RBAC con tabla en World State es flexible: puedes cambiar permisos sin reenroll.</a:t>
+            </a:r>
+          </a:p>
+          <a:p>
+            <a:pPr lvl="1">
+              <a:spcAft>
+                <a:spcPts val="400"/>
+              </a:spcAft>
+              <a:defRPr sz="1700">
+                <a:solidFill>
+                  <a:srgbClr val="666666"/>
+                </a:solidFill>
+                <a:latin typeface="Calibri"/>
+              </a:defRPr>
+            </a:pPr>
+            <a:r>
+              <a:t>    Combinar: ABAC para roles estables (minter, regulator), RBAC para permisos granulares.</a:t>
+            </a:r>
+          </a:p>
+          <a:p>
+            <a:pPr lvl="1">
+              <a:spcAft>
+                <a:spcPts val="400"/>
+              </a:spcAft>
+              <a:defRPr sz="1700">
+                <a:solidFill>
+                  <a:srgbClr val="666666"/>
+                </a:solidFill>
+                <a:latin typeface="Calibri"/>
+              </a:defRPr>
+            </a:pPr>
+            <a:r>
+              <a:t>    Cuidado con RBAC: los permisos son datos normales, necesitan proteccion tambien.</a:t>
+            </a:r>
+          </a:p>
+        </p:txBody>
+      </p:sp>
+    </p:spTree>
+  </p:cSld>
+  <p:clrMapOvr>
+    <a:masterClrMapping/>
+  </p:clrMapOvr>
+</p:sld>
+</file>
+
+<file path=ppt/slides/slide24.xml><?xml version="1.0" encoding="utf-8"?>
+<p:sld xmlns:a="http://schemas.openxmlformats.org/drawingml/2006/main" xmlns:r="http://schemas.openxmlformats.org/officeDocument/2006/relationships" xmlns:p="http://schemas.openxmlformats.org/presentationml/2006/main">
+  <p:cSld>
+    <p:spTree>
+      <p:nvGrpSpPr>
+        <p:cNvPr id="1" name=""/>
+        <p:cNvGrpSpPr/>
+        <p:nvPr/>
+      </p:nvGrpSpPr>
+      <p:grpSpPr>
+        <a:xfrm>
+          <a:off x="0" y="0"/>
+          <a:ext cx="0" cy="0"/>
+          <a:chOff x="0" y="0"/>
+          <a:chExt cx="0" cy="0"/>
+        </a:xfrm>
+      </p:grpSpPr>
+      <p:sp>
+        <p:nvSpPr>
+          <p:cNvPr id="2" name="Rectangle 1"/>
+          <p:cNvSpPr/>
+          <p:nvPr/>
+        </p:nvSpPr>
+        <p:spPr>
+          <a:xfrm>
+            <a:off x="0" y="0"/>
+            <a:ext cx="12188952" cy="73152"/>
+          </a:xfrm>
+          <a:prstGeom prst="rect">
+            <a:avLst/>
+          </a:prstGeom>
+          <a:solidFill>
+            <a:srgbClr val="22627E"/>
+          </a:solidFill>
+          <a:ln>
+            <a:noFill/>
+          </a:ln>
+        </p:spPr>
+        <p:style>
+          <a:lnRef idx="1">
+            <a:schemeClr val="accent1"/>
+          </a:lnRef>
+          <a:fillRef idx="3">
+            <a:schemeClr val="accent1"/>
+          </a:fillRef>
+          <a:effectRef idx="2">
+            <a:schemeClr val="accent1"/>
+          </a:effectRef>
+          <a:fontRef idx="minor">
+            <a:schemeClr val="lt1"/>
+          </a:fontRef>
+        </p:style>
+        <p:txBody>
+          <a:bodyPr rtlCol="0" anchor="ctr"/>
+          <a:lstStyle/>
+          <a:p>
+            <a:pPr algn="ctr"/>
+            <a:endParaRPr/>
+          </a:p>
+        </p:txBody>
+      </p:sp>
+      <p:sp>
+        <p:nvSpPr>
+          <p:cNvPr id="3" name="TextBox 2"/>
+          <p:cNvSpPr txBox="1"/>
+          <p:nvPr/>
+        </p:nvSpPr>
+        <p:spPr>
+          <a:xfrm>
+            <a:off x="457200" y="274320"/>
+            <a:ext cx="10972800" cy="731520"/>
+          </a:xfrm>
+          <a:prstGeom prst="rect">
+            <a:avLst/>
+          </a:prstGeom>
+          <a:noFill/>
+        </p:spPr>
+        <p:txBody>
+          <a:bodyPr wrap="square"/>
+          <a:lstStyle/>
+          <a:p>
+            <a:pPr algn="l">
+              <a:defRPr sz="3200" b="1">
+                <a:solidFill>
+                  <a:srgbClr val="22627E"/>
+                </a:solidFill>
+                <a:latin typeface="Calibri"/>
+              </a:defRPr>
+            </a:pPr>
+            <a:r>
+              <a:t>Respuestas al debate (2/2)</a:t>
+            </a:r>
+          </a:p>
+        </p:txBody>
+      </p:sp>
+      <p:sp>
+        <p:nvSpPr>
+          <p:cNvPr id="4" name="Rectangle 3"/>
+          <p:cNvSpPr/>
+          <p:nvPr/>
+        </p:nvSpPr>
+        <p:spPr>
+          <a:xfrm>
+            <a:off x="457200" y="1051560"/>
+            <a:ext cx="10972800" cy="27432"/>
+          </a:xfrm>
+          <a:prstGeom prst="rect">
+            <a:avLst/>
+          </a:prstGeom>
+          <a:solidFill>
+            <a:srgbClr val="22627E"/>
+          </a:solidFill>
+          <a:ln>
+            <a:noFill/>
+          </a:ln>
+        </p:spPr>
+        <p:style>
+          <a:lnRef idx="1">
+            <a:schemeClr val="accent1"/>
+          </a:lnRef>
+          <a:fillRef idx="3">
+            <a:schemeClr val="accent1"/>
+          </a:fillRef>
+          <a:effectRef idx="2">
+            <a:schemeClr val="accent1"/>
+          </a:effectRef>
+          <a:fontRef idx="minor">
+            <a:schemeClr val="lt1"/>
+          </a:fontRef>
+        </p:style>
+        <p:txBody>
+          <a:bodyPr rtlCol="0" anchor="ctr"/>
+          <a:lstStyle/>
+          <a:p>
+            <a:pPr algn="ctr"/>
+            <a:endParaRPr/>
+          </a:p>
+        </p:txBody>
+      </p:sp>
+      <p:sp>
+        <p:nvSpPr>
+          <p:cNvPr id="5" name="TextBox 4"/>
+          <p:cNvSpPr txBox="1"/>
+          <p:nvPr/>
+        </p:nvSpPr>
+        <p:spPr>
+          <a:xfrm>
+            <a:off x="640080" y="1280160"/>
+            <a:ext cx="10515600" cy="5029200"/>
+          </a:xfrm>
+          <a:prstGeom prst="rect">
+            <a:avLst/>
+          </a:prstGeom>
+          <a:noFill/>
+        </p:spPr>
+        <p:txBody>
+          <a:bodyPr wrap="square">
+            <a:spAutoFit/>
+          </a:bodyPr>
+          <a:lstStyle/>
+          <a:p>
+            <a:pPr>
+              <a:spcAft>
+                <a:spcPts val="800"/>
+              </a:spcAft>
+              <a:defRPr sz="2000">
+                <a:solidFill>
+                  <a:srgbClr val="333333"/>
+                </a:solidFill>
+                <a:latin typeface="Calibri"/>
+              </a:defRPr>
+            </a:pPr>
+            <a:r>
+              <a:t>4. Protecciones si un endorsing peer es comprometido:</a:t>
+            </a:r>
+          </a:p>
+          <a:p>
+            <a:pPr lvl="1">
+              <a:spcAft>
+                <a:spcPts val="400"/>
+              </a:spcAft>
+              <a:defRPr sz="1700">
+                <a:solidFill>
+                  <a:srgbClr val="666666"/>
+                </a:solidFill>
+                <a:latin typeface="Calibri"/>
+              </a:defRPr>
+            </a:pPr>
+            <a:r>
+              <a:t>    La politica de endorsement exige firma de VARIAS orgs — un solo peer comprometido no basta.</a:t>
+            </a:r>
+          </a:p>
+          <a:p>
+            <a:pPr lvl="1">
+              <a:spcAft>
+                <a:spcPts val="400"/>
+              </a:spcAft>
+              <a:defRPr sz="1700">
+                <a:solidFill>
+                  <a:srgbClr val="666666"/>
+                </a:solidFill>
+                <a:latin typeface="Calibri"/>
+              </a:defRPr>
+            </a:pPr>
+            <a:r>
+              <a:t>    El atacante puede emitir endorsements falsos, pero si no hay mayoria, no se commitean.</a:t>
+            </a:r>
+          </a:p>
+          <a:p>
+            <a:pPr lvl="1">
+              <a:spcAft>
+                <a:spcPts val="400"/>
+              </a:spcAft>
+              <a:defRPr sz="1700">
+                <a:solidFill>
+                  <a:srgbClr val="666666"/>
+                </a:solidFill>
+                <a:latin typeface="Calibri"/>
+              </a:defRPr>
+            </a:pPr>
+            <a:r>
+              <a:t>    Detectar: los otros peers ven las propuestas y pueden detectar comportamiento anomalo.</a:t>
+            </a:r>
+          </a:p>
+          <a:p>
+            <a:pPr lvl="1">
+              <a:spcAft>
+                <a:spcPts val="400"/>
+              </a:spcAft>
+              <a:defRPr sz="1700">
+                <a:solidFill>
+                  <a:srgbClr val="666666"/>
+                </a:solidFill>
+                <a:latin typeface="Calibri"/>
+              </a:defRPr>
+            </a:pPr>
+            <a:r>
+              <a:t>    Mitigar: revocar el certificado del peer comprometido y generar uno nuevo.</a:t>
+            </a:r>
+          </a:p>
+          <a:p>
+            <a:pPr lvl="1">
+              <a:spcAft>
+                <a:spcPts val="400"/>
+              </a:spcAft>
+              <a:defRPr sz="1700">
+                <a:solidFill>
+                  <a:srgbClr val="666666"/>
+                </a:solidFill>
+                <a:latin typeface="Calibri"/>
+              </a:defRPr>
+            </a:pPr>
+            <a:r>
+              <a:t>    Proteger los orderers: si hay 3 orderers y 2 estan comprometidos, el atacante controla el bloque.</a:t>
+            </a:r>
+          </a:p>
+          <a:p>
+            <a:pPr>
+              <a:spcAft>
+                <a:spcPts val="800"/>
+              </a:spcAft>
+              <a:defRPr sz="2000">
+                <a:solidFill>
+                  <a:srgbClr val="333333"/>
+                </a:solidFill>
+                <a:latin typeface="Calibri"/>
+              </a:defRPr>
+            </a:pPr>
+            <a:r>
+              <a:t>5. Rotacion de certificados sin perder acceso:</a:t>
+            </a:r>
+          </a:p>
+          <a:p>
+            <a:pPr lvl="1">
+              <a:spcAft>
+                <a:spcPts val="400"/>
+              </a:spcAft>
+              <a:defRPr sz="1700">
+                <a:solidFill>
+                  <a:srgbClr val="666666"/>
+                </a:solidFill>
+                <a:latin typeface="Calibri"/>
+              </a:defRPr>
+            </a:pPr>
+            <a:r>
+              <a:t>    Los certificados los usa cada org localmente — no afectan a los datos del World State.</a:t>
+            </a:r>
+          </a:p>
+          <a:p>
+            <a:pPr lvl="1">
+              <a:spcAft>
+                <a:spcPts val="400"/>
+              </a:spcAft>
+              <a:defRPr sz="1700">
+                <a:solidFill>
+                  <a:srgbClr val="666666"/>
+                </a:solidFill>
+                <a:latin typeface="Calibri"/>
+              </a:defRPr>
+            </a:pPr>
+            <a:r>
+              <a:t>    Al renovar (reenroll), el nuevo certificado queda asociado al mismo MSPID.</a:t>
+            </a:r>
+          </a:p>
+          <a:p>
+            <a:pPr lvl="1">
+              <a:spcAft>
+                <a:spcPts val="400"/>
+              </a:spcAft>
+              <a:defRPr sz="1700">
+                <a:solidFill>
+                  <a:srgbClr val="666666"/>
+                </a:solidFill>
+                <a:latin typeface="Calibri"/>
+              </a:defRPr>
+            </a:pPr>
+            <a:r>
+              <a:t>    Los datos siguen siendo accesibles porque el control de acceso es por MSPID, no por cert concreto.</a:t>
+            </a:r>
+          </a:p>
+          <a:p>
+            <a:pPr lvl="1">
+              <a:spcAft>
+                <a:spcPts val="400"/>
+              </a:spcAft>
+              <a:defRPr sz="1700">
+                <a:solidFill>
+                  <a:srgbClr val="666666"/>
+                </a:solidFill>
+                <a:latin typeface="Calibri"/>
+              </a:defRPr>
+            </a:pPr>
+            <a:r>
+              <a:t>    El peer/cliente solo tiene que conocer el nuevo cert y la nueva clave.</a:t>
+            </a:r>
+          </a:p>
+          <a:p>
+            <a:pPr lvl="1">
+              <a:spcAft>
+                <a:spcPts val="400"/>
+              </a:spcAft>
+              <a:defRPr sz="1700">
+                <a:solidFill>
+                  <a:srgbClr val="666666"/>
+                </a:solidFill>
+                <a:latin typeface="Calibri"/>
+              </a:defRPr>
+            </a:pPr>
+            <a:r>
+              <a:t>    Proceso: Fabric CA emite nuevo cert -&gt; copiar al peer -&gt; reiniciar peer -&gt; listo.</a:t>
+            </a:r>
+          </a:p>
+        </p:txBody>
+      </p:sp>
+    </p:spTree>
+  </p:cSld>
+  <p:clrMapOvr>
+    <a:masterClrMapping/>
+  </p:clrMapOvr>
+</p:sld>
+</file>
+
+<file path=ppt/slides/slide25.xml><?xml version="1.0" encoding="utf-8"?>
+<p:sld xmlns:a="http://schemas.openxmlformats.org/drawingml/2006/main" xmlns:r="http://schemas.openxmlformats.org/officeDocument/2006/relationships" xmlns:p="http://schemas.openxmlformats.org/presentationml/2006/main">
+  <p:cSld>
+    <p:spTree>
+      <p:nvGrpSpPr>
+        <p:cNvPr id="1" name=""/>
+        <p:cNvGrpSpPr/>
+        <p:nvPr/>
+      </p:nvGrpSpPr>
+      <p:grpSpPr>
+        <a:xfrm>
+          <a:off x="0" y="0"/>
+          <a:ext cx="0" cy="0"/>
+          <a:chOff x="0" y="0"/>
+          <a:chExt cx="0" cy="0"/>
+        </a:xfrm>
+      </p:grpSpPr>
+      <p:sp>
+        <p:nvSpPr>
+          <p:cNvPr id="2" name="Rectangle 1"/>
+          <p:cNvSpPr/>
+          <p:nvPr/>
+        </p:nvSpPr>
+        <p:spPr>
+          <a:xfrm>
+            <a:off x="0" y="0"/>
+            <a:ext cx="12188952" cy="6858000"/>
+          </a:xfrm>
+          <a:prstGeom prst="rect">
+            <a:avLst/>
+          </a:prstGeom>
+          <a:solidFill>
+            <a:srgbClr val="22627E"/>
+          </a:solidFill>
+          <a:ln>
+            <a:noFill/>
+          </a:ln>
+        </p:spPr>
+        <p:style>
+          <a:lnRef idx="1">
+            <a:schemeClr val="accent1"/>
+          </a:lnRef>
+          <a:fillRef idx="3">
+            <a:schemeClr val="accent1"/>
+          </a:fillRef>
+          <a:effectRef idx="2">
+            <a:schemeClr val="accent1"/>
+          </a:effectRef>
+          <a:fontRef idx="minor">
+            <a:schemeClr val="lt1"/>
+          </a:fontRef>
+        </p:style>
+        <p:txBody>
+          <a:bodyPr rtlCol="0" anchor="ctr"/>
+          <a:lstStyle/>
+          <a:p>
+            <a:pPr algn="ctr"/>
+            <a:endParaRPr/>
+          </a:p>
+        </p:txBody>
+      </p:sp>
+      <p:sp>
+        <p:nvSpPr>
+          <p:cNvPr id="3" name="TextBox 2"/>
+          <p:cNvSpPr txBox="1"/>
+          <p:nvPr/>
+        </p:nvSpPr>
+        <p:spPr>
+          <a:xfrm>
+            <a:off x="457200" y="274320"/>
+            <a:ext cx="10972800" cy="731520"/>
+          </a:xfrm>
+          <a:prstGeom prst="rect">
+            <a:avLst/>
+          </a:prstGeom>
+          <a:noFill/>
+        </p:spPr>
+        <p:txBody>
+          <a:bodyPr wrap="square"/>
+          <a:lstStyle/>
+          <a:p>
+            <a:pPr algn="l">
               <a:defRPr sz="3600" b="1">
                 <a:solidFill>
                   <a:srgbClr val="FFFFFF"/>
@@ -10519,6 +9529,954 @@
             </a:pPr>
             <a:r>
               <a:t>8. Di 3 items del checklist de seguridad de chaincodes</a:t>
+            </a:r>
+          </a:p>
+        </p:txBody>
+      </p:sp>
+    </p:spTree>
+  </p:cSld>
+  <p:clrMapOvr>
+    <a:masterClrMapping/>
+  </p:clrMapOvr>
+</p:sld>
+</file>
+
+<file path=ppt/slides/slide26.xml><?xml version="1.0" encoding="utf-8"?>
+<p:sld xmlns:a="http://schemas.openxmlformats.org/drawingml/2006/main" xmlns:r="http://schemas.openxmlformats.org/officeDocument/2006/relationships" xmlns:p="http://schemas.openxmlformats.org/presentationml/2006/main">
+  <p:cSld>
+    <p:spTree>
+      <p:nvGrpSpPr>
+        <p:cNvPr id="1" name=""/>
+        <p:cNvGrpSpPr/>
+        <p:nvPr/>
+      </p:nvGrpSpPr>
+      <p:grpSpPr>
+        <a:xfrm>
+          <a:off x="0" y="0"/>
+          <a:ext cx="0" cy="0"/>
+          <a:chOff x="0" y="0"/>
+          <a:chExt cx="0" cy="0"/>
+        </a:xfrm>
+      </p:grpSpPr>
+      <p:sp>
+        <p:nvSpPr>
+          <p:cNvPr id="2" name="Rectangle 1"/>
+          <p:cNvSpPr/>
+          <p:nvPr/>
+        </p:nvSpPr>
+        <p:spPr>
+          <a:xfrm>
+            <a:off x="0" y="0"/>
+            <a:ext cx="12188952" cy="73152"/>
+          </a:xfrm>
+          <a:prstGeom prst="rect">
+            <a:avLst/>
+          </a:prstGeom>
+          <a:solidFill>
+            <a:srgbClr val="22627E"/>
+          </a:solidFill>
+          <a:ln>
+            <a:noFill/>
+          </a:ln>
+        </p:spPr>
+        <p:style>
+          <a:lnRef idx="1">
+            <a:schemeClr val="accent1"/>
+          </a:lnRef>
+          <a:fillRef idx="3">
+            <a:schemeClr val="accent1"/>
+          </a:fillRef>
+          <a:effectRef idx="2">
+            <a:schemeClr val="accent1"/>
+          </a:effectRef>
+          <a:fontRef idx="minor">
+            <a:schemeClr val="lt1"/>
+          </a:fontRef>
+        </p:style>
+        <p:txBody>
+          <a:bodyPr rtlCol="0" anchor="ctr"/>
+          <a:lstStyle/>
+          <a:p>
+            <a:pPr algn="ctr"/>
+            <a:endParaRPr/>
+          </a:p>
+        </p:txBody>
+      </p:sp>
+      <p:sp>
+        <p:nvSpPr>
+          <p:cNvPr id="3" name="TextBox 2"/>
+          <p:cNvSpPr txBox="1"/>
+          <p:nvPr/>
+        </p:nvSpPr>
+        <p:spPr>
+          <a:xfrm>
+            <a:off x="457200" y="274320"/>
+            <a:ext cx="10972800" cy="731520"/>
+          </a:xfrm>
+          <a:prstGeom prst="rect">
+            <a:avLst/>
+          </a:prstGeom>
+          <a:noFill/>
+        </p:spPr>
+        <p:txBody>
+          <a:bodyPr wrap="square"/>
+          <a:lstStyle/>
+          <a:p>
+            <a:pPr algn="l">
+              <a:defRPr sz="3200" b="1">
+                <a:solidFill>
+                  <a:srgbClr val="22627E"/>
+                </a:solidFill>
+                <a:latin typeface="Calibri"/>
+              </a:defRPr>
+            </a:pPr>
+            <a:r>
+              <a:t>Respuestas al repaso (1/2)</a:t>
+            </a:r>
+          </a:p>
+        </p:txBody>
+      </p:sp>
+      <p:sp>
+        <p:nvSpPr>
+          <p:cNvPr id="4" name="Rectangle 3"/>
+          <p:cNvSpPr/>
+          <p:nvPr/>
+        </p:nvSpPr>
+        <p:spPr>
+          <a:xfrm>
+            <a:off x="457200" y="1051560"/>
+            <a:ext cx="10972800" cy="27432"/>
+          </a:xfrm>
+          <a:prstGeom prst="rect">
+            <a:avLst/>
+          </a:prstGeom>
+          <a:solidFill>
+            <a:srgbClr val="22627E"/>
+          </a:solidFill>
+          <a:ln>
+            <a:noFill/>
+          </a:ln>
+        </p:spPr>
+        <p:style>
+          <a:lnRef idx="1">
+            <a:schemeClr val="accent1"/>
+          </a:lnRef>
+          <a:fillRef idx="3">
+            <a:schemeClr val="accent1"/>
+          </a:fillRef>
+          <a:effectRef idx="2">
+            <a:schemeClr val="accent1"/>
+          </a:effectRef>
+          <a:fontRef idx="minor">
+            <a:schemeClr val="lt1"/>
+          </a:fontRef>
+        </p:style>
+        <p:txBody>
+          <a:bodyPr rtlCol="0" anchor="ctr"/>
+          <a:lstStyle/>
+          <a:p>
+            <a:pPr algn="ctr"/>
+            <a:endParaRPr/>
+          </a:p>
+        </p:txBody>
+      </p:sp>
+      <p:sp>
+        <p:nvSpPr>
+          <p:cNvPr id="5" name="TextBox 4"/>
+          <p:cNvSpPr txBox="1"/>
+          <p:nvPr/>
+        </p:nvSpPr>
+        <p:spPr>
+          <a:xfrm>
+            <a:off x="640080" y="1280160"/>
+            <a:ext cx="10515600" cy="5029200"/>
+          </a:xfrm>
+          <a:prstGeom prst="rect">
+            <a:avLst/>
+          </a:prstGeom>
+          <a:noFill/>
+        </p:spPr>
+        <p:txBody>
+          <a:bodyPr wrap="square">
+            <a:spAutoFit/>
+          </a:bodyPr>
+          <a:lstStyle/>
+          <a:p>
+            <a:pPr>
+              <a:spcAft>
+                <a:spcPts val="800"/>
+              </a:spcAft>
+              <a:defRPr sz="2000">
+                <a:solidFill>
+                  <a:srgbClr val="333333"/>
+                </a:solidFill>
+                <a:latin typeface="Calibri"/>
+              </a:defRPr>
+            </a:pPr>
+            <a:r>
+              <a:t>1. Politica de endorsement:</a:t>
+            </a:r>
+          </a:p>
+          <a:p>
+            <a:pPr lvl="1">
+              <a:spcAft>
+                <a:spcPts val="400"/>
+              </a:spcAft>
+              <a:defRPr sz="1700">
+                <a:solidFill>
+                  <a:srgbClr val="666666"/>
+                </a:solidFill>
+                <a:latin typeface="Calibri"/>
+              </a:defRPr>
+            </a:pPr>
+            <a:r>
+              <a:t>    Regla que define que organizaciones deben firmar una transaccion para que sea valida.</a:t>
+            </a:r>
+          </a:p>
+          <a:p>
+            <a:pPr lvl="1">
+              <a:spcAft>
+                <a:spcPts val="400"/>
+              </a:spcAft>
+              <a:defRPr sz="1700">
+                <a:solidFill>
+                  <a:srgbClr val="666666"/>
+                </a:solidFill>
+                <a:latin typeface="Calibri"/>
+              </a:defRPr>
+            </a:pPr>
+            <a:r>
+              <a:t>    Ejemplo: AND('Org1MSP.peer','Org2MSP.peer'), OR(...), OutOf(2, ...), MAJORITY.</a:t>
+            </a:r>
+          </a:p>
+          <a:p>
+            <a:pPr lvl="1">
+              <a:spcAft>
+                <a:spcPts val="400"/>
+              </a:spcAft>
+              <a:defRPr sz="1700">
+                <a:solidFill>
+                  <a:srgbClr val="666666"/>
+                </a:solidFill>
+                <a:latin typeface="Calibri"/>
+              </a:defRPr>
+            </a:pPr>
+            <a:r>
+              <a:t>    Se define en approveformyorg / commit (nivel chaincode) o state-based (nivel key).</a:t>
+            </a:r>
+          </a:p>
+          <a:p>
+            <a:pPr>
+              <a:spcAft>
+                <a:spcPts val="800"/>
+              </a:spcAft>
+              <a:defRPr sz="2000">
+                <a:solidFill>
+                  <a:srgbClr val="333333"/>
+                </a:solidFill>
+                <a:latin typeface="Calibri"/>
+              </a:defRPr>
+            </a:pPr>
+            <a:r>
+              <a:t>2. State-based endorsement:</a:t>
+            </a:r>
+          </a:p>
+          <a:p>
+            <a:pPr lvl="1">
+              <a:spcAft>
+                <a:spcPts val="400"/>
+              </a:spcAft>
+              <a:defRPr sz="1700">
+                <a:solidFill>
+                  <a:srgbClr val="666666"/>
+                </a:solidFill>
+                <a:latin typeface="Calibri"/>
+              </a:defRPr>
+            </a:pPr>
+            <a:r>
+              <a:t>    Cambiar la politica de endorsement para una KEY concreta del World State.</a:t>
+            </a:r>
+          </a:p>
+          <a:p>
+            <a:pPr lvl="1">
+              <a:spcAft>
+                <a:spcPts val="400"/>
+              </a:spcAft>
+              <a:defRPr sz="1700">
+                <a:solidFill>
+                  <a:srgbClr val="666666"/>
+                </a:solidFill>
+                <a:latin typeface="Calibri"/>
+              </a:defRPr>
+            </a:pPr>
+            <a:r>
+              <a:t>    Permite que diferentes activos tengan diferentes requisitos (ej: alto valor = 3 orgs).</a:t>
+            </a:r>
+          </a:p>
+          <a:p>
+            <a:pPr lvl="1">
+              <a:spcAft>
+                <a:spcPts val="400"/>
+              </a:spcAft>
+              <a:defRPr sz="1700">
+                <a:solidFill>
+                  <a:srgbClr val="666666"/>
+                </a:solidFill>
+                <a:latin typeface="Calibri"/>
+              </a:defRPr>
+            </a:pPr>
+            <a:r>
+              <a:t>    Se gestiona con ctx.GetStub().SetStateValidationParameter(key, policy).</a:t>
+            </a:r>
+          </a:p>
+          <a:p>
+            <a:pPr>
+              <a:spcAft>
+                <a:spcPts val="800"/>
+              </a:spcAft>
+              <a:defRPr sz="2000">
+                <a:solidFill>
+                  <a:srgbClr val="333333"/>
+                </a:solidFill>
+                <a:latin typeface="Calibri"/>
+              </a:defRPr>
+            </a:pPr>
+            <a:r>
+              <a:t>3. ABAC en Fabric:</a:t>
+            </a:r>
+          </a:p>
+          <a:p>
+            <a:pPr lvl="1">
+              <a:spcAft>
+                <a:spcPts val="400"/>
+              </a:spcAft>
+              <a:defRPr sz="1700">
+                <a:solidFill>
+                  <a:srgbClr val="666666"/>
+                </a:solidFill>
+                <a:latin typeface="Calibri"/>
+              </a:defRPr>
+            </a:pPr>
+            <a:r>
+              <a:t>    Attribute-Based Access Control: verificar atributos custom del cert X.509.</a:t>
+            </a:r>
+          </a:p>
+          <a:p>
+            <a:pPr lvl="1">
+              <a:spcAft>
+                <a:spcPts val="400"/>
+              </a:spcAft>
+              <a:defRPr sz="1700">
+                <a:solidFill>
+                  <a:srgbClr val="666666"/>
+                </a:solidFill>
+                <a:latin typeface="Calibri"/>
+              </a:defRPr>
+            </a:pPr>
+            <a:r>
+              <a:t>    Atributos se anaden en Fabric CA al registrar/enrollar.</a:t>
+            </a:r>
+          </a:p>
+          <a:p>
+            <a:pPr lvl="1">
+              <a:spcAft>
+                <a:spcPts val="400"/>
+              </a:spcAft>
+              <a:defRPr sz="1700">
+                <a:solidFill>
+                  <a:srgbClr val="666666"/>
+                </a:solidFill>
+                <a:latin typeface="Calibri"/>
+              </a:defRPr>
+            </a:pPr>
+            <a:r>
+              <a:t>    En el chaincode: ctx.GetClientIdentity().AssertAttributeValue('role', 'admin').</a:t>
+            </a:r>
+          </a:p>
+          <a:p>
+            <a:pPr>
+              <a:spcAft>
+                <a:spcPts val="800"/>
+              </a:spcAft>
+              <a:defRPr sz="2000">
+                <a:solidFill>
+                  <a:srgbClr val="333333"/>
+                </a:solidFill>
+                <a:latin typeface="Calibri"/>
+              </a:defRPr>
+            </a:pPr>
+            <a:r>
+              <a:t>4. 5 errores de determinismo mas comunes:</a:t>
+            </a:r>
+          </a:p>
+          <a:p>
+            <a:pPr lvl="1">
+              <a:spcAft>
+                <a:spcPts val="400"/>
+              </a:spcAft>
+              <a:defRPr sz="1700">
+                <a:solidFill>
+                  <a:srgbClr val="666666"/>
+                </a:solidFill>
+                <a:latin typeface="Calibri"/>
+              </a:defRPr>
+            </a:pPr>
+            <a:r>
+              <a:t>    1) time.Now() en vez de GetTxTimestamp()</a:t>
+            </a:r>
+          </a:p>
+          <a:p>
+            <a:pPr lvl="1">
+              <a:spcAft>
+                <a:spcPts val="400"/>
+              </a:spcAft>
+              <a:defRPr sz="1700">
+                <a:solidFill>
+                  <a:srgbClr val="666666"/>
+                </a:solidFill>
+                <a:latin typeface="Calibri"/>
+              </a:defRPr>
+            </a:pPr>
+            <a:r>
+              <a:t>    2) Iterar mapas sin ordenar</a:t>
+            </a:r>
+          </a:p>
+          <a:p>
+            <a:pPr lvl="1">
+              <a:spcAft>
+                <a:spcPts val="400"/>
+              </a:spcAft>
+              <a:defRPr sz="1700">
+                <a:solidFill>
+                  <a:srgbClr val="666666"/>
+                </a:solidFill>
+                <a:latin typeface="Calibri"/>
+              </a:defRPr>
+            </a:pPr>
+            <a:r>
+              <a:t>    3) Llamadas HTTP/gRPC/filesystem externas</a:t>
+            </a:r>
+          </a:p>
+          <a:p>
+            <a:pPr lvl="1">
+              <a:spcAft>
+                <a:spcPts val="400"/>
+              </a:spcAft>
+              <a:defRPr sz="1700">
+                <a:solidFill>
+                  <a:srgbClr val="666666"/>
+                </a:solidFill>
+                <a:latin typeface="Calibri"/>
+              </a:defRPr>
+            </a:pPr>
+            <a:r>
+              <a:t>    4) math/rand (numeros aleatorios)</a:t>
+            </a:r>
+          </a:p>
+          <a:p>
+            <a:pPr lvl="1">
+              <a:spcAft>
+                <a:spcPts val="400"/>
+              </a:spcAft>
+              <a:defRPr sz="1700">
+                <a:solidFill>
+                  <a:srgbClr val="666666"/>
+                </a:solidFill>
+                <a:latin typeface="Calibri"/>
+              </a:defRPr>
+            </a:pPr>
+            <a:r>
+              <a:t>    5) Variables globales mutables</a:t>
+            </a:r>
+          </a:p>
+        </p:txBody>
+      </p:sp>
+    </p:spTree>
+  </p:cSld>
+  <p:clrMapOvr>
+    <a:masterClrMapping/>
+  </p:clrMapOvr>
+</p:sld>
+</file>
+
+<file path=ppt/slides/slide27.xml><?xml version="1.0" encoding="utf-8"?>
+<p:sld xmlns:a="http://schemas.openxmlformats.org/drawingml/2006/main" xmlns:r="http://schemas.openxmlformats.org/officeDocument/2006/relationships" xmlns:p="http://schemas.openxmlformats.org/presentationml/2006/main">
+  <p:cSld>
+    <p:spTree>
+      <p:nvGrpSpPr>
+        <p:cNvPr id="1" name=""/>
+        <p:cNvGrpSpPr/>
+        <p:nvPr/>
+      </p:nvGrpSpPr>
+      <p:grpSpPr>
+        <a:xfrm>
+          <a:off x="0" y="0"/>
+          <a:ext cx="0" cy="0"/>
+          <a:chOff x="0" y="0"/>
+          <a:chExt cx="0" cy="0"/>
+        </a:xfrm>
+      </p:grpSpPr>
+      <p:sp>
+        <p:nvSpPr>
+          <p:cNvPr id="2" name="Rectangle 1"/>
+          <p:cNvSpPr/>
+          <p:nvPr/>
+        </p:nvSpPr>
+        <p:spPr>
+          <a:xfrm>
+            <a:off x="0" y="0"/>
+            <a:ext cx="12188952" cy="73152"/>
+          </a:xfrm>
+          <a:prstGeom prst="rect">
+            <a:avLst/>
+          </a:prstGeom>
+          <a:solidFill>
+            <a:srgbClr val="22627E"/>
+          </a:solidFill>
+          <a:ln>
+            <a:noFill/>
+          </a:ln>
+        </p:spPr>
+        <p:style>
+          <a:lnRef idx="1">
+            <a:schemeClr val="accent1"/>
+          </a:lnRef>
+          <a:fillRef idx="3">
+            <a:schemeClr val="accent1"/>
+          </a:fillRef>
+          <a:effectRef idx="2">
+            <a:schemeClr val="accent1"/>
+          </a:effectRef>
+          <a:fontRef idx="minor">
+            <a:schemeClr val="lt1"/>
+          </a:fontRef>
+        </p:style>
+        <p:txBody>
+          <a:bodyPr rtlCol="0" anchor="ctr"/>
+          <a:lstStyle/>
+          <a:p>
+            <a:pPr algn="ctr"/>
+            <a:endParaRPr/>
+          </a:p>
+        </p:txBody>
+      </p:sp>
+      <p:sp>
+        <p:nvSpPr>
+          <p:cNvPr id="3" name="TextBox 2"/>
+          <p:cNvSpPr txBox="1"/>
+          <p:nvPr/>
+        </p:nvSpPr>
+        <p:spPr>
+          <a:xfrm>
+            <a:off x="457200" y="274320"/>
+            <a:ext cx="10972800" cy="731520"/>
+          </a:xfrm>
+          <a:prstGeom prst="rect">
+            <a:avLst/>
+          </a:prstGeom>
+          <a:noFill/>
+        </p:spPr>
+        <p:txBody>
+          <a:bodyPr wrap="square"/>
+          <a:lstStyle/>
+          <a:p>
+            <a:pPr algn="l">
+              <a:defRPr sz="3200" b="1">
+                <a:solidFill>
+                  <a:srgbClr val="22627E"/>
+                </a:solidFill>
+                <a:latin typeface="Calibri"/>
+              </a:defRPr>
+            </a:pPr>
+            <a:r>
+              <a:t>Respuestas al repaso (2/2)</a:t>
+            </a:r>
+          </a:p>
+        </p:txBody>
+      </p:sp>
+      <p:sp>
+        <p:nvSpPr>
+          <p:cNvPr id="4" name="Rectangle 3"/>
+          <p:cNvSpPr/>
+          <p:nvPr/>
+        </p:nvSpPr>
+        <p:spPr>
+          <a:xfrm>
+            <a:off x="457200" y="1051560"/>
+            <a:ext cx="10972800" cy="27432"/>
+          </a:xfrm>
+          <a:prstGeom prst="rect">
+            <a:avLst/>
+          </a:prstGeom>
+          <a:solidFill>
+            <a:srgbClr val="22627E"/>
+          </a:solidFill>
+          <a:ln>
+            <a:noFill/>
+          </a:ln>
+        </p:spPr>
+        <p:style>
+          <a:lnRef idx="1">
+            <a:schemeClr val="accent1"/>
+          </a:lnRef>
+          <a:fillRef idx="3">
+            <a:schemeClr val="accent1"/>
+          </a:fillRef>
+          <a:effectRef idx="2">
+            <a:schemeClr val="accent1"/>
+          </a:effectRef>
+          <a:fontRef idx="minor">
+            <a:schemeClr val="lt1"/>
+          </a:fontRef>
+        </p:style>
+        <p:txBody>
+          <a:bodyPr rtlCol="0" anchor="ctr"/>
+          <a:lstStyle/>
+          <a:p>
+            <a:pPr algn="ctr"/>
+            <a:endParaRPr/>
+          </a:p>
+        </p:txBody>
+      </p:sp>
+      <p:sp>
+        <p:nvSpPr>
+          <p:cNvPr id="5" name="TextBox 4"/>
+          <p:cNvSpPr txBox="1"/>
+          <p:nvPr/>
+        </p:nvSpPr>
+        <p:spPr>
+          <a:xfrm>
+            <a:off x="640080" y="1280160"/>
+            <a:ext cx="10515600" cy="5029200"/>
+          </a:xfrm>
+          <a:prstGeom prst="rect">
+            <a:avLst/>
+          </a:prstGeom>
+          <a:noFill/>
+        </p:spPr>
+        <p:txBody>
+          <a:bodyPr wrap="square">
+            <a:spAutoFit/>
+          </a:bodyPr>
+          <a:lstStyle/>
+          <a:p>
+            <a:pPr>
+              <a:spcAft>
+                <a:spcPts val="800"/>
+              </a:spcAft>
+              <a:defRPr sz="2000">
+                <a:solidFill>
+                  <a:srgbClr val="333333"/>
+                </a:solidFill>
+                <a:latin typeface="Calibri"/>
+              </a:defRPr>
+            </a:pPr>
+            <a:r>
+              <a:t>5. Conflicto MVCC:</a:t>
+            </a:r>
+          </a:p>
+          <a:p>
+            <a:pPr lvl="1">
+              <a:spcAft>
+                <a:spcPts val="400"/>
+              </a:spcAft>
+              <a:defRPr sz="1700">
+                <a:solidFill>
+                  <a:srgbClr val="666666"/>
+                </a:solidFill>
+                <a:latin typeface="Calibri"/>
+              </a:defRPr>
+            </a:pPr>
+            <a:r>
+              <a:t>    Multi-Version Concurrency Control.</a:t>
+            </a:r>
+          </a:p>
+          <a:p>
+            <a:pPr lvl="1">
+              <a:spcAft>
+                <a:spcPts val="400"/>
+              </a:spcAft>
+              <a:defRPr sz="1700">
+                <a:solidFill>
+                  <a:srgbClr val="666666"/>
+                </a:solidFill>
+                <a:latin typeface="Calibri"/>
+              </a:defRPr>
+            </a:pPr>
+            <a:r>
+              <a:t>    Ocurre cuando dos transacciones concurrentes modifican las mismas keys.</a:t>
+            </a:r>
+          </a:p>
+          <a:p>
+            <a:pPr lvl="1">
+              <a:spcAft>
+                <a:spcPts val="400"/>
+              </a:spcAft>
+              <a:defRPr sz="1700">
+                <a:solidFill>
+                  <a:srgbClr val="666666"/>
+                </a:solidFill>
+                <a:latin typeface="Calibri"/>
+              </a:defRPr>
+            </a:pPr>
+            <a:r>
+              <a:t>    Fabric verifica en el commit que las versiones leidas siguen siendo las mismas.</a:t>
+            </a:r>
+          </a:p>
+          <a:p>
+            <a:pPr lvl="1">
+              <a:spcAft>
+                <a:spcPts val="400"/>
+              </a:spcAft>
+              <a:defRPr sz="1700">
+                <a:solidFill>
+                  <a:srgbClr val="666666"/>
+                </a:solidFill>
+                <a:latin typeface="Calibri"/>
+              </a:defRPr>
+            </a:pPr>
+            <a:r>
+              <a:t>    Si han cambiado -&gt; transaccion invalidada (MVCC_READ_CONFLICT).</a:t>
+            </a:r>
+          </a:p>
+          <a:p>
+            <a:pPr lvl="1">
+              <a:spcAft>
+                <a:spcPts val="400"/>
+              </a:spcAft>
+              <a:defRPr sz="1700">
+                <a:solidFill>
+                  <a:srgbClr val="666666"/>
+                </a:solidFill>
+                <a:latin typeface="Calibri"/>
+              </a:defRPr>
+            </a:pPr>
+            <a:r>
+              <a:t>    Mitigar: evitar queries amplias en transacciones de escritura.</a:t>
+            </a:r>
+          </a:p>
+          <a:p>
+            <a:pPr>
+              <a:spcAft>
+                <a:spcPts val="800"/>
+              </a:spcAft>
+              <a:defRPr sz="2000">
+                <a:solidFill>
+                  <a:srgbClr val="333333"/>
+                </a:solidFill>
+                <a:latin typeface="Calibri"/>
+              </a:defRPr>
+            </a:pPr>
+            <a:r>
+              <a:t>6. Actualizar un chaincode:</a:t>
+            </a:r>
+          </a:p>
+          <a:p>
+            <a:pPr lvl="1">
+              <a:spcAft>
+                <a:spcPts val="400"/>
+              </a:spcAft>
+              <a:defRPr sz="1700">
+                <a:solidFill>
+                  <a:srgbClr val="666666"/>
+                </a:solidFill>
+                <a:latin typeface="Calibri"/>
+              </a:defRPr>
+            </a:pPr>
+            <a:r>
+              <a:t>    Empaquetar nueva version con sequence incrementado.</a:t>
+            </a:r>
+          </a:p>
+          <a:p>
+            <a:pPr lvl="1">
+              <a:spcAft>
+                <a:spcPts val="400"/>
+              </a:spcAft>
+              <a:defRPr sz="1700">
+                <a:solidFill>
+                  <a:srgbClr val="666666"/>
+                </a:solidFill>
+                <a:latin typeface="Calibri"/>
+              </a:defRPr>
+            </a:pPr>
+            <a:r>
+              <a:t>    Install en cada peer + approveformyorg en cada org + commit.</a:t>
+            </a:r>
+          </a:p>
+          <a:p>
+            <a:pPr lvl="1">
+              <a:spcAft>
+                <a:spcPts val="400"/>
+              </a:spcAft>
+              <a:defRPr sz="1700">
+                <a:solidFill>
+                  <a:srgbClr val="666666"/>
+                </a:solidFill>
+                <a:latin typeface="Calibri"/>
+              </a:defRPr>
+            </a:pPr>
+            <a:r>
+              <a:t>    El World State se preserva automaticamente entre versiones.</a:t>
+            </a:r>
+          </a:p>
+          <a:p>
+            <a:pPr>
+              <a:spcAft>
+                <a:spcPts val="800"/>
+              </a:spcAft>
+              <a:defRPr sz="2000">
+                <a:solidFill>
+                  <a:srgbClr val="333333"/>
+                </a:solidFill>
+                <a:latin typeface="Calibri"/>
+              </a:defRPr>
+            </a:pPr>
+            <a:r>
+              <a:t>7. Migrar datos entre versiones:</a:t>
+            </a:r>
+          </a:p>
+          <a:p>
+            <a:pPr lvl="1">
+              <a:spcAft>
+                <a:spcPts val="400"/>
+              </a:spcAft>
+              <a:defRPr sz="1700">
+                <a:solidFill>
+                  <a:srgbClr val="666666"/>
+                </a:solidFill>
+                <a:latin typeface="Calibri"/>
+              </a:defRPr>
+            </a:pPr>
+            <a:r>
+              <a:t>    Campos nuevos opcionales (retrocompatibilidad).</a:t>
+            </a:r>
+          </a:p>
+          <a:p>
+            <a:pPr lvl="1">
+              <a:spcAft>
+                <a:spcPts val="400"/>
+              </a:spcAft>
+              <a:defRPr sz="1700">
+                <a:solidFill>
+                  <a:srgbClr val="666666"/>
+                </a:solidFill>
+                <a:latin typeface="Calibri"/>
+              </a:defRPr>
+            </a:pPr>
+            <a:r>
+              <a:t>    Migracion lazy: al leer un dato viejo, aplicar defaults y guardar.</a:t>
+            </a:r>
+          </a:p>
+          <a:p>
+            <a:pPr lvl="1">
+              <a:spcAft>
+                <a:spcPts val="400"/>
+              </a:spcAft>
+              <a:defRPr sz="1700">
+                <a:solidFill>
+                  <a:srgbClr val="666666"/>
+                </a:solidFill>
+                <a:latin typeface="Calibri"/>
+              </a:defRPr>
+            </a:pPr>
+            <a:r>
+              <a:t>    Migracion en bloque: funcion admin que recorre el World State.</a:t>
+            </a:r>
+          </a:p>
+          <a:p>
+            <a:pPr>
+              <a:spcAft>
+                <a:spcPts val="800"/>
+              </a:spcAft>
+              <a:defRPr sz="2000">
+                <a:solidFill>
+                  <a:srgbClr val="333333"/>
+                </a:solidFill>
+                <a:latin typeface="Calibri"/>
+              </a:defRPr>
+            </a:pPr>
+            <a:r>
+              <a:t>8. 3 items del checklist de seguridad:</a:t>
+            </a:r>
+          </a:p>
+          <a:p>
+            <a:pPr lvl="1">
+              <a:spcAft>
+                <a:spcPts val="400"/>
+              </a:spcAft>
+              <a:defRPr sz="1700">
+                <a:solidFill>
+                  <a:srgbClr val="666666"/>
+                </a:solidFill>
+                <a:latin typeface="Calibri"/>
+              </a:defRPr>
+            </a:pPr>
+            <a:r>
+              <a:t>    Verificar identidad del caller (GetMSPID, ABAC)</a:t>
+            </a:r>
+          </a:p>
+          <a:p>
+            <a:pPr lvl="1">
+              <a:spcAft>
+                <a:spcPts val="400"/>
+              </a:spcAft>
+              <a:defRPr sz="1700">
+                <a:solidFill>
+                  <a:srgbClr val="666666"/>
+                </a:solidFill>
+                <a:latin typeface="Calibri"/>
+              </a:defRPr>
+            </a:pPr>
+            <a:r>
+              <a:t>    No usar time.Now, rand, http, map iteration (determinismo)</a:t>
+            </a:r>
+          </a:p>
+          <a:p>
+            <a:pPr lvl="1">
+              <a:spcAft>
+                <a:spcPts val="400"/>
+              </a:spcAft>
+              <a:defRPr sz="1700">
+                <a:solidFill>
+                  <a:srgbClr val="666666"/>
+                </a:solidFill>
+                <a:latin typeface="Calibri"/>
+              </a:defRPr>
+            </a:pPr>
+            <a:r>
+              <a:t>    Validar inputs (tipos, rangos, longitud)</a:t>
+            </a:r>
+          </a:p>
+          <a:p>
+            <a:pPr lvl="1">
+              <a:spcAft>
+                <a:spcPts val="400"/>
+              </a:spcAft>
+              <a:defRPr sz="1700">
+                <a:solidFill>
+                  <a:srgbClr val="666666"/>
+                </a:solidFill>
+                <a:latin typeface="Calibri"/>
+              </a:defRPr>
+            </a:pPr>
+            <a:r>
+              <a:t>    No loguear datos sensibles</a:t>
+            </a:r>
+          </a:p>
+          <a:p>
+            <a:pPr lvl="1">
+              <a:spcAft>
+                <a:spcPts val="400"/>
+              </a:spcAft>
+              <a:defRPr sz="1700">
+                <a:solidFill>
+                  <a:srgbClr val="666666"/>
+                </a:solidFill>
+                <a:latin typeface="Calibri"/>
+              </a:defRPr>
+            </a:pPr>
+            <a:r>
+              <a:t>    Paginar queries, no devolver miles de registros</a:t>
             </a:r>
           </a:p>
         </p:txBody>
@@ -11876,7 +11834,7 @@
               </a:defRPr>
             </a:pPr>
             <a:r>
-              <a:t>GO</a:t>
+              <a:t>NODE.JS</a:t>
             </a:r>
           </a:p>
         </p:txBody>
@@ -11945,7 +11903,7 @@
           <a:bodyPr wrap="square"/>
           <a:lstStyle/>
           <a:p>
-            <a:br>
+            <a:r>
               <a:rPr sz="1600" dirty="0">
                 <a:solidFill>
                   <a:schemeClr val="bg1">
@@ -11953,7 +11911,19 @@
                   </a:schemeClr>
                 </a:solidFill>
               </a:rPr>
-            </a:br>
+              <a:t>const { KeyEndorsementPolicy } = require('fabric-shim');</a:t>
+            </a:r>
+          </a:p>
+          <a:p>
+            <a:endParaRPr sz="1600" dirty="0">
+              <a:solidFill>
+                <a:schemeClr val="bg1">
+                  <a:lumMod val="95000"/>
+                </a:schemeClr>
+              </a:solidFill>
+            </a:endParaRPr>
+          </a:p>
+          <a:p>
             <a:r>
               <a:rPr sz="1600" dirty="0">
                 <a:solidFill>
@@ -11962,9 +11932,11 @@
                   </a:schemeClr>
                 </a:solidFill>
               </a:rPr>
-              <a:t>import (</a:t>
-            </a:r>
-            <a:br>
+              <a:t>async SetHighValueEndorsement(ctx, propertyID) {</a:t>
+            </a:r>
+          </a:p>
+          <a:p>
+            <a:r>
               <a:rPr sz="1600" dirty="0">
                 <a:solidFill>
                   <a:schemeClr val="bg1">
@@ -11972,7 +11944,10 @@
                   </a:schemeClr>
                 </a:solidFill>
               </a:rPr>
-            </a:br>
+              <a:t>    // Leer propiedad</a:t>
+            </a:r>
+          </a:p>
+          <a:p>
             <a:r>
               <a:rPr sz="1600" dirty="0">
                 <a:solidFill>
@@ -11981,18 +11956,31 @@
                   </a:schemeClr>
                 </a:solidFill>
               </a:rPr>
-              <a:t>    "github.com/</a:t>
-            </a:r>
-            <a:r>
-              <a:rPr sz="1600" dirty="0" err="1">
+              <a:t>    const property = await this.ReadProperty(ctx, propertyID);</a:t>
+            </a:r>
+          </a:p>
+          <a:p>
+            <a:endParaRPr sz="1600" dirty="0">
+              <a:solidFill>
+                <a:schemeClr val="bg1">
+                  <a:lumMod val="95000"/>
+                </a:schemeClr>
+              </a:solidFill>
+            </a:endParaRPr>
+          </a:p>
+          <a:p>
+            <a:r>
+              <a:rPr sz="1600" dirty="0">
                 <a:solidFill>
                   <a:schemeClr val="bg1">
                     <a:lumMod val="95000"/>
                   </a:schemeClr>
                 </a:solidFill>
               </a:rPr>
-              <a:t>hyperledger</a:t>
-            </a:r>
+              <a:t>    // Si el valor supera 1M, requerir endorsement de 3 orgs</a:t>
+            </a:r>
+          </a:p>
+          <a:p>
             <a:r>
               <a:rPr sz="1600" dirty="0">
                 <a:solidFill>
@@ -12001,582 +11989,19 @@
                   </a:schemeClr>
                 </a:solidFill>
               </a:rPr>
-              <a:t>/fabric-</a:t>
-            </a:r>
-            <a:r>
-              <a:rPr sz="1600" dirty="0" err="1">
+              <a:t>    if (property.appraisalValue &gt; 1000000) {</a:t>
+            </a:r>
+          </a:p>
+          <a:p>
+            <a:r>
+              <a:rPr sz="1600" dirty="0">
                 <a:solidFill>
                   <a:schemeClr val="bg1">
                     <a:lumMod val="95000"/>
                   </a:schemeClr>
                 </a:solidFill>
               </a:rPr>
-              <a:t>chaincode</a:t>
-            </a:r>
-            <a:r>
-              <a:rPr sz="1600" dirty="0">
-                <a:solidFill>
-                  <a:schemeClr val="bg1">
-                    <a:lumMod val="95000"/>
-                  </a:schemeClr>
-                </a:solidFill>
-              </a:rPr>
-              <a:t>-go/pkg/</a:t>
-            </a:r>
-            <a:r>
-              <a:rPr sz="1600" dirty="0" err="1">
-                <a:solidFill>
-                  <a:schemeClr val="bg1">
-                    <a:lumMod val="95000"/>
-                  </a:schemeClr>
-                </a:solidFill>
-              </a:rPr>
-              <a:t>statebased</a:t>
-            </a:r>
-            <a:r>
-              <a:rPr sz="1600" dirty="0">
-                <a:solidFill>
-                  <a:schemeClr val="bg1">
-                    <a:lumMod val="95000"/>
-                  </a:schemeClr>
-                </a:solidFill>
-              </a:rPr>
-              <a:t>"</a:t>
-            </a:r>
-            <a:br>
-              <a:rPr sz="1600" dirty="0">
-                <a:solidFill>
-                  <a:schemeClr val="bg1">
-                    <a:lumMod val="95000"/>
-                  </a:schemeClr>
-                </a:solidFill>
-              </a:rPr>
-            </a:br>
-            <a:r>
-              <a:rPr sz="1600" dirty="0">
-                <a:solidFill>
-                  <a:schemeClr val="bg1">
-                    <a:lumMod val="95000"/>
-                  </a:schemeClr>
-                </a:solidFill>
-              </a:rPr>
-              <a:t>)</a:t>
-            </a:r>
-            <a:br>
-              <a:rPr sz="1600" dirty="0">
-                <a:solidFill>
-                  <a:schemeClr val="bg1">
-                    <a:lumMod val="95000"/>
-                  </a:schemeClr>
-                </a:solidFill>
-              </a:rPr>
-            </a:br>
-            <a:br>
-              <a:rPr sz="1600" dirty="0">
-                <a:solidFill>
-                  <a:schemeClr val="bg1">
-                    <a:lumMod val="95000"/>
-                  </a:schemeClr>
-                </a:solidFill>
-              </a:rPr>
-            </a:br>
-            <a:r>
-              <a:rPr sz="1600" dirty="0" err="1">
-                <a:solidFill>
-                  <a:schemeClr val="bg1">
-                    <a:lumMod val="95000"/>
-                  </a:schemeClr>
-                </a:solidFill>
-              </a:rPr>
-              <a:t>func</a:t>
-            </a:r>
-            <a:r>
-              <a:rPr sz="1600" dirty="0">
-                <a:solidFill>
-                  <a:schemeClr val="bg1">
-                    <a:lumMod val="95000"/>
-                  </a:schemeClr>
-                </a:solidFill>
-              </a:rPr>
-              <a:t> (s *</a:t>
-            </a:r>
-            <a:r>
-              <a:rPr sz="1600" dirty="0" err="1">
-                <a:solidFill>
-                  <a:schemeClr val="bg1">
-                    <a:lumMod val="95000"/>
-                  </a:schemeClr>
-                </a:solidFill>
-              </a:rPr>
-              <a:t>SmartContract</a:t>
-            </a:r>
-            <a:r>
-              <a:rPr sz="1600" dirty="0">
-                <a:solidFill>
-                  <a:schemeClr val="bg1">
-                    <a:lumMod val="95000"/>
-                  </a:schemeClr>
-                </a:solidFill>
-              </a:rPr>
-              <a:t>) </a:t>
-            </a:r>
-            <a:r>
-              <a:rPr sz="1600" dirty="0" err="1">
-                <a:solidFill>
-                  <a:schemeClr val="bg1">
-                    <a:lumMod val="95000"/>
-                  </a:schemeClr>
-                </a:solidFill>
-              </a:rPr>
-              <a:t>SetHighValueEndorsement</a:t>
-            </a:r>
-            <a:r>
-              <a:rPr sz="1600" dirty="0">
-                <a:solidFill>
-                  <a:schemeClr val="bg1">
-                    <a:lumMod val="95000"/>
-                  </a:schemeClr>
-                </a:solidFill>
-              </a:rPr>
-              <a:t>(</a:t>
-            </a:r>
-            <a:br>
-              <a:rPr sz="1600" dirty="0">
-                <a:solidFill>
-                  <a:schemeClr val="bg1">
-                    <a:lumMod val="95000"/>
-                  </a:schemeClr>
-                </a:solidFill>
-              </a:rPr>
-            </a:br>
-            <a:r>
-              <a:rPr sz="1600" dirty="0">
-                <a:solidFill>
-                  <a:schemeClr val="bg1">
-                    <a:lumMod val="95000"/>
-                  </a:schemeClr>
-                </a:solidFill>
-              </a:rPr>
-              <a:t>    </a:t>
-            </a:r>
-            <a:r>
-              <a:rPr sz="1600" dirty="0" err="1">
-                <a:solidFill>
-                  <a:schemeClr val="bg1">
-                    <a:lumMod val="95000"/>
-                  </a:schemeClr>
-                </a:solidFill>
-              </a:rPr>
-              <a:t>ctx</a:t>
-            </a:r>
-            <a:r>
-              <a:rPr sz="1600" dirty="0">
-                <a:solidFill>
-                  <a:schemeClr val="bg1">
-                    <a:lumMod val="95000"/>
-                  </a:schemeClr>
-                </a:solidFill>
-              </a:rPr>
-              <a:t> </a:t>
-            </a:r>
-            <a:r>
-              <a:rPr sz="1600" dirty="0" err="1">
-                <a:solidFill>
-                  <a:schemeClr val="bg1">
-                    <a:lumMod val="95000"/>
-                  </a:schemeClr>
-                </a:solidFill>
-              </a:rPr>
-              <a:t>contractapi.TransactionContextInterface</a:t>
-            </a:r>
-            <a:r>
-              <a:rPr sz="1600" dirty="0">
-                <a:solidFill>
-                  <a:schemeClr val="bg1">
-                    <a:lumMod val="95000"/>
-                  </a:schemeClr>
-                </a:solidFill>
-              </a:rPr>
-              <a:t>,</a:t>
-            </a:r>
-            <a:br>
-              <a:rPr sz="1600" dirty="0">
-                <a:solidFill>
-                  <a:schemeClr val="bg1">
-                    <a:lumMod val="95000"/>
-                  </a:schemeClr>
-                </a:solidFill>
-              </a:rPr>
-            </a:br>
-            <a:r>
-              <a:rPr sz="1600" dirty="0">
-                <a:solidFill>
-                  <a:schemeClr val="bg1">
-                    <a:lumMod val="95000"/>
-                  </a:schemeClr>
-                </a:solidFill>
-              </a:rPr>
-              <a:t>    </a:t>
-            </a:r>
-            <a:r>
-              <a:rPr sz="1600" dirty="0" err="1">
-                <a:solidFill>
-                  <a:schemeClr val="bg1">
-                    <a:lumMod val="95000"/>
-                  </a:schemeClr>
-                </a:solidFill>
-              </a:rPr>
-              <a:t>propertyID</a:t>
-            </a:r>
-            <a:r>
-              <a:rPr sz="1600" dirty="0">
-                <a:solidFill>
-                  <a:schemeClr val="bg1">
-                    <a:lumMod val="95000"/>
-                  </a:schemeClr>
-                </a:solidFill>
-              </a:rPr>
-              <a:t> string) error {</a:t>
-            </a:r>
-            <a:br>
-              <a:rPr sz="1600" dirty="0">
-                <a:solidFill>
-                  <a:schemeClr val="bg1">
-                    <a:lumMod val="95000"/>
-                  </a:schemeClr>
-                </a:solidFill>
-              </a:rPr>
-            </a:br>
-            <a:br>
-              <a:rPr sz="1600" dirty="0">
-                <a:solidFill>
-                  <a:schemeClr val="bg1">
-                    <a:lumMod val="95000"/>
-                  </a:schemeClr>
-                </a:solidFill>
-              </a:rPr>
-            </a:br>
-            <a:r>
-              <a:rPr sz="1600" dirty="0">
-                <a:solidFill>
-                  <a:schemeClr val="bg1">
-                    <a:lumMod val="95000"/>
-                  </a:schemeClr>
-                </a:solidFill>
-              </a:rPr>
-              <a:t>    // Leer </a:t>
-            </a:r>
-            <a:r>
-              <a:rPr sz="1600" dirty="0" err="1">
-                <a:solidFill>
-                  <a:schemeClr val="bg1">
-                    <a:lumMod val="95000"/>
-                  </a:schemeClr>
-                </a:solidFill>
-              </a:rPr>
-              <a:t>propiedad</a:t>
-            </a:r>
-            <a:br>
-              <a:rPr sz="1600" dirty="0">
-                <a:solidFill>
-                  <a:schemeClr val="bg1">
-                    <a:lumMod val="95000"/>
-                  </a:schemeClr>
-                </a:solidFill>
-              </a:rPr>
-            </a:br>
-            <a:r>
-              <a:rPr sz="1600" dirty="0">
-                <a:solidFill>
-                  <a:schemeClr val="bg1">
-                    <a:lumMod val="95000"/>
-                  </a:schemeClr>
-                </a:solidFill>
-              </a:rPr>
-              <a:t>    property, _ := </a:t>
-            </a:r>
-            <a:r>
-              <a:rPr sz="1600" dirty="0" err="1">
-                <a:solidFill>
-                  <a:schemeClr val="bg1">
-                    <a:lumMod val="95000"/>
-                  </a:schemeClr>
-                </a:solidFill>
-              </a:rPr>
-              <a:t>s.ReadProperty</a:t>
-            </a:r>
-            <a:r>
-              <a:rPr sz="1600" dirty="0">
-                <a:solidFill>
-                  <a:schemeClr val="bg1">
-                    <a:lumMod val="95000"/>
-                  </a:schemeClr>
-                </a:solidFill>
-              </a:rPr>
-              <a:t>(</a:t>
-            </a:r>
-            <a:r>
-              <a:rPr sz="1600" dirty="0" err="1">
-                <a:solidFill>
-                  <a:schemeClr val="bg1">
-                    <a:lumMod val="95000"/>
-                  </a:schemeClr>
-                </a:solidFill>
-              </a:rPr>
-              <a:t>ctx</a:t>
-            </a:r>
-            <a:r>
-              <a:rPr sz="1600" dirty="0">
-                <a:solidFill>
-                  <a:schemeClr val="bg1">
-                    <a:lumMod val="95000"/>
-                  </a:schemeClr>
-                </a:solidFill>
-              </a:rPr>
-              <a:t>, </a:t>
-            </a:r>
-            <a:r>
-              <a:rPr sz="1600" dirty="0" err="1">
-                <a:solidFill>
-                  <a:schemeClr val="bg1">
-                    <a:lumMod val="95000"/>
-                  </a:schemeClr>
-                </a:solidFill>
-              </a:rPr>
-              <a:t>propertyID</a:t>
-            </a:r>
-            <a:r>
-              <a:rPr sz="1600" dirty="0">
-                <a:solidFill>
-                  <a:schemeClr val="bg1">
-                    <a:lumMod val="95000"/>
-                  </a:schemeClr>
-                </a:solidFill>
-              </a:rPr>
-              <a:t>)</a:t>
-            </a:r>
-            <a:br>
-              <a:rPr sz="1600" dirty="0">
-                <a:solidFill>
-                  <a:schemeClr val="bg1">
-                    <a:lumMod val="95000"/>
-                  </a:schemeClr>
-                </a:solidFill>
-              </a:rPr>
-            </a:br>
-            <a:br>
-              <a:rPr sz="1600" dirty="0">
-                <a:solidFill>
-                  <a:schemeClr val="bg1">
-                    <a:lumMod val="95000"/>
-                  </a:schemeClr>
-                </a:solidFill>
-              </a:rPr>
-            </a:br>
-            <a:r>
-              <a:rPr sz="1600" dirty="0">
-                <a:solidFill>
-                  <a:schemeClr val="bg1">
-                    <a:lumMod val="95000"/>
-                  </a:schemeClr>
-                </a:solidFill>
-              </a:rPr>
-              <a:t>    // Si </a:t>
-            </a:r>
-            <a:r>
-              <a:rPr sz="1600" dirty="0" err="1">
-                <a:solidFill>
-                  <a:schemeClr val="bg1">
-                    <a:lumMod val="95000"/>
-                  </a:schemeClr>
-                </a:solidFill>
-              </a:rPr>
-              <a:t>el</a:t>
-            </a:r>
-            <a:r>
-              <a:rPr sz="1600" dirty="0">
-                <a:solidFill>
-                  <a:schemeClr val="bg1">
-                    <a:lumMod val="95000"/>
-                  </a:schemeClr>
-                </a:solidFill>
-              </a:rPr>
-              <a:t> valor </a:t>
-            </a:r>
-            <a:r>
-              <a:rPr sz="1600" dirty="0" err="1">
-                <a:solidFill>
-                  <a:schemeClr val="bg1">
-                    <a:lumMod val="95000"/>
-                  </a:schemeClr>
-                </a:solidFill>
-              </a:rPr>
-              <a:t>supera</a:t>
-            </a:r>
-            <a:r>
-              <a:rPr sz="1600" dirty="0">
-                <a:solidFill>
-                  <a:schemeClr val="bg1">
-                    <a:lumMod val="95000"/>
-                  </a:schemeClr>
-                </a:solidFill>
-              </a:rPr>
-              <a:t> 1M, </a:t>
-            </a:r>
-            <a:r>
-              <a:rPr sz="1600" dirty="0" err="1">
-                <a:solidFill>
-                  <a:schemeClr val="bg1">
-                    <a:lumMod val="95000"/>
-                  </a:schemeClr>
-                </a:solidFill>
-              </a:rPr>
-              <a:t>requerir</a:t>
-            </a:r>
-            <a:r>
-              <a:rPr sz="1600" dirty="0">
-                <a:solidFill>
-                  <a:schemeClr val="bg1">
-                    <a:lumMod val="95000"/>
-                  </a:schemeClr>
-                </a:solidFill>
-              </a:rPr>
-              <a:t> endorsement de 3 orgs</a:t>
-            </a:r>
-            <a:br>
-              <a:rPr sz="1600" dirty="0">
-                <a:solidFill>
-                  <a:schemeClr val="bg1">
-                    <a:lumMod val="95000"/>
-                  </a:schemeClr>
-                </a:solidFill>
-              </a:rPr>
-            </a:br>
-            <a:r>
-              <a:rPr sz="1600" dirty="0">
-                <a:solidFill>
-                  <a:schemeClr val="bg1">
-                    <a:lumMod val="95000"/>
-                  </a:schemeClr>
-                </a:solidFill>
-              </a:rPr>
-              <a:t>    if </a:t>
-            </a:r>
-            <a:r>
-              <a:rPr sz="1600" dirty="0" err="1">
-                <a:solidFill>
-                  <a:schemeClr val="bg1">
-                    <a:lumMod val="95000"/>
-                  </a:schemeClr>
-                </a:solidFill>
-              </a:rPr>
-              <a:t>property.AppraisalValue</a:t>
-            </a:r>
-            <a:r>
-              <a:rPr sz="1600" dirty="0">
-                <a:solidFill>
-                  <a:schemeClr val="bg1">
-                    <a:lumMod val="95000"/>
-                  </a:schemeClr>
-                </a:solidFill>
-              </a:rPr>
-              <a:t> &gt; 1000000 {</a:t>
-            </a:r>
-            <a:br>
-              <a:rPr sz="1600" dirty="0">
-                <a:solidFill>
-                  <a:schemeClr val="bg1">
-                    <a:lumMod val="95000"/>
-                  </a:schemeClr>
-                </a:solidFill>
-              </a:rPr>
-            </a:br>
-            <a:r>
-              <a:rPr sz="1600" dirty="0">
-                <a:solidFill>
-                  <a:schemeClr val="bg1">
-                    <a:lumMod val="95000"/>
-                  </a:schemeClr>
-                </a:solidFill>
-              </a:rPr>
-              <a:t>        policy, err := </a:t>
-            </a:r>
-            <a:r>
-              <a:rPr sz="1600" dirty="0" err="1">
-                <a:solidFill>
-                  <a:schemeClr val="bg1">
-                    <a:lumMod val="95000"/>
-                  </a:schemeClr>
-                </a:solidFill>
-              </a:rPr>
-              <a:t>statebased.NewStateEP</a:t>
-            </a:r>
-            <a:r>
-              <a:rPr sz="1600" dirty="0">
-                <a:solidFill>
-                  <a:schemeClr val="bg1">
-                    <a:lumMod val="95000"/>
-                  </a:schemeClr>
-                </a:solidFill>
-              </a:rPr>
-              <a:t>(nil)</a:t>
-            </a:r>
-            <a:br>
-              <a:rPr sz="1600" dirty="0">
-                <a:solidFill>
-                  <a:schemeClr val="bg1">
-                    <a:lumMod val="95000"/>
-                  </a:schemeClr>
-                </a:solidFill>
-              </a:rPr>
-            </a:br>
-            <a:r>
-              <a:rPr sz="1600" dirty="0">
-                <a:solidFill>
-                  <a:schemeClr val="bg1">
-                    <a:lumMod val="95000"/>
-                  </a:schemeClr>
-                </a:solidFill>
-              </a:rPr>
-              <a:t>        if err != nil {</a:t>
-            </a:r>
-            <a:br>
-              <a:rPr sz="1600" dirty="0">
-                <a:solidFill>
-                  <a:schemeClr val="bg1">
-                    <a:lumMod val="95000"/>
-                  </a:schemeClr>
-                </a:solidFill>
-              </a:rPr>
-            </a:br>
-            <a:r>
-              <a:rPr sz="1600" dirty="0">
-                <a:solidFill>
-                  <a:schemeClr val="bg1">
-                    <a:lumMod val="95000"/>
-                  </a:schemeClr>
-                </a:solidFill>
-              </a:rPr>
-              <a:t>            return err</a:t>
-            </a:r>
-            <a:br>
-              <a:rPr sz="1600" dirty="0">
-                <a:solidFill>
-                  <a:schemeClr val="bg1">
-                    <a:lumMod val="95000"/>
-                  </a:schemeClr>
-                </a:solidFill>
-              </a:rPr>
-            </a:br>
-            <a:r>
-              <a:rPr sz="1600" dirty="0">
-                <a:solidFill>
-                  <a:schemeClr val="bg1">
-                    <a:lumMod val="95000"/>
-                  </a:schemeClr>
-                </a:solidFill>
-              </a:rPr>
-              <a:t>        }</a:t>
+              <a:t>        const policy = new KeyEndorsementPolicy();</a:t>
             </a:r>
           </a:p>
         </p:txBody>
@@ -12609,7 +12034,7 @@
           </a:bodyPr>
           <a:lstStyle/>
           <a:p>
-            <a:br>
+            <a:r>
               <a:rPr lang="es-ES" sz="1600" dirty="0">
                 <a:solidFill>
                   <a:schemeClr val="bg1">
@@ -12617,7 +12042,10 @@
                   </a:schemeClr>
                 </a:solidFill>
               </a:rPr>
-            </a:br>
+              <a:t>        // Requiere las tres organizaciones</a:t>
+            </a:r>
+          </a:p>
+          <a:p>
             <a:r>
               <a:rPr lang="es-ES" sz="1600" dirty="0">
                 <a:solidFill>
@@ -12626,9 +12054,11 @@
                   </a:schemeClr>
                 </a:solidFill>
               </a:rPr>
-              <a:t>        // Requiere las tres organizaciones</a:t>
-            </a:r>
-            <a:br>
+              <a:t>        policy.addOrgs('MEMBER',</a:t>
+            </a:r>
+          </a:p>
+          <a:p>
+            <a:r>
               <a:rPr lang="es-ES" sz="1600" dirty="0">
                 <a:solidFill>
                   <a:schemeClr val="bg1">
@@ -12636,7 +12066,10 @@
                   </a:schemeClr>
                 </a:solidFill>
               </a:rPr>
-            </a:br>
+              <a:t>            'Org1MSP', 'Org2MSP', 'Org3MSP');</a:t>
+            </a:r>
+          </a:p>
+          <a:p>
             <a:r>
               <a:rPr lang="es-ES" sz="1600" dirty="0">
                 <a:solidFill>
@@ -12645,18 +12078,31 @@
                   </a:schemeClr>
                 </a:solidFill>
               </a:rPr>
-              <a:t>        </a:t>
-            </a:r>
-            <a:r>
-              <a:rPr lang="es-ES" sz="1600" dirty="0" err="1">
+              <a:t>        const policyBytes = policy.getPolicy();</a:t>
+            </a:r>
+          </a:p>
+          <a:p>
+            <a:endParaRPr lang="es-ES" sz="1600" dirty="0">
+              <a:solidFill>
+                <a:schemeClr val="bg1">
+                  <a:lumMod val="95000"/>
+                </a:schemeClr>
+              </a:solidFill>
+            </a:endParaRPr>
+          </a:p>
+          <a:p>
+            <a:r>
+              <a:rPr lang="es-ES" sz="1600" dirty="0">
                 <a:solidFill>
                   <a:schemeClr val="bg1">
                     <a:lumMod val="95000"/>
                   </a:schemeClr>
                 </a:solidFill>
               </a:rPr>
-              <a:t>policy.AddOrgs</a:t>
-            </a:r>
+              <a:t>        await ctx.stub.setStateValidationParameter(</a:t>
+            </a:r>
+          </a:p>
+          <a:p>
             <a:r>
               <a:rPr lang="es-ES" sz="1600" dirty="0">
                 <a:solidFill>
@@ -12665,18 +12111,22 @@
                   </a:schemeClr>
                 </a:solidFill>
               </a:rPr>
-              <a:t>(</a:t>
-            </a:r>
-            <a:r>
-              <a:rPr lang="es-ES" sz="1600" dirty="0" err="1">
+              <a:t>            propertyID, policyBytes);</a:t>
+            </a:r>
+          </a:p>
+          <a:p>
+            <a:r>
+              <a:rPr lang="es-ES" sz="1600" dirty="0">
                 <a:solidFill>
                   <a:schemeClr val="bg1">
                     <a:lumMod val="95000"/>
                   </a:schemeClr>
                 </a:solidFill>
               </a:rPr>
-              <a:t>statebased.RoleTypePeer</a:t>
-            </a:r>
+              <a:t>    }</a:t>
+            </a:r>
+          </a:p>
+          <a:p>
             <a:r>
               <a:rPr lang="es-ES" sz="1600" dirty="0">
                 <a:solidFill>
@@ -12685,321 +12135,8 @@
                   </a:schemeClr>
                 </a:solidFill>
               </a:rPr>
-              <a:t>,</a:t>
-            </a:r>
-            <a:br>
-              <a:rPr lang="es-ES" sz="1600" dirty="0">
-                <a:solidFill>
-                  <a:schemeClr val="bg1">
-                    <a:lumMod val="95000"/>
-                  </a:schemeClr>
-                </a:solidFill>
-              </a:rPr>
-            </a:br>
-            <a:r>
-              <a:rPr lang="es-ES" sz="1600" dirty="0">
-                <a:solidFill>
-                  <a:schemeClr val="bg1">
-                    <a:lumMod val="95000"/>
-                  </a:schemeClr>
-                </a:solidFill>
-              </a:rPr>
-              <a:t>            "Org1MSP", "Org2MSP", "Org3MSP")</a:t>
-            </a:r>
-            <a:br>
-              <a:rPr lang="es-ES" sz="1600" dirty="0">
-                <a:solidFill>
-                  <a:schemeClr val="bg1">
-                    <a:lumMod val="95000"/>
-                  </a:schemeClr>
-                </a:solidFill>
-              </a:rPr>
-            </a:br>
-            <a:r>
-              <a:rPr lang="es-ES" sz="1600" dirty="0">
-                <a:solidFill>
-                  <a:schemeClr val="bg1">
-                    <a:lumMod val="95000"/>
-                  </a:schemeClr>
-                </a:solidFill>
-              </a:rPr>
-              <a:t>        </a:t>
-            </a:r>
-            <a:r>
-              <a:rPr lang="es-ES" sz="1600" dirty="0" err="1">
-                <a:solidFill>
-                  <a:schemeClr val="bg1">
-                    <a:lumMod val="95000"/>
-                  </a:schemeClr>
-                </a:solidFill>
-              </a:rPr>
-              <a:t>policyBytes</a:t>
-            </a:r>
-            <a:r>
-              <a:rPr lang="es-ES" sz="1600" dirty="0">
-                <a:solidFill>
-                  <a:schemeClr val="bg1">
-                    <a:lumMod val="95000"/>
-                  </a:schemeClr>
-                </a:solidFill>
-              </a:rPr>
-              <a:t>, _ := </a:t>
-            </a:r>
-            <a:r>
-              <a:rPr lang="es-ES" sz="1600" dirty="0" err="1">
-                <a:solidFill>
-                  <a:schemeClr val="bg1">
-                    <a:lumMod val="95000"/>
-                  </a:schemeClr>
-                </a:solidFill>
-              </a:rPr>
-              <a:t>policy.Policy</a:t>
-            </a:r>
-            <a:r>
-              <a:rPr lang="es-ES" sz="1600" dirty="0">
-                <a:solidFill>
-                  <a:schemeClr val="bg1">
-                    <a:lumMod val="95000"/>
-                  </a:schemeClr>
-                </a:solidFill>
-              </a:rPr>
-              <a:t>()</a:t>
-            </a:r>
-            <a:br>
-              <a:rPr lang="es-ES" sz="1600" dirty="0">
-                <a:solidFill>
-                  <a:schemeClr val="bg1">
-                    <a:lumMod val="95000"/>
-                  </a:schemeClr>
-                </a:solidFill>
-              </a:rPr>
-            </a:br>
-            <a:br>
-              <a:rPr lang="es-ES" sz="1600" dirty="0">
-                <a:solidFill>
-                  <a:schemeClr val="bg1">
-                    <a:lumMod val="95000"/>
-                  </a:schemeClr>
-                </a:solidFill>
-              </a:rPr>
-            </a:br>
-            <a:r>
-              <a:rPr lang="es-ES" sz="1600" dirty="0">
-                <a:solidFill>
-                  <a:schemeClr val="bg1">
-                    <a:lumMod val="95000"/>
-                  </a:schemeClr>
-                </a:solidFill>
-              </a:rPr>
-              <a:t>        </a:t>
-            </a:r>
-            <a:r>
-              <a:rPr lang="es-ES" sz="1600" dirty="0" err="1">
-                <a:solidFill>
-                  <a:schemeClr val="bg1">
-                    <a:lumMod val="95000"/>
-                  </a:schemeClr>
-                </a:solidFill>
-              </a:rPr>
-              <a:t>return</a:t>
-            </a:r>
-            <a:r>
-              <a:rPr lang="es-ES" sz="1600" dirty="0">
-                <a:solidFill>
-                  <a:schemeClr val="bg1">
-                    <a:lumMod val="95000"/>
-                  </a:schemeClr>
-                </a:solidFill>
-              </a:rPr>
-              <a:t> </a:t>
-            </a:r>
-            <a:r>
-              <a:rPr lang="es-ES" sz="1600" dirty="0" err="1">
-                <a:solidFill>
-                  <a:schemeClr val="bg1">
-                    <a:lumMod val="95000"/>
-                  </a:schemeClr>
-                </a:solidFill>
-              </a:rPr>
-              <a:t>ctx.GetStub</a:t>
-            </a:r>
-            <a:r>
-              <a:rPr lang="es-ES" sz="1600" dirty="0">
-                <a:solidFill>
-                  <a:schemeClr val="bg1">
-                    <a:lumMod val="95000"/>
-                  </a:schemeClr>
-                </a:solidFill>
-              </a:rPr>
-              <a:t>().</a:t>
-            </a:r>
-            <a:r>
-              <a:rPr lang="es-ES" sz="1600" dirty="0" err="1">
-                <a:solidFill>
-                  <a:schemeClr val="bg1">
-                    <a:lumMod val="95000"/>
-                  </a:schemeClr>
-                </a:solidFill>
-              </a:rPr>
-              <a:t>SetStateValidationParameter</a:t>
-            </a:r>
-            <a:r>
-              <a:rPr lang="es-ES" sz="1600" dirty="0">
-                <a:solidFill>
-                  <a:schemeClr val="bg1">
-                    <a:lumMod val="95000"/>
-                  </a:schemeClr>
-                </a:solidFill>
-              </a:rPr>
-              <a:t>(</a:t>
-            </a:r>
-            <a:br>
-              <a:rPr lang="es-ES" sz="1600" dirty="0">
-                <a:solidFill>
-                  <a:schemeClr val="bg1">
-                    <a:lumMod val="95000"/>
-                  </a:schemeClr>
-                </a:solidFill>
-              </a:rPr>
-            </a:br>
-            <a:r>
-              <a:rPr lang="es-ES" sz="1600" dirty="0">
-                <a:solidFill>
-                  <a:schemeClr val="bg1">
-                    <a:lumMod val="95000"/>
-                  </a:schemeClr>
-                </a:solidFill>
-              </a:rPr>
-              <a:t>            </a:t>
-            </a:r>
-            <a:r>
-              <a:rPr lang="es-ES" sz="1600" dirty="0" err="1">
-                <a:solidFill>
-                  <a:schemeClr val="bg1">
-                    <a:lumMod val="95000"/>
-                  </a:schemeClr>
-                </a:solidFill>
-              </a:rPr>
-              <a:t>propertyID</a:t>
-            </a:r>
-            <a:r>
-              <a:rPr lang="es-ES" sz="1600" dirty="0">
-                <a:solidFill>
-                  <a:schemeClr val="bg1">
-                    <a:lumMod val="95000"/>
-                  </a:schemeClr>
-                </a:solidFill>
-              </a:rPr>
-              <a:t>, </a:t>
-            </a:r>
-            <a:r>
-              <a:rPr lang="es-ES" sz="1600" dirty="0" err="1">
-                <a:solidFill>
-                  <a:schemeClr val="bg1">
-                    <a:lumMod val="95000"/>
-                  </a:schemeClr>
-                </a:solidFill>
-              </a:rPr>
-              <a:t>policyBytes</a:t>
-            </a:r>
-            <a:r>
-              <a:rPr lang="es-ES" sz="1600" dirty="0">
-                <a:solidFill>
-                  <a:schemeClr val="bg1">
-                    <a:lumMod val="95000"/>
-                  </a:schemeClr>
-                </a:solidFill>
-              </a:rPr>
-              <a:t>)</a:t>
-            </a:r>
-            <a:br>
-              <a:rPr lang="es-ES" sz="1600" dirty="0">
-                <a:solidFill>
-                  <a:schemeClr val="bg1">
-                    <a:lumMod val="95000"/>
-                  </a:schemeClr>
-                </a:solidFill>
-              </a:rPr>
-            </a:br>
-            <a:r>
-              <a:rPr lang="es-ES" sz="1600" dirty="0">
-                <a:solidFill>
-                  <a:schemeClr val="bg1">
-                    <a:lumMod val="95000"/>
-                  </a:schemeClr>
-                </a:solidFill>
-              </a:rPr>
-              <a:t>    }</a:t>
-            </a:r>
-            <a:br>
-              <a:rPr lang="es-ES" sz="1600" dirty="0">
-                <a:solidFill>
-                  <a:schemeClr val="bg1">
-                    <a:lumMod val="95000"/>
-                  </a:schemeClr>
-                </a:solidFill>
-              </a:rPr>
-            </a:br>
-            <a:r>
-              <a:rPr lang="es-ES" sz="1600" dirty="0">
-                <a:solidFill>
-                  <a:schemeClr val="bg1">
-                    <a:lumMod val="95000"/>
-                  </a:schemeClr>
-                </a:solidFill>
-              </a:rPr>
-              <a:t>    </a:t>
-            </a:r>
-            <a:r>
-              <a:rPr lang="es-ES" sz="1600" dirty="0" err="1">
-                <a:solidFill>
-                  <a:schemeClr val="bg1">
-                    <a:lumMod val="95000"/>
-                  </a:schemeClr>
-                </a:solidFill>
-              </a:rPr>
-              <a:t>return</a:t>
-            </a:r>
-            <a:r>
-              <a:rPr lang="es-ES" sz="1600" dirty="0">
-                <a:solidFill>
-                  <a:schemeClr val="bg1">
-                    <a:lumMod val="95000"/>
-                  </a:schemeClr>
-                </a:solidFill>
-              </a:rPr>
-              <a:t> </a:t>
-            </a:r>
-            <a:r>
-              <a:rPr lang="es-ES" sz="1600" dirty="0" err="1">
-                <a:solidFill>
-                  <a:schemeClr val="bg1">
-                    <a:lumMod val="95000"/>
-                  </a:schemeClr>
-                </a:solidFill>
-              </a:rPr>
-              <a:t>nil</a:t>
-            </a:r>
-            <a:br>
-              <a:rPr lang="es-ES" sz="1600" dirty="0">
-                <a:solidFill>
-                  <a:schemeClr val="bg1">
-                    <a:lumMod val="95000"/>
-                  </a:schemeClr>
-                </a:solidFill>
-              </a:rPr>
-            </a:br>
-            <a:r>
-              <a:rPr lang="es-ES" sz="1600" dirty="0">
-                <a:solidFill>
-                  <a:schemeClr val="bg1">
-                    <a:lumMod val="95000"/>
-                  </a:schemeClr>
-                </a:solidFill>
-              </a:rPr>
               <a:t>}</a:t>
             </a:r>
-            <a:endParaRPr lang="es-ES" sz="1600" dirty="0"/>
           </a:p>
         </p:txBody>
       </p:sp>
@@ -13619,7 +12756,7 @@
               </a:defRPr>
             </a:pPr>
             <a:r>
-              <a:t>GO</a:t>
+              <a:t>NODE.JS</a:t>
             </a:r>
           </a:p>
         </p:txBody>
@@ -13688,15 +12825,18 @@
           <a:bodyPr wrap="square"/>
           <a:lstStyle/>
           <a:p>
-            <a:br>
-              <a:rPr sz="1600" dirty="0">
+            <a:r>
+              <a:rPr sz="1600" dirty="0" err="1">
                 <a:solidFill>
                   <a:schemeClr val="bg1">
                     <a:lumMod val="95000"/>
                   </a:schemeClr>
                 </a:solidFill>
               </a:rPr>
-            </a:br>
+              <a:t>async checkRole(ctx, requiredRole) {</a:t>
+            </a:r>
+          </a:p>
+          <a:p>
             <a:r>
               <a:rPr sz="1600" dirty="0" err="1">
                 <a:solidFill>
@@ -13705,18 +12845,31 @@
                   </a:schemeClr>
                 </a:solidFill>
               </a:rPr>
-              <a:t>func</a:t>
-            </a:r>
-            <a:r>
-              <a:rPr sz="1600" dirty="0">
+              <a:t>    const [role, found] = ctx.clientIdentity</a:t>
+            </a:r>
+          </a:p>
+          <a:p>
+            <a:r>
+              <a:rPr sz="1600" dirty="0" err="1">
                 <a:solidFill>
                   <a:schemeClr val="bg1">
                     <a:lumMod val="95000"/>
                   </a:schemeClr>
                 </a:solidFill>
               </a:rPr>
-              <a:t> (s *</a:t>
-            </a:r>
+              <a:t>        .getAttributeValue('role');</a:t>
+            </a:r>
+          </a:p>
+          <a:p>
+            <a:endParaRPr sz="1600" dirty="0" err="1">
+              <a:solidFill>
+                <a:schemeClr val="bg1">
+                  <a:lumMod val="95000"/>
+                </a:schemeClr>
+              </a:solidFill>
+            </a:endParaRPr>
+          </a:p>
+          <a:p>
             <a:r>
               <a:rPr sz="1600" dirty="0" err="1">
                 <a:solidFill>
@@ -13725,18 +12878,22 @@
                   </a:schemeClr>
                 </a:solidFill>
               </a:rPr>
-              <a:t>SmartContract</a:t>
-            </a:r>
-            <a:r>
-              <a:rPr sz="1600" dirty="0">
+              <a:t>    if (!found) {</a:t>
+            </a:r>
+          </a:p>
+          <a:p>
+            <a:r>
+              <a:rPr sz="1600" dirty="0" err="1">
                 <a:solidFill>
                   <a:schemeClr val="bg1">
                     <a:lumMod val="95000"/>
                   </a:schemeClr>
                 </a:solidFill>
               </a:rPr>
-              <a:t>) </a:t>
-            </a:r>
+              <a:t>        throw new Error(</a:t>
+            </a:r>
+          </a:p>
+          <a:p>
             <a:r>
               <a:rPr sz="1600" dirty="0" err="1">
                 <a:solidFill>
@@ -13745,18 +12902,31 @@
                   </a:schemeClr>
                 </a:solidFill>
               </a:rPr>
-              <a:t>checkRole</a:t>
-            </a:r>
-            <a:r>
-              <a:rPr sz="1600" dirty="0">
+              <a:t>            "el certificado no tiene atributo 'role'");</a:t>
+            </a:r>
+          </a:p>
+          <a:p>
+            <a:r>
+              <a:rPr sz="1600" dirty="0" err="1">
                 <a:solidFill>
                   <a:schemeClr val="bg1">
                     <a:lumMod val="95000"/>
                   </a:schemeClr>
                 </a:solidFill>
               </a:rPr>
-              <a:t>(</a:t>
-            </a:r>
+              <a:t>    }</a:t>
+            </a:r>
+          </a:p>
+          <a:p>
+            <a:endParaRPr sz="1600" dirty="0" err="1">
+              <a:solidFill>
+                <a:schemeClr val="bg1">
+                  <a:lumMod val="95000"/>
+                </a:schemeClr>
+              </a:solidFill>
+            </a:endParaRPr>
+          </a:p>
+          <a:p>
             <a:r>
               <a:rPr sz="1600" dirty="0" err="1">
                 <a:solidFill>
@@ -13765,18 +12935,22 @@
                   </a:schemeClr>
                 </a:solidFill>
               </a:rPr>
-              <a:t>ctx</a:t>
-            </a:r>
-            <a:r>
-              <a:rPr sz="1600" dirty="0">
+              <a:t>    if (role !== requiredRole) {</a:t>
+            </a:r>
+          </a:p>
+          <a:p>
+            <a:r>
+              <a:rPr sz="1600" dirty="0" err="1">
                 <a:solidFill>
                   <a:schemeClr val="bg1">
                     <a:lumMod val="95000"/>
                   </a:schemeClr>
                 </a:solidFill>
               </a:rPr>
-              <a:t> </a:t>
-            </a:r>
+              <a:t>        throw new Error(</a:t>
+            </a:r>
+          </a:p>
+          <a:p>
             <a:r>
               <a:rPr sz="1600" dirty="0" err="1">
                 <a:solidFill>
@@ -13785,625 +12959,36 @@
                   </a:schemeClr>
                 </a:solidFill>
               </a:rPr>
-              <a:t>contractapi.TransactionContextInterface</a:t>
-            </a:r>
-            <a:r>
-              <a:rPr sz="1600" dirty="0">
+              <a:t>            `rol requerido: ${requiredRole}, ` +</a:t>
+            </a:r>
+          </a:p>
+          <a:p>
+            <a:r>
+              <a:rPr sz="1600" dirty="0" err="1">
                 <a:solidFill>
                   <a:schemeClr val="bg1">
                     <a:lumMod val="95000"/>
                   </a:schemeClr>
                 </a:solidFill>
               </a:rPr>
-              <a:t>,</a:t>
-            </a:r>
-            <a:br>
-              <a:rPr sz="1600" dirty="0">
+              <a:t>            `rol actual: ${role}`);</a:t>
+            </a:r>
+          </a:p>
+          <a:p>
+            <a:r>
+              <a:rPr sz="1600" dirty="0" err="1">
                 <a:solidFill>
                   <a:schemeClr val="bg1">
                     <a:lumMod val="95000"/>
                   </a:schemeClr>
                 </a:solidFill>
               </a:rPr>
-            </a:br>
-            <a:r>
-              <a:rPr sz="1600" dirty="0">
-                <a:solidFill>
-                  <a:schemeClr val="bg1">
-                    <a:lumMod val="95000"/>
-                  </a:schemeClr>
-                </a:solidFill>
-              </a:rPr>
-              <a:t>    </a:t>
-            </a:r>
+              <a:t>    }</a:t>
+            </a:r>
+          </a:p>
+          <a:p>
             <a:r>
               <a:rPr sz="1600" dirty="0" err="1">
-                <a:solidFill>
-                  <a:schemeClr val="bg1">
-                    <a:lumMod val="95000"/>
-                  </a:schemeClr>
-                </a:solidFill>
-              </a:rPr>
-              <a:t>requiredRole</a:t>
-            </a:r>
-            <a:r>
-              <a:rPr sz="1600" dirty="0">
-                <a:solidFill>
-                  <a:schemeClr val="bg1">
-                    <a:lumMod val="95000"/>
-                  </a:schemeClr>
-                </a:solidFill>
-              </a:rPr>
-              <a:t> string) error {</a:t>
-            </a:r>
-            <a:br>
-              <a:rPr sz="1600" dirty="0">
-                <a:solidFill>
-                  <a:schemeClr val="bg1">
-                    <a:lumMod val="95000"/>
-                  </a:schemeClr>
-                </a:solidFill>
-              </a:rPr>
-            </a:br>
-            <a:br>
-              <a:rPr sz="1600" dirty="0">
-                <a:solidFill>
-                  <a:schemeClr val="bg1">
-                    <a:lumMod val="95000"/>
-                  </a:schemeClr>
-                </a:solidFill>
-              </a:rPr>
-            </a:br>
-            <a:r>
-              <a:rPr sz="1600" dirty="0">
-                <a:solidFill>
-                  <a:schemeClr val="bg1">
-                    <a:lumMod val="95000"/>
-                  </a:schemeClr>
-                </a:solidFill>
-              </a:rPr>
-              <a:t>    role, found, err := </a:t>
-            </a:r>
-            <a:r>
-              <a:rPr sz="1600" dirty="0" err="1">
-                <a:solidFill>
-                  <a:schemeClr val="bg1">
-                    <a:lumMod val="95000"/>
-                  </a:schemeClr>
-                </a:solidFill>
-              </a:rPr>
-              <a:t>ctx.GetClientIdentity</a:t>
-            </a:r>
-            <a:r>
-              <a:rPr sz="1600" dirty="0">
-                <a:solidFill>
-                  <a:schemeClr val="bg1">
-                    <a:lumMod val="95000"/>
-                  </a:schemeClr>
-                </a:solidFill>
-              </a:rPr>
-              <a:t>().</a:t>
-            </a:r>
-            <a:r>
-              <a:rPr sz="1600" dirty="0" err="1">
-                <a:solidFill>
-                  <a:schemeClr val="bg1">
-                    <a:lumMod val="95000"/>
-                  </a:schemeClr>
-                </a:solidFill>
-              </a:rPr>
-              <a:t>GetAttributeValue</a:t>
-            </a:r>
-            <a:r>
-              <a:rPr sz="1600" dirty="0">
-                <a:solidFill>
-                  <a:schemeClr val="bg1">
-                    <a:lumMod val="95000"/>
-                  </a:schemeClr>
-                </a:solidFill>
-              </a:rPr>
-              <a:t>("role")</a:t>
-            </a:r>
-            <a:br>
-              <a:rPr sz="1600" dirty="0">
-                <a:solidFill>
-                  <a:schemeClr val="bg1">
-                    <a:lumMod val="95000"/>
-                  </a:schemeClr>
-                </a:solidFill>
-              </a:rPr>
-            </a:br>
-            <a:r>
-              <a:rPr sz="1600" dirty="0">
-                <a:solidFill>
-                  <a:schemeClr val="bg1">
-                    <a:lumMod val="95000"/>
-                  </a:schemeClr>
-                </a:solidFill>
-              </a:rPr>
-              <a:t>    if err != nil {</a:t>
-            </a:r>
-            <a:br>
-              <a:rPr sz="1600" dirty="0">
-                <a:solidFill>
-                  <a:schemeClr val="bg1">
-                    <a:lumMod val="95000"/>
-                  </a:schemeClr>
-                </a:solidFill>
-              </a:rPr>
-            </a:br>
-            <a:r>
-              <a:rPr sz="1600" dirty="0">
-                <a:solidFill>
-                  <a:schemeClr val="bg1">
-                    <a:lumMod val="95000"/>
-                  </a:schemeClr>
-                </a:solidFill>
-              </a:rPr>
-              <a:t>        return </a:t>
-            </a:r>
-            <a:r>
-              <a:rPr sz="1600" dirty="0" err="1">
-                <a:solidFill>
-                  <a:schemeClr val="bg1">
-                    <a:lumMod val="95000"/>
-                  </a:schemeClr>
-                </a:solidFill>
-              </a:rPr>
-              <a:t>fmt.Errorf</a:t>
-            </a:r>
-            <a:r>
-              <a:rPr sz="1600" dirty="0">
-                <a:solidFill>
-                  <a:schemeClr val="bg1">
-                    <a:lumMod val="95000"/>
-                  </a:schemeClr>
-                </a:solidFill>
-              </a:rPr>
-              <a:t>("error </a:t>
-            </a:r>
-            <a:r>
-              <a:rPr sz="1600" dirty="0" err="1">
-                <a:solidFill>
-                  <a:schemeClr val="bg1">
-                    <a:lumMod val="95000"/>
-                  </a:schemeClr>
-                </a:solidFill>
-              </a:rPr>
-              <a:t>leyendo</a:t>
-            </a:r>
-            <a:r>
-              <a:rPr sz="1600" dirty="0">
-                <a:solidFill>
-                  <a:schemeClr val="bg1">
-                    <a:lumMod val="95000"/>
-                  </a:schemeClr>
-                </a:solidFill>
-              </a:rPr>
-              <a:t> </a:t>
-            </a:r>
-            <a:r>
-              <a:rPr sz="1600" dirty="0" err="1">
-                <a:solidFill>
-                  <a:schemeClr val="bg1">
-                    <a:lumMod val="95000"/>
-                  </a:schemeClr>
-                </a:solidFill>
-              </a:rPr>
-              <a:t>atributo</a:t>
-            </a:r>
-            <a:r>
-              <a:rPr sz="1600" dirty="0">
-                <a:solidFill>
-                  <a:schemeClr val="bg1">
-                    <a:lumMod val="95000"/>
-                  </a:schemeClr>
-                </a:solidFill>
-              </a:rPr>
-              <a:t> role: %v", err)</a:t>
-            </a:r>
-            <a:br>
-              <a:rPr sz="1600" dirty="0">
-                <a:solidFill>
-                  <a:schemeClr val="bg1">
-                    <a:lumMod val="95000"/>
-                  </a:schemeClr>
-                </a:solidFill>
-              </a:rPr>
-            </a:br>
-            <a:r>
-              <a:rPr sz="1600" dirty="0">
-                <a:solidFill>
-                  <a:schemeClr val="bg1">
-                    <a:lumMod val="95000"/>
-                  </a:schemeClr>
-                </a:solidFill>
-              </a:rPr>
-              <a:t>    }</a:t>
-            </a:r>
-            <a:br>
-              <a:rPr sz="1600" dirty="0">
-                <a:solidFill>
-                  <a:schemeClr val="bg1">
-                    <a:lumMod val="95000"/>
-                  </a:schemeClr>
-                </a:solidFill>
-              </a:rPr>
-            </a:br>
-            <a:r>
-              <a:rPr sz="1600" dirty="0">
-                <a:solidFill>
-                  <a:schemeClr val="bg1">
-                    <a:lumMod val="95000"/>
-                  </a:schemeClr>
-                </a:solidFill>
-              </a:rPr>
-              <a:t>    if !found {</a:t>
-            </a:r>
-            <a:br>
-              <a:rPr sz="1600" dirty="0">
-                <a:solidFill>
-                  <a:schemeClr val="bg1">
-                    <a:lumMod val="95000"/>
-                  </a:schemeClr>
-                </a:solidFill>
-              </a:rPr>
-            </a:br>
-            <a:r>
-              <a:rPr sz="1600" dirty="0">
-                <a:solidFill>
-                  <a:schemeClr val="bg1">
-                    <a:lumMod val="95000"/>
-                  </a:schemeClr>
-                </a:solidFill>
-              </a:rPr>
-              <a:t>        return </a:t>
-            </a:r>
-            <a:r>
-              <a:rPr sz="1600" dirty="0" err="1">
-                <a:solidFill>
-                  <a:schemeClr val="bg1">
-                    <a:lumMod val="95000"/>
-                  </a:schemeClr>
-                </a:solidFill>
-              </a:rPr>
-              <a:t>fmt.Errorf</a:t>
-            </a:r>
-            <a:r>
-              <a:rPr sz="1600" dirty="0">
-                <a:solidFill>
-                  <a:schemeClr val="bg1">
-                    <a:lumMod val="95000"/>
-                  </a:schemeClr>
-                </a:solidFill>
-              </a:rPr>
-              <a:t>("</a:t>
-            </a:r>
-            <a:r>
-              <a:rPr sz="1600" dirty="0" err="1">
-                <a:solidFill>
-                  <a:schemeClr val="bg1">
-                    <a:lumMod val="95000"/>
-                  </a:schemeClr>
-                </a:solidFill>
-              </a:rPr>
-              <a:t>el</a:t>
-            </a:r>
-            <a:r>
-              <a:rPr sz="1600" dirty="0">
-                <a:solidFill>
-                  <a:schemeClr val="bg1">
-                    <a:lumMod val="95000"/>
-                  </a:schemeClr>
-                </a:solidFill>
-              </a:rPr>
-              <a:t> </a:t>
-            </a:r>
-            <a:r>
-              <a:rPr sz="1600" dirty="0" err="1">
-                <a:solidFill>
-                  <a:schemeClr val="bg1">
-                    <a:lumMod val="95000"/>
-                  </a:schemeClr>
-                </a:solidFill>
-              </a:rPr>
-              <a:t>certificado</a:t>
-            </a:r>
-            <a:r>
-              <a:rPr sz="1600" dirty="0">
-                <a:solidFill>
-                  <a:schemeClr val="bg1">
-                    <a:lumMod val="95000"/>
-                  </a:schemeClr>
-                </a:solidFill>
-              </a:rPr>
-              <a:t> no </a:t>
-            </a:r>
-            <a:r>
-              <a:rPr sz="1600" dirty="0" err="1">
-                <a:solidFill>
-                  <a:schemeClr val="bg1">
-                    <a:lumMod val="95000"/>
-                  </a:schemeClr>
-                </a:solidFill>
-              </a:rPr>
-              <a:t>tiene</a:t>
-            </a:r>
-            <a:r>
-              <a:rPr sz="1600" dirty="0">
-                <a:solidFill>
-                  <a:schemeClr val="bg1">
-                    <a:lumMod val="95000"/>
-                  </a:schemeClr>
-                </a:solidFill>
-              </a:rPr>
-              <a:t> </a:t>
-            </a:r>
-            <a:r>
-              <a:rPr sz="1600" dirty="0" err="1">
-                <a:solidFill>
-                  <a:schemeClr val="bg1">
-                    <a:lumMod val="95000"/>
-                  </a:schemeClr>
-                </a:solidFill>
-              </a:rPr>
-              <a:t>atributo</a:t>
-            </a:r>
-            <a:r>
-              <a:rPr sz="1600" dirty="0">
-                <a:solidFill>
-                  <a:schemeClr val="bg1">
-                    <a:lumMod val="95000"/>
-                  </a:schemeClr>
-                </a:solidFill>
-              </a:rPr>
-              <a:t> 'role'")</a:t>
-            </a:r>
-            <a:br>
-              <a:rPr sz="1600" dirty="0">
-                <a:solidFill>
-                  <a:schemeClr val="bg1">
-                    <a:lumMod val="95000"/>
-                  </a:schemeClr>
-                </a:solidFill>
-              </a:rPr>
-            </a:br>
-            <a:r>
-              <a:rPr sz="1600" dirty="0">
-                <a:solidFill>
-                  <a:schemeClr val="bg1">
-                    <a:lumMod val="95000"/>
-                  </a:schemeClr>
-                </a:solidFill>
-              </a:rPr>
-              <a:t>    }</a:t>
-            </a:r>
-            <a:br>
-              <a:rPr sz="1600" dirty="0">
-                <a:solidFill>
-                  <a:schemeClr val="bg1">
-                    <a:lumMod val="95000"/>
-                  </a:schemeClr>
-                </a:solidFill>
-              </a:rPr>
-            </a:br>
-            <a:r>
-              <a:rPr sz="1600" dirty="0">
-                <a:solidFill>
-                  <a:schemeClr val="bg1">
-                    <a:lumMod val="95000"/>
-                  </a:schemeClr>
-                </a:solidFill>
-              </a:rPr>
-              <a:t>    if role != </a:t>
-            </a:r>
-            <a:r>
-              <a:rPr sz="1600" dirty="0" err="1">
-                <a:solidFill>
-                  <a:schemeClr val="bg1">
-                    <a:lumMod val="95000"/>
-                  </a:schemeClr>
-                </a:solidFill>
-              </a:rPr>
-              <a:t>requiredRole</a:t>
-            </a:r>
-            <a:r>
-              <a:rPr sz="1600" dirty="0">
-                <a:solidFill>
-                  <a:schemeClr val="bg1">
-                    <a:lumMod val="95000"/>
-                  </a:schemeClr>
-                </a:solidFill>
-              </a:rPr>
-              <a:t> {</a:t>
-            </a:r>
-            <a:br>
-              <a:rPr sz="1600" dirty="0">
-                <a:solidFill>
-                  <a:schemeClr val="bg1">
-                    <a:lumMod val="95000"/>
-                  </a:schemeClr>
-                </a:solidFill>
-              </a:rPr>
-            </a:br>
-            <a:r>
-              <a:rPr sz="1600" dirty="0">
-                <a:solidFill>
-                  <a:schemeClr val="bg1">
-                    <a:lumMod val="95000"/>
-                  </a:schemeClr>
-                </a:solidFill>
-              </a:rPr>
-              <a:t>        return </a:t>
-            </a:r>
-            <a:r>
-              <a:rPr sz="1600" dirty="0" err="1">
-                <a:solidFill>
-                  <a:schemeClr val="bg1">
-                    <a:lumMod val="95000"/>
-                  </a:schemeClr>
-                </a:solidFill>
-              </a:rPr>
-              <a:t>fmt.Errorf</a:t>
-            </a:r>
-            <a:r>
-              <a:rPr sz="1600" dirty="0">
-                <a:solidFill>
-                  <a:schemeClr val="bg1">
-                    <a:lumMod val="95000"/>
-                  </a:schemeClr>
-                </a:solidFill>
-              </a:rPr>
-              <a:t>("</a:t>
-            </a:r>
-            <a:r>
-              <a:rPr sz="1600" dirty="0" err="1">
-                <a:solidFill>
-                  <a:schemeClr val="bg1">
-                    <a:lumMod val="95000"/>
-                  </a:schemeClr>
-                </a:solidFill>
-              </a:rPr>
-              <a:t>rol</a:t>
-            </a:r>
-            <a:r>
-              <a:rPr sz="1600" dirty="0">
-                <a:solidFill>
-                  <a:schemeClr val="bg1">
-                    <a:lumMod val="95000"/>
-                  </a:schemeClr>
-                </a:solidFill>
-              </a:rPr>
-              <a:t> </a:t>
-            </a:r>
-            <a:r>
-              <a:rPr sz="1600" dirty="0" err="1">
-                <a:solidFill>
-                  <a:schemeClr val="bg1">
-                    <a:lumMod val="95000"/>
-                  </a:schemeClr>
-                </a:solidFill>
-              </a:rPr>
-              <a:t>requerido</a:t>
-            </a:r>
-            <a:r>
-              <a:rPr sz="1600" dirty="0">
-                <a:solidFill>
-                  <a:schemeClr val="bg1">
-                    <a:lumMod val="95000"/>
-                  </a:schemeClr>
-                </a:solidFill>
-              </a:rPr>
-              <a:t>: %s, </a:t>
-            </a:r>
-            <a:r>
-              <a:rPr sz="1600" dirty="0" err="1">
-                <a:solidFill>
-                  <a:schemeClr val="bg1">
-                    <a:lumMod val="95000"/>
-                  </a:schemeClr>
-                </a:solidFill>
-              </a:rPr>
-              <a:t>rol</a:t>
-            </a:r>
-            <a:r>
-              <a:rPr sz="1600" dirty="0">
-                <a:solidFill>
-                  <a:schemeClr val="bg1">
-                    <a:lumMod val="95000"/>
-                  </a:schemeClr>
-                </a:solidFill>
-              </a:rPr>
-              <a:t> actual: %s",</a:t>
-            </a:r>
-            <a:br>
-              <a:rPr sz="1600" dirty="0">
-                <a:solidFill>
-                  <a:schemeClr val="bg1">
-                    <a:lumMod val="95000"/>
-                  </a:schemeClr>
-                </a:solidFill>
-              </a:rPr>
-            </a:br>
-            <a:r>
-              <a:rPr sz="1600" dirty="0">
-                <a:solidFill>
-                  <a:schemeClr val="bg1">
-                    <a:lumMod val="95000"/>
-                  </a:schemeClr>
-                </a:solidFill>
-              </a:rPr>
-              <a:t>            </a:t>
-            </a:r>
-            <a:r>
-              <a:rPr sz="1600" dirty="0" err="1">
-                <a:solidFill>
-                  <a:schemeClr val="bg1">
-                    <a:lumMod val="95000"/>
-                  </a:schemeClr>
-                </a:solidFill>
-              </a:rPr>
-              <a:t>requiredRole</a:t>
-            </a:r>
-            <a:r>
-              <a:rPr sz="1600" dirty="0">
-                <a:solidFill>
-                  <a:schemeClr val="bg1">
-                    <a:lumMod val="95000"/>
-                  </a:schemeClr>
-                </a:solidFill>
-              </a:rPr>
-              <a:t>, role)</a:t>
-            </a:r>
-            <a:br>
-              <a:rPr sz="1600" dirty="0">
-                <a:solidFill>
-                  <a:schemeClr val="bg1">
-                    <a:lumMod val="95000"/>
-                  </a:schemeClr>
-                </a:solidFill>
-              </a:rPr>
-            </a:br>
-            <a:r>
-              <a:rPr sz="1600" dirty="0">
-                <a:solidFill>
-                  <a:schemeClr val="bg1">
-                    <a:lumMod val="95000"/>
-                  </a:schemeClr>
-                </a:solidFill>
-              </a:rPr>
-              <a:t>    }</a:t>
-            </a:r>
-            <a:br>
-              <a:rPr sz="1600" dirty="0">
-                <a:solidFill>
-                  <a:schemeClr val="bg1">
-                    <a:lumMod val="95000"/>
-                  </a:schemeClr>
-                </a:solidFill>
-              </a:rPr>
-            </a:br>
-            <a:r>
-              <a:rPr sz="1600" dirty="0">
-                <a:solidFill>
-                  <a:schemeClr val="bg1">
-                    <a:lumMod val="95000"/>
-                  </a:schemeClr>
-                </a:solidFill>
-              </a:rPr>
-              <a:t>    return nil</a:t>
-            </a:r>
-            <a:br>
-              <a:rPr sz="1600" dirty="0">
-                <a:solidFill>
-                  <a:schemeClr val="bg1">
-                    <a:lumMod val="95000"/>
-                  </a:schemeClr>
-                </a:solidFill>
-              </a:rPr>
-            </a:br>
-            <a:r>
-              <a:rPr sz="1600" dirty="0">
                 <a:solidFill>
                   <a:schemeClr val="bg1">
                     <a:lumMod val="95000"/>
@@ -14443,7 +13028,7 @@
           </a:bodyPr>
           <a:lstStyle/>
           <a:p>
-            <a:br>
+            <a:r>
               <a:rPr lang="es-ES" sz="1600" dirty="0">
                 <a:solidFill>
                   <a:schemeClr val="bg1">
@@ -14451,8 +13036,11 @@
                   </a:schemeClr>
                 </a:solidFill>
               </a:rPr>
-            </a:br>
-            <a:br>
+              <a:t>// Uso en funciones del chaincode:</a:t>
+            </a:r>
+          </a:p>
+          <a:p>
+            <a:r>
               <a:rPr lang="es-ES" sz="1600" dirty="0">
                 <a:solidFill>
                   <a:schemeClr val="bg1">
@@ -14460,7 +13048,10 @@
                   </a:schemeClr>
                 </a:solidFill>
               </a:rPr>
-            </a:br>
+              <a:t>async ApproveTransfer(ctx, ...args) {</a:t>
+            </a:r>
+          </a:p>
+          <a:p>
             <a:r>
               <a:rPr lang="es-ES" sz="1600" dirty="0">
                 <a:solidFill>
@@ -14469,18 +13060,22 @@
                   </a:schemeClr>
                 </a:solidFill>
               </a:rPr>
-              <a:t>// Uso en funciones del </a:t>
-            </a:r>
-            <a:r>
-              <a:rPr lang="es-ES" sz="1600" dirty="0" err="1">
+              <a:t>    await this.checkRole(ctx, 'registrador');</a:t>
+            </a:r>
+          </a:p>
+          <a:p>
+            <a:r>
+              <a:rPr lang="es-ES" sz="1600" dirty="0">
                 <a:solidFill>
                   <a:schemeClr val="bg1">
                     <a:lumMod val="95000"/>
                   </a:schemeClr>
                 </a:solidFill>
               </a:rPr>
-              <a:t>chaincode</a:t>
-            </a:r>
+              <a:t>    // ... logica de aprobacion</a:t>
+            </a:r>
+          </a:p>
+          <a:p>
             <a:r>
               <a:rPr lang="es-ES" sz="1600" dirty="0">
                 <a:solidFill>
@@ -14489,9 +13084,20 @@
                   </a:schemeClr>
                 </a:solidFill>
               </a:rPr>
-              <a:t>:</a:t>
-            </a:r>
-            <a:br>
+              <a:t>}</a:t>
+            </a:r>
+          </a:p>
+          <a:p>
+            <a:endParaRPr lang="es-ES" sz="1600" dirty="0">
+              <a:solidFill>
+                <a:schemeClr val="bg1">
+                  <a:lumMod val="95000"/>
+                </a:schemeClr>
+              </a:solidFill>
+            </a:endParaRPr>
+          </a:p>
+          <a:p>
+            <a:r>
               <a:rPr lang="es-ES" sz="1600" dirty="0">
                 <a:solidFill>
                   <a:schemeClr val="bg1">
@@ -14499,17 +13105,22 @@
                   </a:schemeClr>
                 </a:solidFill>
               </a:rPr>
-            </a:br>
-            <a:r>
-              <a:rPr lang="es-ES" sz="1600" dirty="0" err="1">
+              <a:t>async FreezeProperty(ctx, ...args) {</a:t>
+            </a:r>
+          </a:p>
+          <a:p>
+            <a:r>
+              <a:rPr lang="es-ES" sz="1600" dirty="0">
                 <a:solidFill>
                   <a:schemeClr val="bg1">
                     <a:lumMod val="95000"/>
                   </a:schemeClr>
                 </a:solidFill>
               </a:rPr>
-              <a:t>func</a:t>
-            </a:r>
+              <a:t>    await this.checkRole(ctx, 'autoridad_judicial');</a:t>
+            </a:r>
+          </a:p>
+          <a:p>
             <a:r>
               <a:rPr lang="es-ES" sz="1600" dirty="0">
                 <a:solidFill>
@@ -14518,727 +13129,20 @@
                   </a:schemeClr>
                 </a:solidFill>
               </a:rPr>
-              <a:t> (s *</a:t>
-            </a:r>
-            <a:r>
-              <a:rPr lang="es-ES" sz="1600" dirty="0" err="1">
+              <a:t>    // ... logica de bloqueo</a:t>
+            </a:r>
+          </a:p>
+          <a:p>
+            <a:r>
+              <a:rPr lang="es-ES" sz="1600" dirty="0">
                 <a:solidFill>
                   <a:schemeClr val="bg1">
                     <a:lumMod val="95000"/>
                   </a:schemeClr>
                 </a:solidFill>
               </a:rPr>
-              <a:t>SmartContract</a:t>
-            </a:r>
-            <a:r>
-              <a:rPr lang="es-ES" sz="1600" dirty="0">
-                <a:solidFill>
-                  <a:schemeClr val="bg1">
-                    <a:lumMod val="95000"/>
-                  </a:schemeClr>
-                </a:solidFill>
-              </a:rPr>
-              <a:t>) </a:t>
-            </a:r>
-            <a:r>
-              <a:rPr lang="es-ES" sz="1600" dirty="0" err="1">
-                <a:solidFill>
-                  <a:schemeClr val="bg1">
-                    <a:lumMod val="95000"/>
-                  </a:schemeClr>
-                </a:solidFill>
-              </a:rPr>
-              <a:t>ApproveTransfer</a:t>
-            </a:r>
-            <a:r>
-              <a:rPr lang="es-ES" sz="1600" dirty="0">
-                <a:solidFill>
-                  <a:schemeClr val="bg1">
-                    <a:lumMod val="95000"/>
-                  </a:schemeClr>
-                </a:solidFill>
-              </a:rPr>
-              <a:t>(</a:t>
-            </a:r>
-            <a:r>
-              <a:rPr lang="es-ES" sz="1600" dirty="0" err="1">
-                <a:solidFill>
-                  <a:schemeClr val="bg1">
-                    <a:lumMod val="95000"/>
-                  </a:schemeClr>
-                </a:solidFill>
-              </a:rPr>
-              <a:t>ctx</a:t>
-            </a:r>
-            <a:r>
-              <a:rPr lang="es-ES" sz="1600" dirty="0">
-                <a:solidFill>
-                  <a:schemeClr val="bg1">
-                    <a:lumMod val="95000"/>
-                  </a:schemeClr>
-                </a:solidFill>
-              </a:rPr>
-              <a:t> ...) error {</a:t>
-            </a:r>
-            <a:br>
-              <a:rPr lang="es-ES" sz="1600" dirty="0">
-                <a:solidFill>
-                  <a:schemeClr val="bg1">
-                    <a:lumMod val="95000"/>
-                  </a:schemeClr>
-                </a:solidFill>
-              </a:rPr>
-            </a:br>
-            <a:r>
-              <a:rPr lang="es-ES" sz="1600" dirty="0">
-                <a:solidFill>
-                  <a:schemeClr val="bg1">
-                    <a:lumMod val="95000"/>
-                  </a:schemeClr>
-                </a:solidFill>
-              </a:rPr>
-              <a:t>    </a:t>
-            </a:r>
-            <a:r>
-              <a:rPr lang="es-ES" sz="1600" dirty="0" err="1">
-                <a:solidFill>
-                  <a:schemeClr val="bg1">
-                    <a:lumMod val="95000"/>
-                  </a:schemeClr>
-                </a:solidFill>
-              </a:rPr>
-              <a:t>if</a:t>
-            </a:r>
-            <a:r>
-              <a:rPr lang="es-ES" sz="1600" dirty="0">
-                <a:solidFill>
-                  <a:schemeClr val="bg1">
-                    <a:lumMod val="95000"/>
-                  </a:schemeClr>
-                </a:solidFill>
-              </a:rPr>
-              <a:t> </a:t>
-            </a:r>
-            <a:r>
-              <a:rPr lang="es-ES" sz="1600" dirty="0" err="1">
-                <a:solidFill>
-                  <a:schemeClr val="bg1">
-                    <a:lumMod val="95000"/>
-                  </a:schemeClr>
-                </a:solidFill>
-              </a:rPr>
-              <a:t>err</a:t>
-            </a:r>
-            <a:r>
-              <a:rPr lang="es-ES" sz="1600" dirty="0">
-                <a:solidFill>
-                  <a:schemeClr val="bg1">
-                    <a:lumMod val="95000"/>
-                  </a:schemeClr>
-                </a:solidFill>
-              </a:rPr>
-              <a:t> := </a:t>
-            </a:r>
-            <a:r>
-              <a:rPr lang="es-ES" sz="1600" dirty="0" err="1">
-                <a:solidFill>
-                  <a:schemeClr val="bg1">
-                    <a:lumMod val="95000"/>
-                  </a:schemeClr>
-                </a:solidFill>
-              </a:rPr>
-              <a:t>s.checkRole</a:t>
-            </a:r>
-            <a:r>
-              <a:rPr lang="es-ES" sz="1600" dirty="0">
-                <a:solidFill>
-                  <a:schemeClr val="bg1">
-                    <a:lumMod val="95000"/>
-                  </a:schemeClr>
-                </a:solidFill>
-              </a:rPr>
-              <a:t>(</a:t>
-            </a:r>
-            <a:r>
-              <a:rPr lang="es-ES" sz="1600" dirty="0" err="1">
-                <a:solidFill>
-                  <a:schemeClr val="bg1">
-                    <a:lumMod val="95000"/>
-                  </a:schemeClr>
-                </a:solidFill>
-              </a:rPr>
-              <a:t>ctx</a:t>
-            </a:r>
-            <a:r>
-              <a:rPr lang="es-ES" sz="1600" dirty="0">
-                <a:solidFill>
-                  <a:schemeClr val="bg1">
-                    <a:lumMod val="95000"/>
-                  </a:schemeClr>
-                </a:solidFill>
-              </a:rPr>
-              <a:t>, "registrador"); </a:t>
-            </a:r>
-            <a:r>
-              <a:rPr lang="es-ES" sz="1600" dirty="0" err="1">
-                <a:solidFill>
-                  <a:schemeClr val="bg1">
-                    <a:lumMod val="95000"/>
-                  </a:schemeClr>
-                </a:solidFill>
-              </a:rPr>
-              <a:t>err</a:t>
-            </a:r>
-            <a:r>
-              <a:rPr lang="es-ES" sz="1600" dirty="0">
-                <a:solidFill>
-                  <a:schemeClr val="bg1">
-                    <a:lumMod val="95000"/>
-                  </a:schemeClr>
-                </a:solidFill>
-              </a:rPr>
-              <a:t> != </a:t>
-            </a:r>
-            <a:r>
-              <a:rPr lang="es-ES" sz="1600" dirty="0" err="1">
-                <a:solidFill>
-                  <a:schemeClr val="bg1">
-                    <a:lumMod val="95000"/>
-                  </a:schemeClr>
-                </a:solidFill>
-              </a:rPr>
-              <a:t>nil</a:t>
-            </a:r>
-            <a:r>
-              <a:rPr lang="es-ES" sz="1600" dirty="0">
-                <a:solidFill>
-                  <a:schemeClr val="bg1">
-                    <a:lumMod val="95000"/>
-                  </a:schemeClr>
-                </a:solidFill>
-              </a:rPr>
-              <a:t> {</a:t>
-            </a:r>
-            <a:br>
-              <a:rPr lang="es-ES" sz="1600" dirty="0">
-                <a:solidFill>
-                  <a:schemeClr val="bg1">
-                    <a:lumMod val="95000"/>
-                  </a:schemeClr>
-                </a:solidFill>
-              </a:rPr>
-            </a:br>
-            <a:r>
-              <a:rPr lang="es-ES" sz="1600" dirty="0">
-                <a:solidFill>
-                  <a:schemeClr val="bg1">
-                    <a:lumMod val="95000"/>
-                  </a:schemeClr>
-                </a:solidFill>
-              </a:rPr>
-              <a:t>        </a:t>
-            </a:r>
-            <a:r>
-              <a:rPr lang="es-ES" sz="1600" dirty="0" err="1">
-                <a:solidFill>
-                  <a:schemeClr val="bg1">
-                    <a:lumMod val="95000"/>
-                  </a:schemeClr>
-                </a:solidFill>
-              </a:rPr>
-              <a:t>return</a:t>
-            </a:r>
-            <a:r>
-              <a:rPr lang="es-ES" sz="1600" dirty="0">
-                <a:solidFill>
-                  <a:schemeClr val="bg1">
-                    <a:lumMod val="95000"/>
-                  </a:schemeClr>
-                </a:solidFill>
-              </a:rPr>
-              <a:t> </a:t>
-            </a:r>
-            <a:r>
-              <a:rPr lang="es-ES" sz="1600" dirty="0" err="1">
-                <a:solidFill>
-                  <a:schemeClr val="bg1">
-                    <a:lumMod val="95000"/>
-                  </a:schemeClr>
-                </a:solidFill>
-              </a:rPr>
-              <a:t>err</a:t>
-            </a:r>
-            <a:br>
-              <a:rPr lang="es-ES" sz="1600" dirty="0">
-                <a:solidFill>
-                  <a:schemeClr val="bg1">
-                    <a:lumMod val="95000"/>
-                  </a:schemeClr>
-                </a:solidFill>
-              </a:rPr>
-            </a:br>
-            <a:r>
-              <a:rPr lang="es-ES" sz="1600" dirty="0">
-                <a:solidFill>
-                  <a:schemeClr val="bg1">
-                    <a:lumMod val="95000"/>
-                  </a:schemeClr>
-                </a:solidFill>
-              </a:rPr>
-              <a:t>    }</a:t>
-            </a:r>
-            <a:br>
-              <a:rPr lang="es-ES" sz="1600" dirty="0">
-                <a:solidFill>
-                  <a:schemeClr val="bg1">
-                    <a:lumMod val="95000"/>
-                  </a:schemeClr>
-                </a:solidFill>
-              </a:rPr>
-            </a:br>
-            <a:r>
-              <a:rPr lang="es-ES" sz="1600" dirty="0">
-                <a:solidFill>
-                  <a:schemeClr val="bg1">
-                    <a:lumMod val="95000"/>
-                  </a:schemeClr>
-                </a:solidFill>
-              </a:rPr>
-              <a:t>    // ... </a:t>
-            </a:r>
-            <a:r>
-              <a:rPr lang="es-ES" sz="1600" dirty="0" err="1">
-                <a:solidFill>
-                  <a:schemeClr val="bg1">
-                    <a:lumMod val="95000"/>
-                  </a:schemeClr>
-                </a:solidFill>
-              </a:rPr>
-              <a:t>logica</a:t>
-            </a:r>
-            <a:r>
-              <a:rPr lang="es-ES" sz="1600" dirty="0">
-                <a:solidFill>
-                  <a:schemeClr val="bg1">
-                    <a:lumMod val="95000"/>
-                  </a:schemeClr>
-                </a:solidFill>
-              </a:rPr>
-              <a:t> de </a:t>
-            </a:r>
-            <a:r>
-              <a:rPr lang="es-ES" sz="1600" dirty="0" err="1">
-                <a:solidFill>
-                  <a:schemeClr val="bg1">
-                    <a:lumMod val="95000"/>
-                  </a:schemeClr>
-                </a:solidFill>
-              </a:rPr>
-              <a:t>aprobacion</a:t>
-            </a:r>
-            <a:br>
-              <a:rPr lang="es-ES" sz="1600" dirty="0">
-                <a:solidFill>
-                  <a:schemeClr val="bg1">
-                    <a:lumMod val="95000"/>
-                  </a:schemeClr>
-                </a:solidFill>
-              </a:rPr>
-            </a:br>
-            <a:r>
-              <a:rPr lang="es-ES" sz="1600" dirty="0">
-                <a:solidFill>
-                  <a:schemeClr val="bg1">
-                    <a:lumMod val="95000"/>
-                  </a:schemeClr>
-                </a:solidFill>
-              </a:rPr>
               <a:t>}</a:t>
             </a:r>
-            <a:br>
-              <a:rPr lang="es-ES" sz="1600" dirty="0">
-                <a:solidFill>
-                  <a:schemeClr val="bg1">
-                    <a:lumMod val="95000"/>
-                  </a:schemeClr>
-                </a:solidFill>
-              </a:rPr>
-            </a:br>
-            <a:br>
-              <a:rPr lang="es-ES" sz="1600" dirty="0">
-                <a:solidFill>
-                  <a:schemeClr val="bg1">
-                    <a:lumMod val="95000"/>
-                  </a:schemeClr>
-                </a:solidFill>
-              </a:rPr>
-            </a:br>
-            <a:r>
-              <a:rPr lang="es-ES" sz="1600" dirty="0" err="1">
-                <a:solidFill>
-                  <a:schemeClr val="bg1">
-                    <a:lumMod val="95000"/>
-                  </a:schemeClr>
-                </a:solidFill>
-              </a:rPr>
-              <a:t>func</a:t>
-            </a:r>
-            <a:r>
-              <a:rPr lang="es-ES" sz="1600" dirty="0">
-                <a:solidFill>
-                  <a:schemeClr val="bg1">
-                    <a:lumMod val="95000"/>
-                  </a:schemeClr>
-                </a:solidFill>
-              </a:rPr>
-              <a:t> (s *</a:t>
-            </a:r>
-            <a:r>
-              <a:rPr lang="es-ES" sz="1600" dirty="0" err="1">
-                <a:solidFill>
-                  <a:schemeClr val="bg1">
-                    <a:lumMod val="95000"/>
-                  </a:schemeClr>
-                </a:solidFill>
-              </a:rPr>
-              <a:t>SmartContract</a:t>
-            </a:r>
-            <a:r>
-              <a:rPr lang="es-ES" sz="1600" dirty="0">
-                <a:solidFill>
-                  <a:schemeClr val="bg1">
-                    <a:lumMod val="95000"/>
-                  </a:schemeClr>
-                </a:solidFill>
-              </a:rPr>
-              <a:t>) </a:t>
-            </a:r>
-            <a:r>
-              <a:rPr lang="es-ES" sz="1600" dirty="0" err="1">
-                <a:solidFill>
-                  <a:schemeClr val="bg1">
-                    <a:lumMod val="95000"/>
-                  </a:schemeClr>
-                </a:solidFill>
-              </a:rPr>
-              <a:t>FreezeProperty</a:t>
-            </a:r>
-            <a:r>
-              <a:rPr lang="es-ES" sz="1600" dirty="0">
-                <a:solidFill>
-                  <a:schemeClr val="bg1">
-                    <a:lumMod val="95000"/>
-                  </a:schemeClr>
-                </a:solidFill>
-              </a:rPr>
-              <a:t>(</a:t>
-            </a:r>
-            <a:r>
-              <a:rPr lang="es-ES" sz="1600" dirty="0" err="1">
-                <a:solidFill>
-                  <a:schemeClr val="bg1">
-                    <a:lumMod val="95000"/>
-                  </a:schemeClr>
-                </a:solidFill>
-              </a:rPr>
-              <a:t>ctx</a:t>
-            </a:r>
-            <a:r>
-              <a:rPr lang="es-ES" sz="1600" dirty="0">
-                <a:solidFill>
-                  <a:schemeClr val="bg1">
-                    <a:lumMod val="95000"/>
-                  </a:schemeClr>
-                </a:solidFill>
-              </a:rPr>
-              <a:t> ...) error {</a:t>
-            </a:r>
-            <a:br>
-              <a:rPr lang="es-ES" sz="1600" dirty="0">
-                <a:solidFill>
-                  <a:schemeClr val="bg1">
-                    <a:lumMod val="95000"/>
-                  </a:schemeClr>
-                </a:solidFill>
-              </a:rPr>
-            </a:br>
-            <a:r>
-              <a:rPr lang="es-ES" sz="1600" dirty="0">
-                <a:solidFill>
-                  <a:schemeClr val="bg1">
-                    <a:lumMod val="95000"/>
-                  </a:schemeClr>
-                </a:solidFill>
-              </a:rPr>
-              <a:t>    </a:t>
-            </a:r>
-            <a:r>
-              <a:rPr lang="es-ES" sz="1600" dirty="0" err="1">
-                <a:solidFill>
-                  <a:schemeClr val="bg1">
-                    <a:lumMod val="95000"/>
-                  </a:schemeClr>
-                </a:solidFill>
-              </a:rPr>
-              <a:t>if</a:t>
-            </a:r>
-            <a:r>
-              <a:rPr lang="es-ES" sz="1600" dirty="0">
-                <a:solidFill>
-                  <a:schemeClr val="bg1">
-                    <a:lumMod val="95000"/>
-                  </a:schemeClr>
-                </a:solidFill>
-              </a:rPr>
-              <a:t> </a:t>
-            </a:r>
-            <a:r>
-              <a:rPr lang="es-ES" sz="1600" dirty="0" err="1">
-                <a:solidFill>
-                  <a:schemeClr val="bg1">
-                    <a:lumMod val="95000"/>
-                  </a:schemeClr>
-                </a:solidFill>
-              </a:rPr>
-              <a:t>err</a:t>
-            </a:r>
-            <a:r>
-              <a:rPr lang="es-ES" sz="1600" dirty="0">
-                <a:solidFill>
-                  <a:schemeClr val="bg1">
-                    <a:lumMod val="95000"/>
-                  </a:schemeClr>
-                </a:solidFill>
-              </a:rPr>
-              <a:t> := </a:t>
-            </a:r>
-            <a:r>
-              <a:rPr lang="es-ES" sz="1600" dirty="0" err="1">
-                <a:solidFill>
-                  <a:schemeClr val="bg1">
-                    <a:lumMod val="95000"/>
-                  </a:schemeClr>
-                </a:solidFill>
-              </a:rPr>
-              <a:t>s.checkRole</a:t>
-            </a:r>
-            <a:r>
-              <a:rPr lang="es-ES" sz="1600" dirty="0">
-                <a:solidFill>
-                  <a:schemeClr val="bg1">
-                    <a:lumMod val="95000"/>
-                  </a:schemeClr>
-                </a:solidFill>
-              </a:rPr>
-              <a:t>(</a:t>
-            </a:r>
-            <a:r>
-              <a:rPr lang="es-ES" sz="1600" dirty="0" err="1">
-                <a:solidFill>
-                  <a:schemeClr val="bg1">
-                    <a:lumMod val="95000"/>
-                  </a:schemeClr>
-                </a:solidFill>
-              </a:rPr>
-              <a:t>ctx</a:t>
-            </a:r>
-            <a:r>
-              <a:rPr lang="es-ES" sz="1600" dirty="0">
-                <a:solidFill>
-                  <a:schemeClr val="bg1">
-                    <a:lumMod val="95000"/>
-                  </a:schemeClr>
-                </a:solidFill>
-              </a:rPr>
-              <a:t>, "</a:t>
-            </a:r>
-            <a:r>
-              <a:rPr lang="es-ES" sz="1600" dirty="0" err="1">
-                <a:solidFill>
-                  <a:schemeClr val="bg1">
-                    <a:lumMod val="95000"/>
-                  </a:schemeClr>
-                </a:solidFill>
-              </a:rPr>
-              <a:t>autoridad_judicial</a:t>
-            </a:r>
-            <a:r>
-              <a:rPr lang="es-ES" sz="1600" dirty="0">
-                <a:solidFill>
-                  <a:schemeClr val="bg1">
-                    <a:lumMod val="95000"/>
-                  </a:schemeClr>
-                </a:solidFill>
-              </a:rPr>
-              <a:t>"); </a:t>
-            </a:r>
-            <a:r>
-              <a:rPr lang="es-ES" sz="1600" dirty="0" err="1">
-                <a:solidFill>
-                  <a:schemeClr val="bg1">
-                    <a:lumMod val="95000"/>
-                  </a:schemeClr>
-                </a:solidFill>
-              </a:rPr>
-              <a:t>err</a:t>
-            </a:r>
-            <a:r>
-              <a:rPr lang="es-ES" sz="1600" dirty="0">
-                <a:solidFill>
-                  <a:schemeClr val="bg1">
-                    <a:lumMod val="95000"/>
-                  </a:schemeClr>
-                </a:solidFill>
-              </a:rPr>
-              <a:t> != </a:t>
-            </a:r>
-            <a:r>
-              <a:rPr lang="es-ES" sz="1600" dirty="0" err="1">
-                <a:solidFill>
-                  <a:schemeClr val="bg1">
-                    <a:lumMod val="95000"/>
-                  </a:schemeClr>
-                </a:solidFill>
-              </a:rPr>
-              <a:t>nil</a:t>
-            </a:r>
-            <a:r>
-              <a:rPr lang="es-ES" sz="1600" dirty="0">
-                <a:solidFill>
-                  <a:schemeClr val="bg1">
-                    <a:lumMod val="95000"/>
-                  </a:schemeClr>
-                </a:solidFill>
-              </a:rPr>
-              <a:t> {</a:t>
-            </a:r>
-            <a:br>
-              <a:rPr lang="es-ES" sz="1600" dirty="0">
-                <a:solidFill>
-                  <a:schemeClr val="bg1">
-                    <a:lumMod val="95000"/>
-                  </a:schemeClr>
-                </a:solidFill>
-              </a:rPr>
-            </a:br>
-            <a:r>
-              <a:rPr lang="es-ES" sz="1600" dirty="0">
-                <a:solidFill>
-                  <a:schemeClr val="bg1">
-                    <a:lumMod val="95000"/>
-                  </a:schemeClr>
-                </a:solidFill>
-              </a:rPr>
-              <a:t>        </a:t>
-            </a:r>
-            <a:r>
-              <a:rPr lang="es-ES" sz="1600" dirty="0" err="1">
-                <a:solidFill>
-                  <a:schemeClr val="bg1">
-                    <a:lumMod val="95000"/>
-                  </a:schemeClr>
-                </a:solidFill>
-              </a:rPr>
-              <a:t>return</a:t>
-            </a:r>
-            <a:r>
-              <a:rPr lang="es-ES" sz="1600" dirty="0">
-                <a:solidFill>
-                  <a:schemeClr val="bg1">
-                    <a:lumMod val="95000"/>
-                  </a:schemeClr>
-                </a:solidFill>
-              </a:rPr>
-              <a:t> </a:t>
-            </a:r>
-            <a:r>
-              <a:rPr lang="es-ES" sz="1600" dirty="0" err="1">
-                <a:solidFill>
-                  <a:schemeClr val="bg1">
-                    <a:lumMod val="95000"/>
-                  </a:schemeClr>
-                </a:solidFill>
-              </a:rPr>
-              <a:t>err</a:t>
-            </a:r>
-            <a:br>
-              <a:rPr lang="es-ES" sz="1600" dirty="0">
-                <a:solidFill>
-                  <a:schemeClr val="bg1">
-                    <a:lumMod val="95000"/>
-                  </a:schemeClr>
-                </a:solidFill>
-              </a:rPr>
-            </a:br>
-            <a:r>
-              <a:rPr lang="es-ES" sz="1600" dirty="0">
-                <a:solidFill>
-                  <a:schemeClr val="bg1">
-                    <a:lumMod val="95000"/>
-                  </a:schemeClr>
-                </a:solidFill>
-              </a:rPr>
-              <a:t>    }</a:t>
-            </a:r>
-            <a:br>
-              <a:rPr lang="es-ES" sz="1600" dirty="0">
-                <a:solidFill>
-                  <a:schemeClr val="bg1">
-                    <a:lumMod val="95000"/>
-                  </a:schemeClr>
-                </a:solidFill>
-              </a:rPr>
-            </a:br>
-            <a:r>
-              <a:rPr lang="es-ES" sz="1600" dirty="0">
-                <a:solidFill>
-                  <a:schemeClr val="bg1">
-                    <a:lumMod val="95000"/>
-                  </a:schemeClr>
-                </a:solidFill>
-              </a:rPr>
-              <a:t>    // ... </a:t>
-            </a:r>
-            <a:r>
-              <a:rPr lang="es-ES" sz="1600" dirty="0" err="1">
-                <a:solidFill>
-                  <a:schemeClr val="bg1">
-                    <a:lumMod val="95000"/>
-                  </a:schemeClr>
-                </a:solidFill>
-              </a:rPr>
-              <a:t>logica</a:t>
-            </a:r>
-            <a:r>
-              <a:rPr lang="es-ES" sz="1600" dirty="0">
-                <a:solidFill>
-                  <a:schemeClr val="bg1">
-                    <a:lumMod val="95000"/>
-                  </a:schemeClr>
-                </a:solidFill>
-              </a:rPr>
-              <a:t> de bloqueo</a:t>
-            </a:r>
-            <a:br>
-              <a:rPr lang="es-ES" sz="1600" dirty="0">
-                <a:solidFill>
-                  <a:schemeClr val="bg1">
-                    <a:lumMod val="95000"/>
-                  </a:schemeClr>
-                </a:solidFill>
-              </a:rPr>
-            </a:br>
-            <a:r>
-              <a:rPr lang="es-ES" sz="1600" dirty="0">
-                <a:solidFill>
-                  <a:schemeClr val="bg1">
-                    <a:lumMod val="95000"/>
-                  </a:schemeClr>
-                </a:solidFill>
-              </a:rPr>
-              <a:t>}</a:t>
-            </a:r>
-            <a:endParaRPr lang="es-ES" sz="1600" dirty="0"/>
           </a:p>
         </p:txBody>
       </p:sp>
